--- a/slides/planb-starter.pptx
+++ b/slides/planb-starter.pptx
@@ -1357,7 +1357,7 @@
 </file>
 
 <file path=ppt/slideLayouts/slideLayout1.xml><?xml version="1.0" encoding="utf-8"?>
-<p:sldLayout xmlns:a="http://schemas.openxmlformats.org/drawingml/2006/main" xmlns:r="http://schemas.openxmlformats.org/officeDocument/2006/relationships" xmlns:p="http://schemas.openxmlformats.org/presentationml/2006/main" type="cust" preserve="1" showMasterSp="0">
+<p:sldLayout xmlns:a="http://schemas.openxmlformats.org/drawingml/2006/main" xmlns:r="http://schemas.openxmlformats.org/officeDocument/2006/relationships" xmlns:p="http://schemas.openxmlformats.org/presentationml/2006/main" type="cust" preserve="1" showMasterSp="1">
   <p:cSld name="Plan B / Cover">
     <p:bg>
       <p:bgPr>
@@ -1403,19 +1403,20 @@
           </a:bodyPr>
           <a:lstStyle/>
           <a:p>
-            <a:pPr>
-              <a:lnSpc>
-                <a:spcPct val="112000"/>
-              </a:lnSpc>
-              <a:spcAft>
-                <a:spcPts val="1200"/>
-              </a:spcAft>
+            <a:pPr algn="l" marL="0" indent="0">
               <a:defRPr sz="1100" b="1">
                 <a:solidFill>
                   <a:srgbClr val="082952"/>
                 </a:solidFill>
                 <a:latin typeface="Inter"/>
               </a:defRPr>
+              <a:lnSpc>
+                <a:spcPct val="112000"/>
+              </a:lnSpc>
+              <a:spcAft>
+                <a:spcPts val="1200"/>
+              </a:spcAft>
+              <a:buNone/>
             </a:pPr>
             <a:r>
               <a:t>Plan B Foundation</a:t>
@@ -1445,19 +1446,20 @@
           </a:bodyPr>
           <a:lstStyle/>
           <a:p>
-            <a:pPr>
-              <a:lnSpc>
-                <a:spcPct val="112000"/>
-              </a:lnSpc>
-              <a:spcAft>
-                <a:spcPts val="1200"/>
-              </a:spcAft>
+            <a:pPr algn="l" marL="0" indent="0">
               <a:defRPr sz="1100" b="0">
                 <a:solidFill>
                   <a:srgbClr val="082952"/>
                 </a:solidFill>
                 <a:latin typeface="Inter"/>
               </a:defRPr>
+              <a:lnSpc>
+                <a:spcPct val="112000"/>
+              </a:lnSpc>
+              <a:spcAft>
+                <a:spcPts val="1200"/>
+              </a:spcAft>
+              <a:buNone/>
             </a:pPr>
             <a:r>
               <a:t>Civic Digital Commons</a:t>
@@ -1489,38 +1491,40 @@
           </a:bodyPr>
           <a:lstStyle/>
           <a:p>
-            <a:pPr>
-              <a:lnSpc>
-                <a:spcPct val="112000"/>
-              </a:lnSpc>
-              <a:spcAft>
-                <a:spcPts val="1200"/>
-              </a:spcAft>
+            <a:pPr algn="l" marL="0" indent="0">
               <a:defRPr sz="4800" b="1">
                 <a:solidFill>
                   <a:srgbClr val="082952"/>
                 </a:solidFill>
                 <a:latin typeface="Inter"/>
               </a:defRPr>
+              <a:lnSpc>
+                <a:spcPct val="112000"/>
+              </a:lnSpc>
+              <a:spcAft>
+                <a:spcPts val="1200"/>
+              </a:spcAft>
+              <a:buNone/>
             </a:pPr>
             <a:r>
               <a:t>[Presentation</a:t>
             </a:r>
           </a:p>
           <a:p>
-            <a:pPr>
-              <a:lnSpc>
-                <a:spcPct val="112000"/>
-              </a:lnSpc>
-              <a:spcAft>
-                <a:spcPts val="1200"/>
-              </a:spcAft>
+            <a:pPr algn="l" marL="0" indent="0">
               <a:defRPr sz="4800" b="1">
                 <a:solidFill>
                   <a:srgbClr val="082952"/>
                 </a:solidFill>
                 <a:latin typeface="Inter"/>
               </a:defRPr>
+              <a:lnSpc>
+                <a:spcPct val="112000"/>
+              </a:lnSpc>
+              <a:spcAft>
+                <a:spcPts val="1200"/>
+              </a:spcAft>
+              <a:buNone/>
             </a:pPr>
             <a:r>
               <a:t>title]</a:t>
@@ -1552,19 +1556,20 @@
           </a:bodyPr>
           <a:lstStyle/>
           <a:p>
-            <a:pPr>
-              <a:lnSpc>
-                <a:spcPct val="112000"/>
-              </a:lnSpc>
-              <a:spcAft>
-                <a:spcPts val="1200"/>
-              </a:spcAft>
+            <a:pPr algn="l" marL="0" indent="0">
               <a:defRPr sz="2400" b="0">
                 <a:solidFill>
                   <a:srgbClr val="030B20"/>
                 </a:solidFill>
                 <a:latin typeface="Inter"/>
               </a:defRPr>
+              <a:lnSpc>
+                <a:spcPct val="112000"/>
+              </a:lnSpc>
+              <a:spcAft>
+                <a:spcPts val="1200"/>
+              </a:spcAft>
+              <a:buNone/>
             </a:pPr>
             <a:r>
               <a:t>[A clear sentence about the civic purpose]</a:t>
@@ -1596,38 +1601,40 @@
           </a:bodyPr>
           <a:lstStyle/>
           <a:p>
-            <a:pPr>
-              <a:lnSpc>
-                <a:spcPct val="112000"/>
-              </a:lnSpc>
-              <a:spcAft>
-                <a:spcPts val="1200"/>
-              </a:spcAft>
+            <a:pPr algn="l" marL="0" indent="0">
               <a:defRPr sz="1700" b="0">
                 <a:solidFill>
                   <a:srgbClr val="030B20"/>
                 </a:solidFill>
                 <a:latin typeface="Inter"/>
               </a:defRPr>
+              <a:lnSpc>
+                <a:spcPct val="112000"/>
+              </a:lnSpc>
+              <a:spcAft>
+                <a:spcPts val="1200"/>
+              </a:spcAft>
+              <a:buNone/>
             </a:pPr>
             <a:r>
               <a:t>[Presenter / team]</a:t>
             </a:r>
           </a:p>
           <a:p>
-            <a:pPr>
-              <a:lnSpc>
-                <a:spcPct val="112000"/>
-              </a:lnSpc>
-              <a:spcAft>
-                <a:spcPts val="1200"/>
-              </a:spcAft>
+            <a:pPr algn="l" marL="0" indent="0">
               <a:defRPr sz="1700" b="0">
                 <a:solidFill>
                   <a:srgbClr val="030B20"/>
                 </a:solidFill>
                 <a:latin typeface="Inter"/>
               </a:defRPr>
+              <a:lnSpc>
+                <a:spcPct val="112000"/>
+              </a:lnSpc>
+              <a:spcAft>
+                <a:spcPts val="1200"/>
+              </a:spcAft>
+              <a:buNone/>
             </a:pPr>
             <a:r>
               <a:t>[Event · date]</a:t>
@@ -1728,76 +1735,80 @@
           </a:bodyPr>
           <a:lstStyle/>
           <a:p>
-            <a:pPr>
-              <a:lnSpc>
-                <a:spcPct val="112000"/>
-              </a:lnSpc>
-              <a:spcAft>
-                <a:spcPts val="1200"/>
-              </a:spcAft>
+            <a:pPr algn="l" marL="0" indent="0">
               <a:defRPr sz="2900" b="1">
                 <a:solidFill>
                   <a:srgbClr val="FFFEFA"/>
                 </a:solidFill>
                 <a:latin typeface="Inter"/>
               </a:defRPr>
+              <a:lnSpc>
+                <a:spcPct val="112000"/>
+              </a:lnSpc>
+              <a:spcAft>
+                <a:spcPts val="1200"/>
+              </a:spcAft>
+              <a:buNone/>
             </a:pPr>
             <a:r>
               <a:t>Open.</a:t>
             </a:r>
           </a:p>
           <a:p>
-            <a:pPr>
-              <a:lnSpc>
-                <a:spcPct val="112000"/>
-              </a:lnSpc>
-              <a:spcAft>
-                <a:spcPts val="1200"/>
-              </a:spcAft>
+            <a:pPr algn="l" marL="0" indent="0">
               <a:defRPr sz="2900" b="1">
                 <a:solidFill>
                   <a:srgbClr val="FFFEFA"/>
                 </a:solidFill>
                 <a:latin typeface="Inter"/>
               </a:defRPr>
+              <a:lnSpc>
+                <a:spcPct val="112000"/>
+              </a:lnSpc>
+              <a:spcAft>
+                <a:spcPts val="1200"/>
+              </a:spcAft>
+              <a:buNone/>
             </a:pPr>
             <a:r>
               <a:t>Capable.</a:t>
             </a:r>
           </a:p>
           <a:p>
-            <a:pPr>
-              <a:lnSpc>
-                <a:spcPct val="112000"/>
-              </a:lnSpc>
-              <a:spcAft>
-                <a:spcPts val="1200"/>
-              </a:spcAft>
+            <a:pPr algn="l" marL="0" indent="0">
               <a:defRPr sz="2900" b="1">
                 <a:solidFill>
                   <a:srgbClr val="FFFEFA"/>
                 </a:solidFill>
                 <a:latin typeface="Inter"/>
               </a:defRPr>
+              <a:lnSpc>
+                <a:spcPct val="112000"/>
+              </a:lnSpc>
+              <a:spcAft>
+                <a:spcPts val="1200"/>
+              </a:spcAft>
+              <a:buNone/>
             </a:pPr>
             <a:r>
               <a:t>Curious.</a:t>
             </a:r>
           </a:p>
           <a:p>
-            <a:pPr>
-              <a:lnSpc>
-                <a:spcPct val="112000"/>
-              </a:lnSpc>
-              <a:spcAft>
-                <a:spcPts val="1200"/>
-              </a:spcAft>
+            <a:pPr algn="l" marL="0" indent="0">
               <a:defRPr sz="2900" b="1">
                 <a:solidFill>
                   <a:srgbClr val="FFFEFA"/>
                 </a:solidFill>
                 <a:latin typeface="Inter"/>
               </a:defRPr>
+              <a:lnSpc>
+                <a:spcPct val="112000"/>
+              </a:lnSpc>
+              <a:spcAft>
+                <a:spcPts val="1200"/>
+              </a:spcAft>
+              <a:buNone/>
             </a:pPr>
             <a:r>
               <a:t>Grounded.</a:t>
@@ -1876,7 +1887,7 @@
 </file>
 
 <file path=ppt/slideLayouts/slideLayout10.xml><?xml version="1.0" encoding="utf-8"?>
-<p:sldLayout xmlns:a="http://schemas.openxmlformats.org/drawingml/2006/main" xmlns:r="http://schemas.openxmlformats.org/officeDocument/2006/relationships" xmlns:p="http://schemas.openxmlformats.org/presentationml/2006/main" type="cust" preserve="1" showMasterSp="0">
+<p:sldLayout xmlns:a="http://schemas.openxmlformats.org/drawingml/2006/main" xmlns:r="http://schemas.openxmlformats.org/officeDocument/2006/relationships" xmlns:p="http://schemas.openxmlformats.org/presentationml/2006/main" type="cust" preserve="1" showMasterSp="1">
   <p:cSld name="Plan B / Template guide">
     <p:bg>
       <p:bgPr>
@@ -1922,19 +1933,20 @@
           </a:bodyPr>
           <a:lstStyle/>
           <a:p>
-            <a:pPr>
-              <a:lnSpc>
-                <a:spcPct val="112000"/>
-              </a:lnSpc>
-              <a:spcAft>
-                <a:spcPts val="1200"/>
-              </a:spcAft>
+            <a:pPr algn="l" marL="0" indent="0">
               <a:defRPr sz="1100" b="1">
                 <a:solidFill>
                   <a:srgbClr val="082952"/>
                 </a:solidFill>
                 <a:latin typeface="Inter"/>
               </a:defRPr>
+              <a:lnSpc>
+                <a:spcPct val="112000"/>
+              </a:lnSpc>
+              <a:spcAft>
+                <a:spcPts val="1200"/>
+              </a:spcAft>
+              <a:buNone/>
             </a:pPr>
             <a:r>
               <a:t>Plan B Foundation</a:t>
@@ -1964,19 +1976,20 @@
           </a:bodyPr>
           <a:lstStyle/>
           <a:p>
-            <a:pPr>
-              <a:lnSpc>
-                <a:spcPct val="112000"/>
-              </a:lnSpc>
-              <a:spcAft>
-                <a:spcPts val="1200"/>
-              </a:spcAft>
+            <a:pPr algn="l" marL="0" indent="0">
               <a:defRPr sz="1100" b="0">
                 <a:solidFill>
                   <a:srgbClr val="082952"/>
                 </a:solidFill>
                 <a:latin typeface="Inter"/>
               </a:defRPr>
+              <a:lnSpc>
+                <a:spcPct val="112000"/>
+              </a:lnSpc>
+              <a:spcAft>
+                <a:spcPts val="1200"/>
+              </a:spcAft>
+              <a:buNone/>
             </a:pPr>
             <a:r>
               <a:t>Civic Digital Commons</a:t>
@@ -2008,19 +2021,20 @@
           </a:bodyPr>
           <a:lstStyle/>
           <a:p>
-            <a:pPr>
-              <a:lnSpc>
-                <a:spcPct val="112000"/>
-              </a:lnSpc>
-              <a:spcAft>
-                <a:spcPts val="1200"/>
-              </a:spcAft>
+            <a:pPr algn="l" marL="0" indent="0">
               <a:defRPr sz="3600" b="1">
                 <a:solidFill>
                   <a:srgbClr val="082952"/>
                 </a:solidFill>
                 <a:latin typeface="Inter"/>
               </a:defRPr>
+              <a:lnSpc>
+                <a:spcPct val="112000"/>
+              </a:lnSpc>
+              <a:spcAft>
+                <a:spcPts val="1200"/>
+              </a:spcAft>
+              <a:buNone/>
             </a:pPr>
             <a:r>
               <a:t>Make it yours. Keep it Plan B.</a:t>
@@ -2052,19 +2066,20 @@
           </a:bodyPr>
           <a:lstStyle/>
           <a:p>
-            <a:pPr>
-              <a:lnSpc>
-                <a:spcPct val="112000"/>
-              </a:lnSpc>
-              <a:spcAft>
-                <a:spcPts val="1200"/>
-              </a:spcAft>
+            <a:pPr algn="l" marL="0" indent="0">
               <a:defRPr sz="1900" b="0">
                 <a:solidFill>
                   <a:srgbClr val="030B20"/>
                 </a:solidFill>
                 <a:latin typeface="Inter"/>
               </a:defRPr>
+              <a:lnSpc>
+                <a:spcPct val="112000"/>
+              </a:lnSpc>
+              <a:spcAft>
+                <a:spcPts val="1200"/>
+              </a:spcAft>
+              <a:buNone/>
             </a:pPr>
             <a:r>
               <a:t>Delete this guidance slide before presenting.</a:t>
@@ -2096,38 +2111,40 @@
           </a:bodyPr>
           <a:lstStyle/>
           <a:p>
-            <a:pPr>
-              <a:lnSpc>
-                <a:spcPct val="112000"/>
-              </a:lnSpc>
-              <a:spcAft>
-                <a:spcPts val="1200"/>
-              </a:spcAft>
+            <a:pPr algn="l" marL="0" indent="0">
               <a:defRPr sz="2300" b="0">
                 <a:solidFill>
                   <a:srgbClr val="030B20"/>
                 </a:solidFill>
                 <a:latin typeface="Inter"/>
               </a:defRPr>
+              <a:lnSpc>
+                <a:spcPct val="112000"/>
+              </a:lnSpc>
+              <a:spcAft>
+                <a:spcPts val="1200"/>
+              </a:spcAft>
+              <a:buNone/>
             </a:pPr>
             <a:r>
               <a:t>Use the layouts</a:t>
             </a:r>
           </a:p>
           <a:p>
-            <a:pPr>
-              <a:lnSpc>
-                <a:spcPct val="112000"/>
-              </a:lnSpc>
-              <a:spcAft>
-                <a:spcPts val="1200"/>
-              </a:spcAft>
+            <a:pPr algn="l" marL="0" indent="0">
               <a:defRPr sz="2300" b="0">
                 <a:solidFill>
                   <a:srgbClr val="030B20"/>
                 </a:solidFill>
                 <a:latin typeface="Inter"/>
               </a:defRPr>
+              <a:lnSpc>
+                <a:spcPct val="112000"/>
+              </a:lnSpc>
+              <a:spcAft>
+                <a:spcPts val="1200"/>
+              </a:spcAft>
+              <a:buNone/>
             </a:pPr>
             <a:r>
               <a:t>Install Inter, then choose Home → New Slide. Replace bracketed prompts. Duplicate the chart or table example to retain its styling.</a:t>
@@ -2159,38 +2176,40 @@
           </a:bodyPr>
           <a:lstStyle/>
           <a:p>
-            <a:pPr>
-              <a:lnSpc>
-                <a:spcPct val="112000"/>
-              </a:lnSpc>
-              <a:spcAft>
-                <a:spcPts val="1200"/>
-              </a:spcAft>
+            <a:pPr algn="l" marL="0" indent="0">
               <a:defRPr sz="2300" b="0">
                 <a:solidFill>
                   <a:srgbClr val="030B20"/>
                 </a:solidFill>
                 <a:latin typeface="Inter"/>
               </a:defRPr>
+              <a:lnSpc>
+                <a:spcPct val="112000"/>
+              </a:lnSpc>
+              <a:spcAft>
+                <a:spcPts val="1200"/>
+              </a:spcAft>
+              <a:buNone/>
             </a:pPr>
             <a:r>
               <a:t>Keep it clear</a:t>
             </a:r>
           </a:p>
           <a:p>
-            <a:pPr>
-              <a:lnSpc>
-                <a:spcPct val="112000"/>
-              </a:lnSpc>
-              <a:spcAft>
-                <a:spcPts val="1200"/>
-              </a:spcAft>
+            <a:pPr algn="l" marL="0" indent="0">
               <a:defRPr sz="2300" b="0">
                 <a:solidFill>
                   <a:srgbClr val="030B20"/>
                 </a:solidFill>
                 <a:latin typeface="Inter"/>
               </a:defRPr>
+              <a:lnSpc>
+                <a:spcPct val="112000"/>
+              </a:lnSpc>
+              <a:spcAft>
+                <a:spcPts val="1200"/>
+              </a:spcAft>
+              <a:buNone/>
             </a:pPr>
             <a:r>
               <a:t>One idea per slide. Use navy and warm white. Choose gold or a small gradient as the exceptional signal. Aim for 20pt or larger body text.</a:t>
@@ -2392,19 +2411,20 @@
           </a:bodyPr>
           <a:lstStyle/>
           <a:p>
-            <a:pPr>
-              <a:lnSpc>
-                <a:spcPct val="112000"/>
-              </a:lnSpc>
-              <a:spcAft>
-                <a:spcPts val="1200"/>
-              </a:spcAft>
+            <a:pPr algn="l" marL="0" indent="0">
               <a:defRPr sz="1500" b="0">
                 <a:solidFill>
                   <a:srgbClr val="082952"/>
                 </a:solidFill>
                 <a:latin typeface="Inter"/>
               </a:defRPr>
+              <a:lnSpc>
+                <a:spcPct val="112000"/>
+              </a:lnSpc>
+              <a:spcAft>
+                <a:spcPts val="1200"/>
+              </a:spcAft>
+              <a:buNone/>
             </a:pPr>
             <a:r>
               <a:t>Full guidance: plan-b.foundation/branding/</a:t>
@@ -2426,7 +2446,7 @@
 </file>
 
 <file path=ppt/slideLayouts/slideLayout11.xml><?xml version="1.0" encoding="utf-8"?>
-<p:sldLayout xmlns:a="http://schemas.openxmlformats.org/drawingml/2006/main" xmlns:r="http://schemas.openxmlformats.org/officeDocument/2006/relationships" xmlns:p="http://schemas.openxmlformats.org/presentationml/2006/main" type="cust" preserve="1" showMasterSp="0">
+<p:sldLayout xmlns:a="http://schemas.openxmlformats.org/drawingml/2006/main" xmlns:r="http://schemas.openxmlformats.org/officeDocument/2006/relationships" xmlns:p="http://schemas.openxmlformats.org/presentationml/2006/main" type="cust" preserve="1" showMasterSp="1">
   <p:cSld name="Plan B / Blank">
     <p:bg>
       <p:bgPr>
@@ -2464,7 +2484,7 @@
 </file>
 
 <file path=ppt/slideLayouts/slideLayout2.xml><?xml version="1.0" encoding="utf-8"?>
-<p:sldLayout xmlns:a="http://schemas.openxmlformats.org/drawingml/2006/main" xmlns:r="http://schemas.openxmlformats.org/officeDocument/2006/relationships" xmlns:p="http://schemas.openxmlformats.org/presentationml/2006/main" type="cust" preserve="1" showMasterSp="0">
+<p:sldLayout xmlns:a="http://schemas.openxmlformats.org/drawingml/2006/main" xmlns:r="http://schemas.openxmlformats.org/officeDocument/2006/relationships" xmlns:p="http://schemas.openxmlformats.org/presentationml/2006/main" type="cust" preserve="1" showMasterSp="1">
   <p:cSld name="Plan B / Section">
     <p:bg>
       <p:bgPr>
@@ -2510,19 +2530,20 @@
           </a:bodyPr>
           <a:lstStyle/>
           <a:p>
-            <a:pPr>
-              <a:lnSpc>
-                <a:spcPct val="112000"/>
-              </a:lnSpc>
-              <a:spcAft>
-                <a:spcPts val="1200"/>
-              </a:spcAft>
+            <a:pPr algn="l" marL="0" indent="0">
               <a:defRPr sz="1100" b="1">
                 <a:solidFill>
                   <a:srgbClr val="FFFEFA"/>
                 </a:solidFill>
                 <a:latin typeface="Inter"/>
               </a:defRPr>
+              <a:lnSpc>
+                <a:spcPct val="112000"/>
+              </a:lnSpc>
+              <a:spcAft>
+                <a:spcPts val="1200"/>
+              </a:spcAft>
+              <a:buNone/>
             </a:pPr>
             <a:r>
               <a:t>Plan B Foundation</a:t>
@@ -2552,19 +2573,20 @@
           </a:bodyPr>
           <a:lstStyle/>
           <a:p>
-            <a:pPr>
-              <a:lnSpc>
-                <a:spcPct val="112000"/>
-              </a:lnSpc>
-              <a:spcAft>
-                <a:spcPts val="1200"/>
-              </a:spcAft>
+            <a:pPr algn="l" marL="0" indent="0">
               <a:defRPr sz="1100" b="0">
                 <a:solidFill>
                   <a:srgbClr val="FFFEFA"/>
                 </a:solidFill>
                 <a:latin typeface="Inter"/>
               </a:defRPr>
+              <a:lnSpc>
+                <a:spcPct val="112000"/>
+              </a:lnSpc>
+              <a:spcAft>
+                <a:spcPts val="1200"/>
+              </a:spcAft>
+              <a:buNone/>
             </a:pPr>
             <a:r>
               <a:t>Civic Digital Commons</a:t>
@@ -2596,19 +2618,20 @@
           </a:bodyPr>
           <a:lstStyle/>
           <a:p>
-            <a:pPr>
-              <a:lnSpc>
-                <a:spcPct val="112000"/>
-              </a:lnSpc>
-              <a:spcAft>
-                <a:spcPts val="1200"/>
-              </a:spcAft>
+            <a:pPr algn="l" marL="0" indent="0">
               <a:defRPr sz="4800" b="1">
                 <a:solidFill>
                   <a:srgbClr val="FFFEFA"/>
                 </a:solidFill>
                 <a:latin typeface="Inter"/>
               </a:defRPr>
+              <a:lnSpc>
+                <a:spcPct val="112000"/>
+              </a:lnSpc>
+              <a:spcAft>
+                <a:spcPts val="1200"/>
+              </a:spcAft>
+              <a:buNone/>
             </a:pPr>
             <a:r>
               <a:t>[Section title]</a:t>
@@ -2640,19 +2663,20 @@
           </a:bodyPr>
           <a:lstStyle/>
           <a:p>
-            <a:pPr>
-              <a:lnSpc>
-                <a:spcPct val="112000"/>
-              </a:lnSpc>
-              <a:spcAft>
-                <a:spcPts val="1200"/>
-              </a:spcAft>
+            <a:pPr algn="l" marL="0" indent="0">
               <a:defRPr sz="2500" b="0">
                 <a:solidFill>
                   <a:srgbClr val="FFFEFA"/>
                 </a:solidFill>
                 <a:latin typeface="Inter"/>
               </a:defRPr>
+              <a:lnSpc>
+                <a:spcPct val="112000"/>
+              </a:lnSpc>
+              <a:spcAft>
+                <a:spcPts val="1200"/>
+              </a:spcAft>
+              <a:buNone/>
             </a:pPr>
             <a:r>
               <a:t>[One sentence that sets the direction]</a:t>
@@ -2717,7 +2741,7 @@
 </file>
 
 <file path=ppt/slideLayouts/slideLayout3.xml><?xml version="1.0" encoding="utf-8"?>
-<p:sldLayout xmlns:a="http://schemas.openxmlformats.org/drawingml/2006/main" xmlns:r="http://schemas.openxmlformats.org/officeDocument/2006/relationships" xmlns:p="http://schemas.openxmlformats.org/presentationml/2006/main" type="cust" preserve="1" showMasterSp="0">
+<p:sldLayout xmlns:a="http://schemas.openxmlformats.org/drawingml/2006/main" xmlns:r="http://schemas.openxmlformats.org/officeDocument/2006/relationships" xmlns:p="http://schemas.openxmlformats.org/presentationml/2006/main" type="cust" preserve="1" showMasterSp="1">
   <p:cSld name="Plan B / Title and content">
     <p:bg>
       <p:bgPr>
@@ -2763,19 +2787,20 @@
           </a:bodyPr>
           <a:lstStyle/>
           <a:p>
-            <a:pPr>
-              <a:lnSpc>
-                <a:spcPct val="112000"/>
-              </a:lnSpc>
-              <a:spcAft>
-                <a:spcPts val="1200"/>
-              </a:spcAft>
+            <a:pPr algn="l" marL="0" indent="0">
               <a:defRPr sz="1100" b="1">
                 <a:solidFill>
                   <a:srgbClr val="082952"/>
                 </a:solidFill>
                 <a:latin typeface="Inter"/>
               </a:defRPr>
+              <a:lnSpc>
+                <a:spcPct val="112000"/>
+              </a:lnSpc>
+              <a:spcAft>
+                <a:spcPts val="1200"/>
+              </a:spcAft>
+              <a:buNone/>
             </a:pPr>
             <a:r>
               <a:t>Plan B Foundation</a:t>
@@ -2805,19 +2830,20 @@
           </a:bodyPr>
           <a:lstStyle/>
           <a:p>
-            <a:pPr>
-              <a:lnSpc>
-                <a:spcPct val="112000"/>
-              </a:lnSpc>
-              <a:spcAft>
-                <a:spcPts val="1200"/>
-              </a:spcAft>
+            <a:pPr algn="l" marL="0" indent="0">
               <a:defRPr sz="1100" b="0">
                 <a:solidFill>
                   <a:srgbClr val="082952"/>
                 </a:solidFill>
                 <a:latin typeface="Inter"/>
               </a:defRPr>
+              <a:lnSpc>
+                <a:spcPct val="112000"/>
+              </a:lnSpc>
+              <a:spcAft>
+                <a:spcPts val="1200"/>
+              </a:spcAft>
+              <a:buNone/>
             </a:pPr>
             <a:r>
               <a:t>Civic Digital Commons</a:t>
@@ -2849,19 +2875,20 @@
           </a:bodyPr>
           <a:lstStyle/>
           <a:p>
-            <a:pPr>
-              <a:lnSpc>
-                <a:spcPct val="112000"/>
-              </a:lnSpc>
-              <a:spcAft>
-                <a:spcPts val="1200"/>
-              </a:spcAft>
+            <a:pPr algn="l" marL="0" indent="0">
               <a:defRPr sz="3600" b="1">
                 <a:solidFill>
                   <a:srgbClr val="082952"/>
                 </a:solidFill>
                 <a:latin typeface="Inter"/>
               </a:defRPr>
+              <a:lnSpc>
+                <a:spcPct val="112000"/>
+              </a:lnSpc>
+              <a:spcAft>
+                <a:spcPts val="1200"/>
+              </a:spcAft>
+              <a:buNone/>
             </a:pPr>
             <a:r>
               <a:t>[Lead with the point]</a:t>
@@ -2893,19 +2920,20 @@
           </a:bodyPr>
           <a:lstStyle/>
           <a:p>
-            <a:pPr>
-              <a:lnSpc>
-                <a:spcPct val="112000"/>
-              </a:lnSpc>
-              <a:spcAft>
-                <a:spcPts val="1200"/>
-              </a:spcAft>
+            <a:pPr algn="l" marL="0" indent="0">
               <a:defRPr sz="1900" b="0">
                 <a:solidFill>
                   <a:srgbClr val="030B20"/>
                 </a:solidFill>
                 <a:latin typeface="Inter"/>
               </a:defRPr>
+              <a:lnSpc>
+                <a:spcPct val="112000"/>
+              </a:lnSpc>
+              <a:spcAft>
+                <a:spcPts val="1200"/>
+              </a:spcAft>
+              <a:buNone/>
             </a:pPr>
             <a:r>
               <a:t>[Explain why this matters to the audience]</a:t>
@@ -2937,57 +2965,60 @@
           </a:bodyPr>
           <a:lstStyle/>
           <a:p>
-            <a:pPr>
-              <a:lnSpc>
-                <a:spcPct val="112000"/>
-              </a:lnSpc>
-              <a:spcAft>
-                <a:spcPts val="1200"/>
-              </a:spcAft>
+            <a:pPr algn="l" marL="0" indent="0">
               <a:defRPr sz="2700" b="0">
                 <a:solidFill>
                   <a:srgbClr val="030B20"/>
                 </a:solidFill>
                 <a:latin typeface="Inter"/>
               </a:defRPr>
+              <a:lnSpc>
+                <a:spcPct val="112000"/>
+              </a:lnSpc>
+              <a:spcAft>
+                <a:spcPts val="1200"/>
+              </a:spcAft>
+              <a:buNone/>
             </a:pPr>
             <a:r>
               <a:t>[First idea — one concise sentence]</a:t>
             </a:r>
           </a:p>
           <a:p>
-            <a:pPr>
-              <a:lnSpc>
-                <a:spcPct val="112000"/>
-              </a:lnSpc>
-              <a:spcAft>
-                <a:spcPts val="1200"/>
-              </a:spcAft>
+            <a:pPr algn="l" marL="0" indent="0">
               <a:defRPr sz="2700" b="0">
                 <a:solidFill>
                   <a:srgbClr val="030B20"/>
                 </a:solidFill>
                 <a:latin typeface="Inter"/>
               </a:defRPr>
+              <a:lnSpc>
+                <a:spcPct val="112000"/>
+              </a:lnSpc>
+              <a:spcAft>
+                <a:spcPts val="1200"/>
+              </a:spcAft>
+              <a:buNone/>
             </a:pPr>
             <a:r>
               <a:t>[Second idea — one concise sentence]</a:t>
             </a:r>
           </a:p>
           <a:p>
-            <a:pPr>
-              <a:lnSpc>
-                <a:spcPct val="112000"/>
-              </a:lnSpc>
-              <a:spcAft>
-                <a:spcPts val="1200"/>
-              </a:spcAft>
+            <a:pPr algn="l" marL="0" indent="0">
               <a:defRPr sz="2700" b="0">
                 <a:solidFill>
                   <a:srgbClr val="030B20"/>
                 </a:solidFill>
                 <a:latin typeface="Inter"/>
               </a:defRPr>
+              <a:lnSpc>
+                <a:spcPct val="112000"/>
+              </a:lnSpc>
+              <a:spcAft>
+                <a:spcPts val="1200"/>
+              </a:spcAft>
+              <a:buNone/>
             </a:pPr>
             <a:r>
               <a:t>[Third idea — one concise sentence]</a:t>
@@ -3052,7 +3083,7 @@
 </file>
 
 <file path=ppt/slideLayouts/slideLayout4.xml><?xml version="1.0" encoding="utf-8"?>
-<p:sldLayout xmlns:a="http://schemas.openxmlformats.org/drawingml/2006/main" xmlns:r="http://schemas.openxmlformats.org/officeDocument/2006/relationships" xmlns:p="http://schemas.openxmlformats.org/presentationml/2006/main" type="cust" preserve="1" showMasterSp="0">
+<p:sldLayout xmlns:a="http://schemas.openxmlformats.org/drawingml/2006/main" xmlns:r="http://schemas.openxmlformats.org/officeDocument/2006/relationships" xmlns:p="http://schemas.openxmlformats.org/presentationml/2006/main" type="cust" preserve="1" showMasterSp="1">
   <p:cSld name="Plan B / Two columns">
     <p:bg>
       <p:bgPr>
@@ -3098,19 +3129,20 @@
           </a:bodyPr>
           <a:lstStyle/>
           <a:p>
-            <a:pPr>
-              <a:lnSpc>
-                <a:spcPct val="112000"/>
-              </a:lnSpc>
-              <a:spcAft>
-                <a:spcPts val="1200"/>
-              </a:spcAft>
+            <a:pPr algn="l" marL="0" indent="0">
               <a:defRPr sz="1100" b="1">
                 <a:solidFill>
                   <a:srgbClr val="082952"/>
                 </a:solidFill>
                 <a:latin typeface="Inter"/>
               </a:defRPr>
+              <a:lnSpc>
+                <a:spcPct val="112000"/>
+              </a:lnSpc>
+              <a:spcAft>
+                <a:spcPts val="1200"/>
+              </a:spcAft>
+              <a:buNone/>
             </a:pPr>
             <a:r>
               <a:t>Plan B Foundation</a:t>
@@ -3140,19 +3172,20 @@
           </a:bodyPr>
           <a:lstStyle/>
           <a:p>
-            <a:pPr>
-              <a:lnSpc>
-                <a:spcPct val="112000"/>
-              </a:lnSpc>
-              <a:spcAft>
-                <a:spcPts val="1200"/>
-              </a:spcAft>
+            <a:pPr algn="l" marL="0" indent="0">
               <a:defRPr sz="1100" b="0">
                 <a:solidFill>
                   <a:srgbClr val="082952"/>
                 </a:solidFill>
                 <a:latin typeface="Inter"/>
               </a:defRPr>
+              <a:lnSpc>
+                <a:spcPct val="112000"/>
+              </a:lnSpc>
+              <a:spcAft>
+                <a:spcPts val="1200"/>
+              </a:spcAft>
+              <a:buNone/>
             </a:pPr>
             <a:r>
               <a:t>Civic Digital Commons</a:t>
@@ -3184,19 +3217,20 @@
           </a:bodyPr>
           <a:lstStyle/>
           <a:p>
-            <a:pPr>
-              <a:lnSpc>
-                <a:spcPct val="112000"/>
-              </a:lnSpc>
-              <a:spcAft>
-                <a:spcPts val="1200"/>
-              </a:spcAft>
+            <a:pPr algn="l" marL="0" indent="0">
               <a:defRPr sz="3600" b="1">
                 <a:solidFill>
                   <a:srgbClr val="082952"/>
                 </a:solidFill>
                 <a:latin typeface="Inter"/>
               </a:defRPr>
+              <a:lnSpc>
+                <a:spcPct val="112000"/>
+              </a:lnSpc>
+              <a:spcAft>
+                <a:spcPts val="1200"/>
+              </a:spcAft>
+              <a:buNone/>
             </a:pPr>
             <a:r>
               <a:t>[Compare two ideas]</a:t>
@@ -3228,19 +3262,20 @@
           </a:bodyPr>
           <a:lstStyle/>
           <a:p>
-            <a:pPr>
-              <a:lnSpc>
-                <a:spcPct val="112000"/>
-              </a:lnSpc>
-              <a:spcAft>
-                <a:spcPts val="1200"/>
-              </a:spcAft>
+            <a:pPr algn="l" marL="0" indent="0">
               <a:defRPr sz="2600" b="1">
                 <a:solidFill>
                   <a:srgbClr val="082952"/>
                 </a:solidFill>
                 <a:latin typeface="Inter"/>
               </a:defRPr>
+              <a:lnSpc>
+                <a:spcPct val="112000"/>
+              </a:lnSpc>
+              <a:spcAft>
+                <a:spcPts val="1200"/>
+              </a:spcAft>
+              <a:buNone/>
             </a:pPr>
             <a:r>
               <a:t>[First perspective]</a:t>
@@ -3272,19 +3307,20 @@
           </a:bodyPr>
           <a:lstStyle/>
           <a:p>
-            <a:pPr>
-              <a:lnSpc>
-                <a:spcPct val="112000"/>
-              </a:lnSpc>
-              <a:spcAft>
-                <a:spcPts val="1200"/>
-              </a:spcAft>
+            <a:pPr algn="l" marL="0" indent="0">
               <a:defRPr sz="2400" b="0">
                 <a:solidFill>
                   <a:srgbClr val="030B20"/>
                 </a:solidFill>
                 <a:latin typeface="Inter"/>
               </a:defRPr>
+              <a:lnSpc>
+                <a:spcPct val="112000"/>
+              </a:lnSpc>
+              <a:spcAft>
+                <a:spcPts val="1200"/>
+              </a:spcAft>
+              <a:buNone/>
             </a:pPr>
             <a:r>
               <a:t>[Explain the idea in 40 words or fewer. Keep sentences concrete and easy to read.]</a:t>
@@ -3316,19 +3352,20 @@
           </a:bodyPr>
           <a:lstStyle/>
           <a:p>
-            <a:pPr>
-              <a:lnSpc>
-                <a:spcPct val="112000"/>
-              </a:lnSpc>
-              <a:spcAft>
-                <a:spcPts val="1200"/>
-              </a:spcAft>
+            <a:pPr algn="l" marL="0" indent="0">
               <a:defRPr sz="2600" b="1">
                 <a:solidFill>
                   <a:srgbClr val="082952"/>
                 </a:solidFill>
                 <a:latin typeface="Inter"/>
               </a:defRPr>
+              <a:lnSpc>
+                <a:spcPct val="112000"/>
+              </a:lnSpc>
+              <a:spcAft>
+                <a:spcPts val="1200"/>
+              </a:spcAft>
+              <a:buNone/>
             </a:pPr>
             <a:r>
               <a:t>[Second perspective]</a:t>
@@ -3360,19 +3397,20 @@
           </a:bodyPr>
           <a:lstStyle/>
           <a:p>
-            <a:pPr>
-              <a:lnSpc>
-                <a:spcPct val="112000"/>
-              </a:lnSpc>
-              <a:spcAft>
-                <a:spcPts val="1200"/>
-              </a:spcAft>
+            <a:pPr algn="l" marL="0" indent="0">
               <a:defRPr sz="2400" b="0">
                 <a:solidFill>
                   <a:srgbClr val="030B20"/>
                 </a:solidFill>
                 <a:latin typeface="Inter"/>
               </a:defRPr>
+              <a:lnSpc>
+                <a:spcPct val="112000"/>
+              </a:lnSpc>
+              <a:spcAft>
+                <a:spcPts val="1200"/>
+              </a:spcAft>
+              <a:buNone/>
             </a:pPr>
             <a:r>
               <a:t>[Explain the difference or consequence. Use the same level of detail as the first column.]</a:t>
@@ -3437,7 +3475,7 @@
 </file>
 
 <file path=ppt/slideLayouts/slideLayout5.xml><?xml version="1.0" encoding="utf-8"?>
-<p:sldLayout xmlns:a="http://schemas.openxmlformats.org/drawingml/2006/main" xmlns:r="http://schemas.openxmlformats.org/officeDocument/2006/relationships" xmlns:p="http://schemas.openxmlformats.org/presentationml/2006/main" type="cust" preserve="1" showMasterSp="0">
+<p:sldLayout xmlns:a="http://schemas.openxmlformats.org/drawingml/2006/main" xmlns:r="http://schemas.openxmlformats.org/officeDocument/2006/relationships" xmlns:p="http://schemas.openxmlformats.org/presentationml/2006/main" type="cust" preserve="1" showMasterSp="1">
   <p:cSld name="Plan B / Image and story">
     <p:bg>
       <p:bgPr>
@@ -3483,19 +3521,20 @@
           </a:bodyPr>
           <a:lstStyle/>
           <a:p>
-            <a:pPr>
-              <a:lnSpc>
-                <a:spcPct val="112000"/>
-              </a:lnSpc>
-              <a:spcAft>
-                <a:spcPts val="1200"/>
-              </a:spcAft>
+            <a:pPr algn="l" marL="0" indent="0">
               <a:defRPr sz="1100" b="1">
                 <a:solidFill>
                   <a:srgbClr val="082952"/>
                 </a:solidFill>
                 <a:latin typeface="Inter"/>
               </a:defRPr>
+              <a:lnSpc>
+                <a:spcPct val="112000"/>
+              </a:lnSpc>
+              <a:spcAft>
+                <a:spcPts val="1200"/>
+              </a:spcAft>
+              <a:buNone/>
             </a:pPr>
             <a:r>
               <a:t>Plan B Foundation</a:t>
@@ -3525,19 +3564,20 @@
           </a:bodyPr>
           <a:lstStyle/>
           <a:p>
-            <a:pPr>
-              <a:lnSpc>
-                <a:spcPct val="112000"/>
-              </a:lnSpc>
-              <a:spcAft>
-                <a:spcPts val="1200"/>
-              </a:spcAft>
+            <a:pPr algn="l" marL="0" indent="0">
               <a:defRPr sz="1100" b="0">
                 <a:solidFill>
                   <a:srgbClr val="082952"/>
                 </a:solidFill>
                 <a:latin typeface="Inter"/>
               </a:defRPr>
+              <a:lnSpc>
+                <a:spcPct val="112000"/>
+              </a:lnSpc>
+              <a:spcAft>
+                <a:spcPts val="1200"/>
+              </a:spcAft>
+              <a:buNone/>
             </a:pPr>
             <a:r>
               <a:t>Civic Digital Commons</a:t>
@@ -3569,19 +3609,20 @@
           </a:bodyPr>
           <a:lstStyle/>
           <a:p>
-            <a:pPr>
-              <a:lnSpc>
-                <a:spcPct val="112000"/>
-              </a:lnSpc>
-              <a:spcAft>
-                <a:spcPts val="1200"/>
-              </a:spcAft>
+            <a:pPr algn="l" marL="0" indent="0">
               <a:defRPr sz="3600" b="1">
                 <a:solidFill>
                   <a:srgbClr val="082952"/>
                 </a:solidFill>
                 <a:latin typeface="Inter"/>
               </a:defRPr>
+              <a:lnSpc>
+                <a:spcPct val="112000"/>
+              </a:lnSpc>
+              <a:spcAft>
+                <a:spcPts val="1200"/>
+              </a:spcAft>
+              <a:buNone/>
             </a:pPr>
             <a:r>
               <a:t>[Make the place visible]</a:t>
@@ -3636,11 +3677,9 @@
       </p:sp>
       <p:sp>
         <p:nvSpPr>
-          <p:cNvPr id="6" name="Placeholder 1"/>
-          <p:cNvSpPr txBox="1"/>
-          <p:nvPr>
-            <p:ph type="pic" idx="1"/>
-          </p:nvPr>
+          <p:cNvPr id="6" name="Insert a documentary photograph"/>
+          <p:cNvSpPr txBox="1"/>
+          <p:nvPr/>
         </p:nvSpPr>
         <p:spPr>
           <a:xfrm>
@@ -3658,19 +3697,65 @@
           </a:bodyPr>
           <a:lstStyle/>
           <a:p>
-            <a:pPr>
-              <a:lnSpc>
-                <a:spcPct val="112000"/>
-              </a:lnSpc>
-              <a:spcAft>
-                <a:spcPts val="1200"/>
-              </a:spcAft>
+            <a:pPr algn="l" marL="0" indent="0">
               <a:defRPr sz="2600" b="1">
                 <a:solidFill>
                   <a:srgbClr val="082952"/>
                 </a:solidFill>
                 <a:latin typeface="Inter"/>
               </a:defRPr>
+              <a:lnSpc>
+                <a:spcPct val="112000"/>
+              </a:lnSpc>
+              <a:spcAft>
+                <a:spcPts val="1200"/>
+              </a:spcAft>
+              <a:buNone/>
+            </a:pPr>
+            <a:r>
+              <a:t>Insert a documentary photograph</a:t>
+            </a:r>
+          </a:p>
+        </p:txBody>
+      </p:sp>
+      <p:sp>
+        <p:nvSpPr>
+          <p:cNvPr id="7" name="Placeholder 1"/>
+          <p:cNvSpPr txBox="1"/>
+          <p:nvPr>
+            <p:ph type="pic" idx="1"/>
+          </p:nvPr>
+        </p:nvSpPr>
+        <p:spPr>
+          <a:xfrm>
+            <a:off x="914400" y="2834640"/>
+            <a:ext cx="6035040" cy="1051560"/>
+          </a:xfrm>
+          <a:prstGeom prst="rect">
+            <a:avLst/>
+          </a:prstGeom>
+          <a:noFill/>
+        </p:spPr>
+        <p:txBody>
+          <a:bodyPr wrap="square" lIns="0" rIns="0" tIns="0" bIns="0">
+            <a:spAutoFit/>
+          </a:bodyPr>
+          <a:lstStyle/>
+          <a:p>
+            <a:pPr algn="l" marL="0" indent="0">
+              <a:defRPr sz="2600" b="1">
+                <a:solidFill>
+                  <a:srgbClr val="082952"/>
+                </a:solidFill>
+                <a:latin typeface="Inter"/>
+              </a:defRPr>
+              <a:lnSpc>
+                <a:spcPct val="112000"/>
+              </a:lnSpc>
+              <a:spcAft>
+                <a:spcPts val="1200"/>
+              </a:spcAft>
+              <a:buNone/>
             </a:pPr>
             <a:r>
               <a:t>[Insert a documentary photograph]</a:t>
@@ -3680,7 +3765,7 @@
       </p:sp>
       <p:sp>
         <p:nvSpPr>
-          <p:cNvPr id="7" name="Placeholder 2"/>
+          <p:cNvPr id="8" name="Placeholder 2"/>
           <p:cNvSpPr txBox="1"/>
           <p:nvPr>
             <p:ph type="body" idx="2"/>
@@ -3702,19 +3787,20 @@
           </a:bodyPr>
           <a:lstStyle/>
           <a:p>
-            <a:pPr>
-              <a:lnSpc>
-                <a:spcPct val="112000"/>
-              </a:lnSpc>
-              <a:spcAft>
-                <a:spcPts val="1200"/>
-              </a:spcAft>
+            <a:pPr algn="l" marL="0" indent="0">
               <a:defRPr sz="2700" b="1">
                 <a:solidFill>
                   <a:srgbClr val="082952"/>
                 </a:solidFill>
                 <a:latin typeface="Inter"/>
               </a:defRPr>
+              <a:lnSpc>
+                <a:spcPct val="112000"/>
+              </a:lnSpc>
+              <a:spcAft>
+                <a:spcPts val="1200"/>
+              </a:spcAft>
+              <a:buNone/>
             </a:pPr>
             <a:r>
               <a:t>[What should we notice?]</a:t>
@@ -3724,7 +3810,7 @@
       </p:sp>
       <p:sp>
         <p:nvSpPr>
-          <p:cNvPr id="8" name="Placeholder 3"/>
+          <p:cNvPr id="9" name="Placeholder 3"/>
           <p:cNvSpPr txBox="1"/>
           <p:nvPr>
             <p:ph type="body" idx="3"/>
@@ -3746,19 +3832,20 @@
           </a:bodyPr>
           <a:lstStyle/>
           <a:p>
-            <a:pPr>
-              <a:lnSpc>
-                <a:spcPct val="112000"/>
-              </a:lnSpc>
-              <a:spcAft>
-                <a:spcPts val="1200"/>
-              </a:spcAft>
+            <a:pPr algn="l" marL="0" indent="0">
               <a:defRPr sz="2200" b="0">
                 <a:solidFill>
                   <a:srgbClr val="030B20"/>
                 </a:solidFill>
                 <a:latin typeface="Inter"/>
               </a:defRPr>
+              <a:lnSpc>
+                <a:spcPct val="112000"/>
+              </a:lnSpc>
+              <a:spcAft>
+                <a:spcPts val="1200"/>
+              </a:spcAft>
+              <a:buNone/>
             </a:pPr>
             <a:r>
               <a:t>[Connect the image to the public purpose. Use real Lugano, civic spaces, workshops or people making and learning.]</a:t>
@@ -3768,7 +3855,7 @@
       </p:sp>
       <p:sp>
         <p:nvSpPr>
-          <p:cNvPr id="9" name="Placeholder 4"/>
+          <p:cNvPr id="10" name="Placeholder 4"/>
           <p:cNvSpPr txBox="1"/>
           <p:nvPr>
             <p:ph type="body" idx="4"/>
@@ -3790,19 +3877,20 @@
           </a:bodyPr>
           <a:lstStyle/>
           <a:p>
-            <a:pPr>
-              <a:lnSpc>
-                <a:spcPct val="112000"/>
-              </a:lnSpc>
-              <a:spcAft>
-                <a:spcPts val="1200"/>
-              </a:spcAft>
+            <a:pPr algn="l" marL="0" indent="0">
               <a:defRPr sz="1200" b="0">
                 <a:solidFill>
                   <a:srgbClr val="030B20"/>
                 </a:solidFill>
                 <a:latin typeface="Inter"/>
               </a:defRPr>
+              <a:lnSpc>
+                <a:spcPct val="112000"/>
+              </a:lnSpc>
+              <a:spcAft>
+                <a:spcPts val="1200"/>
+              </a:spcAft>
+              <a:buNone/>
             </a:pPr>
             <a:r>
               <a:t>[Photo credit / source / permission]</a:t>
@@ -3824,7 +3912,7 @@
 </file>
 
 <file path=ppt/slideLayouts/slideLayout6.xml><?xml version="1.0" encoding="utf-8"?>
-<p:sldLayout xmlns:a="http://schemas.openxmlformats.org/drawingml/2006/main" xmlns:r="http://schemas.openxmlformats.org/officeDocument/2006/relationships" xmlns:p="http://schemas.openxmlformats.org/presentationml/2006/main" type="cust" preserve="1" showMasterSp="0">
+<p:sldLayout xmlns:a="http://schemas.openxmlformats.org/drawingml/2006/main" xmlns:r="http://schemas.openxmlformats.org/officeDocument/2006/relationships" xmlns:p="http://schemas.openxmlformats.org/presentationml/2006/main" type="cust" preserve="1" showMasterSp="1">
   <p:cSld name="Plan B / Chart and takeaway">
     <p:bg>
       <p:bgPr>
@@ -3870,19 +3958,20 @@
           </a:bodyPr>
           <a:lstStyle/>
           <a:p>
-            <a:pPr>
-              <a:lnSpc>
-                <a:spcPct val="112000"/>
-              </a:lnSpc>
-              <a:spcAft>
-                <a:spcPts val="1200"/>
-              </a:spcAft>
+            <a:pPr algn="l" marL="0" indent="0">
               <a:defRPr sz="1100" b="1">
                 <a:solidFill>
                   <a:srgbClr val="082952"/>
                 </a:solidFill>
                 <a:latin typeface="Inter"/>
               </a:defRPr>
+              <a:lnSpc>
+                <a:spcPct val="112000"/>
+              </a:lnSpc>
+              <a:spcAft>
+                <a:spcPts val="1200"/>
+              </a:spcAft>
+              <a:buNone/>
             </a:pPr>
             <a:r>
               <a:t>Plan B Foundation</a:t>
@@ -3912,19 +4001,20 @@
           </a:bodyPr>
           <a:lstStyle/>
           <a:p>
-            <a:pPr>
-              <a:lnSpc>
-                <a:spcPct val="112000"/>
-              </a:lnSpc>
-              <a:spcAft>
-                <a:spcPts val="1200"/>
-              </a:spcAft>
+            <a:pPr algn="l" marL="0" indent="0">
               <a:defRPr sz="1100" b="0">
                 <a:solidFill>
                   <a:srgbClr val="082952"/>
                 </a:solidFill>
                 <a:latin typeface="Inter"/>
               </a:defRPr>
+              <a:lnSpc>
+                <a:spcPct val="112000"/>
+              </a:lnSpc>
+              <a:spcAft>
+                <a:spcPts val="1200"/>
+              </a:spcAft>
+              <a:buNone/>
             </a:pPr>
             <a:r>
               <a:t>Civic Digital Commons</a:t>
@@ -3956,19 +4046,20 @@
           </a:bodyPr>
           <a:lstStyle/>
           <a:p>
-            <a:pPr>
-              <a:lnSpc>
-                <a:spcPct val="112000"/>
-              </a:lnSpc>
-              <a:spcAft>
-                <a:spcPts val="1200"/>
-              </a:spcAft>
+            <a:pPr algn="l" marL="0" indent="0">
               <a:defRPr sz="3600" b="1">
                 <a:solidFill>
                   <a:srgbClr val="082952"/>
                 </a:solidFill>
                 <a:latin typeface="Inter"/>
               </a:defRPr>
+              <a:lnSpc>
+                <a:spcPct val="112000"/>
+              </a:lnSpc>
+              <a:spcAft>
+                <a:spcPts val="1200"/>
+              </a:spcAft>
+              <a:buNone/>
             </a:pPr>
             <a:r>
               <a:t>[Say what the data shows]</a:t>
@@ -4000,19 +4091,20 @@
           </a:bodyPr>
           <a:lstStyle/>
           <a:p>
-            <a:pPr>
-              <a:lnSpc>
-                <a:spcPct val="112000"/>
-              </a:lnSpc>
-              <a:spcAft>
-                <a:spcPts val="1200"/>
-              </a:spcAft>
+            <a:pPr algn="l" marL="0" indent="0">
               <a:defRPr sz="1900" b="0">
                 <a:solidFill>
                   <a:srgbClr val="030B20"/>
                 </a:solidFill>
                 <a:latin typeface="Inter"/>
               </a:defRPr>
+              <a:lnSpc>
+                <a:spcPct val="112000"/>
+              </a:lnSpc>
+              <a:spcAft>
+                <a:spcPts val="1200"/>
+              </a:spcAft>
+              <a:buNone/>
             </a:pPr>
             <a:r>
               <a:t>[Unit, population and time period]</a:t>
@@ -4044,19 +4136,20 @@
           </a:bodyPr>
           <a:lstStyle/>
           <a:p>
-            <a:pPr>
-              <a:lnSpc>
-                <a:spcPct val="112000"/>
-              </a:lnSpc>
-              <a:spcAft>
-                <a:spcPts val="1200"/>
-              </a:spcAft>
+            <a:pPr algn="l" marL="0" indent="0">
               <a:defRPr sz="2200" b="0">
                 <a:solidFill>
                   <a:srgbClr val="082952"/>
                 </a:solidFill>
                 <a:latin typeface="Inter"/>
               </a:defRPr>
+              <a:lnSpc>
+                <a:spcPct val="112000"/>
+              </a:lnSpc>
+              <a:spcAft>
+                <a:spcPts val="1200"/>
+              </a:spcAft>
+              <a:buNone/>
             </a:pPr>
             <a:r>
               <a:t>[Insert chart]</a:t>
@@ -4088,19 +4181,20 @@
           </a:bodyPr>
           <a:lstStyle/>
           <a:p>
-            <a:pPr>
-              <a:lnSpc>
-                <a:spcPct val="112000"/>
-              </a:lnSpc>
-              <a:spcAft>
-                <a:spcPts val="1200"/>
-              </a:spcAft>
+            <a:pPr algn="l" marL="0" indent="0">
               <a:defRPr sz="2700" b="1">
                 <a:solidFill>
                   <a:srgbClr val="082952"/>
                 </a:solidFill>
                 <a:latin typeface="Inter"/>
               </a:defRPr>
+              <a:lnSpc>
+                <a:spcPct val="112000"/>
+              </a:lnSpc>
+              <a:spcAft>
+                <a:spcPts val="1200"/>
+              </a:spcAft>
+              <a:buNone/>
             </a:pPr>
             <a:r>
               <a:t>[The takeaway]</a:t>
@@ -4132,19 +4226,20 @@
           </a:bodyPr>
           <a:lstStyle/>
           <a:p>
-            <a:pPr>
-              <a:lnSpc>
-                <a:spcPct val="112000"/>
-              </a:lnSpc>
-              <a:spcAft>
-                <a:spcPts val="1200"/>
-              </a:spcAft>
+            <a:pPr algn="l" marL="0" indent="0">
               <a:defRPr sz="2200" b="0">
                 <a:solidFill>
                   <a:srgbClr val="030B20"/>
                 </a:solidFill>
                 <a:latin typeface="Inter"/>
               </a:defRPr>
+              <a:lnSpc>
+                <a:spcPct val="112000"/>
+              </a:lnSpc>
+              <a:spcAft>
+                <a:spcPts val="1200"/>
+              </a:spcAft>
+              <a:buNone/>
             </a:pPr>
             <a:r>
               <a:t>[Explain the implication and the limits of the evidence.]</a:t>
@@ -4176,19 +4271,20 @@
           </a:bodyPr>
           <a:lstStyle/>
           <a:p>
-            <a:pPr>
-              <a:lnSpc>
-                <a:spcPct val="112000"/>
-              </a:lnSpc>
-              <a:spcAft>
-                <a:spcPts val="1200"/>
-              </a:spcAft>
+            <a:pPr algn="l" marL="0" indent="0">
               <a:defRPr sz="1200" b="0">
                 <a:solidFill>
                   <a:srgbClr val="030B20"/>
                 </a:solidFill>
                 <a:latin typeface="Inter"/>
               </a:defRPr>
+              <a:lnSpc>
+                <a:spcPct val="112000"/>
+              </a:lnSpc>
+              <a:spcAft>
+                <a:spcPts val="1200"/>
+              </a:spcAft>
+              <a:buNone/>
             </a:pPr>
             <a:r>
               <a:t>ILLUSTRATIVE DATA ONLY · Replace values and add a source before presenting.</a:t>
@@ -4210,7 +4306,7 @@
 </file>
 
 <file path=ppt/slideLayouts/slideLayout7.xml><?xml version="1.0" encoding="utf-8"?>
-<p:sldLayout xmlns:a="http://schemas.openxmlformats.org/drawingml/2006/main" xmlns:r="http://schemas.openxmlformats.org/officeDocument/2006/relationships" xmlns:p="http://schemas.openxmlformats.org/presentationml/2006/main" type="cust" preserve="1" showMasterSp="0">
+<p:sldLayout xmlns:a="http://schemas.openxmlformats.org/drawingml/2006/main" xmlns:r="http://schemas.openxmlformats.org/officeDocument/2006/relationships" xmlns:p="http://schemas.openxmlformats.org/presentationml/2006/main" type="cust" preserve="1" showMasterSp="1">
   <p:cSld name="Plan B / Table">
     <p:bg>
       <p:bgPr>
@@ -4256,19 +4352,20 @@
           </a:bodyPr>
           <a:lstStyle/>
           <a:p>
-            <a:pPr>
-              <a:lnSpc>
-                <a:spcPct val="112000"/>
-              </a:lnSpc>
-              <a:spcAft>
-                <a:spcPts val="1200"/>
-              </a:spcAft>
+            <a:pPr algn="l" marL="0" indent="0">
               <a:defRPr sz="1100" b="1">
                 <a:solidFill>
                   <a:srgbClr val="082952"/>
                 </a:solidFill>
                 <a:latin typeface="Inter"/>
               </a:defRPr>
+              <a:lnSpc>
+                <a:spcPct val="112000"/>
+              </a:lnSpc>
+              <a:spcAft>
+                <a:spcPts val="1200"/>
+              </a:spcAft>
+              <a:buNone/>
             </a:pPr>
             <a:r>
               <a:t>Plan B Foundation</a:t>
@@ -4298,19 +4395,20 @@
           </a:bodyPr>
           <a:lstStyle/>
           <a:p>
-            <a:pPr>
-              <a:lnSpc>
-                <a:spcPct val="112000"/>
-              </a:lnSpc>
-              <a:spcAft>
-                <a:spcPts val="1200"/>
-              </a:spcAft>
+            <a:pPr algn="l" marL="0" indent="0">
               <a:defRPr sz="1100" b="0">
                 <a:solidFill>
                   <a:srgbClr val="082952"/>
                 </a:solidFill>
                 <a:latin typeface="Inter"/>
               </a:defRPr>
+              <a:lnSpc>
+                <a:spcPct val="112000"/>
+              </a:lnSpc>
+              <a:spcAft>
+                <a:spcPts val="1200"/>
+              </a:spcAft>
+              <a:buNone/>
             </a:pPr>
             <a:r>
               <a:t>Civic Digital Commons</a:t>
@@ -4342,19 +4440,20 @@
           </a:bodyPr>
           <a:lstStyle/>
           <a:p>
-            <a:pPr>
-              <a:lnSpc>
-                <a:spcPct val="112000"/>
-              </a:lnSpc>
-              <a:spcAft>
-                <a:spcPts val="1200"/>
-              </a:spcAft>
+            <a:pPr algn="l" marL="0" indent="0">
               <a:defRPr sz="3600" b="1">
                 <a:solidFill>
                   <a:srgbClr val="082952"/>
                 </a:solidFill>
                 <a:latin typeface="Inter"/>
               </a:defRPr>
+              <a:lnSpc>
+                <a:spcPct val="112000"/>
+              </a:lnSpc>
+              <a:spcAft>
+                <a:spcPts val="1200"/>
+              </a:spcAft>
+              <a:buNone/>
             </a:pPr>
             <a:r>
               <a:t>[Make a decision easier]</a:t>
@@ -4386,19 +4485,20 @@
           </a:bodyPr>
           <a:lstStyle/>
           <a:p>
-            <a:pPr>
-              <a:lnSpc>
-                <a:spcPct val="112000"/>
-              </a:lnSpc>
-              <a:spcAft>
-                <a:spcPts val="1200"/>
-              </a:spcAft>
+            <a:pPr algn="l" marL="0" indent="0">
               <a:defRPr sz="1900" b="0">
                 <a:solidFill>
                   <a:srgbClr val="030B20"/>
                 </a:solidFill>
                 <a:latin typeface="Inter"/>
               </a:defRPr>
+              <a:lnSpc>
+                <a:spcPct val="112000"/>
+              </a:lnSpc>
+              <a:spcAft>
+                <a:spcPts val="1200"/>
+              </a:spcAft>
+              <a:buNone/>
             </a:pPr>
             <a:r>
               <a:t>[Explain what the comparison includes]</a:t>
@@ -4430,19 +4530,20 @@
           </a:bodyPr>
           <a:lstStyle/>
           <a:p>
-            <a:pPr>
-              <a:lnSpc>
-                <a:spcPct val="112000"/>
-              </a:lnSpc>
-              <a:spcAft>
-                <a:spcPts val="1200"/>
-              </a:spcAft>
+            <a:pPr algn="l" marL="0" indent="0">
               <a:defRPr sz="2200" b="0">
                 <a:solidFill>
                   <a:srgbClr val="082952"/>
                 </a:solidFill>
                 <a:latin typeface="Inter"/>
               </a:defRPr>
+              <a:lnSpc>
+                <a:spcPct val="112000"/>
+              </a:lnSpc>
+              <a:spcAft>
+                <a:spcPts val="1200"/>
+              </a:spcAft>
+              <a:buNone/>
             </a:pPr>
             <a:r>
               <a:t>[Insert table]</a:t>
@@ -4474,19 +4575,20 @@
           </a:bodyPr>
           <a:lstStyle/>
           <a:p>
-            <a:pPr>
-              <a:lnSpc>
-                <a:spcPct val="112000"/>
-              </a:lnSpc>
-              <a:spcAft>
-                <a:spcPts val="1200"/>
-              </a:spcAft>
+            <a:pPr algn="l" marL="0" indent="0">
               <a:defRPr sz="1300" b="0">
                 <a:solidFill>
                   <a:srgbClr val="030B20"/>
                 </a:solidFill>
                 <a:latin typeface="Inter"/>
               </a:defRPr>
+              <a:lnSpc>
+                <a:spcPct val="112000"/>
+              </a:lnSpc>
+              <a:spcAft>
+                <a:spcPts val="1200"/>
+              </a:spcAft>
+              <a:buNone/>
             </a:pPr>
             <a:r>
               <a:t>[Source / definitions / caveat]</a:t>
@@ -4508,7 +4610,7 @@
 </file>
 
 <file path=ppt/slideLayouts/slideLayout8.xml><?xml version="1.0" encoding="utf-8"?>
-<p:sldLayout xmlns:a="http://schemas.openxmlformats.org/drawingml/2006/main" xmlns:r="http://schemas.openxmlformats.org/officeDocument/2006/relationships" xmlns:p="http://schemas.openxmlformats.org/presentationml/2006/main" type="cust" preserve="1" showMasterSp="0">
+<p:sldLayout xmlns:a="http://schemas.openxmlformats.org/drawingml/2006/main" xmlns:r="http://schemas.openxmlformats.org/officeDocument/2006/relationships" xmlns:p="http://schemas.openxmlformats.org/presentationml/2006/main" type="cust" preserve="1" showMasterSp="1">
   <p:cSld name="Plan B / Quotation">
     <p:bg>
       <p:bgPr>
@@ -4554,19 +4656,20 @@
           </a:bodyPr>
           <a:lstStyle/>
           <a:p>
-            <a:pPr>
-              <a:lnSpc>
-                <a:spcPct val="112000"/>
-              </a:lnSpc>
-              <a:spcAft>
-                <a:spcPts val="1200"/>
-              </a:spcAft>
+            <a:pPr algn="l" marL="0" indent="0">
               <a:defRPr sz="1100" b="1">
                 <a:solidFill>
                   <a:srgbClr val="082952"/>
                 </a:solidFill>
                 <a:latin typeface="Inter"/>
               </a:defRPr>
+              <a:lnSpc>
+                <a:spcPct val="112000"/>
+              </a:lnSpc>
+              <a:spcAft>
+                <a:spcPts val="1200"/>
+              </a:spcAft>
+              <a:buNone/>
             </a:pPr>
             <a:r>
               <a:t>Plan B Foundation</a:t>
@@ -4596,19 +4699,20 @@
           </a:bodyPr>
           <a:lstStyle/>
           <a:p>
-            <a:pPr>
-              <a:lnSpc>
-                <a:spcPct val="112000"/>
-              </a:lnSpc>
-              <a:spcAft>
-                <a:spcPts val="1200"/>
-              </a:spcAft>
+            <a:pPr algn="l" marL="0" indent="0">
               <a:defRPr sz="1100" b="0">
                 <a:solidFill>
                   <a:srgbClr val="082952"/>
                 </a:solidFill>
                 <a:latin typeface="Inter"/>
               </a:defRPr>
+              <a:lnSpc>
+                <a:spcPct val="112000"/>
+              </a:lnSpc>
+              <a:spcAft>
+                <a:spcPts val="1200"/>
+              </a:spcAft>
+              <a:buNone/>
             </a:pPr>
             <a:r>
               <a:t>Civic Digital Commons</a:t>
@@ -4640,38 +4744,40 @@
           </a:bodyPr>
           <a:lstStyle/>
           <a:p>
-            <a:pPr>
-              <a:lnSpc>
-                <a:spcPct val="112000"/>
-              </a:lnSpc>
-              <a:spcAft>
-                <a:spcPts val="1200"/>
-              </a:spcAft>
+            <a:pPr algn="l" marL="0" indent="0">
               <a:defRPr sz="4200" b="1">
                 <a:solidFill>
                   <a:srgbClr val="082952"/>
                 </a:solidFill>
                 <a:latin typeface="Inter"/>
               </a:defRPr>
+              <a:lnSpc>
+                <a:spcPct val="112000"/>
+              </a:lnSpc>
+              <a:spcAft>
+                <a:spcPts val="1200"/>
+              </a:spcAft>
+              <a:buNone/>
             </a:pPr>
             <a:r>
               <a:t>[A short quotation,</a:t>
             </a:r>
           </a:p>
           <a:p>
-            <a:pPr>
-              <a:lnSpc>
-                <a:spcPct val="112000"/>
-              </a:lnSpc>
-              <a:spcAft>
-                <a:spcPts val="1200"/>
-              </a:spcAft>
+            <a:pPr algn="l" marL="0" indent="0">
               <a:defRPr sz="4200" b="1">
                 <a:solidFill>
                   <a:srgbClr val="082952"/>
                 </a:solidFill>
                 <a:latin typeface="Inter"/>
               </a:defRPr>
+              <a:lnSpc>
+                <a:spcPct val="112000"/>
+              </a:lnSpc>
+              <a:spcAft>
+                <a:spcPts val="1200"/>
+              </a:spcAft>
+              <a:buNone/>
             </a:pPr>
             <a:r>
               <a:t>accurately attributed.]</a:t>
@@ -4703,38 +4809,40 @@
           </a:bodyPr>
           <a:lstStyle/>
           <a:p>
-            <a:pPr>
-              <a:lnSpc>
-                <a:spcPct val="112000"/>
-              </a:lnSpc>
-              <a:spcAft>
-                <a:spcPts val="1200"/>
-              </a:spcAft>
+            <a:pPr algn="l" marL="0" indent="0">
               <a:defRPr sz="2000" b="0">
                 <a:solidFill>
                   <a:srgbClr val="030B20"/>
                 </a:solidFill>
                 <a:latin typeface="Inter"/>
               </a:defRPr>
+              <a:lnSpc>
+                <a:spcPct val="112000"/>
+              </a:lnSpc>
+              <a:spcAft>
+                <a:spcPts val="1200"/>
+              </a:spcAft>
+              <a:buNone/>
             </a:pPr>
             <a:r>
               <a:t>[Speaker / role]</a:t>
             </a:r>
           </a:p>
           <a:p>
-            <a:pPr>
-              <a:lnSpc>
-                <a:spcPct val="112000"/>
-              </a:lnSpc>
-              <a:spcAft>
-                <a:spcPts val="1200"/>
-              </a:spcAft>
+            <a:pPr algn="l" marL="0" indent="0">
               <a:defRPr sz="2000" b="0">
                 <a:solidFill>
                   <a:srgbClr val="030B20"/>
                 </a:solidFill>
                 <a:latin typeface="Inter"/>
               </a:defRPr>
+              <a:lnSpc>
+                <a:spcPct val="112000"/>
+              </a:lnSpc>
+              <a:spcAft>
+                <a:spcPts val="1200"/>
+              </a:spcAft>
+              <a:buNone/>
             </a:pPr>
             <a:r>
               <a:t>[Source · date]</a:t>
@@ -4799,7 +4907,7 @@
 </file>
 
 <file path=ppt/slideLayouts/slideLayout9.xml><?xml version="1.0" encoding="utf-8"?>
-<p:sldLayout xmlns:a="http://schemas.openxmlformats.org/drawingml/2006/main" xmlns:r="http://schemas.openxmlformats.org/officeDocument/2006/relationships" xmlns:p="http://schemas.openxmlformats.org/presentationml/2006/main" type="cust" preserve="1" showMasterSp="0">
+<p:sldLayout xmlns:a="http://schemas.openxmlformats.org/drawingml/2006/main" xmlns:r="http://schemas.openxmlformats.org/officeDocument/2006/relationships" xmlns:p="http://schemas.openxmlformats.org/presentationml/2006/main" type="cust" preserve="1" showMasterSp="1">
   <p:cSld name="Plan B / Next steps">
     <p:bg>
       <p:bgPr>
@@ -4845,19 +4953,20 @@
           </a:bodyPr>
           <a:lstStyle/>
           <a:p>
-            <a:pPr>
-              <a:lnSpc>
-                <a:spcPct val="112000"/>
-              </a:lnSpc>
-              <a:spcAft>
-                <a:spcPts val="1200"/>
-              </a:spcAft>
+            <a:pPr algn="l" marL="0" indent="0">
               <a:defRPr sz="1100" b="1">
                 <a:solidFill>
                   <a:srgbClr val="082952"/>
                 </a:solidFill>
                 <a:latin typeface="Inter"/>
               </a:defRPr>
+              <a:lnSpc>
+                <a:spcPct val="112000"/>
+              </a:lnSpc>
+              <a:spcAft>
+                <a:spcPts val="1200"/>
+              </a:spcAft>
+              <a:buNone/>
             </a:pPr>
             <a:r>
               <a:t>Plan B Foundation</a:t>
@@ -4887,19 +4996,20 @@
           </a:bodyPr>
           <a:lstStyle/>
           <a:p>
-            <a:pPr>
-              <a:lnSpc>
-                <a:spcPct val="112000"/>
-              </a:lnSpc>
-              <a:spcAft>
-                <a:spcPts val="1200"/>
-              </a:spcAft>
+            <a:pPr algn="l" marL="0" indent="0">
               <a:defRPr sz="1100" b="0">
                 <a:solidFill>
                   <a:srgbClr val="082952"/>
                 </a:solidFill>
                 <a:latin typeface="Inter"/>
               </a:defRPr>
+              <a:lnSpc>
+                <a:spcPct val="112000"/>
+              </a:lnSpc>
+              <a:spcAft>
+                <a:spcPts val="1200"/>
+              </a:spcAft>
+              <a:buNone/>
             </a:pPr>
             <a:r>
               <a:t>Civic Digital Commons</a:t>
@@ -4931,19 +5041,20 @@
           </a:bodyPr>
           <a:lstStyle/>
           <a:p>
-            <a:pPr>
-              <a:lnSpc>
-                <a:spcPct val="112000"/>
-              </a:lnSpc>
-              <a:spcAft>
-                <a:spcPts val="1200"/>
-              </a:spcAft>
+            <a:pPr algn="l" marL="0" indent="0">
               <a:defRPr sz="3600" b="1">
                 <a:solidFill>
                   <a:srgbClr val="082952"/>
                 </a:solidFill>
                 <a:latin typeface="Inter"/>
               </a:defRPr>
+              <a:lnSpc>
+                <a:spcPct val="112000"/>
+              </a:lnSpc>
+              <a:spcAft>
+                <a:spcPts val="1200"/>
+              </a:spcAft>
+              <a:buNone/>
             </a:pPr>
             <a:r>
               <a:t>[What happens next?]</a:t>
@@ -4975,19 +5086,20 @@
           </a:bodyPr>
           <a:lstStyle/>
           <a:p>
-            <a:pPr>
-              <a:lnSpc>
-                <a:spcPct val="112000"/>
-              </a:lnSpc>
-              <a:spcAft>
-                <a:spcPts val="1200"/>
-              </a:spcAft>
+            <a:pPr algn="l" marL="0" indent="0">
               <a:defRPr sz="2800" b="1">
                 <a:solidFill>
                   <a:srgbClr val="082952"/>
                 </a:solidFill>
                 <a:latin typeface="Inter"/>
               </a:defRPr>
+              <a:lnSpc>
+                <a:spcPct val="112000"/>
+              </a:lnSpc>
+              <a:spcAft>
+                <a:spcPts val="1200"/>
+              </a:spcAft>
+              <a:buNone/>
             </a:pPr>
             <a:r>
               <a:t>[Learn]</a:t>
@@ -5019,38 +5131,40 @@
           </a:bodyPr>
           <a:lstStyle/>
           <a:p>
-            <a:pPr>
-              <a:lnSpc>
-                <a:spcPct val="112000"/>
-              </a:lnSpc>
-              <a:spcAft>
-                <a:spcPts val="1200"/>
-              </a:spcAft>
+            <a:pPr algn="l" marL="0" indent="0">
               <a:defRPr sz="2300" b="0">
                 <a:solidFill>
                   <a:srgbClr val="030B20"/>
                 </a:solidFill>
                 <a:latin typeface="Inter"/>
               </a:defRPr>
+              <a:lnSpc>
+                <a:spcPct val="112000"/>
+              </a:lnSpc>
+              <a:spcAft>
+                <a:spcPts val="1200"/>
+              </a:spcAft>
+              <a:buNone/>
             </a:pPr>
             <a:r>
               <a:t>[Concrete next action]</a:t>
             </a:r>
           </a:p>
           <a:p>
-            <a:pPr>
-              <a:lnSpc>
-                <a:spcPct val="112000"/>
-              </a:lnSpc>
-              <a:spcAft>
-                <a:spcPts val="1200"/>
-              </a:spcAft>
+            <a:pPr algn="l" marL="0" indent="0">
               <a:defRPr sz="2300" b="0">
                 <a:solidFill>
                   <a:srgbClr val="030B20"/>
                 </a:solidFill>
                 <a:latin typeface="Inter"/>
               </a:defRPr>
+              <a:lnSpc>
+                <a:spcPct val="112000"/>
+              </a:lnSpc>
+              <a:spcAft>
+                <a:spcPts val="1200"/>
+              </a:spcAft>
+              <a:buNone/>
             </a:pPr>
             <a:r>
               <a:t>[Owner · timing]</a:t>
@@ -5082,19 +5196,20 @@
           </a:bodyPr>
           <a:lstStyle/>
           <a:p>
-            <a:pPr>
-              <a:lnSpc>
-                <a:spcPct val="112000"/>
-              </a:lnSpc>
-              <a:spcAft>
-                <a:spcPts val="1200"/>
-              </a:spcAft>
+            <a:pPr algn="l" marL="0" indent="0">
               <a:defRPr sz="2800" b="1">
                 <a:solidFill>
                   <a:srgbClr val="082952"/>
                 </a:solidFill>
                 <a:latin typeface="Inter"/>
               </a:defRPr>
+              <a:lnSpc>
+                <a:spcPct val="112000"/>
+              </a:lnSpc>
+              <a:spcAft>
+                <a:spcPts val="1200"/>
+              </a:spcAft>
+              <a:buNone/>
             </a:pPr>
             <a:r>
               <a:t>[Test]</a:t>
@@ -5126,38 +5241,40 @@
           </a:bodyPr>
           <a:lstStyle/>
           <a:p>
-            <a:pPr>
-              <a:lnSpc>
-                <a:spcPct val="112000"/>
-              </a:lnSpc>
-              <a:spcAft>
-                <a:spcPts val="1200"/>
-              </a:spcAft>
+            <a:pPr algn="l" marL="0" indent="0">
               <a:defRPr sz="2300" b="0">
                 <a:solidFill>
                   <a:srgbClr val="030B20"/>
                 </a:solidFill>
                 <a:latin typeface="Inter"/>
               </a:defRPr>
+              <a:lnSpc>
+                <a:spcPct val="112000"/>
+              </a:lnSpc>
+              <a:spcAft>
+                <a:spcPts val="1200"/>
+              </a:spcAft>
+              <a:buNone/>
             </a:pPr>
             <a:r>
               <a:t>[Concrete next action]</a:t>
             </a:r>
           </a:p>
           <a:p>
-            <a:pPr>
-              <a:lnSpc>
-                <a:spcPct val="112000"/>
-              </a:lnSpc>
-              <a:spcAft>
-                <a:spcPts val="1200"/>
-              </a:spcAft>
+            <a:pPr algn="l" marL="0" indent="0">
               <a:defRPr sz="2300" b="0">
                 <a:solidFill>
                   <a:srgbClr val="030B20"/>
                 </a:solidFill>
                 <a:latin typeface="Inter"/>
               </a:defRPr>
+              <a:lnSpc>
+                <a:spcPct val="112000"/>
+              </a:lnSpc>
+              <a:spcAft>
+                <a:spcPts val="1200"/>
+              </a:spcAft>
+              <a:buNone/>
             </a:pPr>
             <a:r>
               <a:t>[Owner · timing]</a:t>
@@ -5189,19 +5306,20 @@
           </a:bodyPr>
           <a:lstStyle/>
           <a:p>
-            <a:pPr>
-              <a:lnSpc>
-                <a:spcPct val="112000"/>
-              </a:lnSpc>
-              <a:spcAft>
-                <a:spcPts val="1200"/>
-              </a:spcAft>
+            <a:pPr algn="l" marL="0" indent="0">
               <a:defRPr sz="2800" b="1">
                 <a:solidFill>
                   <a:srgbClr val="082952"/>
                 </a:solidFill>
                 <a:latin typeface="Inter"/>
               </a:defRPr>
+              <a:lnSpc>
+                <a:spcPct val="112000"/>
+              </a:lnSpc>
+              <a:spcAft>
+                <a:spcPts val="1200"/>
+              </a:spcAft>
+              <a:buNone/>
             </a:pPr>
             <a:r>
               <a:t>[Contribute]</a:t>
@@ -5233,38 +5351,40 @@
           </a:bodyPr>
           <a:lstStyle/>
           <a:p>
-            <a:pPr>
-              <a:lnSpc>
-                <a:spcPct val="112000"/>
-              </a:lnSpc>
-              <a:spcAft>
-                <a:spcPts val="1200"/>
-              </a:spcAft>
+            <a:pPr algn="l" marL="0" indent="0">
               <a:defRPr sz="2300" b="0">
                 <a:solidFill>
                   <a:srgbClr val="030B20"/>
                 </a:solidFill>
                 <a:latin typeface="Inter"/>
               </a:defRPr>
+              <a:lnSpc>
+                <a:spcPct val="112000"/>
+              </a:lnSpc>
+              <a:spcAft>
+                <a:spcPts val="1200"/>
+              </a:spcAft>
+              <a:buNone/>
             </a:pPr>
             <a:r>
               <a:t>[Concrete next action]</a:t>
             </a:r>
           </a:p>
           <a:p>
-            <a:pPr>
-              <a:lnSpc>
-                <a:spcPct val="112000"/>
-              </a:lnSpc>
-              <a:spcAft>
-                <a:spcPts val="1200"/>
-              </a:spcAft>
+            <a:pPr algn="l" marL="0" indent="0">
               <a:defRPr sz="2300" b="0">
                 <a:solidFill>
                   <a:srgbClr val="030B20"/>
                 </a:solidFill>
                 <a:latin typeface="Inter"/>
               </a:defRPr>
+              <a:lnSpc>
+                <a:spcPct val="112000"/>
+              </a:lnSpc>
+              <a:spcAft>
+                <a:spcPts val="1200"/>
+              </a:spcAft>
+              <a:buNone/>
             </a:pPr>
             <a:r>
               <a:t>[Owner · timing]</a:t>
@@ -5296,19 +5416,20 @@
           </a:bodyPr>
           <a:lstStyle/>
           <a:p>
-            <a:pPr>
-              <a:lnSpc>
-                <a:spcPct val="112000"/>
-              </a:lnSpc>
-              <a:spcAft>
-                <a:spcPts val="1200"/>
-              </a:spcAft>
+            <a:pPr algn="l" marL="0" indent="0">
               <a:defRPr sz="1900" b="0">
                 <a:solidFill>
                   <a:srgbClr val="082952"/>
                 </a:solidFill>
                 <a:latin typeface="Inter"/>
               </a:defRPr>
+              <a:lnSpc>
+                <a:spcPct val="112000"/>
+              </a:lnSpc>
+              <a:spcAft>
+                <a:spcPts val="1200"/>
+              </a:spcAft>
+              <a:buNone/>
             </a:pPr>
             <a:r>
               <a:t>[Contact / project URL]</a:t>
@@ -5351,220 +5472,6 @@
           <a:chExt cx="0" cy="0"/>
         </a:xfrm>
       </p:grpSpPr>
-      <p:sp>
-        <p:nvSpPr>
-          <p:cNvPr id="2" name="Title Placeholder 1"/>
-          <p:cNvSpPr>
-            <a:spLocks noGrp="1"/>
-          </p:cNvSpPr>
-          <p:nvPr>
-            <p:ph type="title"/>
-          </p:nvPr>
-        </p:nvSpPr>
-        <p:spPr>
-          <a:xfrm>
-            <a:off x="457200" y="274638"/>
-            <a:ext cx="8229600" cy="1143000"/>
-          </a:xfrm>
-          <a:prstGeom prst="rect">
-            <a:avLst/>
-          </a:prstGeom>
-        </p:spPr>
-        <p:txBody>
-          <a:bodyPr vert="horz" lIns="91440" tIns="45720" rIns="91440" bIns="45720" rtlCol="0" anchor="ctr">
-            <a:normAutofit/>
-          </a:bodyPr>
-          <a:lstStyle/>
-          <a:p>
-            <a:r>
-              <a:rPr lang="en-US" smtClean="0"/>
-              <a:t>Click to edit Master title style</a:t>
-            </a:r>
-            <a:endParaRPr lang="en-US"/>
-          </a:p>
-        </p:txBody>
-      </p:sp>
-      <p:sp>
-        <p:nvSpPr>
-          <p:cNvPr id="3" name="Text Placeholder 2"/>
-          <p:cNvSpPr>
-            <a:spLocks noGrp="1"/>
-          </p:cNvSpPr>
-          <p:nvPr>
-            <p:ph type="body" idx="1"/>
-          </p:nvPr>
-        </p:nvSpPr>
-        <p:spPr>
-          <a:xfrm>
-            <a:off x="457200" y="1600200"/>
-            <a:ext cx="8229600" cy="4525963"/>
-          </a:xfrm>
-          <a:prstGeom prst="rect">
-            <a:avLst/>
-          </a:prstGeom>
-        </p:spPr>
-        <p:txBody>
-          <a:bodyPr vert="horz" lIns="91440" tIns="45720" rIns="91440" bIns="45720" rtlCol="0">
-            <a:normAutofit/>
-          </a:bodyPr>
-          <a:lstStyle/>
-          <a:p>
-            <a:pPr lvl="0"/>
-            <a:r>
-              <a:rPr lang="en-US" smtClean="0"/>
-              <a:t>Click to edit Master text styles</a:t>
-            </a:r>
-          </a:p>
-          <a:p>
-            <a:pPr lvl="1"/>
-            <a:r>
-              <a:rPr lang="en-US" smtClean="0"/>
-              <a:t>Second level</a:t>
-            </a:r>
-          </a:p>
-          <a:p>
-            <a:pPr lvl="2"/>
-            <a:r>
-              <a:rPr lang="en-US" smtClean="0"/>
-              <a:t>Third level</a:t>
-            </a:r>
-          </a:p>
-          <a:p>
-            <a:pPr lvl="3"/>
-            <a:r>
-              <a:rPr lang="en-US" smtClean="0"/>
-              <a:t>Fourth level</a:t>
-            </a:r>
-          </a:p>
-          <a:p>
-            <a:pPr lvl="4"/>
-            <a:r>
-              <a:rPr lang="en-US" smtClean="0"/>
-              <a:t>Fifth level</a:t>
-            </a:r>
-            <a:endParaRPr lang="en-US"/>
-          </a:p>
-        </p:txBody>
-      </p:sp>
-      <p:sp>
-        <p:nvSpPr>
-          <p:cNvPr id="4" name="Date Placeholder 3"/>
-          <p:cNvSpPr>
-            <a:spLocks noGrp="1"/>
-          </p:cNvSpPr>
-          <p:nvPr>
-            <p:ph type="dt" sz="half" idx="2"/>
-          </p:nvPr>
-        </p:nvSpPr>
-        <p:spPr>
-          <a:xfrm>
-            <a:off x="457200" y="6356350"/>
-            <a:ext cx="2133600" cy="365125"/>
-          </a:xfrm>
-          <a:prstGeom prst="rect">
-            <a:avLst/>
-          </a:prstGeom>
-        </p:spPr>
-        <p:txBody>
-          <a:bodyPr vert="horz" lIns="91440" tIns="45720" rIns="91440" bIns="45720" rtlCol="0" anchor="ctr"/>
-          <a:lstStyle>
-            <a:lvl1pPr algn="l">
-              <a:defRPr sz="1200">
-                <a:solidFill>
-                  <a:schemeClr val="tx1">
-                    <a:tint val="75000"/>
-                  </a:schemeClr>
-                </a:solidFill>
-              </a:defRPr>
-            </a:lvl1pPr>
-          </a:lstStyle>
-          <a:p>
-            <a:fld id="{5BCAD085-E8A6-8845-BD4E-CB4CCA059FC4}" type="datetimeFigureOut">
-              <a:rPr lang="en-US" smtClean="0"/>
-              <a:t>1/27/13</a:t>
-            </a:fld>
-            <a:endParaRPr lang="en-US"/>
-          </a:p>
-        </p:txBody>
-      </p:sp>
-      <p:sp>
-        <p:nvSpPr>
-          <p:cNvPr id="5" name="Footer Placeholder 4"/>
-          <p:cNvSpPr>
-            <a:spLocks noGrp="1"/>
-          </p:cNvSpPr>
-          <p:nvPr>
-            <p:ph type="ftr" sz="quarter" idx="3"/>
-          </p:nvPr>
-        </p:nvSpPr>
-        <p:spPr>
-          <a:xfrm>
-            <a:off x="3124200" y="6356350"/>
-            <a:ext cx="2895600" cy="365125"/>
-          </a:xfrm>
-          <a:prstGeom prst="rect">
-            <a:avLst/>
-          </a:prstGeom>
-        </p:spPr>
-        <p:txBody>
-          <a:bodyPr vert="horz" lIns="91440" tIns="45720" rIns="91440" bIns="45720" rtlCol="0" anchor="ctr"/>
-          <a:lstStyle>
-            <a:lvl1pPr algn="ctr">
-              <a:defRPr sz="1200">
-                <a:solidFill>
-                  <a:schemeClr val="tx1">
-                    <a:tint val="75000"/>
-                  </a:schemeClr>
-                </a:solidFill>
-              </a:defRPr>
-            </a:lvl1pPr>
-          </a:lstStyle>
-          <a:p>
-            <a:endParaRPr lang="en-US"/>
-          </a:p>
-        </p:txBody>
-      </p:sp>
-      <p:sp>
-        <p:nvSpPr>
-          <p:cNvPr id="6" name="Slide Number Placeholder 5"/>
-          <p:cNvSpPr>
-            <a:spLocks noGrp="1"/>
-          </p:cNvSpPr>
-          <p:nvPr>
-            <p:ph type="sldNum" sz="quarter" idx="4"/>
-          </p:nvPr>
-        </p:nvSpPr>
-        <p:spPr>
-          <a:xfrm>
-            <a:off x="6553200" y="6356350"/>
-            <a:ext cx="2133600" cy="365125"/>
-          </a:xfrm>
-          <a:prstGeom prst="rect">
-            <a:avLst/>
-          </a:prstGeom>
-        </p:spPr>
-        <p:txBody>
-          <a:bodyPr vert="horz" lIns="91440" tIns="45720" rIns="91440" bIns="45720" rtlCol="0" anchor="ctr"/>
-          <a:lstStyle>
-            <a:lvl1pPr algn="r">
-              <a:defRPr sz="1200">
-                <a:solidFill>
-                  <a:schemeClr val="tx1">
-                    <a:tint val="75000"/>
-                  </a:schemeClr>
-                </a:solidFill>
-              </a:defRPr>
-            </a:lvl1pPr>
-          </a:lstStyle>
-          <a:p>
-            <a:fld id="{C1FF6DA9-008F-8B48-92A6-B652298478BF}" type="slidenum">
-              <a:rPr lang="en-US" smtClean="0"/>
-              <a:t>‹#›</a:t>
-            </a:fld>
-            <a:endParaRPr lang="en-US"/>
-          </a:p>
-        </p:txBody>
-      </p:sp>
     </p:spTree>
     <p:extLst>
       <p:ext uri="{BB962C8B-B14F-4D97-AF65-F5344CB8AC3E}">
@@ -5840,7 +5747,7 @@
 </file>
 
 <file path=ppt/slides/slide1.xml><?xml version="1.0" encoding="utf-8"?>
-<p:sld xmlns:a="http://schemas.openxmlformats.org/drawingml/2006/main" xmlns:p="http://schemas.openxmlformats.org/presentationml/2006/main" xmlns:r="http://schemas.openxmlformats.org/officeDocument/2006/relationships" showMasterSp="0">
+<p:sld xmlns:a="http://schemas.openxmlformats.org/drawingml/2006/main" xmlns:p="http://schemas.openxmlformats.org/presentationml/2006/main" xmlns:r="http://schemas.openxmlformats.org/officeDocument/2006/relationships" showMasterSp="1">
   <p:cSld>
     <p:bg>
       <p:bgPr>
@@ -5881,38 +5788,40 @@
           </a:bodyPr>
           <a:lstStyle/>
           <a:p>
-            <a:pPr>
-              <a:lnSpc>
-                <a:spcPct val="112000"/>
-              </a:lnSpc>
-              <a:spcAft>
-                <a:spcPts val="1200"/>
-              </a:spcAft>
+            <a:pPr algn="l" marL="0" indent="0">
               <a:defRPr sz="4800" b="1">
                 <a:solidFill>
                   <a:srgbClr val="082952"/>
                 </a:solidFill>
                 <a:latin typeface="Inter"/>
               </a:defRPr>
+              <a:lnSpc>
+                <a:spcPct val="112000"/>
+              </a:lnSpc>
+              <a:spcAft>
+                <a:spcPts val="1200"/>
+              </a:spcAft>
+              <a:buNone/>
             </a:pPr>
             <a:r>
               <a:t>[Presentation</a:t>
             </a:r>
           </a:p>
           <a:p>
-            <a:pPr>
-              <a:lnSpc>
-                <a:spcPct val="112000"/>
-              </a:lnSpc>
-              <a:spcAft>
-                <a:spcPts val="1200"/>
-              </a:spcAft>
+            <a:pPr algn="l" marL="0" indent="0">
               <a:defRPr sz="4800" b="1">
                 <a:solidFill>
                   <a:srgbClr val="082952"/>
                 </a:solidFill>
                 <a:latin typeface="Inter"/>
               </a:defRPr>
+              <a:lnSpc>
+                <a:spcPct val="112000"/>
+              </a:lnSpc>
+              <a:spcAft>
+                <a:spcPts val="1200"/>
+              </a:spcAft>
+              <a:buNone/>
             </a:pPr>
             <a:r>
               <a:t>title]</a:t>
@@ -5944,19 +5853,20 @@
           </a:bodyPr>
           <a:lstStyle/>
           <a:p>
-            <a:pPr>
-              <a:lnSpc>
-                <a:spcPct val="112000"/>
-              </a:lnSpc>
-              <a:spcAft>
-                <a:spcPts val="1200"/>
-              </a:spcAft>
+            <a:pPr algn="l" marL="0" indent="0">
               <a:defRPr sz="2400" b="0">
                 <a:solidFill>
                   <a:srgbClr val="030B20"/>
                 </a:solidFill>
                 <a:latin typeface="Inter"/>
               </a:defRPr>
+              <a:lnSpc>
+                <a:spcPct val="112000"/>
+              </a:lnSpc>
+              <a:spcAft>
+                <a:spcPts val="1200"/>
+              </a:spcAft>
+              <a:buNone/>
             </a:pPr>
             <a:r>
               <a:t>[A clear sentence about the civic purpose]</a:t>
@@ -5988,38 +5898,40 @@
           </a:bodyPr>
           <a:lstStyle/>
           <a:p>
-            <a:pPr>
-              <a:lnSpc>
-                <a:spcPct val="112000"/>
-              </a:lnSpc>
-              <a:spcAft>
-                <a:spcPts val="1200"/>
-              </a:spcAft>
+            <a:pPr algn="l" marL="0" indent="0">
               <a:defRPr sz="1700" b="0">
                 <a:solidFill>
                   <a:srgbClr val="030B20"/>
                 </a:solidFill>
                 <a:latin typeface="Inter"/>
               </a:defRPr>
+              <a:lnSpc>
+                <a:spcPct val="112000"/>
+              </a:lnSpc>
+              <a:spcAft>
+                <a:spcPts val="1200"/>
+              </a:spcAft>
+              <a:buNone/>
             </a:pPr>
             <a:r>
               <a:t>[Presenter / team]</a:t>
             </a:r>
           </a:p>
           <a:p>
-            <a:pPr>
-              <a:lnSpc>
-                <a:spcPct val="112000"/>
-              </a:lnSpc>
-              <a:spcAft>
-                <a:spcPts val="1200"/>
-              </a:spcAft>
+            <a:pPr algn="l" marL="0" indent="0">
               <a:defRPr sz="1700" b="0">
                 <a:solidFill>
                   <a:srgbClr val="030B20"/>
                 </a:solidFill>
                 <a:latin typeface="Inter"/>
               </a:defRPr>
+              <a:lnSpc>
+                <a:spcPct val="112000"/>
+              </a:lnSpc>
+              <a:spcAft>
+                <a:spcPts val="1200"/>
+              </a:spcAft>
+              <a:buNone/>
             </a:pPr>
             <a:r>
               <a:t>[Event · date]</a:t>
@@ -6036,7 +5948,7 @@
 </file>
 
 <file path=ppt/slides/slide10.xml><?xml version="1.0" encoding="utf-8"?>
-<p:sld xmlns:a="http://schemas.openxmlformats.org/drawingml/2006/main" xmlns:p="http://schemas.openxmlformats.org/presentationml/2006/main" xmlns:r="http://schemas.openxmlformats.org/officeDocument/2006/relationships" showMasterSp="0">
+<p:sld xmlns:a="http://schemas.openxmlformats.org/drawingml/2006/main" xmlns:p="http://schemas.openxmlformats.org/presentationml/2006/main" xmlns:r="http://schemas.openxmlformats.org/officeDocument/2006/relationships" showMasterSp="1">
   <p:cSld>
     <p:bg>
       <p:bgPr>
@@ -6077,19 +5989,20 @@
           </a:bodyPr>
           <a:lstStyle/>
           <a:p>
-            <a:pPr>
-              <a:lnSpc>
-                <a:spcPct val="112000"/>
-              </a:lnSpc>
-              <a:spcAft>
-                <a:spcPts val="1200"/>
-              </a:spcAft>
+            <a:pPr algn="l" marL="0" indent="0">
               <a:defRPr sz="3600" b="1">
                 <a:solidFill>
                   <a:srgbClr val="082952"/>
                 </a:solidFill>
                 <a:latin typeface="Inter"/>
               </a:defRPr>
+              <a:lnSpc>
+                <a:spcPct val="112000"/>
+              </a:lnSpc>
+              <a:spcAft>
+                <a:spcPts val="1200"/>
+              </a:spcAft>
+              <a:buNone/>
             </a:pPr>
             <a:r>
               <a:t>Make it yours. Keep it Plan B.</a:t>
@@ -6121,19 +6034,20 @@
           </a:bodyPr>
           <a:lstStyle/>
           <a:p>
-            <a:pPr>
-              <a:lnSpc>
-                <a:spcPct val="112000"/>
-              </a:lnSpc>
-              <a:spcAft>
-                <a:spcPts val="1200"/>
-              </a:spcAft>
+            <a:pPr algn="l" marL="0" indent="0">
               <a:defRPr sz="1900" b="0">
                 <a:solidFill>
                   <a:srgbClr val="030B20"/>
                 </a:solidFill>
                 <a:latin typeface="Inter"/>
               </a:defRPr>
+              <a:lnSpc>
+                <a:spcPct val="112000"/>
+              </a:lnSpc>
+              <a:spcAft>
+                <a:spcPts val="1200"/>
+              </a:spcAft>
+              <a:buNone/>
             </a:pPr>
             <a:r>
               <a:t>Delete this guidance slide before presenting.</a:t>
@@ -6165,38 +6079,40 @@
           </a:bodyPr>
           <a:lstStyle/>
           <a:p>
-            <a:pPr>
-              <a:lnSpc>
-                <a:spcPct val="112000"/>
-              </a:lnSpc>
-              <a:spcAft>
-                <a:spcPts val="1200"/>
-              </a:spcAft>
+            <a:pPr algn="l" marL="0" indent="0">
               <a:defRPr sz="2300" b="0">
                 <a:solidFill>
                   <a:srgbClr val="030B20"/>
                 </a:solidFill>
                 <a:latin typeface="Inter"/>
               </a:defRPr>
+              <a:lnSpc>
+                <a:spcPct val="112000"/>
+              </a:lnSpc>
+              <a:spcAft>
+                <a:spcPts val="1200"/>
+              </a:spcAft>
+              <a:buNone/>
             </a:pPr>
             <a:r>
               <a:t>Use the layouts</a:t>
             </a:r>
           </a:p>
           <a:p>
-            <a:pPr>
-              <a:lnSpc>
-                <a:spcPct val="112000"/>
-              </a:lnSpc>
-              <a:spcAft>
-                <a:spcPts val="1200"/>
-              </a:spcAft>
+            <a:pPr algn="l" marL="0" indent="0">
               <a:defRPr sz="2300" b="0">
                 <a:solidFill>
                   <a:srgbClr val="030B20"/>
                 </a:solidFill>
                 <a:latin typeface="Inter"/>
               </a:defRPr>
+              <a:lnSpc>
+                <a:spcPct val="112000"/>
+              </a:lnSpc>
+              <a:spcAft>
+                <a:spcPts val="1200"/>
+              </a:spcAft>
+              <a:buNone/>
             </a:pPr>
             <a:r>
               <a:t>Install Inter, then choose Home → New Slide. Replace bracketed prompts. Duplicate the chart or table example to retain its styling.</a:t>
@@ -6228,38 +6144,40 @@
           </a:bodyPr>
           <a:lstStyle/>
           <a:p>
-            <a:pPr>
-              <a:lnSpc>
-                <a:spcPct val="112000"/>
-              </a:lnSpc>
-              <a:spcAft>
-                <a:spcPts val="1200"/>
-              </a:spcAft>
+            <a:pPr algn="l" marL="0" indent="0">
               <a:defRPr sz="2300" b="0">
                 <a:solidFill>
                   <a:srgbClr val="030B20"/>
                 </a:solidFill>
                 <a:latin typeface="Inter"/>
               </a:defRPr>
+              <a:lnSpc>
+                <a:spcPct val="112000"/>
+              </a:lnSpc>
+              <a:spcAft>
+                <a:spcPts val="1200"/>
+              </a:spcAft>
+              <a:buNone/>
             </a:pPr>
             <a:r>
               <a:t>Keep it clear</a:t>
             </a:r>
           </a:p>
           <a:p>
-            <a:pPr>
-              <a:lnSpc>
-                <a:spcPct val="112000"/>
-              </a:lnSpc>
-              <a:spcAft>
-                <a:spcPts val="1200"/>
-              </a:spcAft>
+            <a:pPr algn="l" marL="0" indent="0">
               <a:defRPr sz="2300" b="0">
                 <a:solidFill>
                   <a:srgbClr val="030B20"/>
                 </a:solidFill>
                 <a:latin typeface="Inter"/>
               </a:defRPr>
+              <a:lnSpc>
+                <a:spcPct val="112000"/>
+              </a:lnSpc>
+              <a:spcAft>
+                <a:spcPts val="1200"/>
+              </a:spcAft>
+              <a:buNone/>
             </a:pPr>
             <a:r>
               <a:t>One idea per slide. Use navy and warm white. Choose gold or a small gradient as the exceptional signal. Aim for 20pt or larger body text.</a:t>
@@ -6276,7 +6194,7 @@
 </file>
 
 <file path=ppt/slides/slide2.xml><?xml version="1.0" encoding="utf-8"?>
-<p:sld xmlns:a="http://schemas.openxmlformats.org/drawingml/2006/main" xmlns:p="http://schemas.openxmlformats.org/presentationml/2006/main" xmlns:r="http://schemas.openxmlformats.org/officeDocument/2006/relationships" showMasterSp="0">
+<p:sld xmlns:a="http://schemas.openxmlformats.org/drawingml/2006/main" xmlns:p="http://schemas.openxmlformats.org/presentationml/2006/main" xmlns:r="http://schemas.openxmlformats.org/officeDocument/2006/relationships" showMasterSp="1">
   <p:cSld>
     <p:bg>
       <p:bgPr>
@@ -6317,19 +6235,20 @@
           </a:bodyPr>
           <a:lstStyle/>
           <a:p>
-            <a:pPr>
-              <a:lnSpc>
-                <a:spcPct val="112000"/>
-              </a:lnSpc>
-              <a:spcAft>
-                <a:spcPts val="1200"/>
-              </a:spcAft>
+            <a:pPr algn="l" marL="0" indent="0">
               <a:defRPr sz="4800" b="1">
                 <a:solidFill>
                   <a:srgbClr val="FFFEFA"/>
                 </a:solidFill>
                 <a:latin typeface="Inter"/>
               </a:defRPr>
+              <a:lnSpc>
+                <a:spcPct val="112000"/>
+              </a:lnSpc>
+              <a:spcAft>
+                <a:spcPts val="1200"/>
+              </a:spcAft>
+              <a:buNone/>
             </a:pPr>
             <a:r>
               <a:t>[Section title]</a:t>
@@ -6361,19 +6280,20 @@
           </a:bodyPr>
           <a:lstStyle/>
           <a:p>
-            <a:pPr>
-              <a:lnSpc>
-                <a:spcPct val="112000"/>
-              </a:lnSpc>
-              <a:spcAft>
-                <a:spcPts val="1200"/>
-              </a:spcAft>
+            <a:pPr algn="l" marL="0" indent="0">
               <a:defRPr sz="2500" b="0">
                 <a:solidFill>
                   <a:srgbClr val="FFFEFA"/>
                 </a:solidFill>
                 <a:latin typeface="Inter"/>
               </a:defRPr>
+              <a:lnSpc>
+                <a:spcPct val="112000"/>
+              </a:lnSpc>
+              <a:spcAft>
+                <a:spcPts val="1200"/>
+              </a:spcAft>
+              <a:buNone/>
             </a:pPr>
             <a:r>
               <a:t>[One sentence that sets the direction]</a:t>
@@ -6390,7 +6310,7 @@
 </file>
 
 <file path=ppt/slides/slide3.xml><?xml version="1.0" encoding="utf-8"?>
-<p:sld xmlns:a="http://schemas.openxmlformats.org/drawingml/2006/main" xmlns:p="http://schemas.openxmlformats.org/presentationml/2006/main" xmlns:r="http://schemas.openxmlformats.org/officeDocument/2006/relationships" showMasterSp="0">
+<p:sld xmlns:a="http://schemas.openxmlformats.org/drawingml/2006/main" xmlns:p="http://schemas.openxmlformats.org/presentationml/2006/main" xmlns:r="http://schemas.openxmlformats.org/officeDocument/2006/relationships" showMasterSp="1">
   <p:cSld>
     <p:bg>
       <p:bgPr>
@@ -6431,19 +6351,20 @@
           </a:bodyPr>
           <a:lstStyle/>
           <a:p>
-            <a:pPr>
-              <a:lnSpc>
-                <a:spcPct val="112000"/>
-              </a:lnSpc>
-              <a:spcAft>
-                <a:spcPts val="1200"/>
-              </a:spcAft>
+            <a:pPr algn="l" marL="0" indent="0">
               <a:defRPr sz="3600" b="1">
                 <a:solidFill>
                   <a:srgbClr val="082952"/>
                 </a:solidFill>
                 <a:latin typeface="Inter"/>
               </a:defRPr>
+              <a:lnSpc>
+                <a:spcPct val="112000"/>
+              </a:lnSpc>
+              <a:spcAft>
+                <a:spcPts val="1200"/>
+              </a:spcAft>
+              <a:buNone/>
             </a:pPr>
             <a:r>
               <a:t>[Lead with the point]</a:t>
@@ -6475,19 +6396,20 @@
           </a:bodyPr>
           <a:lstStyle/>
           <a:p>
-            <a:pPr>
-              <a:lnSpc>
-                <a:spcPct val="112000"/>
-              </a:lnSpc>
-              <a:spcAft>
-                <a:spcPts val="1200"/>
-              </a:spcAft>
+            <a:pPr algn="l" marL="0" indent="0">
               <a:defRPr sz="1900" b="0">
                 <a:solidFill>
                   <a:srgbClr val="030B20"/>
                 </a:solidFill>
                 <a:latin typeface="Inter"/>
               </a:defRPr>
+              <a:lnSpc>
+                <a:spcPct val="112000"/>
+              </a:lnSpc>
+              <a:spcAft>
+                <a:spcPts val="1200"/>
+              </a:spcAft>
+              <a:buNone/>
             </a:pPr>
             <a:r>
               <a:t>[Explain why this matters to the audience]</a:t>
@@ -6519,57 +6441,60 @@
           </a:bodyPr>
           <a:lstStyle/>
           <a:p>
-            <a:pPr>
-              <a:lnSpc>
-                <a:spcPct val="112000"/>
-              </a:lnSpc>
-              <a:spcAft>
-                <a:spcPts val="1200"/>
-              </a:spcAft>
+            <a:pPr algn="l" marL="0" indent="0">
               <a:defRPr sz="2700" b="0">
                 <a:solidFill>
                   <a:srgbClr val="030B20"/>
                 </a:solidFill>
                 <a:latin typeface="Inter"/>
               </a:defRPr>
+              <a:lnSpc>
+                <a:spcPct val="112000"/>
+              </a:lnSpc>
+              <a:spcAft>
+                <a:spcPts val="1200"/>
+              </a:spcAft>
+              <a:buNone/>
             </a:pPr>
             <a:r>
               <a:t>[First idea — one concise sentence]</a:t>
             </a:r>
           </a:p>
           <a:p>
-            <a:pPr>
-              <a:lnSpc>
-                <a:spcPct val="112000"/>
-              </a:lnSpc>
-              <a:spcAft>
-                <a:spcPts val="1200"/>
-              </a:spcAft>
+            <a:pPr algn="l" marL="0" indent="0">
               <a:defRPr sz="2700" b="0">
                 <a:solidFill>
                   <a:srgbClr val="030B20"/>
                 </a:solidFill>
                 <a:latin typeface="Inter"/>
               </a:defRPr>
+              <a:lnSpc>
+                <a:spcPct val="112000"/>
+              </a:lnSpc>
+              <a:spcAft>
+                <a:spcPts val="1200"/>
+              </a:spcAft>
+              <a:buNone/>
             </a:pPr>
             <a:r>
               <a:t>[Second idea — one concise sentence]</a:t>
             </a:r>
           </a:p>
           <a:p>
-            <a:pPr>
-              <a:lnSpc>
-                <a:spcPct val="112000"/>
-              </a:lnSpc>
-              <a:spcAft>
-                <a:spcPts val="1200"/>
-              </a:spcAft>
+            <a:pPr algn="l" marL="0" indent="0">
               <a:defRPr sz="2700" b="0">
                 <a:solidFill>
                   <a:srgbClr val="030B20"/>
                 </a:solidFill>
                 <a:latin typeface="Inter"/>
               </a:defRPr>
+              <a:lnSpc>
+                <a:spcPct val="112000"/>
+              </a:lnSpc>
+              <a:spcAft>
+                <a:spcPts val="1200"/>
+              </a:spcAft>
+              <a:buNone/>
             </a:pPr>
             <a:r>
               <a:t>[Third idea — one concise sentence]</a:t>
@@ -6586,7 +6511,7 @@
 </file>
 
 <file path=ppt/slides/slide4.xml><?xml version="1.0" encoding="utf-8"?>
-<p:sld xmlns:a="http://schemas.openxmlformats.org/drawingml/2006/main" xmlns:p="http://schemas.openxmlformats.org/presentationml/2006/main" xmlns:r="http://schemas.openxmlformats.org/officeDocument/2006/relationships" showMasterSp="0">
+<p:sld xmlns:a="http://schemas.openxmlformats.org/drawingml/2006/main" xmlns:p="http://schemas.openxmlformats.org/presentationml/2006/main" xmlns:r="http://schemas.openxmlformats.org/officeDocument/2006/relationships" showMasterSp="1">
   <p:cSld>
     <p:bg>
       <p:bgPr>
@@ -6627,19 +6552,20 @@
           </a:bodyPr>
           <a:lstStyle/>
           <a:p>
-            <a:pPr>
-              <a:lnSpc>
-                <a:spcPct val="112000"/>
-              </a:lnSpc>
-              <a:spcAft>
-                <a:spcPts val="1200"/>
-              </a:spcAft>
+            <a:pPr algn="l" marL="0" indent="0">
               <a:defRPr sz="3600" b="1">
                 <a:solidFill>
                   <a:srgbClr val="082952"/>
                 </a:solidFill>
                 <a:latin typeface="Inter"/>
               </a:defRPr>
+              <a:lnSpc>
+                <a:spcPct val="112000"/>
+              </a:lnSpc>
+              <a:spcAft>
+                <a:spcPts val="1200"/>
+              </a:spcAft>
+              <a:buNone/>
             </a:pPr>
             <a:r>
               <a:t>[Compare two ideas]</a:t>
@@ -6671,19 +6597,20 @@
           </a:bodyPr>
           <a:lstStyle/>
           <a:p>
-            <a:pPr>
-              <a:lnSpc>
-                <a:spcPct val="112000"/>
-              </a:lnSpc>
-              <a:spcAft>
-                <a:spcPts val="1200"/>
-              </a:spcAft>
+            <a:pPr algn="l" marL="0" indent="0">
               <a:defRPr sz="2600" b="1">
                 <a:solidFill>
                   <a:srgbClr val="082952"/>
                 </a:solidFill>
                 <a:latin typeface="Inter"/>
               </a:defRPr>
+              <a:lnSpc>
+                <a:spcPct val="112000"/>
+              </a:lnSpc>
+              <a:spcAft>
+                <a:spcPts val="1200"/>
+              </a:spcAft>
+              <a:buNone/>
             </a:pPr>
             <a:r>
               <a:t>[First perspective]</a:t>
@@ -6715,19 +6642,20 @@
           </a:bodyPr>
           <a:lstStyle/>
           <a:p>
-            <a:pPr>
-              <a:lnSpc>
-                <a:spcPct val="112000"/>
-              </a:lnSpc>
-              <a:spcAft>
-                <a:spcPts val="1200"/>
-              </a:spcAft>
+            <a:pPr algn="l" marL="0" indent="0">
               <a:defRPr sz="2400" b="0">
                 <a:solidFill>
                   <a:srgbClr val="030B20"/>
                 </a:solidFill>
                 <a:latin typeface="Inter"/>
               </a:defRPr>
+              <a:lnSpc>
+                <a:spcPct val="112000"/>
+              </a:lnSpc>
+              <a:spcAft>
+                <a:spcPts val="1200"/>
+              </a:spcAft>
+              <a:buNone/>
             </a:pPr>
             <a:r>
               <a:t>[Explain the idea in 40 words or fewer. Keep sentences concrete and easy to read.]</a:t>
@@ -6759,19 +6687,20 @@
           </a:bodyPr>
           <a:lstStyle/>
           <a:p>
-            <a:pPr>
-              <a:lnSpc>
-                <a:spcPct val="112000"/>
-              </a:lnSpc>
-              <a:spcAft>
-                <a:spcPts val="1200"/>
-              </a:spcAft>
+            <a:pPr algn="l" marL="0" indent="0">
               <a:defRPr sz="2600" b="1">
                 <a:solidFill>
                   <a:srgbClr val="082952"/>
                 </a:solidFill>
                 <a:latin typeface="Inter"/>
               </a:defRPr>
+              <a:lnSpc>
+                <a:spcPct val="112000"/>
+              </a:lnSpc>
+              <a:spcAft>
+                <a:spcPts val="1200"/>
+              </a:spcAft>
+              <a:buNone/>
             </a:pPr>
             <a:r>
               <a:t>[Second perspective]</a:t>
@@ -6803,19 +6732,20 @@
           </a:bodyPr>
           <a:lstStyle/>
           <a:p>
-            <a:pPr>
-              <a:lnSpc>
-                <a:spcPct val="112000"/>
-              </a:lnSpc>
-              <a:spcAft>
-                <a:spcPts val="1200"/>
-              </a:spcAft>
+            <a:pPr algn="l" marL="0" indent="0">
               <a:defRPr sz="2400" b="0">
                 <a:solidFill>
                   <a:srgbClr val="030B20"/>
                 </a:solidFill>
                 <a:latin typeface="Inter"/>
               </a:defRPr>
+              <a:lnSpc>
+                <a:spcPct val="112000"/>
+              </a:lnSpc>
+              <a:spcAft>
+                <a:spcPts val="1200"/>
+              </a:spcAft>
+              <a:buNone/>
             </a:pPr>
             <a:r>
               <a:t>[Explain the difference or consequence. Use the same level of detail as the first column.]</a:t>
@@ -6832,7 +6762,7 @@
 </file>
 
 <file path=ppt/slides/slide5.xml><?xml version="1.0" encoding="utf-8"?>
-<p:sld xmlns:a="http://schemas.openxmlformats.org/drawingml/2006/main" xmlns:p="http://schemas.openxmlformats.org/presentationml/2006/main" xmlns:r="http://schemas.openxmlformats.org/officeDocument/2006/relationships" showMasterSp="0">
+<p:sld xmlns:a="http://schemas.openxmlformats.org/drawingml/2006/main" xmlns:p="http://schemas.openxmlformats.org/presentationml/2006/main" xmlns:r="http://schemas.openxmlformats.org/officeDocument/2006/relationships" showMasterSp="1">
   <p:cSld>
     <p:bg>
       <p:bgPr>
@@ -6873,19 +6803,20 @@
           </a:bodyPr>
           <a:lstStyle/>
           <a:p>
-            <a:pPr>
-              <a:lnSpc>
-                <a:spcPct val="112000"/>
-              </a:lnSpc>
-              <a:spcAft>
-                <a:spcPts val="1200"/>
-              </a:spcAft>
+            <a:pPr algn="l" marL="0" indent="0">
               <a:defRPr sz="3600" b="1">
                 <a:solidFill>
                   <a:srgbClr val="082952"/>
                 </a:solidFill>
                 <a:latin typeface="Inter"/>
               </a:defRPr>
+              <a:lnSpc>
+                <a:spcPct val="112000"/>
+              </a:lnSpc>
+              <a:spcAft>
+                <a:spcPts val="1200"/>
+              </a:spcAft>
+              <a:buNone/>
             </a:pPr>
             <a:r>
               <a:t>[Make the place visible]</a:t>
@@ -6895,7 +6826,7 @@
       </p:sp>
       <p:sp>
         <p:nvSpPr>
-          <p:cNvPr id="6" name="Placeholder 1"/>
+          <p:cNvPr id="7" name="Placeholder 1"/>
           <p:cNvSpPr txBox="1"/>
           <p:nvPr>
             <p:ph type="pic" idx="1"/>
@@ -6917,19 +6848,20 @@
           </a:bodyPr>
           <a:lstStyle/>
           <a:p>
-            <a:pPr>
-              <a:lnSpc>
-                <a:spcPct val="112000"/>
-              </a:lnSpc>
-              <a:spcAft>
-                <a:spcPts val="1200"/>
-              </a:spcAft>
+            <a:pPr algn="l" marL="0" indent="0">
               <a:defRPr sz="2600" b="1">
                 <a:solidFill>
                   <a:srgbClr val="082952"/>
                 </a:solidFill>
                 <a:latin typeface="Inter"/>
               </a:defRPr>
+              <a:lnSpc>
+                <a:spcPct val="112000"/>
+              </a:lnSpc>
+              <a:spcAft>
+                <a:spcPts val="1200"/>
+              </a:spcAft>
+              <a:buNone/>
             </a:pPr>
             <a:r>
               <a:t>[Insert a documentary photograph]</a:t>
@@ -6939,7 +6871,7 @@
       </p:sp>
       <p:sp>
         <p:nvSpPr>
-          <p:cNvPr id="7" name="Placeholder 2"/>
+          <p:cNvPr id="8" name="Placeholder 2"/>
           <p:cNvSpPr txBox="1"/>
           <p:nvPr>
             <p:ph type="body" idx="2"/>
@@ -6961,19 +6893,20 @@
           </a:bodyPr>
           <a:lstStyle/>
           <a:p>
-            <a:pPr>
-              <a:lnSpc>
-                <a:spcPct val="112000"/>
-              </a:lnSpc>
-              <a:spcAft>
-                <a:spcPts val="1200"/>
-              </a:spcAft>
+            <a:pPr algn="l" marL="0" indent="0">
               <a:defRPr sz="2700" b="1">
                 <a:solidFill>
                   <a:srgbClr val="082952"/>
                 </a:solidFill>
                 <a:latin typeface="Inter"/>
               </a:defRPr>
+              <a:lnSpc>
+                <a:spcPct val="112000"/>
+              </a:lnSpc>
+              <a:spcAft>
+                <a:spcPts val="1200"/>
+              </a:spcAft>
+              <a:buNone/>
             </a:pPr>
             <a:r>
               <a:t>[What should we notice?]</a:t>
@@ -6983,7 +6916,7 @@
       </p:sp>
       <p:sp>
         <p:nvSpPr>
-          <p:cNvPr id="8" name="Placeholder 3"/>
+          <p:cNvPr id="9" name="Placeholder 3"/>
           <p:cNvSpPr txBox="1"/>
           <p:nvPr>
             <p:ph type="body" idx="3"/>
@@ -7005,19 +6938,20 @@
           </a:bodyPr>
           <a:lstStyle/>
           <a:p>
-            <a:pPr>
-              <a:lnSpc>
-                <a:spcPct val="112000"/>
-              </a:lnSpc>
-              <a:spcAft>
-                <a:spcPts val="1200"/>
-              </a:spcAft>
+            <a:pPr algn="l" marL="0" indent="0">
               <a:defRPr sz="2200" b="0">
                 <a:solidFill>
                   <a:srgbClr val="030B20"/>
                 </a:solidFill>
                 <a:latin typeface="Inter"/>
               </a:defRPr>
+              <a:lnSpc>
+                <a:spcPct val="112000"/>
+              </a:lnSpc>
+              <a:spcAft>
+                <a:spcPts val="1200"/>
+              </a:spcAft>
+              <a:buNone/>
             </a:pPr>
             <a:r>
               <a:t>[Connect the image to the public purpose. Use real Lugano, civic spaces, workshops or people making and learning.]</a:t>
@@ -7027,7 +6961,7 @@
       </p:sp>
       <p:sp>
         <p:nvSpPr>
-          <p:cNvPr id="9" name="Placeholder 4"/>
+          <p:cNvPr id="10" name="Placeholder 4"/>
           <p:cNvSpPr txBox="1"/>
           <p:nvPr>
             <p:ph type="body" idx="4"/>
@@ -7049,19 +6983,20 @@
           </a:bodyPr>
           <a:lstStyle/>
           <a:p>
-            <a:pPr>
-              <a:lnSpc>
-                <a:spcPct val="112000"/>
-              </a:lnSpc>
-              <a:spcAft>
-                <a:spcPts val="1200"/>
-              </a:spcAft>
+            <a:pPr algn="l" marL="0" indent="0">
               <a:defRPr sz="1200" b="0">
                 <a:solidFill>
                   <a:srgbClr val="030B20"/>
                 </a:solidFill>
                 <a:latin typeface="Inter"/>
               </a:defRPr>
+              <a:lnSpc>
+                <a:spcPct val="112000"/>
+              </a:lnSpc>
+              <a:spcAft>
+                <a:spcPts val="1200"/>
+              </a:spcAft>
+              <a:buNone/>
             </a:pPr>
             <a:r>
               <a:t>[Photo credit / source / permission]</a:t>
@@ -7078,7 +7013,7 @@
 </file>
 
 <file path=ppt/slides/slide6.xml><?xml version="1.0" encoding="utf-8"?>
-<p:sld xmlns:a="http://schemas.openxmlformats.org/drawingml/2006/main" xmlns:p="http://schemas.openxmlformats.org/presentationml/2006/main" xmlns:r="http://schemas.openxmlformats.org/officeDocument/2006/relationships" showMasterSp="0">
+<p:sld xmlns:a="http://schemas.openxmlformats.org/drawingml/2006/main" xmlns:p="http://schemas.openxmlformats.org/presentationml/2006/main" xmlns:r="http://schemas.openxmlformats.org/officeDocument/2006/relationships" showMasterSp="1">
   <p:cSld>
     <p:bg>
       <p:bgPr>
@@ -7119,19 +7054,20 @@
           </a:bodyPr>
           <a:lstStyle/>
           <a:p>
-            <a:pPr>
-              <a:lnSpc>
-                <a:spcPct val="112000"/>
-              </a:lnSpc>
-              <a:spcAft>
-                <a:spcPts val="1200"/>
-              </a:spcAft>
+            <a:pPr algn="l" marL="0" indent="0">
               <a:defRPr sz="3600" b="1">
                 <a:solidFill>
                   <a:srgbClr val="082952"/>
                 </a:solidFill>
                 <a:latin typeface="Inter"/>
               </a:defRPr>
+              <a:lnSpc>
+                <a:spcPct val="112000"/>
+              </a:lnSpc>
+              <a:spcAft>
+                <a:spcPts val="1200"/>
+              </a:spcAft>
+              <a:buNone/>
             </a:pPr>
             <a:r>
               <a:t>[Say what the data shows]</a:t>
@@ -7163,19 +7099,20 @@
           </a:bodyPr>
           <a:lstStyle/>
           <a:p>
-            <a:pPr>
-              <a:lnSpc>
-                <a:spcPct val="112000"/>
-              </a:lnSpc>
-              <a:spcAft>
-                <a:spcPts val="1200"/>
-              </a:spcAft>
+            <a:pPr algn="l" marL="0" indent="0">
               <a:defRPr sz="1900" b="0">
                 <a:solidFill>
                   <a:srgbClr val="030B20"/>
                 </a:solidFill>
                 <a:latin typeface="Inter"/>
               </a:defRPr>
+              <a:lnSpc>
+                <a:spcPct val="112000"/>
+              </a:lnSpc>
+              <a:spcAft>
+                <a:spcPts val="1200"/>
+              </a:spcAft>
+              <a:buNone/>
             </a:pPr>
             <a:r>
               <a:t>[Unit, population and time period]</a:t>
@@ -7207,19 +7144,20 @@
           </a:bodyPr>
           <a:lstStyle/>
           <a:p>
-            <a:pPr>
-              <a:lnSpc>
-                <a:spcPct val="112000"/>
-              </a:lnSpc>
-              <a:spcAft>
-                <a:spcPts val="1200"/>
-              </a:spcAft>
+            <a:pPr algn="l" marL="0" indent="0">
               <a:defRPr sz="2700" b="1">
                 <a:solidFill>
                   <a:srgbClr val="082952"/>
                 </a:solidFill>
                 <a:latin typeface="Inter"/>
               </a:defRPr>
+              <a:lnSpc>
+                <a:spcPct val="112000"/>
+              </a:lnSpc>
+              <a:spcAft>
+                <a:spcPts val="1200"/>
+              </a:spcAft>
+              <a:buNone/>
             </a:pPr>
             <a:r>
               <a:t>[The takeaway]</a:t>
@@ -7251,19 +7189,20 @@
           </a:bodyPr>
           <a:lstStyle/>
           <a:p>
-            <a:pPr>
-              <a:lnSpc>
-                <a:spcPct val="112000"/>
-              </a:lnSpc>
-              <a:spcAft>
-                <a:spcPts val="1200"/>
-              </a:spcAft>
+            <a:pPr algn="l" marL="0" indent="0">
               <a:defRPr sz="2200" b="0">
                 <a:solidFill>
                   <a:srgbClr val="030B20"/>
                 </a:solidFill>
                 <a:latin typeface="Inter"/>
               </a:defRPr>
+              <a:lnSpc>
+                <a:spcPct val="112000"/>
+              </a:lnSpc>
+              <a:spcAft>
+                <a:spcPts val="1200"/>
+              </a:spcAft>
+              <a:buNone/>
             </a:pPr>
             <a:r>
               <a:t>[Explain the implication and the limits of the evidence.]</a:t>
@@ -7295,19 +7234,20 @@
           </a:bodyPr>
           <a:lstStyle/>
           <a:p>
-            <a:pPr>
-              <a:lnSpc>
-                <a:spcPct val="112000"/>
-              </a:lnSpc>
-              <a:spcAft>
-                <a:spcPts val="1200"/>
-              </a:spcAft>
+            <a:pPr algn="l" marL="0" indent="0">
               <a:defRPr sz="1200" b="0">
                 <a:solidFill>
                   <a:srgbClr val="030B20"/>
                 </a:solidFill>
                 <a:latin typeface="Inter"/>
               </a:defRPr>
+              <a:lnSpc>
+                <a:spcPct val="112000"/>
+              </a:lnSpc>
+              <a:spcAft>
+                <a:spcPts val="1200"/>
+              </a:spcAft>
+              <a:buNone/>
             </a:pPr>
             <a:r>
               <a:t>ILLUSTRATIVE DATA ONLY · Replace values and add a source before presenting.</a:t>
@@ -7342,7 +7282,7 @@
 </file>
 
 <file path=ppt/slides/slide7.xml><?xml version="1.0" encoding="utf-8"?>
-<p:sld xmlns:a="http://schemas.openxmlformats.org/drawingml/2006/main" xmlns:p="http://schemas.openxmlformats.org/presentationml/2006/main" xmlns:r="http://schemas.openxmlformats.org/officeDocument/2006/relationships" showMasterSp="0">
+<p:sld xmlns:a="http://schemas.openxmlformats.org/drawingml/2006/main" xmlns:p="http://schemas.openxmlformats.org/presentationml/2006/main" xmlns:r="http://schemas.openxmlformats.org/officeDocument/2006/relationships" showMasterSp="1">
   <p:cSld>
     <p:bg>
       <p:bgPr>
@@ -7383,19 +7323,20 @@
           </a:bodyPr>
           <a:lstStyle/>
           <a:p>
-            <a:pPr>
-              <a:lnSpc>
-                <a:spcPct val="112000"/>
-              </a:lnSpc>
-              <a:spcAft>
-                <a:spcPts val="1200"/>
-              </a:spcAft>
+            <a:pPr algn="l" marL="0" indent="0">
               <a:defRPr sz="3600" b="1">
                 <a:solidFill>
                   <a:srgbClr val="082952"/>
                 </a:solidFill>
                 <a:latin typeface="Inter"/>
               </a:defRPr>
+              <a:lnSpc>
+                <a:spcPct val="112000"/>
+              </a:lnSpc>
+              <a:spcAft>
+                <a:spcPts val="1200"/>
+              </a:spcAft>
+              <a:buNone/>
             </a:pPr>
             <a:r>
               <a:t>[Make a decision easier]</a:t>
@@ -7427,19 +7368,20 @@
           </a:bodyPr>
           <a:lstStyle/>
           <a:p>
-            <a:pPr>
-              <a:lnSpc>
-                <a:spcPct val="112000"/>
-              </a:lnSpc>
-              <a:spcAft>
-                <a:spcPts val="1200"/>
-              </a:spcAft>
+            <a:pPr algn="l" marL="0" indent="0">
               <a:defRPr sz="1900" b="0">
                 <a:solidFill>
                   <a:srgbClr val="030B20"/>
                 </a:solidFill>
                 <a:latin typeface="Inter"/>
               </a:defRPr>
+              <a:lnSpc>
+                <a:spcPct val="112000"/>
+              </a:lnSpc>
+              <a:spcAft>
+                <a:spcPts val="1200"/>
+              </a:spcAft>
+              <a:buNone/>
             </a:pPr>
             <a:r>
               <a:t>[Explain what the comparison includes]</a:t>
@@ -7471,19 +7413,20 @@
           </a:bodyPr>
           <a:lstStyle/>
           <a:p>
-            <a:pPr>
-              <a:lnSpc>
-                <a:spcPct val="112000"/>
-              </a:lnSpc>
-              <a:spcAft>
-                <a:spcPts val="1200"/>
-              </a:spcAft>
+            <a:pPr algn="l" marL="0" indent="0">
               <a:defRPr sz="1300" b="0">
                 <a:solidFill>
                   <a:srgbClr val="030B20"/>
                 </a:solidFill>
                 <a:latin typeface="Inter"/>
               </a:defRPr>
+              <a:lnSpc>
+                <a:spcPct val="112000"/>
+              </a:lnSpc>
+              <a:spcAft>
+                <a:spcPts val="1200"/>
+              </a:spcAft>
+              <a:buNone/>
             </a:pPr>
             <a:r>
               <a:t>[Source / definitions / caveat]</a:t>
@@ -7823,7 +7766,7 @@
 </file>
 
 <file path=ppt/slides/slide8.xml><?xml version="1.0" encoding="utf-8"?>
-<p:sld xmlns:a="http://schemas.openxmlformats.org/drawingml/2006/main" xmlns:p="http://schemas.openxmlformats.org/presentationml/2006/main" xmlns:r="http://schemas.openxmlformats.org/officeDocument/2006/relationships" showMasterSp="0">
+<p:sld xmlns:a="http://schemas.openxmlformats.org/drawingml/2006/main" xmlns:p="http://schemas.openxmlformats.org/presentationml/2006/main" xmlns:r="http://schemas.openxmlformats.org/officeDocument/2006/relationships" showMasterSp="1">
   <p:cSld>
     <p:bg>
       <p:bgPr>
@@ -7864,38 +7807,40 @@
           </a:bodyPr>
           <a:lstStyle/>
           <a:p>
-            <a:pPr>
-              <a:lnSpc>
-                <a:spcPct val="112000"/>
-              </a:lnSpc>
-              <a:spcAft>
-                <a:spcPts val="1200"/>
-              </a:spcAft>
+            <a:pPr algn="l" marL="0" indent="0">
               <a:defRPr sz="4200" b="1">
                 <a:solidFill>
                   <a:srgbClr val="082952"/>
                 </a:solidFill>
                 <a:latin typeface="Inter"/>
               </a:defRPr>
+              <a:lnSpc>
+                <a:spcPct val="112000"/>
+              </a:lnSpc>
+              <a:spcAft>
+                <a:spcPts val="1200"/>
+              </a:spcAft>
+              <a:buNone/>
             </a:pPr>
             <a:r>
               <a:t>[A short quotation,</a:t>
             </a:r>
           </a:p>
           <a:p>
-            <a:pPr>
-              <a:lnSpc>
-                <a:spcPct val="112000"/>
-              </a:lnSpc>
-              <a:spcAft>
-                <a:spcPts val="1200"/>
-              </a:spcAft>
+            <a:pPr algn="l" marL="0" indent="0">
               <a:defRPr sz="4200" b="1">
                 <a:solidFill>
                   <a:srgbClr val="082952"/>
                 </a:solidFill>
                 <a:latin typeface="Inter"/>
               </a:defRPr>
+              <a:lnSpc>
+                <a:spcPct val="112000"/>
+              </a:lnSpc>
+              <a:spcAft>
+                <a:spcPts val="1200"/>
+              </a:spcAft>
+              <a:buNone/>
             </a:pPr>
             <a:r>
               <a:t>accurately attributed.]</a:t>
@@ -7927,38 +7872,40 @@
           </a:bodyPr>
           <a:lstStyle/>
           <a:p>
-            <a:pPr>
-              <a:lnSpc>
-                <a:spcPct val="112000"/>
-              </a:lnSpc>
-              <a:spcAft>
-                <a:spcPts val="1200"/>
-              </a:spcAft>
+            <a:pPr algn="l" marL="0" indent="0">
               <a:defRPr sz="2000" b="0">
                 <a:solidFill>
                   <a:srgbClr val="030B20"/>
                 </a:solidFill>
                 <a:latin typeface="Inter"/>
               </a:defRPr>
+              <a:lnSpc>
+                <a:spcPct val="112000"/>
+              </a:lnSpc>
+              <a:spcAft>
+                <a:spcPts val="1200"/>
+              </a:spcAft>
+              <a:buNone/>
             </a:pPr>
             <a:r>
               <a:t>[Speaker / role]</a:t>
             </a:r>
           </a:p>
           <a:p>
-            <a:pPr>
-              <a:lnSpc>
-                <a:spcPct val="112000"/>
-              </a:lnSpc>
-              <a:spcAft>
-                <a:spcPts val="1200"/>
-              </a:spcAft>
+            <a:pPr algn="l" marL="0" indent="0">
               <a:defRPr sz="2000" b="0">
                 <a:solidFill>
                   <a:srgbClr val="030B20"/>
                 </a:solidFill>
                 <a:latin typeface="Inter"/>
               </a:defRPr>
+              <a:lnSpc>
+                <a:spcPct val="112000"/>
+              </a:lnSpc>
+              <a:spcAft>
+                <a:spcPts val="1200"/>
+              </a:spcAft>
+              <a:buNone/>
             </a:pPr>
             <a:r>
               <a:t>[Source · date]</a:t>
@@ -7975,7 +7922,7 @@
 </file>
 
 <file path=ppt/slides/slide9.xml><?xml version="1.0" encoding="utf-8"?>
-<p:sld xmlns:a="http://schemas.openxmlformats.org/drawingml/2006/main" xmlns:p="http://schemas.openxmlformats.org/presentationml/2006/main" xmlns:r="http://schemas.openxmlformats.org/officeDocument/2006/relationships" showMasterSp="0">
+<p:sld xmlns:a="http://schemas.openxmlformats.org/drawingml/2006/main" xmlns:p="http://schemas.openxmlformats.org/presentationml/2006/main" xmlns:r="http://schemas.openxmlformats.org/officeDocument/2006/relationships" showMasterSp="1">
   <p:cSld>
     <p:bg>
       <p:bgPr>
@@ -8016,19 +7963,20 @@
           </a:bodyPr>
           <a:lstStyle/>
           <a:p>
-            <a:pPr>
-              <a:lnSpc>
-                <a:spcPct val="112000"/>
-              </a:lnSpc>
-              <a:spcAft>
-                <a:spcPts val="1200"/>
-              </a:spcAft>
+            <a:pPr algn="l" marL="0" indent="0">
               <a:defRPr sz="3600" b="1">
                 <a:solidFill>
                   <a:srgbClr val="082952"/>
                 </a:solidFill>
                 <a:latin typeface="Inter"/>
               </a:defRPr>
+              <a:lnSpc>
+                <a:spcPct val="112000"/>
+              </a:lnSpc>
+              <a:spcAft>
+                <a:spcPts val="1200"/>
+              </a:spcAft>
+              <a:buNone/>
             </a:pPr>
             <a:r>
               <a:t>[What happens next?]</a:t>
@@ -8060,19 +8008,20 @@
           </a:bodyPr>
           <a:lstStyle/>
           <a:p>
-            <a:pPr>
-              <a:lnSpc>
-                <a:spcPct val="112000"/>
-              </a:lnSpc>
-              <a:spcAft>
-                <a:spcPts val="1200"/>
-              </a:spcAft>
+            <a:pPr algn="l" marL="0" indent="0">
               <a:defRPr sz="2800" b="1">
                 <a:solidFill>
                   <a:srgbClr val="082952"/>
                 </a:solidFill>
                 <a:latin typeface="Inter"/>
               </a:defRPr>
+              <a:lnSpc>
+                <a:spcPct val="112000"/>
+              </a:lnSpc>
+              <a:spcAft>
+                <a:spcPts val="1200"/>
+              </a:spcAft>
+              <a:buNone/>
             </a:pPr>
             <a:r>
               <a:t>[Learn]</a:t>
@@ -8104,38 +8053,40 @@
           </a:bodyPr>
           <a:lstStyle/>
           <a:p>
-            <a:pPr>
-              <a:lnSpc>
-                <a:spcPct val="112000"/>
-              </a:lnSpc>
-              <a:spcAft>
-                <a:spcPts val="1200"/>
-              </a:spcAft>
+            <a:pPr algn="l" marL="0" indent="0">
               <a:defRPr sz="2300" b="0">
                 <a:solidFill>
                   <a:srgbClr val="030B20"/>
                 </a:solidFill>
                 <a:latin typeface="Inter"/>
               </a:defRPr>
+              <a:lnSpc>
+                <a:spcPct val="112000"/>
+              </a:lnSpc>
+              <a:spcAft>
+                <a:spcPts val="1200"/>
+              </a:spcAft>
+              <a:buNone/>
             </a:pPr>
             <a:r>
               <a:t>[Concrete next action]</a:t>
             </a:r>
           </a:p>
           <a:p>
-            <a:pPr>
-              <a:lnSpc>
-                <a:spcPct val="112000"/>
-              </a:lnSpc>
-              <a:spcAft>
-                <a:spcPts val="1200"/>
-              </a:spcAft>
+            <a:pPr algn="l" marL="0" indent="0">
               <a:defRPr sz="2300" b="0">
                 <a:solidFill>
                   <a:srgbClr val="030B20"/>
                 </a:solidFill>
                 <a:latin typeface="Inter"/>
               </a:defRPr>
+              <a:lnSpc>
+                <a:spcPct val="112000"/>
+              </a:lnSpc>
+              <a:spcAft>
+                <a:spcPts val="1200"/>
+              </a:spcAft>
+              <a:buNone/>
             </a:pPr>
             <a:r>
               <a:t>[Owner · timing]</a:t>
@@ -8167,19 +8118,20 @@
           </a:bodyPr>
           <a:lstStyle/>
           <a:p>
-            <a:pPr>
-              <a:lnSpc>
-                <a:spcPct val="112000"/>
-              </a:lnSpc>
-              <a:spcAft>
-                <a:spcPts val="1200"/>
-              </a:spcAft>
+            <a:pPr algn="l" marL="0" indent="0">
               <a:defRPr sz="2800" b="1">
                 <a:solidFill>
                   <a:srgbClr val="082952"/>
                 </a:solidFill>
                 <a:latin typeface="Inter"/>
               </a:defRPr>
+              <a:lnSpc>
+                <a:spcPct val="112000"/>
+              </a:lnSpc>
+              <a:spcAft>
+                <a:spcPts val="1200"/>
+              </a:spcAft>
+              <a:buNone/>
             </a:pPr>
             <a:r>
               <a:t>[Test]</a:t>
@@ -8211,38 +8163,40 @@
           </a:bodyPr>
           <a:lstStyle/>
           <a:p>
-            <a:pPr>
-              <a:lnSpc>
-                <a:spcPct val="112000"/>
-              </a:lnSpc>
-              <a:spcAft>
-                <a:spcPts val="1200"/>
-              </a:spcAft>
+            <a:pPr algn="l" marL="0" indent="0">
               <a:defRPr sz="2300" b="0">
                 <a:solidFill>
                   <a:srgbClr val="030B20"/>
                 </a:solidFill>
                 <a:latin typeface="Inter"/>
               </a:defRPr>
+              <a:lnSpc>
+                <a:spcPct val="112000"/>
+              </a:lnSpc>
+              <a:spcAft>
+                <a:spcPts val="1200"/>
+              </a:spcAft>
+              <a:buNone/>
             </a:pPr>
             <a:r>
               <a:t>[Concrete next action]</a:t>
             </a:r>
           </a:p>
           <a:p>
-            <a:pPr>
-              <a:lnSpc>
-                <a:spcPct val="112000"/>
-              </a:lnSpc>
-              <a:spcAft>
-                <a:spcPts val="1200"/>
-              </a:spcAft>
+            <a:pPr algn="l" marL="0" indent="0">
               <a:defRPr sz="2300" b="0">
                 <a:solidFill>
                   <a:srgbClr val="030B20"/>
                 </a:solidFill>
                 <a:latin typeface="Inter"/>
               </a:defRPr>
+              <a:lnSpc>
+                <a:spcPct val="112000"/>
+              </a:lnSpc>
+              <a:spcAft>
+                <a:spcPts val="1200"/>
+              </a:spcAft>
+              <a:buNone/>
             </a:pPr>
             <a:r>
               <a:t>[Owner · timing]</a:t>
@@ -8274,19 +8228,20 @@
           </a:bodyPr>
           <a:lstStyle/>
           <a:p>
-            <a:pPr>
-              <a:lnSpc>
-                <a:spcPct val="112000"/>
-              </a:lnSpc>
-              <a:spcAft>
-                <a:spcPts val="1200"/>
-              </a:spcAft>
+            <a:pPr algn="l" marL="0" indent="0">
               <a:defRPr sz="2800" b="1">
                 <a:solidFill>
                   <a:srgbClr val="082952"/>
                 </a:solidFill>
                 <a:latin typeface="Inter"/>
               </a:defRPr>
+              <a:lnSpc>
+                <a:spcPct val="112000"/>
+              </a:lnSpc>
+              <a:spcAft>
+                <a:spcPts val="1200"/>
+              </a:spcAft>
+              <a:buNone/>
             </a:pPr>
             <a:r>
               <a:t>[Contribute]</a:t>
@@ -8318,38 +8273,40 @@
           </a:bodyPr>
           <a:lstStyle/>
           <a:p>
-            <a:pPr>
-              <a:lnSpc>
-                <a:spcPct val="112000"/>
-              </a:lnSpc>
-              <a:spcAft>
-                <a:spcPts val="1200"/>
-              </a:spcAft>
+            <a:pPr algn="l" marL="0" indent="0">
               <a:defRPr sz="2300" b="0">
                 <a:solidFill>
                   <a:srgbClr val="030B20"/>
                 </a:solidFill>
                 <a:latin typeface="Inter"/>
               </a:defRPr>
+              <a:lnSpc>
+                <a:spcPct val="112000"/>
+              </a:lnSpc>
+              <a:spcAft>
+                <a:spcPts val="1200"/>
+              </a:spcAft>
+              <a:buNone/>
             </a:pPr>
             <a:r>
               <a:t>[Concrete next action]</a:t>
             </a:r>
           </a:p>
           <a:p>
-            <a:pPr>
-              <a:lnSpc>
-                <a:spcPct val="112000"/>
-              </a:lnSpc>
-              <a:spcAft>
-                <a:spcPts val="1200"/>
-              </a:spcAft>
+            <a:pPr algn="l" marL="0" indent="0">
               <a:defRPr sz="2300" b="0">
                 <a:solidFill>
                   <a:srgbClr val="030B20"/>
                 </a:solidFill>
                 <a:latin typeface="Inter"/>
               </a:defRPr>
+              <a:lnSpc>
+                <a:spcPct val="112000"/>
+              </a:lnSpc>
+              <a:spcAft>
+                <a:spcPts val="1200"/>
+              </a:spcAft>
+              <a:buNone/>
             </a:pPr>
             <a:r>
               <a:t>[Owner · timing]</a:t>
@@ -8381,19 +8338,20 @@
           </a:bodyPr>
           <a:lstStyle/>
           <a:p>
-            <a:pPr>
-              <a:lnSpc>
-                <a:spcPct val="112000"/>
-              </a:lnSpc>
-              <a:spcAft>
-                <a:spcPts val="1200"/>
-              </a:spcAft>
+            <a:pPr algn="l" marL="0" indent="0">
               <a:defRPr sz="1900" b="0">
                 <a:solidFill>
                   <a:srgbClr val="082952"/>
                 </a:solidFill>
                 <a:latin typeface="Inter"/>
               </a:defRPr>
+              <a:lnSpc>
+                <a:spcPct val="112000"/>
+              </a:lnSpc>
+              <a:spcAft>
+                <a:spcPts val="1200"/>
+              </a:spcAft>
+              <a:buNone/>
             </a:pPr>
             <a:r>
               <a:t>[Contact / project URL]</a:t>

--- a/slides/planb-starter.pptx
+++ b/slides/planb-starter.pptx
@@ -1662,6 +1662,7 @@
           <a:ln>
             <a:noFill/>
           </a:ln>
+          <a:effectLst/>
         </p:spPr>
         <p:style>
           <a:lnRef idx="1">
@@ -1850,6 +1851,7 @@
           <a:ln>
             <a:noFill/>
           </a:ln>
+          <a:effectLst/>
         </p:spPr>
         <p:style>
           <a:lnRef idx="1">
@@ -2237,6 +2239,7 @@
           <a:ln>
             <a:noFill/>
           </a:ln>
+          <a:effectLst/>
         </p:spPr>
         <p:style>
           <a:lnRef idx="1">
@@ -2280,6 +2283,7 @@
           <a:ln>
             <a:noFill/>
           </a:ln>
+          <a:effectLst/>
         </p:spPr>
         <p:style>
           <a:lnRef idx="1">
@@ -2323,6 +2327,7 @@
           <a:ln>
             <a:noFill/>
           </a:ln>
+          <a:effectLst/>
         </p:spPr>
         <p:style>
           <a:lnRef idx="1">
@@ -2366,6 +2371,7 @@
           <a:ln>
             <a:noFill/>
           </a:ln>
+          <a:effectLst/>
         </p:spPr>
         <p:style>
           <a:lnRef idx="1">
@@ -2704,6 +2710,7 @@
           <a:ln>
             <a:noFill/>
           </a:ln>
+          <a:effectLst/>
         </p:spPr>
         <p:style>
           <a:lnRef idx="1">
@@ -3046,6 +3053,7 @@
           <a:ln>
             <a:noFill/>
           </a:ln>
+          <a:effectLst/>
         </p:spPr>
         <p:style>
           <a:lnRef idx="1">
@@ -3438,6 +3446,7 @@
           <a:ln>
             <a:noFill/>
           </a:ln>
+          <a:effectLst/>
         </p:spPr>
         <p:style>
           <a:lnRef idx="1">
@@ -3652,6 +3661,7 @@
           <a:ln>
             <a:noFill/>
           </a:ln>
+          <a:effectLst/>
         </p:spPr>
         <p:style>
           <a:lnRef idx="1">
@@ -3728,8 +3738,8 @@
         </p:nvSpPr>
         <p:spPr>
           <a:xfrm>
-            <a:off x="914400" y="2834640"/>
-            <a:ext cx="6035040" cy="1051560"/>
+            <a:off x="594360" y="1828800"/>
+            <a:ext cx="6720840" cy="3886200"/>
           </a:xfrm>
           <a:prstGeom prst="rect">
             <a:avLst/>
@@ -4870,6 +4880,7 @@
           <a:ln>
             <a:noFill/>
           </a:ln>
+          <a:effectLst/>
         </p:spPr>
         <p:style>
           <a:lnRef idx="1">
@@ -6834,8 +6845,8 @@
         </p:nvSpPr>
         <p:spPr>
           <a:xfrm>
-            <a:off x="914400" y="2834640"/>
-            <a:ext cx="6035040" cy="1051560"/>
+            <a:off x="594360" y="1828800"/>
+            <a:ext cx="6720840" cy="3886200"/>
           </a:xfrm>
           <a:prstGeom prst="rect">
             <a:avLst/>

--- a/slides/planb-starter.pptx
+++ b/slides/planb-starter.pptx
@@ -216,6 +216,9 @@
             <a:p>
               <a:pPr>
                 <a:defRPr sz="1500">
+                  <a:solidFill>
+                    <a:srgbClr val="030B20"/>
+                  </a:solidFill>
                   <a:latin typeface="Inter"/>
                 </a:defRPr>
               </a:pPr>
@@ -249,6 +252,9 @@
           <a:p>
             <a:pPr>
               <a:defRPr sz="1500">
+                <a:solidFill>
+                  <a:srgbClr val="030B20"/>
+                </a:solidFill>
                 <a:latin typeface="Inter"/>
               </a:defRPr>
             </a:pPr>
@@ -269,7 +275,15 @@
         </c:scaling>
         <c:delete val="0"/>
         <c:axPos val="b"/>
-        <c:majorGridlines/>
+        <c:majorGridlines>
+          <c:spPr>
+            <a:ln>
+              <a:solidFill>
+                <a:srgbClr val="DCEAF6"/>
+              </a:solidFill>
+            </a:ln>
+          </c:spPr>
+        </c:majorGridlines>
         <c:majorTickMark val="out"/>
         <c:minorTickMark val="none"/>
         <c:tickLblPos val="nextTo"/>
@@ -279,6 +293,9 @@
           <a:p>
             <a:pPr>
               <a:defRPr sz="1200">
+                <a:solidFill>
+                  <a:srgbClr val="030B20"/>
+                </a:solidFill>
                 <a:latin typeface="Inter"/>
               </a:defRPr>
             </a:pPr>
@@ -290,6 +307,14 @@
     </c:plotArea>
     <c:dispBlanksAs val="gap"/>
   </c:chart>
+  <c:spPr>
+    <a:solidFill>
+      <a:srgbClr val="fffefa"/>
+    </a:solidFill>
+    <a:ln>
+      <a:noFill/>
+    </a:ln>
+  </c:spPr>
   <c:txPr>
     <a:bodyPr/>
     <a:lstStyle/>
@@ -841,7 +866,7 @@
           <a:lstStyle/>
           <a:p>
             <a:r>
-              <a:t>SECTION. Use between major topics, not before every slide. Navy is a presentation divider, not the default dark UI theme. Gold is the single accent. Keep the statement short.</a:t>
+              <a:t>SECTION. Use between major topics, not before every slide. The background follows the selected light or dark edition. The gradient is the brand signal. Keep the statement short.</a:t>
             </a:r>
           </a:p>
         </p:txBody>
@@ -1358,7 +1383,7 @@
 
 <file path=ppt/slideLayouts/slideLayout1.xml><?xml version="1.0" encoding="utf-8"?>
 <p:sldLayout xmlns:a="http://schemas.openxmlformats.org/drawingml/2006/main" xmlns:r="http://schemas.openxmlformats.org/officeDocument/2006/relationships" xmlns:p="http://schemas.openxmlformats.org/presentationml/2006/main" type="cust" preserve="1" showMasterSp="1">
-  <p:cSld name="Plan B / Cover">
+  <p:cSld name="Plan B / Light / Cover">
     <p:bg>
       <p:bgPr>
         <a:solidFill>
@@ -1383,282 +1408,35 @@
       </p:grpSpPr>
       <p:sp>
         <p:nvSpPr>
-          <p:cNvPr id="2" name="Plan B Foundation"/>
-          <p:cNvSpPr txBox="1"/>
-          <p:nvPr/>
-        </p:nvSpPr>
-        <p:spPr>
-          <a:xfrm>
-            <a:off x="594360" y="6382512"/>
-            <a:ext cx="3657600" cy="228600"/>
-          </a:xfrm>
-          <a:prstGeom prst="rect">
-            <a:avLst/>
-          </a:prstGeom>
-          <a:noFill/>
-        </p:spPr>
-        <p:txBody>
-          <a:bodyPr wrap="square" lIns="0" rIns="0" tIns="0" bIns="0">
-            <a:spAutoFit/>
-          </a:bodyPr>
-          <a:lstStyle/>
-          <a:p>
-            <a:pPr algn="l" marL="0" indent="0">
-              <a:defRPr sz="1100" b="1">
-                <a:solidFill>
-                  <a:srgbClr val="082952"/>
-                </a:solidFill>
-                <a:latin typeface="Inter"/>
-              </a:defRPr>
-              <a:lnSpc>
-                <a:spcPct val="112000"/>
-              </a:lnSpc>
-              <a:spcAft>
-                <a:spcPts val="1200"/>
-              </a:spcAft>
-              <a:buNone/>
-            </a:pPr>
-            <a:r>
-              <a:t>Plan B Foundation</a:t>
-            </a:r>
-          </a:p>
-        </p:txBody>
-      </p:sp>
-      <p:sp>
-        <p:nvSpPr>
-          <p:cNvPr id="3" name="Civic Digital Commons"/>
-          <p:cNvSpPr txBox="1"/>
-          <p:nvPr/>
-        </p:nvSpPr>
-        <p:spPr>
-          <a:xfrm>
-            <a:off x="8595360" y="6382512"/>
-            <a:ext cx="2971800" cy="228600"/>
-          </a:xfrm>
-          <a:prstGeom prst="rect">
-            <a:avLst/>
-          </a:prstGeom>
-          <a:noFill/>
-        </p:spPr>
-        <p:txBody>
-          <a:bodyPr wrap="square" lIns="0" rIns="0" tIns="0" bIns="0">
-            <a:spAutoFit/>
-          </a:bodyPr>
-          <a:lstStyle/>
-          <a:p>
-            <a:pPr algn="l" marL="0" indent="0">
-              <a:defRPr sz="1100" b="0">
-                <a:solidFill>
-                  <a:srgbClr val="082952"/>
-                </a:solidFill>
-                <a:latin typeface="Inter"/>
-              </a:defRPr>
-              <a:lnSpc>
-                <a:spcPct val="112000"/>
-              </a:lnSpc>
-              <a:spcAft>
-                <a:spcPts val="1200"/>
-              </a:spcAft>
-              <a:buNone/>
-            </a:pPr>
-            <a:r>
-              <a:t>Civic Digital Commons</a:t>
-            </a:r>
-          </a:p>
-        </p:txBody>
-      </p:sp>
-      <p:sp>
-        <p:nvSpPr>
-          <p:cNvPr id="4" name="Placeholder 0"/>
-          <p:cNvSpPr txBox="1"/>
-          <p:nvPr>
-            <p:ph type="title" idx="0"/>
-          </p:nvPr>
-        </p:nvSpPr>
-        <p:spPr>
-          <a:xfrm>
-            <a:off x="594360" y="1234440"/>
-            <a:ext cx="6675120" cy="1965960"/>
-          </a:xfrm>
-          <a:prstGeom prst="rect">
-            <a:avLst/>
-          </a:prstGeom>
-          <a:noFill/>
-        </p:spPr>
-        <p:txBody>
-          <a:bodyPr wrap="square" lIns="0" rIns="0" tIns="0" bIns="0">
-            <a:spAutoFit/>
-          </a:bodyPr>
-          <a:lstStyle/>
-          <a:p>
-            <a:pPr algn="l" marL="0" indent="0">
-              <a:defRPr sz="4800" b="1">
-                <a:solidFill>
-                  <a:srgbClr val="082952"/>
-                </a:solidFill>
-                <a:latin typeface="Inter"/>
-              </a:defRPr>
-              <a:lnSpc>
-                <a:spcPct val="112000"/>
-              </a:lnSpc>
-              <a:spcAft>
-                <a:spcPts val="1200"/>
-              </a:spcAft>
-              <a:buNone/>
-            </a:pPr>
-            <a:r>
-              <a:t>[Presentation</a:t>
-            </a:r>
-          </a:p>
-          <a:p>
-            <a:pPr algn="l" marL="0" indent="0">
-              <a:defRPr sz="4800" b="1">
-                <a:solidFill>
-                  <a:srgbClr val="082952"/>
-                </a:solidFill>
-                <a:latin typeface="Inter"/>
-              </a:defRPr>
-              <a:lnSpc>
-                <a:spcPct val="112000"/>
-              </a:lnSpc>
-              <a:spcAft>
-                <a:spcPts val="1200"/>
-              </a:spcAft>
-              <a:buNone/>
-            </a:pPr>
-            <a:r>
-              <a:t>title]</a:t>
-            </a:r>
-          </a:p>
-        </p:txBody>
-      </p:sp>
-      <p:sp>
-        <p:nvSpPr>
-          <p:cNvPr id="5" name="Placeholder 1"/>
-          <p:cNvSpPr txBox="1"/>
-          <p:nvPr>
-            <p:ph type="subTitle" idx="1"/>
-          </p:nvPr>
-        </p:nvSpPr>
-        <p:spPr>
-          <a:xfrm>
-            <a:off x="621792" y="3566160"/>
-            <a:ext cx="6217920" cy="822960"/>
-          </a:xfrm>
-          <a:prstGeom prst="rect">
-            <a:avLst/>
-          </a:prstGeom>
-          <a:noFill/>
-        </p:spPr>
-        <p:txBody>
-          <a:bodyPr wrap="square" lIns="0" rIns="0" tIns="0" bIns="0">
-            <a:spAutoFit/>
-          </a:bodyPr>
-          <a:lstStyle/>
-          <a:p>
-            <a:pPr algn="l" marL="0" indent="0">
-              <a:defRPr sz="2400" b="0">
-                <a:solidFill>
-                  <a:srgbClr val="030B20"/>
-                </a:solidFill>
-                <a:latin typeface="Inter"/>
-              </a:defRPr>
-              <a:lnSpc>
-                <a:spcPct val="112000"/>
-              </a:lnSpc>
-              <a:spcAft>
-                <a:spcPts val="1200"/>
-              </a:spcAft>
-              <a:buNone/>
-            </a:pPr>
-            <a:r>
-              <a:t>[A clear sentence about the civic purpose]</a:t>
-            </a:r>
-          </a:p>
-        </p:txBody>
-      </p:sp>
-      <p:sp>
-        <p:nvSpPr>
-          <p:cNvPr id="6" name="Placeholder 2"/>
-          <p:cNvSpPr txBox="1"/>
-          <p:nvPr>
-            <p:ph type="body" idx="2"/>
-          </p:nvPr>
-        </p:nvSpPr>
-        <p:spPr>
-          <a:xfrm>
-            <a:off x="621792" y="5074920"/>
-            <a:ext cx="5943600" cy="731520"/>
-          </a:xfrm>
-          <a:prstGeom prst="rect">
-            <a:avLst/>
-          </a:prstGeom>
-          <a:noFill/>
-        </p:spPr>
-        <p:txBody>
-          <a:bodyPr wrap="square" lIns="0" rIns="0" tIns="0" bIns="0">
-            <a:spAutoFit/>
-          </a:bodyPr>
-          <a:lstStyle/>
-          <a:p>
-            <a:pPr algn="l" marL="0" indent="0">
-              <a:defRPr sz="1700" b="0">
-                <a:solidFill>
-                  <a:srgbClr val="030B20"/>
-                </a:solidFill>
-                <a:latin typeface="Inter"/>
-              </a:defRPr>
-              <a:lnSpc>
-                <a:spcPct val="112000"/>
-              </a:lnSpc>
-              <a:spcAft>
-                <a:spcPts val="1200"/>
-              </a:spcAft>
-              <a:buNone/>
-            </a:pPr>
-            <a:r>
-              <a:t>[Presenter / team]</a:t>
-            </a:r>
-          </a:p>
-          <a:p>
-            <a:pPr algn="l" marL="0" indent="0">
-              <a:defRPr sz="1700" b="0">
-                <a:solidFill>
-                  <a:srgbClr val="030B20"/>
-                </a:solidFill>
-                <a:latin typeface="Inter"/>
-              </a:defRPr>
-              <a:lnSpc>
-                <a:spcPct val="112000"/>
-              </a:lnSpc>
-              <a:spcAft>
-                <a:spcPts val="1200"/>
-              </a:spcAft>
-              <a:buNone/>
-            </a:pPr>
-            <a:r>
-              <a:t>[Event · date]</a:t>
-            </a:r>
-          </a:p>
-        </p:txBody>
-      </p:sp>
-      <p:sp>
-        <p:nvSpPr>
-          <p:cNvPr id="7" name="Rectangle 6"/>
+          <p:cNvPr id="2" name="Plan B / Network energy gradient"/>
           <p:cNvSpPr/>
           <p:nvPr/>
         </p:nvSpPr>
         <p:spPr>
           <a:xfrm>
-            <a:off x="7818120" y="0"/>
-            <a:ext cx="4379976" cy="6080760"/>
-          </a:xfrm>
-          <a:prstGeom prst="rect">
-            <a:avLst/>
-          </a:prstGeom>
-          <a:solidFill>
-            <a:srgbClr val="082952"/>
-          </a:solidFill>
+            <a:off x="594360" y="6163056"/>
+            <a:ext cx="10972800" cy="91440"/>
+          </a:xfrm>
+          <a:prstGeom prst="rect">
+            <a:avLst/>
+          </a:prstGeom>
+          <a:gradFill rotWithShape="1">
+            <a:gsLst>
+              <a:gs pos="0">
+                <a:srgbClr val="FFB604"/>
+              </a:gs>
+              <a:gs pos="28000">
+                <a:srgbClr val="FF5DB1"/>
+              </a:gs>
+              <a:gs pos="58000">
+                <a:srgbClr val="7468FF"/>
+              </a:gs>
+              <a:gs pos="100000">
+                <a:srgbClr val="23F5FF"/>
+              </a:gs>
+            </a:gsLst>
+            <a:lin ang="0" scaled="1"/>
+          </a:gradFill>
           <a:ln>
             <a:noFill/>
           </a:ln>
@@ -1686,9 +1464,314 @@
           </a:p>
         </p:txBody>
       </p:sp>
+      <p:sp>
+        <p:nvSpPr>
+          <p:cNvPr id="3" name="Plan B Foundation"/>
+          <p:cNvSpPr txBox="1"/>
+          <p:nvPr/>
+        </p:nvSpPr>
+        <p:spPr>
+          <a:xfrm>
+            <a:off x="594360" y="6382512"/>
+            <a:ext cx="3657600" cy="228600"/>
+          </a:xfrm>
+          <a:prstGeom prst="rect">
+            <a:avLst/>
+          </a:prstGeom>
+          <a:noFill/>
+        </p:spPr>
+        <p:txBody>
+          <a:bodyPr wrap="square" lIns="0" rIns="0" tIns="0" bIns="0">
+            <a:spAutoFit/>
+          </a:bodyPr>
+          <a:lstStyle/>
+          <a:p>
+            <a:pPr algn="l" marL="0" indent="0">
+              <a:defRPr sz="1100" b="1">
+                <a:solidFill>
+                  <a:srgbClr val="082952"/>
+                </a:solidFill>
+                <a:latin typeface="Inter"/>
+              </a:defRPr>
+              <a:lnSpc>
+                <a:spcPct val="112000"/>
+              </a:lnSpc>
+              <a:spcAft>
+                <a:spcPts val="1200"/>
+              </a:spcAft>
+              <a:buNone/>
+            </a:pPr>
+            <a:r>
+              <a:t>Plan B Foundation</a:t>
+            </a:r>
+          </a:p>
+        </p:txBody>
+      </p:sp>
+      <p:sp>
+        <p:nvSpPr>
+          <p:cNvPr id="4" name="Civic Digital Commons"/>
+          <p:cNvSpPr txBox="1"/>
+          <p:nvPr/>
+        </p:nvSpPr>
+        <p:spPr>
+          <a:xfrm>
+            <a:off x="8595360" y="6382512"/>
+            <a:ext cx="2971800" cy="228600"/>
+          </a:xfrm>
+          <a:prstGeom prst="rect">
+            <a:avLst/>
+          </a:prstGeom>
+          <a:noFill/>
+        </p:spPr>
+        <p:txBody>
+          <a:bodyPr wrap="square" lIns="0" rIns="0" tIns="0" bIns="0">
+            <a:spAutoFit/>
+          </a:bodyPr>
+          <a:lstStyle/>
+          <a:p>
+            <a:pPr algn="l" marL="0" indent="0">
+              <a:defRPr sz="1100" b="0">
+                <a:solidFill>
+                  <a:srgbClr val="082952"/>
+                </a:solidFill>
+                <a:latin typeface="Inter"/>
+              </a:defRPr>
+              <a:lnSpc>
+                <a:spcPct val="112000"/>
+              </a:lnSpc>
+              <a:spcAft>
+                <a:spcPts val="1200"/>
+              </a:spcAft>
+              <a:buNone/>
+            </a:pPr>
+            <a:r>
+              <a:t>Civic Digital Commons</a:t>
+            </a:r>
+          </a:p>
+        </p:txBody>
+      </p:sp>
+      <p:sp>
+        <p:nvSpPr>
+          <p:cNvPr id="5" name="Placeholder 0"/>
+          <p:cNvSpPr txBox="1"/>
+          <p:nvPr>
+            <p:ph type="title" idx="0"/>
+          </p:nvPr>
+        </p:nvSpPr>
+        <p:spPr>
+          <a:xfrm>
+            <a:off x="594360" y="1234440"/>
+            <a:ext cx="6675120" cy="1965960"/>
+          </a:xfrm>
+          <a:prstGeom prst="rect">
+            <a:avLst/>
+          </a:prstGeom>
+          <a:noFill/>
+        </p:spPr>
+        <p:txBody>
+          <a:bodyPr wrap="square" lIns="0" rIns="0" tIns="0" bIns="0">
+            <a:spAutoFit/>
+          </a:bodyPr>
+          <a:lstStyle/>
+          <a:p>
+            <a:pPr algn="l" marL="0" indent="0">
+              <a:defRPr sz="4800" b="1">
+                <a:solidFill>
+                  <a:srgbClr val="082952"/>
+                </a:solidFill>
+                <a:latin typeface="Inter"/>
+              </a:defRPr>
+              <a:lnSpc>
+                <a:spcPct val="112000"/>
+              </a:lnSpc>
+              <a:spcAft>
+                <a:spcPts val="1200"/>
+              </a:spcAft>
+              <a:buNone/>
+            </a:pPr>
+            <a:r>
+              <a:t>[Presentation</a:t>
+            </a:r>
+          </a:p>
+          <a:p>
+            <a:pPr algn="l" marL="0" indent="0">
+              <a:defRPr sz="4800" b="1">
+                <a:solidFill>
+                  <a:srgbClr val="082952"/>
+                </a:solidFill>
+                <a:latin typeface="Inter"/>
+              </a:defRPr>
+              <a:lnSpc>
+                <a:spcPct val="112000"/>
+              </a:lnSpc>
+              <a:spcAft>
+                <a:spcPts val="1200"/>
+              </a:spcAft>
+              <a:buNone/>
+            </a:pPr>
+            <a:r>
+              <a:t>title]</a:t>
+            </a:r>
+          </a:p>
+        </p:txBody>
+      </p:sp>
+      <p:sp>
+        <p:nvSpPr>
+          <p:cNvPr id="6" name="Placeholder 1"/>
+          <p:cNvSpPr txBox="1"/>
+          <p:nvPr>
+            <p:ph type="subTitle" idx="1"/>
+          </p:nvPr>
+        </p:nvSpPr>
+        <p:spPr>
+          <a:xfrm>
+            <a:off x="621792" y="3566160"/>
+            <a:ext cx="6217920" cy="822960"/>
+          </a:xfrm>
+          <a:prstGeom prst="rect">
+            <a:avLst/>
+          </a:prstGeom>
+          <a:noFill/>
+        </p:spPr>
+        <p:txBody>
+          <a:bodyPr wrap="square" lIns="0" rIns="0" tIns="0" bIns="0">
+            <a:spAutoFit/>
+          </a:bodyPr>
+          <a:lstStyle/>
+          <a:p>
+            <a:pPr algn="l" marL="0" indent="0">
+              <a:defRPr sz="2400" b="0">
+                <a:solidFill>
+                  <a:srgbClr val="030B20"/>
+                </a:solidFill>
+                <a:latin typeface="Inter"/>
+              </a:defRPr>
+              <a:lnSpc>
+                <a:spcPct val="112000"/>
+              </a:lnSpc>
+              <a:spcAft>
+                <a:spcPts val="1200"/>
+              </a:spcAft>
+              <a:buNone/>
+            </a:pPr>
+            <a:r>
+              <a:t>[A clear sentence about the civic purpose]</a:t>
+            </a:r>
+          </a:p>
+        </p:txBody>
+      </p:sp>
+      <p:sp>
+        <p:nvSpPr>
+          <p:cNvPr id="7" name="Placeholder 2"/>
+          <p:cNvSpPr txBox="1"/>
+          <p:nvPr>
+            <p:ph type="body" idx="2"/>
+          </p:nvPr>
+        </p:nvSpPr>
+        <p:spPr>
+          <a:xfrm>
+            <a:off x="621792" y="5074920"/>
+            <a:ext cx="5943600" cy="731520"/>
+          </a:xfrm>
+          <a:prstGeom prst="rect">
+            <a:avLst/>
+          </a:prstGeom>
+          <a:noFill/>
+        </p:spPr>
+        <p:txBody>
+          <a:bodyPr wrap="square" lIns="0" rIns="0" tIns="0" bIns="0">
+            <a:spAutoFit/>
+          </a:bodyPr>
+          <a:lstStyle/>
+          <a:p>
+            <a:pPr algn="l" marL="0" indent="0">
+              <a:defRPr sz="1700" b="0">
+                <a:solidFill>
+                  <a:srgbClr val="030B20"/>
+                </a:solidFill>
+                <a:latin typeface="Inter"/>
+              </a:defRPr>
+              <a:lnSpc>
+                <a:spcPct val="112000"/>
+              </a:lnSpc>
+              <a:spcAft>
+                <a:spcPts val="1200"/>
+              </a:spcAft>
+              <a:buNone/>
+            </a:pPr>
+            <a:r>
+              <a:t>[Presenter / team]</a:t>
+            </a:r>
+          </a:p>
+          <a:p>
+            <a:pPr algn="l" marL="0" indent="0">
+              <a:defRPr sz="1700" b="0">
+                <a:solidFill>
+                  <a:srgbClr val="030B20"/>
+                </a:solidFill>
+                <a:latin typeface="Inter"/>
+              </a:defRPr>
+              <a:lnSpc>
+                <a:spcPct val="112000"/>
+              </a:lnSpc>
+              <a:spcAft>
+                <a:spcPts val="1200"/>
+              </a:spcAft>
+              <a:buNone/>
+            </a:pPr>
+            <a:r>
+              <a:t>[Event · date]</a:t>
+            </a:r>
+          </a:p>
+        </p:txBody>
+      </p:sp>
+      <p:sp>
+        <p:nvSpPr>
+          <p:cNvPr id="8" name="Rectangle 7"/>
+          <p:cNvSpPr/>
+          <p:nvPr/>
+        </p:nvSpPr>
+        <p:spPr>
+          <a:xfrm>
+            <a:off x="7818120" y="0"/>
+            <a:ext cx="4379976" cy="6080760"/>
+          </a:xfrm>
+          <a:prstGeom prst="rect">
+            <a:avLst/>
+          </a:prstGeom>
+          <a:solidFill>
+            <a:srgbClr val="082952"/>
+          </a:solidFill>
+          <a:ln>
+            <a:noFill/>
+          </a:ln>
+          <a:effectLst/>
+        </p:spPr>
+        <p:style>
+          <a:lnRef idx="1">
+            <a:schemeClr val="accent1"/>
+          </a:lnRef>
+          <a:fillRef idx="3">
+            <a:schemeClr val="accent1"/>
+          </a:fillRef>
+          <a:effectRef idx="2">
+            <a:schemeClr val="accent1"/>
+          </a:effectRef>
+          <a:fontRef idx="minor">
+            <a:schemeClr val="lt1"/>
+          </a:fontRef>
+        </p:style>
+        <p:txBody>
+          <a:bodyPr rtlCol="0" anchor="ctr"/>
+          <a:lstStyle/>
+          <a:p>
+            <a:pPr algn="ctr"/>
+          </a:p>
+        </p:txBody>
+      </p:sp>
       <p:pic>
         <p:nvPicPr>
-          <p:cNvPr id="8" name="Original Lugano's Plan B mark" descr="Lugano's Plan B original logo; existing mark, not a new Foundation logo"/>
+          <p:cNvPr id="9" name="Original Lugano's Plan B mark" descr="Lugano's Plan B original logo; existing mark, not a new Foundation logo"/>
           <p:cNvPicPr>
             <a:picLocks noChangeAspect="1"/>
           </p:cNvPicPr>
@@ -1716,7 +1799,7 @@
       </p:pic>
       <p:sp>
         <p:nvSpPr>
-          <p:cNvPr id="9" name="Open.&#10;Capable.&#10;Curious.&#10;Grounded."/>
+          <p:cNvPr id="10" name="Open.&#10;Capable.&#10;Curious.&#10;Grounded."/>
           <p:cNvSpPr txBox="1"/>
           <p:nvPr/>
         </p:nvSpPr>
@@ -1819,35 +1902,35 @@
       </p:sp>
       <p:sp>
         <p:nvSpPr>
-          <p:cNvPr id="10" name="Rectangle 9"/>
+          <p:cNvPr id="11" name="Plan B / Network energy gradient"/>
           <p:cNvSpPr/>
           <p:nvPr/>
         </p:nvSpPr>
         <p:spPr>
           <a:xfrm>
-            <a:off x="7818120" y="6016752"/>
-            <a:ext cx="4379976" cy="64008"/>
-          </a:xfrm>
+            <a:off x="7818120" y="5715000"/>
+            <a:ext cx="4379976" cy="365760"/>
+          </a:xfrm>
+          <a:prstGeom prst="rect">
+            <a:avLst/>
+          </a:prstGeom>
           <a:gradFill rotWithShape="1">
             <a:gsLst>
               <a:gs pos="0">
-                <a:srgbClr val="ffb604"/>
+                <a:srgbClr val="FFB604"/>
               </a:gs>
               <a:gs pos="28000">
-                <a:srgbClr val="ff5db1"/>
+                <a:srgbClr val="FF5DB1"/>
               </a:gs>
               <a:gs pos="58000">
-                <a:srgbClr val="7468ff"/>
+                <a:srgbClr val="7468FF"/>
               </a:gs>
               <a:gs pos="100000">
-                <a:srgbClr val="23f5ff"/>
+                <a:srgbClr val="23F5FF"/>
               </a:gs>
             </a:gsLst>
             <a:lin ang="0" scaled="1"/>
           </a:gradFill>
-          <a:prstGeom prst="rect">
-            <a:avLst/>
-          </a:prstGeom>
           <a:ln>
             <a:noFill/>
           </a:ln>
@@ -1890,7 +1973,7 @@
 
 <file path=ppt/slideLayouts/slideLayout10.xml><?xml version="1.0" encoding="utf-8"?>
 <p:sldLayout xmlns:a="http://schemas.openxmlformats.org/drawingml/2006/main" xmlns:r="http://schemas.openxmlformats.org/officeDocument/2006/relationships" xmlns:p="http://schemas.openxmlformats.org/presentationml/2006/main" type="cust" preserve="1" showMasterSp="1">
-  <p:cSld name="Plan B / Template guide">
+  <p:cSld name="Plan B / Light / Template guide">
     <p:bg>
       <p:bgPr>
         <a:solidFill>
@@ -1915,327 +1998,35 @@
       </p:grpSpPr>
       <p:sp>
         <p:nvSpPr>
-          <p:cNvPr id="2" name="Plan B Foundation"/>
-          <p:cNvSpPr txBox="1"/>
-          <p:nvPr/>
-        </p:nvSpPr>
-        <p:spPr>
-          <a:xfrm>
-            <a:off x="594360" y="6382512"/>
-            <a:ext cx="3657600" cy="228600"/>
-          </a:xfrm>
-          <a:prstGeom prst="rect">
-            <a:avLst/>
-          </a:prstGeom>
-          <a:noFill/>
-        </p:spPr>
-        <p:txBody>
-          <a:bodyPr wrap="square" lIns="0" rIns="0" tIns="0" bIns="0">
-            <a:spAutoFit/>
-          </a:bodyPr>
-          <a:lstStyle/>
-          <a:p>
-            <a:pPr algn="l" marL="0" indent="0">
-              <a:defRPr sz="1100" b="1">
-                <a:solidFill>
-                  <a:srgbClr val="082952"/>
-                </a:solidFill>
-                <a:latin typeface="Inter"/>
-              </a:defRPr>
-              <a:lnSpc>
-                <a:spcPct val="112000"/>
-              </a:lnSpc>
-              <a:spcAft>
-                <a:spcPts val="1200"/>
-              </a:spcAft>
-              <a:buNone/>
-            </a:pPr>
-            <a:r>
-              <a:t>Plan B Foundation</a:t>
-            </a:r>
-          </a:p>
-        </p:txBody>
-      </p:sp>
-      <p:sp>
-        <p:nvSpPr>
-          <p:cNvPr id="3" name="Civic Digital Commons"/>
-          <p:cNvSpPr txBox="1"/>
-          <p:nvPr/>
-        </p:nvSpPr>
-        <p:spPr>
-          <a:xfrm>
-            <a:off x="8595360" y="6382512"/>
-            <a:ext cx="2971800" cy="228600"/>
-          </a:xfrm>
-          <a:prstGeom prst="rect">
-            <a:avLst/>
-          </a:prstGeom>
-          <a:noFill/>
-        </p:spPr>
-        <p:txBody>
-          <a:bodyPr wrap="square" lIns="0" rIns="0" tIns="0" bIns="0">
-            <a:spAutoFit/>
-          </a:bodyPr>
-          <a:lstStyle/>
-          <a:p>
-            <a:pPr algn="l" marL="0" indent="0">
-              <a:defRPr sz="1100" b="0">
-                <a:solidFill>
-                  <a:srgbClr val="082952"/>
-                </a:solidFill>
-                <a:latin typeface="Inter"/>
-              </a:defRPr>
-              <a:lnSpc>
-                <a:spcPct val="112000"/>
-              </a:lnSpc>
-              <a:spcAft>
-                <a:spcPts val="1200"/>
-              </a:spcAft>
-              <a:buNone/>
-            </a:pPr>
-            <a:r>
-              <a:t>Civic Digital Commons</a:t>
-            </a:r>
-          </a:p>
-        </p:txBody>
-      </p:sp>
-      <p:sp>
-        <p:nvSpPr>
-          <p:cNvPr id="4" name="Placeholder 0"/>
-          <p:cNvSpPr txBox="1"/>
-          <p:nvPr>
-            <p:ph type="title" idx="0"/>
-          </p:nvPr>
-        </p:nvSpPr>
-        <p:spPr>
-          <a:xfrm>
-            <a:off x="594360" y="502920"/>
-            <a:ext cx="10972800" cy="1005840"/>
-          </a:xfrm>
-          <a:prstGeom prst="rect">
-            <a:avLst/>
-          </a:prstGeom>
-          <a:noFill/>
-        </p:spPr>
-        <p:txBody>
-          <a:bodyPr wrap="square" lIns="0" rIns="0" tIns="0" bIns="0">
-            <a:spAutoFit/>
-          </a:bodyPr>
-          <a:lstStyle/>
-          <a:p>
-            <a:pPr algn="l" marL="0" indent="0">
-              <a:defRPr sz="3600" b="1">
-                <a:solidFill>
-                  <a:srgbClr val="082952"/>
-                </a:solidFill>
-                <a:latin typeface="Inter"/>
-              </a:defRPr>
-              <a:lnSpc>
-                <a:spcPct val="112000"/>
-              </a:lnSpc>
-              <a:spcAft>
-                <a:spcPts val="1200"/>
-              </a:spcAft>
-              <a:buNone/>
-            </a:pPr>
-            <a:r>
-              <a:t>Make it yours. Keep it Plan B.</a:t>
-            </a:r>
-          </a:p>
-        </p:txBody>
-      </p:sp>
-      <p:sp>
-        <p:nvSpPr>
-          <p:cNvPr id="5" name="Placeholder 1"/>
-          <p:cNvSpPr txBox="1"/>
-          <p:nvPr>
-            <p:ph type="body" idx="1"/>
-          </p:nvPr>
-        </p:nvSpPr>
-        <p:spPr>
-          <a:xfrm>
-            <a:off x="594360" y="1508760"/>
-            <a:ext cx="10698480" cy="685800"/>
-          </a:xfrm>
-          <a:prstGeom prst="rect">
-            <a:avLst/>
-          </a:prstGeom>
-          <a:noFill/>
-        </p:spPr>
-        <p:txBody>
-          <a:bodyPr wrap="square" lIns="0" rIns="0" tIns="0" bIns="0">
-            <a:spAutoFit/>
-          </a:bodyPr>
-          <a:lstStyle/>
-          <a:p>
-            <a:pPr algn="l" marL="0" indent="0">
-              <a:defRPr sz="1900" b="0">
-                <a:solidFill>
-                  <a:srgbClr val="030B20"/>
-                </a:solidFill>
-                <a:latin typeface="Inter"/>
-              </a:defRPr>
-              <a:lnSpc>
-                <a:spcPct val="112000"/>
-              </a:lnSpc>
-              <a:spcAft>
-                <a:spcPts val="1200"/>
-              </a:spcAft>
-              <a:buNone/>
-            </a:pPr>
-            <a:r>
-              <a:t>Delete this guidance slide before presenting.</a:t>
-            </a:r>
-          </a:p>
-        </p:txBody>
-      </p:sp>
-      <p:sp>
-        <p:nvSpPr>
-          <p:cNvPr id="6" name="Placeholder 2"/>
-          <p:cNvSpPr txBox="1"/>
-          <p:nvPr>
-            <p:ph type="body" idx="2"/>
-          </p:nvPr>
-        </p:nvSpPr>
-        <p:spPr>
-          <a:xfrm>
-            <a:off x="640080" y="2514600"/>
-            <a:ext cx="5120640" cy="2651760"/>
-          </a:xfrm>
-          <a:prstGeom prst="rect">
-            <a:avLst/>
-          </a:prstGeom>
-          <a:noFill/>
-        </p:spPr>
-        <p:txBody>
-          <a:bodyPr wrap="square" lIns="0" rIns="0" tIns="0" bIns="0">
-            <a:spAutoFit/>
-          </a:bodyPr>
-          <a:lstStyle/>
-          <a:p>
-            <a:pPr algn="l" marL="0" indent="0">
-              <a:defRPr sz="2300" b="0">
-                <a:solidFill>
-                  <a:srgbClr val="030B20"/>
-                </a:solidFill>
-                <a:latin typeface="Inter"/>
-              </a:defRPr>
-              <a:lnSpc>
-                <a:spcPct val="112000"/>
-              </a:lnSpc>
-              <a:spcAft>
-                <a:spcPts val="1200"/>
-              </a:spcAft>
-              <a:buNone/>
-            </a:pPr>
-            <a:r>
-              <a:t>Use the layouts</a:t>
-            </a:r>
-          </a:p>
-          <a:p>
-            <a:pPr algn="l" marL="0" indent="0">
-              <a:defRPr sz="2300" b="0">
-                <a:solidFill>
-                  <a:srgbClr val="030B20"/>
-                </a:solidFill>
-                <a:latin typeface="Inter"/>
-              </a:defRPr>
-              <a:lnSpc>
-                <a:spcPct val="112000"/>
-              </a:lnSpc>
-              <a:spcAft>
-                <a:spcPts val="1200"/>
-              </a:spcAft>
-              <a:buNone/>
-            </a:pPr>
-            <a:r>
-              <a:t>Install Inter, then choose Home → New Slide. Replace bracketed prompts. Duplicate the chart or table example to retain its styling.</a:t>
-            </a:r>
-          </a:p>
-        </p:txBody>
-      </p:sp>
-      <p:sp>
-        <p:nvSpPr>
-          <p:cNvPr id="7" name="Placeholder 3"/>
-          <p:cNvSpPr txBox="1"/>
-          <p:nvPr>
-            <p:ph type="body" idx="3"/>
-          </p:nvPr>
-        </p:nvSpPr>
-        <p:spPr>
-          <a:xfrm>
-            <a:off x="6400800" y="2514600"/>
-            <a:ext cx="5120640" cy="2651760"/>
-          </a:xfrm>
-          <a:prstGeom prst="rect">
-            <a:avLst/>
-          </a:prstGeom>
-          <a:noFill/>
-        </p:spPr>
-        <p:txBody>
-          <a:bodyPr wrap="square" lIns="0" rIns="0" tIns="0" bIns="0">
-            <a:spAutoFit/>
-          </a:bodyPr>
-          <a:lstStyle/>
-          <a:p>
-            <a:pPr algn="l" marL="0" indent="0">
-              <a:defRPr sz="2300" b="0">
-                <a:solidFill>
-                  <a:srgbClr val="030B20"/>
-                </a:solidFill>
-                <a:latin typeface="Inter"/>
-              </a:defRPr>
-              <a:lnSpc>
-                <a:spcPct val="112000"/>
-              </a:lnSpc>
-              <a:spcAft>
-                <a:spcPts val="1200"/>
-              </a:spcAft>
-              <a:buNone/>
-            </a:pPr>
-            <a:r>
-              <a:t>Keep it clear</a:t>
-            </a:r>
-          </a:p>
-          <a:p>
-            <a:pPr algn="l" marL="0" indent="0">
-              <a:defRPr sz="2300" b="0">
-                <a:solidFill>
-                  <a:srgbClr val="030B20"/>
-                </a:solidFill>
-                <a:latin typeface="Inter"/>
-              </a:defRPr>
-              <a:lnSpc>
-                <a:spcPct val="112000"/>
-              </a:lnSpc>
-              <a:spcAft>
-                <a:spcPts val="1200"/>
-              </a:spcAft>
-              <a:buNone/>
-            </a:pPr>
-            <a:r>
-              <a:t>One idea per slide. Use navy and warm white. Choose gold or a small gradient as the exceptional signal. Aim for 20pt or larger body text.</a:t>
-            </a:r>
-          </a:p>
-        </p:txBody>
-      </p:sp>
-      <p:sp>
-        <p:nvSpPr>
-          <p:cNvPr id="8" name="Rectangle 7"/>
+          <p:cNvPr id="2" name="Plan B / Network energy gradient"/>
           <p:cNvSpPr/>
           <p:nvPr/>
         </p:nvSpPr>
         <p:spPr>
           <a:xfrm>
-            <a:off x="640080" y="5486400"/>
-            <a:ext cx="365760" cy="228600"/>
-          </a:xfrm>
-          <a:prstGeom prst="rect">
-            <a:avLst/>
-          </a:prstGeom>
-          <a:solidFill>
-            <a:srgbClr val="082952"/>
-          </a:solidFill>
+            <a:off x="594360" y="6163056"/>
+            <a:ext cx="10972800" cy="91440"/>
+          </a:xfrm>
+          <a:prstGeom prst="rect">
+            <a:avLst/>
+          </a:prstGeom>
+          <a:gradFill rotWithShape="1">
+            <a:gsLst>
+              <a:gs pos="0">
+                <a:srgbClr val="FFB604"/>
+              </a:gs>
+              <a:gs pos="28000">
+                <a:srgbClr val="FF5DB1"/>
+              </a:gs>
+              <a:gs pos="58000">
+                <a:srgbClr val="7468FF"/>
+              </a:gs>
+              <a:gs pos="100000">
+                <a:srgbClr val="23F5FF"/>
+              </a:gs>
+            </a:gsLst>
+            <a:lin ang="0" scaled="1"/>
+          </a:gradFill>
           <a:ln>
             <a:noFill/>
           </a:ln>
@@ -2265,20 +2056,326 @@
       </p:sp>
       <p:sp>
         <p:nvSpPr>
+          <p:cNvPr id="3" name="Plan B Foundation"/>
+          <p:cNvSpPr txBox="1"/>
+          <p:nvPr/>
+        </p:nvSpPr>
+        <p:spPr>
+          <a:xfrm>
+            <a:off x="594360" y="6382512"/>
+            <a:ext cx="3657600" cy="228600"/>
+          </a:xfrm>
+          <a:prstGeom prst="rect">
+            <a:avLst/>
+          </a:prstGeom>
+          <a:noFill/>
+        </p:spPr>
+        <p:txBody>
+          <a:bodyPr wrap="square" lIns="0" rIns="0" tIns="0" bIns="0">
+            <a:spAutoFit/>
+          </a:bodyPr>
+          <a:lstStyle/>
+          <a:p>
+            <a:pPr algn="l" marL="0" indent="0">
+              <a:defRPr sz="1100" b="1">
+                <a:solidFill>
+                  <a:srgbClr val="082952"/>
+                </a:solidFill>
+                <a:latin typeface="Inter"/>
+              </a:defRPr>
+              <a:lnSpc>
+                <a:spcPct val="112000"/>
+              </a:lnSpc>
+              <a:spcAft>
+                <a:spcPts val="1200"/>
+              </a:spcAft>
+              <a:buNone/>
+            </a:pPr>
+            <a:r>
+              <a:t>Plan B Foundation</a:t>
+            </a:r>
+          </a:p>
+        </p:txBody>
+      </p:sp>
+      <p:sp>
+        <p:nvSpPr>
+          <p:cNvPr id="4" name="Civic Digital Commons"/>
+          <p:cNvSpPr txBox="1"/>
+          <p:nvPr/>
+        </p:nvSpPr>
+        <p:spPr>
+          <a:xfrm>
+            <a:off x="8595360" y="6382512"/>
+            <a:ext cx="2971800" cy="228600"/>
+          </a:xfrm>
+          <a:prstGeom prst="rect">
+            <a:avLst/>
+          </a:prstGeom>
+          <a:noFill/>
+        </p:spPr>
+        <p:txBody>
+          <a:bodyPr wrap="square" lIns="0" rIns="0" tIns="0" bIns="0">
+            <a:spAutoFit/>
+          </a:bodyPr>
+          <a:lstStyle/>
+          <a:p>
+            <a:pPr algn="l" marL="0" indent="0">
+              <a:defRPr sz="1100" b="0">
+                <a:solidFill>
+                  <a:srgbClr val="082952"/>
+                </a:solidFill>
+                <a:latin typeface="Inter"/>
+              </a:defRPr>
+              <a:lnSpc>
+                <a:spcPct val="112000"/>
+              </a:lnSpc>
+              <a:spcAft>
+                <a:spcPts val="1200"/>
+              </a:spcAft>
+              <a:buNone/>
+            </a:pPr>
+            <a:r>
+              <a:t>Civic Digital Commons</a:t>
+            </a:r>
+          </a:p>
+        </p:txBody>
+      </p:sp>
+      <p:sp>
+        <p:nvSpPr>
+          <p:cNvPr id="5" name="Placeholder 0"/>
+          <p:cNvSpPr txBox="1"/>
+          <p:nvPr>
+            <p:ph type="title" idx="0"/>
+          </p:nvPr>
+        </p:nvSpPr>
+        <p:spPr>
+          <a:xfrm>
+            <a:off x="594360" y="502920"/>
+            <a:ext cx="10972800" cy="1005840"/>
+          </a:xfrm>
+          <a:prstGeom prst="rect">
+            <a:avLst/>
+          </a:prstGeom>
+          <a:noFill/>
+        </p:spPr>
+        <p:txBody>
+          <a:bodyPr wrap="square" lIns="0" rIns="0" tIns="0" bIns="0">
+            <a:spAutoFit/>
+          </a:bodyPr>
+          <a:lstStyle/>
+          <a:p>
+            <a:pPr algn="l" marL="0" indent="0">
+              <a:defRPr sz="3600" b="1">
+                <a:solidFill>
+                  <a:srgbClr val="082952"/>
+                </a:solidFill>
+                <a:latin typeface="Inter"/>
+              </a:defRPr>
+              <a:lnSpc>
+                <a:spcPct val="112000"/>
+              </a:lnSpc>
+              <a:spcAft>
+                <a:spcPts val="1200"/>
+              </a:spcAft>
+              <a:buNone/>
+            </a:pPr>
+            <a:r>
+              <a:t>Make it yours. Keep it Plan B.</a:t>
+            </a:r>
+          </a:p>
+        </p:txBody>
+      </p:sp>
+      <p:sp>
+        <p:nvSpPr>
+          <p:cNvPr id="6" name="Placeholder 1"/>
+          <p:cNvSpPr txBox="1"/>
+          <p:nvPr>
+            <p:ph type="body" idx="1"/>
+          </p:nvPr>
+        </p:nvSpPr>
+        <p:spPr>
+          <a:xfrm>
+            <a:off x="594360" y="1508760"/>
+            <a:ext cx="10698480" cy="685800"/>
+          </a:xfrm>
+          <a:prstGeom prst="rect">
+            <a:avLst/>
+          </a:prstGeom>
+          <a:noFill/>
+        </p:spPr>
+        <p:txBody>
+          <a:bodyPr wrap="square" lIns="0" rIns="0" tIns="0" bIns="0">
+            <a:spAutoFit/>
+          </a:bodyPr>
+          <a:lstStyle/>
+          <a:p>
+            <a:pPr algn="l" marL="0" indent="0">
+              <a:defRPr sz="1900" b="0">
+                <a:solidFill>
+                  <a:srgbClr val="030B20"/>
+                </a:solidFill>
+                <a:latin typeface="Inter"/>
+              </a:defRPr>
+              <a:lnSpc>
+                <a:spcPct val="112000"/>
+              </a:lnSpc>
+              <a:spcAft>
+                <a:spcPts val="1200"/>
+              </a:spcAft>
+              <a:buNone/>
+            </a:pPr>
+            <a:r>
+              <a:t>Delete this guidance slide before presenting.</a:t>
+            </a:r>
+          </a:p>
+        </p:txBody>
+      </p:sp>
+      <p:sp>
+        <p:nvSpPr>
+          <p:cNvPr id="7" name="Placeholder 2"/>
+          <p:cNvSpPr txBox="1"/>
+          <p:nvPr>
+            <p:ph type="body" idx="2"/>
+          </p:nvPr>
+        </p:nvSpPr>
+        <p:spPr>
+          <a:xfrm>
+            <a:off x="640080" y="2514600"/>
+            <a:ext cx="5120640" cy="2651760"/>
+          </a:xfrm>
+          <a:prstGeom prst="rect">
+            <a:avLst/>
+          </a:prstGeom>
+          <a:noFill/>
+        </p:spPr>
+        <p:txBody>
+          <a:bodyPr wrap="square" lIns="0" rIns="0" tIns="0" bIns="0">
+            <a:spAutoFit/>
+          </a:bodyPr>
+          <a:lstStyle/>
+          <a:p>
+            <a:pPr algn="l" marL="0" indent="0">
+              <a:defRPr sz="2300" b="0">
+                <a:solidFill>
+                  <a:srgbClr val="030B20"/>
+                </a:solidFill>
+                <a:latin typeface="Inter"/>
+              </a:defRPr>
+              <a:lnSpc>
+                <a:spcPct val="112000"/>
+              </a:lnSpc>
+              <a:spcAft>
+                <a:spcPts val="1200"/>
+              </a:spcAft>
+              <a:buNone/>
+            </a:pPr>
+            <a:r>
+              <a:t>Use the layouts</a:t>
+            </a:r>
+          </a:p>
+          <a:p>
+            <a:pPr algn="l" marL="0" indent="0">
+              <a:defRPr sz="2300" b="0">
+                <a:solidFill>
+                  <a:srgbClr val="030B20"/>
+                </a:solidFill>
+                <a:latin typeface="Inter"/>
+              </a:defRPr>
+              <a:lnSpc>
+                <a:spcPct val="112000"/>
+              </a:lnSpc>
+              <a:spcAft>
+                <a:spcPts val="1200"/>
+              </a:spcAft>
+              <a:buNone/>
+            </a:pPr>
+            <a:r>
+              <a:t>Install Inter, then choose Home → New Slide. Replace bracketed prompts. Duplicate the chart or table example to retain its styling.</a:t>
+            </a:r>
+          </a:p>
+        </p:txBody>
+      </p:sp>
+      <p:sp>
+        <p:nvSpPr>
+          <p:cNvPr id="8" name="Placeholder 3"/>
+          <p:cNvSpPr txBox="1"/>
+          <p:nvPr>
+            <p:ph type="body" idx="3"/>
+          </p:nvPr>
+        </p:nvSpPr>
+        <p:spPr>
+          <a:xfrm>
+            <a:off x="6400800" y="2514600"/>
+            <a:ext cx="5120640" cy="2651760"/>
+          </a:xfrm>
+          <a:prstGeom prst="rect">
+            <a:avLst/>
+          </a:prstGeom>
+          <a:noFill/>
+        </p:spPr>
+        <p:txBody>
+          <a:bodyPr wrap="square" lIns="0" rIns="0" tIns="0" bIns="0">
+            <a:spAutoFit/>
+          </a:bodyPr>
+          <a:lstStyle/>
+          <a:p>
+            <a:pPr algn="l" marL="0" indent="0">
+              <a:defRPr sz="2300" b="0">
+                <a:solidFill>
+                  <a:srgbClr val="030B20"/>
+                </a:solidFill>
+                <a:latin typeface="Inter"/>
+              </a:defRPr>
+              <a:lnSpc>
+                <a:spcPct val="112000"/>
+              </a:lnSpc>
+              <a:spcAft>
+                <a:spcPts val="1200"/>
+              </a:spcAft>
+              <a:buNone/>
+            </a:pPr>
+            <a:r>
+              <a:t>Keep it clear</a:t>
+            </a:r>
+          </a:p>
+          <a:p>
+            <a:pPr algn="l" marL="0" indent="0">
+              <a:defRPr sz="2300" b="0">
+                <a:solidFill>
+                  <a:srgbClr val="030B20"/>
+                </a:solidFill>
+                <a:latin typeface="Inter"/>
+              </a:defRPr>
+              <a:lnSpc>
+                <a:spcPct val="112000"/>
+              </a:lnSpc>
+              <a:spcAft>
+                <a:spcPts val="1200"/>
+              </a:spcAft>
+              <a:buNone/>
+            </a:pPr>
+            <a:r>
+              <a:t>One idea per slide. Keep the selected light or dark palette. Preserve the gradient band and keep text on solid grounds. Aim for 20pt or larger body text.</a:t>
+            </a:r>
+          </a:p>
+        </p:txBody>
+      </p:sp>
+      <p:sp>
+        <p:nvSpPr>
           <p:cNvPr id="9" name="Rectangle 8"/>
           <p:cNvSpPr/>
           <p:nvPr/>
         </p:nvSpPr>
         <p:spPr>
           <a:xfrm>
-            <a:off x="1188719" y="5486400"/>
+            <a:off x="640080" y="5486400"/>
             <a:ext cx="365760" cy="228600"/>
           </a:xfrm>
           <a:prstGeom prst="rect">
             <a:avLst/>
           </a:prstGeom>
           <a:solidFill>
-            <a:srgbClr val="4F97E9"/>
+            <a:srgbClr val="082952"/>
           </a:solidFill>
           <a:ln>
             <a:noFill/>
@@ -2315,14 +2412,14 @@
         </p:nvSpPr>
         <p:spPr>
           <a:xfrm>
-            <a:off x="1737360" y="5486400"/>
+            <a:off x="1188719" y="5486400"/>
             <a:ext cx="365760" cy="228600"/>
           </a:xfrm>
           <a:prstGeom prst="rect">
             <a:avLst/>
           </a:prstGeom>
           <a:solidFill>
-            <a:srgbClr val="FFB604"/>
+            <a:srgbClr val="4F97E9"/>
           </a:solidFill>
           <a:ln>
             <a:noFill/>
@@ -2359,14 +2456,14 @@
         </p:nvSpPr>
         <p:spPr>
           <a:xfrm>
-            <a:off x="2286000" y="5486400"/>
+            <a:off x="1737360" y="5486400"/>
             <a:ext cx="365760" cy="228600"/>
           </a:xfrm>
           <a:prstGeom prst="rect">
             <a:avLst/>
           </a:prstGeom>
           <a:solidFill>
-            <a:srgbClr val="FFFEFA"/>
+            <a:srgbClr val="FFB604"/>
           </a:solidFill>
           <a:ln>
             <a:noFill/>
@@ -2397,7 +2494,51 @@
       </p:sp>
       <p:sp>
         <p:nvSpPr>
-          <p:cNvPr id="12" name="Full guidance: plan-b.foundation/brandin"/>
+          <p:cNvPr id="12" name="Rectangle 11"/>
+          <p:cNvSpPr/>
+          <p:nvPr/>
+        </p:nvSpPr>
+        <p:spPr>
+          <a:xfrm>
+            <a:off x="2286000" y="5486400"/>
+            <a:ext cx="365760" cy="228600"/>
+          </a:xfrm>
+          <a:prstGeom prst="rect">
+            <a:avLst/>
+          </a:prstGeom>
+          <a:solidFill>
+            <a:srgbClr val="FFFEFA"/>
+          </a:solidFill>
+          <a:ln>
+            <a:noFill/>
+          </a:ln>
+          <a:effectLst/>
+        </p:spPr>
+        <p:style>
+          <a:lnRef idx="1">
+            <a:schemeClr val="accent1"/>
+          </a:lnRef>
+          <a:fillRef idx="3">
+            <a:schemeClr val="accent1"/>
+          </a:fillRef>
+          <a:effectRef idx="2">
+            <a:schemeClr val="accent1"/>
+          </a:effectRef>
+          <a:fontRef idx="minor">
+            <a:schemeClr val="lt1"/>
+          </a:fontRef>
+        </p:style>
+        <p:txBody>
+          <a:bodyPr rtlCol="0" anchor="ctr"/>
+          <a:lstStyle/>
+          <a:p>
+            <a:pPr algn="ctr"/>
+          </a:p>
+        </p:txBody>
+      </p:sp>
+      <p:sp>
+        <p:nvSpPr>
+          <p:cNvPr id="13" name="Full guidance: plan-b.foundation/brandin"/>
           <p:cNvSpPr txBox="1"/>
           <p:nvPr/>
         </p:nvSpPr>
@@ -2453,7 +2594,7 @@
 
 <file path=ppt/slideLayouts/slideLayout11.xml><?xml version="1.0" encoding="utf-8"?>
 <p:sldLayout xmlns:a="http://schemas.openxmlformats.org/drawingml/2006/main" xmlns:r="http://schemas.openxmlformats.org/officeDocument/2006/relationships" xmlns:p="http://schemas.openxmlformats.org/presentationml/2006/main" type="cust" preserve="1" showMasterSp="1">
-  <p:cSld name="Plan B / Blank">
+  <p:cSld name="Plan B / Light / Blank">
     <p:bg>
       <p:bgPr>
         <a:solidFill>
@@ -2476,6 +2617,64 @@
           <a:chExt cx="0" cy="0"/>
         </a:xfrm>
       </p:grpSpPr>
+      <p:sp>
+        <p:nvSpPr>
+          <p:cNvPr id="2" name="Plan B / Network energy gradient"/>
+          <p:cNvSpPr/>
+          <p:nvPr/>
+        </p:nvSpPr>
+        <p:spPr>
+          <a:xfrm>
+            <a:off x="594360" y="6163056"/>
+            <a:ext cx="10972800" cy="91440"/>
+          </a:xfrm>
+          <a:prstGeom prst="rect">
+            <a:avLst/>
+          </a:prstGeom>
+          <a:gradFill rotWithShape="1">
+            <a:gsLst>
+              <a:gs pos="0">
+                <a:srgbClr val="FFB604"/>
+              </a:gs>
+              <a:gs pos="28000">
+                <a:srgbClr val="FF5DB1"/>
+              </a:gs>
+              <a:gs pos="58000">
+                <a:srgbClr val="7468FF"/>
+              </a:gs>
+              <a:gs pos="100000">
+                <a:srgbClr val="23F5FF"/>
+              </a:gs>
+            </a:gsLst>
+            <a:lin ang="0" scaled="1"/>
+          </a:gradFill>
+          <a:ln>
+            <a:noFill/>
+          </a:ln>
+          <a:effectLst/>
+        </p:spPr>
+        <p:style>
+          <a:lnRef idx="1">
+            <a:schemeClr val="accent1"/>
+          </a:lnRef>
+          <a:fillRef idx="3">
+            <a:schemeClr val="accent1"/>
+          </a:fillRef>
+          <a:effectRef idx="2">
+            <a:schemeClr val="accent1"/>
+          </a:effectRef>
+          <a:fontRef idx="minor">
+            <a:schemeClr val="lt1"/>
+          </a:fontRef>
+        </p:style>
+        <p:txBody>
+          <a:bodyPr rtlCol="0" anchor="ctr"/>
+          <a:lstStyle/>
+          <a:p>
+            <a:pPr algn="ctr"/>
+          </a:p>
+        </p:txBody>
+      </p:sp>
     </p:spTree>
     <p:extLst>
       <p:ext uri="{BB962C8B-B14F-4D97-AF65-F5344CB8AC3E}">
@@ -2491,11 +2690,11 @@
 
 <file path=ppt/slideLayouts/slideLayout2.xml><?xml version="1.0" encoding="utf-8"?>
 <p:sldLayout xmlns:a="http://schemas.openxmlformats.org/drawingml/2006/main" xmlns:r="http://schemas.openxmlformats.org/officeDocument/2006/relationships" xmlns:p="http://schemas.openxmlformats.org/presentationml/2006/main" type="cust" preserve="1" showMasterSp="1">
-  <p:cSld name="Plan B / Section">
+  <p:cSld name="Plan B / Light / Section">
     <p:bg>
       <p:bgPr>
         <a:solidFill>
-          <a:srgbClr val="082952"/>
+          <a:srgbClr val="F3F9FF"/>
         </a:solidFill>
         <a:effectLst/>
       </p:bgPr>
@@ -2516,7 +2715,65 @@
       </p:grpSpPr>
       <p:sp>
         <p:nvSpPr>
-          <p:cNvPr id="2" name="Plan B Foundation"/>
+          <p:cNvPr id="2" name="Plan B / Network energy gradient"/>
+          <p:cNvSpPr/>
+          <p:nvPr/>
+        </p:nvSpPr>
+        <p:spPr>
+          <a:xfrm>
+            <a:off x="594360" y="6163056"/>
+            <a:ext cx="10972800" cy="91440"/>
+          </a:xfrm>
+          <a:prstGeom prst="rect">
+            <a:avLst/>
+          </a:prstGeom>
+          <a:gradFill rotWithShape="1">
+            <a:gsLst>
+              <a:gs pos="0">
+                <a:srgbClr val="FFB604"/>
+              </a:gs>
+              <a:gs pos="28000">
+                <a:srgbClr val="FF5DB1"/>
+              </a:gs>
+              <a:gs pos="58000">
+                <a:srgbClr val="7468FF"/>
+              </a:gs>
+              <a:gs pos="100000">
+                <a:srgbClr val="23F5FF"/>
+              </a:gs>
+            </a:gsLst>
+            <a:lin ang="0" scaled="1"/>
+          </a:gradFill>
+          <a:ln>
+            <a:noFill/>
+          </a:ln>
+          <a:effectLst/>
+        </p:spPr>
+        <p:style>
+          <a:lnRef idx="1">
+            <a:schemeClr val="accent1"/>
+          </a:lnRef>
+          <a:fillRef idx="3">
+            <a:schemeClr val="accent1"/>
+          </a:fillRef>
+          <a:effectRef idx="2">
+            <a:schemeClr val="accent1"/>
+          </a:effectRef>
+          <a:fontRef idx="minor">
+            <a:schemeClr val="lt1"/>
+          </a:fontRef>
+        </p:style>
+        <p:txBody>
+          <a:bodyPr rtlCol="0" anchor="ctr"/>
+          <a:lstStyle/>
+          <a:p>
+            <a:pPr algn="ctr"/>
+          </a:p>
+        </p:txBody>
+      </p:sp>
+      <p:sp>
+        <p:nvSpPr>
+          <p:cNvPr id="3" name="Plan B Foundation"/>
           <p:cNvSpPr txBox="1"/>
           <p:nvPr/>
         </p:nvSpPr>
@@ -2539,7 +2796,7 @@
             <a:pPr algn="l" marL="0" indent="0">
               <a:defRPr sz="1100" b="1">
                 <a:solidFill>
-                  <a:srgbClr val="FFFEFA"/>
+                  <a:srgbClr val="082952"/>
                 </a:solidFill>
                 <a:latin typeface="Inter"/>
               </a:defRPr>
@@ -2559,7 +2816,7 @@
       </p:sp>
       <p:sp>
         <p:nvSpPr>
-          <p:cNvPr id="3" name="Civic Digital Commons"/>
+          <p:cNvPr id="4" name="Civic Digital Commons"/>
           <p:cNvSpPr txBox="1"/>
           <p:nvPr/>
         </p:nvSpPr>
@@ -2582,7 +2839,7 @@
             <a:pPr algn="l" marL="0" indent="0">
               <a:defRPr sz="1100" b="0">
                 <a:solidFill>
-                  <a:srgbClr val="FFFEFA"/>
+                  <a:srgbClr val="082952"/>
                 </a:solidFill>
                 <a:latin typeface="Inter"/>
               </a:defRPr>
@@ -2602,7 +2859,7 @@
       </p:sp>
       <p:sp>
         <p:nvSpPr>
-          <p:cNvPr id="4" name="Placeholder 0"/>
+          <p:cNvPr id="5" name="Placeholder 0"/>
           <p:cNvSpPr txBox="1"/>
           <p:nvPr>
             <p:ph type="title" idx="0"/>
@@ -2627,7 +2884,7 @@
             <a:pPr algn="l" marL="0" indent="0">
               <a:defRPr sz="4800" b="1">
                 <a:solidFill>
-                  <a:srgbClr val="FFFEFA"/>
+                  <a:srgbClr val="082952"/>
                 </a:solidFill>
                 <a:latin typeface="Inter"/>
               </a:defRPr>
@@ -2647,7 +2904,7 @@
       </p:sp>
       <p:sp>
         <p:nvSpPr>
-          <p:cNvPr id="5" name="Placeholder 1"/>
+          <p:cNvPr id="6" name="Placeholder 1"/>
           <p:cNvSpPr txBox="1"/>
           <p:nvPr>
             <p:ph type="body" idx="1"/>
@@ -2672,7 +2929,7 @@
             <a:pPr algn="l" marL="0" indent="0">
               <a:defRPr sz="2500" b="0">
                 <a:solidFill>
-                  <a:srgbClr val="FFFEFA"/>
+                  <a:srgbClr val="030B20"/>
                 </a:solidFill>
                 <a:latin typeface="Inter"/>
               </a:defRPr>
@@ -2692,21 +2949,35 @@
       </p:sp>
       <p:sp>
         <p:nvSpPr>
-          <p:cNvPr id="6" name="Rectangle 5"/>
+          <p:cNvPr id="7" name="Plan B / Network energy gradient"/>
           <p:cNvSpPr/>
           <p:nvPr/>
         </p:nvSpPr>
         <p:spPr>
           <a:xfrm>
-            <a:off x="777240" y="1325880"/>
-            <a:ext cx="594360" cy="73152"/>
-          </a:xfrm>
-          <a:prstGeom prst="rect">
-            <a:avLst/>
-          </a:prstGeom>
-          <a:solidFill>
-            <a:srgbClr val="FFB604"/>
-          </a:solidFill>
+            <a:off x="777240" y="1234440"/>
+            <a:ext cx="3291840" cy="201168"/>
+          </a:xfrm>
+          <a:prstGeom prst="rect">
+            <a:avLst/>
+          </a:prstGeom>
+          <a:gradFill rotWithShape="1">
+            <a:gsLst>
+              <a:gs pos="0">
+                <a:srgbClr val="FFB604"/>
+              </a:gs>
+              <a:gs pos="28000">
+                <a:srgbClr val="FF5DB1"/>
+              </a:gs>
+              <a:gs pos="58000">
+                <a:srgbClr val="7468FF"/>
+              </a:gs>
+              <a:gs pos="100000">
+                <a:srgbClr val="23F5FF"/>
+              </a:gs>
+            </a:gsLst>
+            <a:lin ang="0" scaled="1"/>
+          </a:gradFill>
           <a:ln>
             <a:noFill/>
           </a:ln>
@@ -2749,7 +3020,7 @@
 
 <file path=ppt/slideLayouts/slideLayout3.xml><?xml version="1.0" encoding="utf-8"?>
 <p:sldLayout xmlns:a="http://schemas.openxmlformats.org/drawingml/2006/main" xmlns:r="http://schemas.openxmlformats.org/officeDocument/2006/relationships" xmlns:p="http://schemas.openxmlformats.org/presentationml/2006/main" type="cust" preserve="1" showMasterSp="1">
-  <p:cSld name="Plan B / Title and content">
+  <p:cSld name="Plan B / Light / Title and content">
     <p:bg>
       <p:bgPr>
         <a:solidFill>
@@ -2774,282 +3045,35 @@
       </p:grpSpPr>
       <p:sp>
         <p:nvSpPr>
-          <p:cNvPr id="2" name="Plan B Foundation"/>
-          <p:cNvSpPr txBox="1"/>
-          <p:nvPr/>
-        </p:nvSpPr>
-        <p:spPr>
-          <a:xfrm>
-            <a:off x="594360" y="6382512"/>
-            <a:ext cx="3657600" cy="228600"/>
-          </a:xfrm>
-          <a:prstGeom prst="rect">
-            <a:avLst/>
-          </a:prstGeom>
-          <a:noFill/>
-        </p:spPr>
-        <p:txBody>
-          <a:bodyPr wrap="square" lIns="0" rIns="0" tIns="0" bIns="0">
-            <a:spAutoFit/>
-          </a:bodyPr>
-          <a:lstStyle/>
-          <a:p>
-            <a:pPr algn="l" marL="0" indent="0">
-              <a:defRPr sz="1100" b="1">
-                <a:solidFill>
-                  <a:srgbClr val="082952"/>
-                </a:solidFill>
-                <a:latin typeface="Inter"/>
-              </a:defRPr>
-              <a:lnSpc>
-                <a:spcPct val="112000"/>
-              </a:lnSpc>
-              <a:spcAft>
-                <a:spcPts val="1200"/>
-              </a:spcAft>
-              <a:buNone/>
-            </a:pPr>
-            <a:r>
-              <a:t>Plan B Foundation</a:t>
-            </a:r>
-          </a:p>
-        </p:txBody>
-      </p:sp>
-      <p:sp>
-        <p:nvSpPr>
-          <p:cNvPr id="3" name="Civic Digital Commons"/>
-          <p:cNvSpPr txBox="1"/>
-          <p:nvPr/>
-        </p:nvSpPr>
-        <p:spPr>
-          <a:xfrm>
-            <a:off x="8595360" y="6382512"/>
-            <a:ext cx="2971800" cy="228600"/>
-          </a:xfrm>
-          <a:prstGeom prst="rect">
-            <a:avLst/>
-          </a:prstGeom>
-          <a:noFill/>
-        </p:spPr>
-        <p:txBody>
-          <a:bodyPr wrap="square" lIns="0" rIns="0" tIns="0" bIns="0">
-            <a:spAutoFit/>
-          </a:bodyPr>
-          <a:lstStyle/>
-          <a:p>
-            <a:pPr algn="l" marL="0" indent="0">
-              <a:defRPr sz="1100" b="0">
-                <a:solidFill>
-                  <a:srgbClr val="082952"/>
-                </a:solidFill>
-                <a:latin typeface="Inter"/>
-              </a:defRPr>
-              <a:lnSpc>
-                <a:spcPct val="112000"/>
-              </a:lnSpc>
-              <a:spcAft>
-                <a:spcPts val="1200"/>
-              </a:spcAft>
-              <a:buNone/>
-            </a:pPr>
-            <a:r>
-              <a:t>Civic Digital Commons</a:t>
-            </a:r>
-          </a:p>
-        </p:txBody>
-      </p:sp>
-      <p:sp>
-        <p:nvSpPr>
-          <p:cNvPr id="4" name="Placeholder 0"/>
-          <p:cNvSpPr txBox="1"/>
-          <p:nvPr>
-            <p:ph type="title" idx="0"/>
-          </p:nvPr>
-        </p:nvSpPr>
-        <p:spPr>
-          <a:xfrm>
-            <a:off x="594360" y="502920"/>
-            <a:ext cx="10972800" cy="1005840"/>
-          </a:xfrm>
-          <a:prstGeom prst="rect">
-            <a:avLst/>
-          </a:prstGeom>
-          <a:noFill/>
-        </p:spPr>
-        <p:txBody>
-          <a:bodyPr wrap="square" lIns="0" rIns="0" tIns="0" bIns="0">
-            <a:spAutoFit/>
-          </a:bodyPr>
-          <a:lstStyle/>
-          <a:p>
-            <a:pPr algn="l" marL="0" indent="0">
-              <a:defRPr sz="3600" b="1">
-                <a:solidFill>
-                  <a:srgbClr val="082952"/>
-                </a:solidFill>
-                <a:latin typeface="Inter"/>
-              </a:defRPr>
-              <a:lnSpc>
-                <a:spcPct val="112000"/>
-              </a:lnSpc>
-              <a:spcAft>
-                <a:spcPts val="1200"/>
-              </a:spcAft>
-              <a:buNone/>
-            </a:pPr>
-            <a:r>
-              <a:t>[Lead with the point]</a:t>
-            </a:r>
-          </a:p>
-        </p:txBody>
-      </p:sp>
-      <p:sp>
-        <p:nvSpPr>
-          <p:cNvPr id="5" name="Placeholder 1"/>
-          <p:cNvSpPr txBox="1"/>
-          <p:nvPr>
-            <p:ph type="body" idx="1"/>
-          </p:nvPr>
-        </p:nvSpPr>
-        <p:spPr>
-          <a:xfrm>
-            <a:off x="594360" y="1508760"/>
-            <a:ext cx="10698480" cy="685800"/>
-          </a:xfrm>
-          <a:prstGeom prst="rect">
-            <a:avLst/>
-          </a:prstGeom>
-          <a:noFill/>
-        </p:spPr>
-        <p:txBody>
-          <a:bodyPr wrap="square" lIns="0" rIns="0" tIns="0" bIns="0">
-            <a:spAutoFit/>
-          </a:bodyPr>
-          <a:lstStyle/>
-          <a:p>
-            <a:pPr algn="l" marL="0" indent="0">
-              <a:defRPr sz="1900" b="0">
-                <a:solidFill>
-                  <a:srgbClr val="030B20"/>
-                </a:solidFill>
-                <a:latin typeface="Inter"/>
-              </a:defRPr>
-              <a:lnSpc>
-                <a:spcPct val="112000"/>
-              </a:lnSpc>
-              <a:spcAft>
-                <a:spcPts val="1200"/>
-              </a:spcAft>
-              <a:buNone/>
-            </a:pPr>
-            <a:r>
-              <a:t>[Explain why this matters to the audience]</a:t>
-            </a:r>
-          </a:p>
-        </p:txBody>
-      </p:sp>
-      <p:sp>
-        <p:nvSpPr>
-          <p:cNvPr id="6" name="Placeholder 2"/>
-          <p:cNvSpPr txBox="1"/>
-          <p:nvPr>
-            <p:ph type="body" idx="2"/>
-          </p:nvPr>
-        </p:nvSpPr>
-        <p:spPr>
-          <a:xfrm>
-            <a:off x="777240" y="2606040"/>
-            <a:ext cx="10332720" cy="2651760"/>
-          </a:xfrm>
-          <a:prstGeom prst="rect">
-            <a:avLst/>
-          </a:prstGeom>
-          <a:noFill/>
-        </p:spPr>
-        <p:txBody>
-          <a:bodyPr wrap="square" lIns="0" rIns="0" tIns="0" bIns="0">
-            <a:spAutoFit/>
-          </a:bodyPr>
-          <a:lstStyle/>
-          <a:p>
-            <a:pPr algn="l" marL="0" indent="0">
-              <a:defRPr sz="2700" b="0">
-                <a:solidFill>
-                  <a:srgbClr val="030B20"/>
-                </a:solidFill>
-                <a:latin typeface="Inter"/>
-              </a:defRPr>
-              <a:lnSpc>
-                <a:spcPct val="112000"/>
-              </a:lnSpc>
-              <a:spcAft>
-                <a:spcPts val="1200"/>
-              </a:spcAft>
-              <a:buNone/>
-            </a:pPr>
-            <a:r>
-              <a:t>[First idea — one concise sentence]</a:t>
-            </a:r>
-          </a:p>
-          <a:p>
-            <a:pPr algn="l" marL="0" indent="0">
-              <a:defRPr sz="2700" b="0">
-                <a:solidFill>
-                  <a:srgbClr val="030B20"/>
-                </a:solidFill>
-                <a:latin typeface="Inter"/>
-              </a:defRPr>
-              <a:lnSpc>
-                <a:spcPct val="112000"/>
-              </a:lnSpc>
-              <a:spcAft>
-                <a:spcPts val="1200"/>
-              </a:spcAft>
-              <a:buNone/>
-            </a:pPr>
-            <a:r>
-              <a:t>[Second idea — one concise sentence]</a:t>
-            </a:r>
-          </a:p>
-          <a:p>
-            <a:pPr algn="l" marL="0" indent="0">
-              <a:defRPr sz="2700" b="0">
-                <a:solidFill>
-                  <a:srgbClr val="030B20"/>
-                </a:solidFill>
-                <a:latin typeface="Inter"/>
-              </a:defRPr>
-              <a:lnSpc>
-                <a:spcPct val="112000"/>
-              </a:lnSpc>
-              <a:spcAft>
-                <a:spcPts val="1200"/>
-              </a:spcAft>
-              <a:buNone/>
-            </a:pPr>
-            <a:r>
-              <a:t>[Third idea — one concise sentence]</a:t>
-            </a:r>
-          </a:p>
-        </p:txBody>
-      </p:sp>
-      <p:sp>
-        <p:nvSpPr>
-          <p:cNvPr id="7" name="Rectangle 6"/>
+          <p:cNvPr id="2" name="Plan B / Network energy gradient"/>
           <p:cNvSpPr/>
           <p:nvPr/>
         </p:nvSpPr>
         <p:spPr>
           <a:xfrm>
-            <a:off x="594360" y="2487168"/>
-            <a:ext cx="64008" cy="2377440"/>
-          </a:xfrm>
-          <a:prstGeom prst="rect">
-            <a:avLst/>
-          </a:prstGeom>
-          <a:solidFill>
-            <a:srgbClr val="4F97E9"/>
-          </a:solidFill>
+            <a:off x="594360" y="6163056"/>
+            <a:ext cx="10972800" cy="91440"/>
+          </a:xfrm>
+          <a:prstGeom prst="rect">
+            <a:avLst/>
+          </a:prstGeom>
+          <a:gradFill rotWithShape="1">
+            <a:gsLst>
+              <a:gs pos="0">
+                <a:srgbClr val="FFB604"/>
+              </a:gs>
+              <a:gs pos="28000">
+                <a:srgbClr val="FF5DB1"/>
+              </a:gs>
+              <a:gs pos="58000">
+                <a:srgbClr val="7468FF"/>
+              </a:gs>
+              <a:gs pos="100000">
+                <a:srgbClr val="23F5FF"/>
+              </a:gs>
+            </a:gsLst>
+            <a:lin ang="0" scaled="1"/>
+          </a:gradFill>
           <a:ln>
             <a:noFill/>
           </a:ln>
@@ -3074,6 +3098,267 @@
           <a:lstStyle/>
           <a:p>
             <a:pPr algn="ctr"/>
+          </a:p>
+        </p:txBody>
+      </p:sp>
+      <p:sp>
+        <p:nvSpPr>
+          <p:cNvPr id="3" name="Plan B Foundation"/>
+          <p:cNvSpPr txBox="1"/>
+          <p:nvPr/>
+        </p:nvSpPr>
+        <p:spPr>
+          <a:xfrm>
+            <a:off x="594360" y="6382512"/>
+            <a:ext cx="3657600" cy="228600"/>
+          </a:xfrm>
+          <a:prstGeom prst="rect">
+            <a:avLst/>
+          </a:prstGeom>
+          <a:noFill/>
+        </p:spPr>
+        <p:txBody>
+          <a:bodyPr wrap="square" lIns="0" rIns="0" tIns="0" bIns="0">
+            <a:spAutoFit/>
+          </a:bodyPr>
+          <a:lstStyle/>
+          <a:p>
+            <a:pPr algn="l" marL="0" indent="0">
+              <a:defRPr sz="1100" b="1">
+                <a:solidFill>
+                  <a:srgbClr val="082952"/>
+                </a:solidFill>
+                <a:latin typeface="Inter"/>
+              </a:defRPr>
+              <a:lnSpc>
+                <a:spcPct val="112000"/>
+              </a:lnSpc>
+              <a:spcAft>
+                <a:spcPts val="1200"/>
+              </a:spcAft>
+              <a:buNone/>
+            </a:pPr>
+            <a:r>
+              <a:t>Plan B Foundation</a:t>
+            </a:r>
+          </a:p>
+        </p:txBody>
+      </p:sp>
+      <p:sp>
+        <p:nvSpPr>
+          <p:cNvPr id="4" name="Civic Digital Commons"/>
+          <p:cNvSpPr txBox="1"/>
+          <p:nvPr/>
+        </p:nvSpPr>
+        <p:spPr>
+          <a:xfrm>
+            <a:off x="8595360" y="6382512"/>
+            <a:ext cx="2971800" cy="228600"/>
+          </a:xfrm>
+          <a:prstGeom prst="rect">
+            <a:avLst/>
+          </a:prstGeom>
+          <a:noFill/>
+        </p:spPr>
+        <p:txBody>
+          <a:bodyPr wrap="square" lIns="0" rIns="0" tIns="0" bIns="0">
+            <a:spAutoFit/>
+          </a:bodyPr>
+          <a:lstStyle/>
+          <a:p>
+            <a:pPr algn="l" marL="0" indent="0">
+              <a:defRPr sz="1100" b="0">
+                <a:solidFill>
+                  <a:srgbClr val="082952"/>
+                </a:solidFill>
+                <a:latin typeface="Inter"/>
+              </a:defRPr>
+              <a:lnSpc>
+                <a:spcPct val="112000"/>
+              </a:lnSpc>
+              <a:spcAft>
+                <a:spcPts val="1200"/>
+              </a:spcAft>
+              <a:buNone/>
+            </a:pPr>
+            <a:r>
+              <a:t>Civic Digital Commons</a:t>
+            </a:r>
+          </a:p>
+        </p:txBody>
+      </p:sp>
+      <p:sp>
+        <p:nvSpPr>
+          <p:cNvPr id="5" name="Placeholder 0"/>
+          <p:cNvSpPr txBox="1"/>
+          <p:nvPr>
+            <p:ph type="title" idx="0"/>
+          </p:nvPr>
+        </p:nvSpPr>
+        <p:spPr>
+          <a:xfrm>
+            <a:off x="594360" y="502920"/>
+            <a:ext cx="10972800" cy="1005840"/>
+          </a:xfrm>
+          <a:prstGeom prst="rect">
+            <a:avLst/>
+          </a:prstGeom>
+          <a:noFill/>
+        </p:spPr>
+        <p:txBody>
+          <a:bodyPr wrap="square" lIns="0" rIns="0" tIns="0" bIns="0">
+            <a:spAutoFit/>
+          </a:bodyPr>
+          <a:lstStyle/>
+          <a:p>
+            <a:pPr algn="l" marL="0" indent="0">
+              <a:defRPr sz="3600" b="1">
+                <a:solidFill>
+                  <a:srgbClr val="082952"/>
+                </a:solidFill>
+                <a:latin typeface="Inter"/>
+              </a:defRPr>
+              <a:lnSpc>
+                <a:spcPct val="112000"/>
+              </a:lnSpc>
+              <a:spcAft>
+                <a:spcPts val="1200"/>
+              </a:spcAft>
+              <a:buNone/>
+            </a:pPr>
+            <a:r>
+              <a:t>[Lead with the point]</a:t>
+            </a:r>
+          </a:p>
+        </p:txBody>
+      </p:sp>
+      <p:sp>
+        <p:nvSpPr>
+          <p:cNvPr id="6" name="Placeholder 1"/>
+          <p:cNvSpPr txBox="1"/>
+          <p:nvPr>
+            <p:ph type="body" idx="1"/>
+          </p:nvPr>
+        </p:nvSpPr>
+        <p:spPr>
+          <a:xfrm>
+            <a:off x="594360" y="1508760"/>
+            <a:ext cx="10698480" cy="685800"/>
+          </a:xfrm>
+          <a:prstGeom prst="rect">
+            <a:avLst/>
+          </a:prstGeom>
+          <a:noFill/>
+        </p:spPr>
+        <p:txBody>
+          <a:bodyPr wrap="square" lIns="0" rIns="0" tIns="0" bIns="0">
+            <a:spAutoFit/>
+          </a:bodyPr>
+          <a:lstStyle/>
+          <a:p>
+            <a:pPr algn="l" marL="0" indent="0">
+              <a:defRPr sz="1900" b="0">
+                <a:solidFill>
+                  <a:srgbClr val="030B20"/>
+                </a:solidFill>
+                <a:latin typeface="Inter"/>
+              </a:defRPr>
+              <a:lnSpc>
+                <a:spcPct val="112000"/>
+              </a:lnSpc>
+              <a:spcAft>
+                <a:spcPts val="1200"/>
+              </a:spcAft>
+              <a:buNone/>
+            </a:pPr>
+            <a:r>
+              <a:t>[Explain why this matters to the audience]</a:t>
+            </a:r>
+          </a:p>
+        </p:txBody>
+      </p:sp>
+      <p:sp>
+        <p:nvSpPr>
+          <p:cNvPr id="7" name="Placeholder 2"/>
+          <p:cNvSpPr txBox="1"/>
+          <p:nvPr>
+            <p:ph type="body" idx="2"/>
+          </p:nvPr>
+        </p:nvSpPr>
+        <p:spPr>
+          <a:xfrm>
+            <a:off x="777240" y="2606040"/>
+            <a:ext cx="10332720" cy="2651760"/>
+          </a:xfrm>
+          <a:prstGeom prst="rect">
+            <a:avLst/>
+          </a:prstGeom>
+          <a:noFill/>
+        </p:spPr>
+        <p:txBody>
+          <a:bodyPr wrap="square" lIns="0" rIns="0" tIns="0" bIns="0">
+            <a:spAutoFit/>
+          </a:bodyPr>
+          <a:lstStyle/>
+          <a:p>
+            <a:pPr algn="l" marL="0" indent="0">
+              <a:defRPr sz="2700" b="0">
+                <a:solidFill>
+                  <a:srgbClr val="030B20"/>
+                </a:solidFill>
+                <a:latin typeface="Inter"/>
+              </a:defRPr>
+              <a:lnSpc>
+                <a:spcPct val="112000"/>
+              </a:lnSpc>
+              <a:spcAft>
+                <a:spcPts val="1200"/>
+              </a:spcAft>
+              <a:buNone/>
+            </a:pPr>
+            <a:r>
+              <a:t>[First idea — one concise sentence]</a:t>
+            </a:r>
+          </a:p>
+          <a:p>
+            <a:pPr algn="l" marL="0" indent="0">
+              <a:defRPr sz="2700" b="0">
+                <a:solidFill>
+                  <a:srgbClr val="030B20"/>
+                </a:solidFill>
+                <a:latin typeface="Inter"/>
+              </a:defRPr>
+              <a:lnSpc>
+                <a:spcPct val="112000"/>
+              </a:lnSpc>
+              <a:spcAft>
+                <a:spcPts val="1200"/>
+              </a:spcAft>
+              <a:buNone/>
+            </a:pPr>
+            <a:r>
+              <a:t>[Second idea — one concise sentence]</a:t>
+            </a:r>
+          </a:p>
+          <a:p>
+            <a:pPr algn="l" marL="0" indent="0">
+              <a:defRPr sz="2700" b="0">
+                <a:solidFill>
+                  <a:srgbClr val="030B20"/>
+                </a:solidFill>
+                <a:latin typeface="Inter"/>
+              </a:defRPr>
+              <a:lnSpc>
+                <a:spcPct val="112000"/>
+              </a:lnSpc>
+              <a:spcAft>
+                <a:spcPts val="1200"/>
+              </a:spcAft>
+              <a:buNone/>
+            </a:pPr>
+            <a:r>
+              <a:t>[Third idea — one concise sentence]</a:t>
+            </a:r>
           </a:p>
         </p:txBody>
       </p:sp>
@@ -3092,7 +3377,7 @@
 
 <file path=ppt/slideLayouts/slideLayout4.xml><?xml version="1.0" encoding="utf-8"?>
 <p:sldLayout xmlns:a="http://schemas.openxmlformats.org/drawingml/2006/main" xmlns:r="http://schemas.openxmlformats.org/officeDocument/2006/relationships" xmlns:p="http://schemas.openxmlformats.org/presentationml/2006/main" type="cust" preserve="1" showMasterSp="1">
-  <p:cSld name="Plan B / Two columns">
+  <p:cSld name="Plan B / Light / Two columns">
     <p:bg>
       <p:bgPr>
         <a:solidFill>
@@ -3117,7 +3402,65 @@
       </p:grpSpPr>
       <p:sp>
         <p:nvSpPr>
-          <p:cNvPr id="2" name="Plan B Foundation"/>
+          <p:cNvPr id="2" name="Plan B / Network energy gradient"/>
+          <p:cNvSpPr/>
+          <p:nvPr/>
+        </p:nvSpPr>
+        <p:spPr>
+          <a:xfrm>
+            <a:off x="594360" y="6163056"/>
+            <a:ext cx="10972800" cy="91440"/>
+          </a:xfrm>
+          <a:prstGeom prst="rect">
+            <a:avLst/>
+          </a:prstGeom>
+          <a:gradFill rotWithShape="1">
+            <a:gsLst>
+              <a:gs pos="0">
+                <a:srgbClr val="FFB604"/>
+              </a:gs>
+              <a:gs pos="28000">
+                <a:srgbClr val="FF5DB1"/>
+              </a:gs>
+              <a:gs pos="58000">
+                <a:srgbClr val="7468FF"/>
+              </a:gs>
+              <a:gs pos="100000">
+                <a:srgbClr val="23F5FF"/>
+              </a:gs>
+            </a:gsLst>
+            <a:lin ang="0" scaled="1"/>
+          </a:gradFill>
+          <a:ln>
+            <a:noFill/>
+          </a:ln>
+          <a:effectLst/>
+        </p:spPr>
+        <p:style>
+          <a:lnRef idx="1">
+            <a:schemeClr val="accent1"/>
+          </a:lnRef>
+          <a:fillRef idx="3">
+            <a:schemeClr val="accent1"/>
+          </a:fillRef>
+          <a:effectRef idx="2">
+            <a:schemeClr val="accent1"/>
+          </a:effectRef>
+          <a:fontRef idx="minor">
+            <a:schemeClr val="lt1"/>
+          </a:fontRef>
+        </p:style>
+        <p:txBody>
+          <a:bodyPr rtlCol="0" anchor="ctr"/>
+          <a:lstStyle/>
+          <a:p>
+            <a:pPr algn="ctr"/>
+          </a:p>
+        </p:txBody>
+      </p:sp>
+      <p:sp>
+        <p:nvSpPr>
+          <p:cNvPr id="3" name="Plan B Foundation"/>
           <p:cNvSpPr txBox="1"/>
           <p:nvPr/>
         </p:nvSpPr>
@@ -3160,7 +3503,7 @@
       </p:sp>
       <p:sp>
         <p:nvSpPr>
-          <p:cNvPr id="3" name="Civic Digital Commons"/>
+          <p:cNvPr id="4" name="Civic Digital Commons"/>
           <p:cNvSpPr txBox="1"/>
           <p:nvPr/>
         </p:nvSpPr>
@@ -3203,7 +3546,7 @@
       </p:sp>
       <p:sp>
         <p:nvSpPr>
-          <p:cNvPr id="4" name="Placeholder 0"/>
+          <p:cNvPr id="5" name="Placeholder 0"/>
           <p:cNvSpPr txBox="1"/>
           <p:nvPr>
             <p:ph type="title" idx="0"/>
@@ -3248,7 +3591,7 @@
       </p:sp>
       <p:sp>
         <p:nvSpPr>
-          <p:cNvPr id="5" name="Placeholder 1"/>
+          <p:cNvPr id="6" name="Placeholder 1"/>
           <p:cNvSpPr txBox="1"/>
           <p:nvPr>
             <p:ph type="body" idx="1"/>
@@ -3293,7 +3636,7 @@
       </p:sp>
       <p:sp>
         <p:nvSpPr>
-          <p:cNvPr id="6" name="Placeholder 2"/>
+          <p:cNvPr id="7" name="Placeholder 2"/>
           <p:cNvSpPr txBox="1"/>
           <p:nvPr>
             <p:ph type="body" idx="2"/>
@@ -3338,7 +3681,7 @@
       </p:sp>
       <p:sp>
         <p:nvSpPr>
-          <p:cNvPr id="7" name="Placeholder 3"/>
+          <p:cNvPr id="8" name="Placeholder 3"/>
           <p:cNvSpPr txBox="1"/>
           <p:nvPr>
             <p:ph type="body" idx="3"/>
@@ -3383,7 +3726,7 @@
       </p:sp>
       <p:sp>
         <p:nvSpPr>
-          <p:cNvPr id="8" name="Placeholder 4"/>
+          <p:cNvPr id="9" name="Placeholder 4"/>
           <p:cNvSpPr txBox="1"/>
           <p:nvPr>
             <p:ph type="body" idx="4"/>
@@ -3428,7 +3771,7 @@
       </p:sp>
       <p:sp>
         <p:nvSpPr>
-          <p:cNvPr id="9" name="Rectangle 8"/>
+          <p:cNvPr id="10" name="Rectangle 9"/>
           <p:cNvSpPr/>
           <p:nvPr/>
         </p:nvSpPr>
@@ -3441,7 +3784,7 @@
             <a:avLst/>
           </a:prstGeom>
           <a:solidFill>
-            <a:srgbClr val="B0D3F1"/>
+            <a:srgbClr val="DCEAF6"/>
           </a:solidFill>
           <a:ln>
             <a:noFill/>
@@ -3485,7 +3828,7 @@
 
 <file path=ppt/slideLayouts/slideLayout5.xml><?xml version="1.0" encoding="utf-8"?>
 <p:sldLayout xmlns:a="http://schemas.openxmlformats.org/drawingml/2006/main" xmlns:r="http://schemas.openxmlformats.org/officeDocument/2006/relationships" xmlns:p="http://schemas.openxmlformats.org/presentationml/2006/main" type="cust" preserve="1" showMasterSp="1">
-  <p:cSld name="Plan B / Image and story">
+  <p:cSld name="Plan B / Light / Image and story">
     <p:bg>
       <p:bgPr>
         <a:solidFill>
@@ -3510,154 +3853,35 @@
       </p:grpSpPr>
       <p:sp>
         <p:nvSpPr>
-          <p:cNvPr id="2" name="Plan B Foundation"/>
-          <p:cNvSpPr txBox="1"/>
-          <p:nvPr/>
-        </p:nvSpPr>
-        <p:spPr>
-          <a:xfrm>
-            <a:off x="594360" y="6382512"/>
-            <a:ext cx="3657600" cy="228600"/>
-          </a:xfrm>
-          <a:prstGeom prst="rect">
-            <a:avLst/>
-          </a:prstGeom>
-          <a:noFill/>
-        </p:spPr>
-        <p:txBody>
-          <a:bodyPr wrap="square" lIns="0" rIns="0" tIns="0" bIns="0">
-            <a:spAutoFit/>
-          </a:bodyPr>
-          <a:lstStyle/>
-          <a:p>
-            <a:pPr algn="l" marL="0" indent="0">
-              <a:defRPr sz="1100" b="1">
-                <a:solidFill>
-                  <a:srgbClr val="082952"/>
-                </a:solidFill>
-                <a:latin typeface="Inter"/>
-              </a:defRPr>
-              <a:lnSpc>
-                <a:spcPct val="112000"/>
-              </a:lnSpc>
-              <a:spcAft>
-                <a:spcPts val="1200"/>
-              </a:spcAft>
-              <a:buNone/>
-            </a:pPr>
-            <a:r>
-              <a:t>Plan B Foundation</a:t>
-            </a:r>
-          </a:p>
-        </p:txBody>
-      </p:sp>
-      <p:sp>
-        <p:nvSpPr>
-          <p:cNvPr id="3" name="Civic Digital Commons"/>
-          <p:cNvSpPr txBox="1"/>
-          <p:nvPr/>
-        </p:nvSpPr>
-        <p:spPr>
-          <a:xfrm>
-            <a:off x="8595360" y="6382512"/>
-            <a:ext cx="2971800" cy="228600"/>
-          </a:xfrm>
-          <a:prstGeom prst="rect">
-            <a:avLst/>
-          </a:prstGeom>
-          <a:noFill/>
-        </p:spPr>
-        <p:txBody>
-          <a:bodyPr wrap="square" lIns="0" rIns="0" tIns="0" bIns="0">
-            <a:spAutoFit/>
-          </a:bodyPr>
-          <a:lstStyle/>
-          <a:p>
-            <a:pPr algn="l" marL="0" indent="0">
-              <a:defRPr sz="1100" b="0">
-                <a:solidFill>
-                  <a:srgbClr val="082952"/>
-                </a:solidFill>
-                <a:latin typeface="Inter"/>
-              </a:defRPr>
-              <a:lnSpc>
-                <a:spcPct val="112000"/>
-              </a:lnSpc>
-              <a:spcAft>
-                <a:spcPts val="1200"/>
-              </a:spcAft>
-              <a:buNone/>
-            </a:pPr>
-            <a:r>
-              <a:t>Civic Digital Commons</a:t>
-            </a:r>
-          </a:p>
-        </p:txBody>
-      </p:sp>
-      <p:sp>
-        <p:nvSpPr>
-          <p:cNvPr id="4" name="Placeholder 0"/>
-          <p:cNvSpPr txBox="1"/>
-          <p:nvPr>
-            <p:ph type="title" idx="0"/>
-          </p:nvPr>
-        </p:nvSpPr>
-        <p:spPr>
-          <a:xfrm>
-            <a:off x="594360" y="502920"/>
-            <a:ext cx="10972800" cy="1005840"/>
-          </a:xfrm>
-          <a:prstGeom prst="rect">
-            <a:avLst/>
-          </a:prstGeom>
-          <a:noFill/>
-        </p:spPr>
-        <p:txBody>
-          <a:bodyPr wrap="square" lIns="0" rIns="0" tIns="0" bIns="0">
-            <a:spAutoFit/>
-          </a:bodyPr>
-          <a:lstStyle/>
-          <a:p>
-            <a:pPr algn="l" marL="0" indent="0">
-              <a:defRPr sz="3600" b="1">
-                <a:solidFill>
-                  <a:srgbClr val="082952"/>
-                </a:solidFill>
-                <a:latin typeface="Inter"/>
-              </a:defRPr>
-              <a:lnSpc>
-                <a:spcPct val="112000"/>
-              </a:lnSpc>
-              <a:spcAft>
-                <a:spcPts val="1200"/>
-              </a:spcAft>
-              <a:buNone/>
-            </a:pPr>
-            <a:r>
-              <a:t>[Make the place visible]</a:t>
-            </a:r>
-          </a:p>
-        </p:txBody>
-      </p:sp>
-      <p:sp>
-        <p:nvSpPr>
-          <p:cNvPr id="5" name="Rounded Rectangle 4"/>
+          <p:cNvPr id="2" name="Plan B / Network energy gradient"/>
           <p:cNvSpPr/>
           <p:nvPr/>
         </p:nvSpPr>
         <p:spPr>
           <a:xfrm>
-            <a:off x="594360" y="1828800"/>
-            <a:ext cx="6720840" cy="3886200"/>
-          </a:xfrm>
-          <a:prstGeom prst="roundRect">
-            <a:avLst>
-              <a:gd name="adj" fmla="val 12000"/>
-            </a:avLst>
-          </a:prstGeom>
-          <a:solidFill>
-            <a:srgbClr val="F3F9FF"/>
-          </a:solidFill>
+            <a:off x="594360" y="6163056"/>
+            <a:ext cx="10972800" cy="91440"/>
+          </a:xfrm>
+          <a:prstGeom prst="rect">
+            <a:avLst/>
+          </a:prstGeom>
+          <a:gradFill rotWithShape="1">
+            <a:gsLst>
+              <a:gs pos="0">
+                <a:srgbClr val="FFB604"/>
+              </a:gs>
+              <a:gs pos="28000">
+                <a:srgbClr val="FF5DB1"/>
+              </a:gs>
+              <a:gs pos="58000">
+                <a:srgbClr val="7468FF"/>
+              </a:gs>
+              <a:gs pos="100000">
+                <a:srgbClr val="23F5FF"/>
+              </a:gs>
+            </a:gsLst>
+            <a:lin ang="0" scaled="1"/>
+          </a:gradFill>
           <a:ln>
             <a:noFill/>
           </a:ln>
@@ -3687,7 +3911,184 @@
       </p:sp>
       <p:sp>
         <p:nvSpPr>
-          <p:cNvPr id="6" name="Insert a documentary photograph"/>
+          <p:cNvPr id="3" name="Plan B Foundation"/>
+          <p:cNvSpPr txBox="1"/>
+          <p:nvPr/>
+        </p:nvSpPr>
+        <p:spPr>
+          <a:xfrm>
+            <a:off x="594360" y="6382512"/>
+            <a:ext cx="3657600" cy="228600"/>
+          </a:xfrm>
+          <a:prstGeom prst="rect">
+            <a:avLst/>
+          </a:prstGeom>
+          <a:noFill/>
+        </p:spPr>
+        <p:txBody>
+          <a:bodyPr wrap="square" lIns="0" rIns="0" tIns="0" bIns="0">
+            <a:spAutoFit/>
+          </a:bodyPr>
+          <a:lstStyle/>
+          <a:p>
+            <a:pPr algn="l" marL="0" indent="0">
+              <a:defRPr sz="1100" b="1">
+                <a:solidFill>
+                  <a:srgbClr val="082952"/>
+                </a:solidFill>
+                <a:latin typeface="Inter"/>
+              </a:defRPr>
+              <a:lnSpc>
+                <a:spcPct val="112000"/>
+              </a:lnSpc>
+              <a:spcAft>
+                <a:spcPts val="1200"/>
+              </a:spcAft>
+              <a:buNone/>
+            </a:pPr>
+            <a:r>
+              <a:t>Plan B Foundation</a:t>
+            </a:r>
+          </a:p>
+        </p:txBody>
+      </p:sp>
+      <p:sp>
+        <p:nvSpPr>
+          <p:cNvPr id="4" name="Civic Digital Commons"/>
+          <p:cNvSpPr txBox="1"/>
+          <p:nvPr/>
+        </p:nvSpPr>
+        <p:spPr>
+          <a:xfrm>
+            <a:off x="8595360" y="6382512"/>
+            <a:ext cx="2971800" cy="228600"/>
+          </a:xfrm>
+          <a:prstGeom prst="rect">
+            <a:avLst/>
+          </a:prstGeom>
+          <a:noFill/>
+        </p:spPr>
+        <p:txBody>
+          <a:bodyPr wrap="square" lIns="0" rIns="0" tIns="0" bIns="0">
+            <a:spAutoFit/>
+          </a:bodyPr>
+          <a:lstStyle/>
+          <a:p>
+            <a:pPr algn="l" marL="0" indent="0">
+              <a:defRPr sz="1100" b="0">
+                <a:solidFill>
+                  <a:srgbClr val="082952"/>
+                </a:solidFill>
+                <a:latin typeface="Inter"/>
+              </a:defRPr>
+              <a:lnSpc>
+                <a:spcPct val="112000"/>
+              </a:lnSpc>
+              <a:spcAft>
+                <a:spcPts val="1200"/>
+              </a:spcAft>
+              <a:buNone/>
+            </a:pPr>
+            <a:r>
+              <a:t>Civic Digital Commons</a:t>
+            </a:r>
+          </a:p>
+        </p:txBody>
+      </p:sp>
+      <p:sp>
+        <p:nvSpPr>
+          <p:cNvPr id="5" name="Placeholder 0"/>
+          <p:cNvSpPr txBox="1"/>
+          <p:nvPr>
+            <p:ph type="title" idx="0"/>
+          </p:nvPr>
+        </p:nvSpPr>
+        <p:spPr>
+          <a:xfrm>
+            <a:off x="594360" y="502920"/>
+            <a:ext cx="10972800" cy="1005840"/>
+          </a:xfrm>
+          <a:prstGeom prst="rect">
+            <a:avLst/>
+          </a:prstGeom>
+          <a:noFill/>
+        </p:spPr>
+        <p:txBody>
+          <a:bodyPr wrap="square" lIns="0" rIns="0" tIns="0" bIns="0">
+            <a:spAutoFit/>
+          </a:bodyPr>
+          <a:lstStyle/>
+          <a:p>
+            <a:pPr algn="l" marL="0" indent="0">
+              <a:defRPr sz="3600" b="1">
+                <a:solidFill>
+                  <a:srgbClr val="082952"/>
+                </a:solidFill>
+                <a:latin typeface="Inter"/>
+              </a:defRPr>
+              <a:lnSpc>
+                <a:spcPct val="112000"/>
+              </a:lnSpc>
+              <a:spcAft>
+                <a:spcPts val="1200"/>
+              </a:spcAft>
+              <a:buNone/>
+            </a:pPr>
+            <a:r>
+              <a:t>[Make the place visible]</a:t>
+            </a:r>
+          </a:p>
+        </p:txBody>
+      </p:sp>
+      <p:sp>
+        <p:nvSpPr>
+          <p:cNvPr id="6" name="Rounded Rectangle 5"/>
+          <p:cNvSpPr/>
+          <p:nvPr/>
+        </p:nvSpPr>
+        <p:spPr>
+          <a:xfrm>
+            <a:off x="594360" y="1828800"/>
+            <a:ext cx="6720840" cy="3886200"/>
+          </a:xfrm>
+          <a:prstGeom prst="roundRect">
+            <a:avLst>
+              <a:gd name="adj" fmla="val 12000"/>
+            </a:avLst>
+          </a:prstGeom>
+          <a:solidFill>
+            <a:srgbClr val="F3F9FF"/>
+          </a:solidFill>
+          <a:ln>
+            <a:noFill/>
+          </a:ln>
+          <a:effectLst/>
+        </p:spPr>
+        <p:style>
+          <a:lnRef idx="1">
+            <a:schemeClr val="accent1"/>
+          </a:lnRef>
+          <a:fillRef idx="3">
+            <a:schemeClr val="accent1"/>
+          </a:fillRef>
+          <a:effectRef idx="2">
+            <a:schemeClr val="accent1"/>
+          </a:effectRef>
+          <a:fontRef idx="minor">
+            <a:schemeClr val="lt1"/>
+          </a:fontRef>
+        </p:style>
+        <p:txBody>
+          <a:bodyPr rtlCol="0" anchor="ctr"/>
+          <a:lstStyle/>
+          <a:p>
+            <a:pPr algn="ctr"/>
+          </a:p>
+        </p:txBody>
+      </p:sp>
+      <p:sp>
+        <p:nvSpPr>
+          <p:cNvPr id="7" name="Insert a documentary photograph"/>
           <p:cNvSpPr txBox="1"/>
           <p:nvPr/>
         </p:nvSpPr>
@@ -3730,7 +4131,7 @@
       </p:sp>
       <p:sp>
         <p:nvSpPr>
-          <p:cNvPr id="7" name="Placeholder 1"/>
+          <p:cNvPr id="8" name="Placeholder 1"/>
           <p:cNvSpPr txBox="1"/>
           <p:nvPr>
             <p:ph type="pic" idx="1"/>
@@ -3775,7 +4176,7 @@
       </p:sp>
       <p:sp>
         <p:nvSpPr>
-          <p:cNvPr id="8" name="Placeholder 2"/>
+          <p:cNvPr id="9" name="Placeholder 2"/>
           <p:cNvSpPr txBox="1"/>
           <p:nvPr>
             <p:ph type="body" idx="2"/>
@@ -3820,7 +4221,7 @@
       </p:sp>
       <p:sp>
         <p:nvSpPr>
-          <p:cNvPr id="9" name="Placeholder 3"/>
+          <p:cNvPr id="10" name="Placeholder 3"/>
           <p:cNvSpPr txBox="1"/>
           <p:nvPr>
             <p:ph type="body" idx="3"/>
@@ -3865,7 +4266,7 @@
       </p:sp>
       <p:sp>
         <p:nvSpPr>
-          <p:cNvPr id="10" name="Placeholder 4"/>
+          <p:cNvPr id="11" name="Placeholder 4"/>
           <p:cNvSpPr txBox="1"/>
           <p:nvPr>
             <p:ph type="body" idx="4"/>
@@ -3923,7 +4324,7 @@
 
 <file path=ppt/slideLayouts/slideLayout6.xml><?xml version="1.0" encoding="utf-8"?>
 <p:sldLayout xmlns:a="http://schemas.openxmlformats.org/drawingml/2006/main" xmlns:r="http://schemas.openxmlformats.org/officeDocument/2006/relationships" xmlns:p="http://schemas.openxmlformats.org/presentationml/2006/main" type="cust" preserve="1" showMasterSp="1">
-  <p:cSld name="Plan B / Chart and takeaway">
+  <p:cSld name="Plan B / Light / Chart and takeaway">
     <p:bg>
       <p:bgPr>
         <a:solidFill>
@@ -3948,7 +4349,65 @@
       </p:grpSpPr>
       <p:sp>
         <p:nvSpPr>
-          <p:cNvPr id="2" name="Plan B Foundation"/>
+          <p:cNvPr id="2" name="Plan B / Network energy gradient"/>
+          <p:cNvSpPr/>
+          <p:nvPr/>
+        </p:nvSpPr>
+        <p:spPr>
+          <a:xfrm>
+            <a:off x="594360" y="6163056"/>
+            <a:ext cx="10972800" cy="91440"/>
+          </a:xfrm>
+          <a:prstGeom prst="rect">
+            <a:avLst/>
+          </a:prstGeom>
+          <a:gradFill rotWithShape="1">
+            <a:gsLst>
+              <a:gs pos="0">
+                <a:srgbClr val="FFB604"/>
+              </a:gs>
+              <a:gs pos="28000">
+                <a:srgbClr val="FF5DB1"/>
+              </a:gs>
+              <a:gs pos="58000">
+                <a:srgbClr val="7468FF"/>
+              </a:gs>
+              <a:gs pos="100000">
+                <a:srgbClr val="23F5FF"/>
+              </a:gs>
+            </a:gsLst>
+            <a:lin ang="0" scaled="1"/>
+          </a:gradFill>
+          <a:ln>
+            <a:noFill/>
+          </a:ln>
+          <a:effectLst/>
+        </p:spPr>
+        <p:style>
+          <a:lnRef idx="1">
+            <a:schemeClr val="accent1"/>
+          </a:lnRef>
+          <a:fillRef idx="3">
+            <a:schemeClr val="accent1"/>
+          </a:fillRef>
+          <a:effectRef idx="2">
+            <a:schemeClr val="accent1"/>
+          </a:effectRef>
+          <a:fontRef idx="minor">
+            <a:schemeClr val="lt1"/>
+          </a:fontRef>
+        </p:style>
+        <p:txBody>
+          <a:bodyPr rtlCol="0" anchor="ctr"/>
+          <a:lstStyle/>
+          <a:p>
+            <a:pPr algn="ctr"/>
+          </a:p>
+        </p:txBody>
+      </p:sp>
+      <p:sp>
+        <p:nvSpPr>
+          <p:cNvPr id="3" name="Plan B Foundation"/>
           <p:cNvSpPr txBox="1"/>
           <p:nvPr/>
         </p:nvSpPr>
@@ -3991,7 +4450,7 @@
       </p:sp>
       <p:sp>
         <p:nvSpPr>
-          <p:cNvPr id="3" name="Civic Digital Commons"/>
+          <p:cNvPr id="4" name="Civic Digital Commons"/>
           <p:cNvSpPr txBox="1"/>
           <p:nvPr/>
         </p:nvSpPr>
@@ -4034,7 +4493,7 @@
       </p:sp>
       <p:sp>
         <p:nvSpPr>
-          <p:cNvPr id="4" name="Placeholder 0"/>
+          <p:cNvPr id="5" name="Placeholder 0"/>
           <p:cNvSpPr txBox="1"/>
           <p:nvPr>
             <p:ph type="title" idx="0"/>
@@ -4079,7 +4538,7 @@
       </p:sp>
       <p:sp>
         <p:nvSpPr>
-          <p:cNvPr id="5" name="Placeholder 1"/>
+          <p:cNvPr id="6" name="Placeholder 1"/>
           <p:cNvSpPr txBox="1"/>
           <p:nvPr>
             <p:ph type="body" idx="1"/>
@@ -4124,7 +4583,7 @@
       </p:sp>
       <p:sp>
         <p:nvSpPr>
-          <p:cNvPr id="6" name="Placeholder 2"/>
+          <p:cNvPr id="7" name="Placeholder 2"/>
           <p:cNvSpPr txBox="1"/>
           <p:nvPr>
             <p:ph type="chart" idx="2"/>
@@ -4169,7 +4628,7 @@
       </p:sp>
       <p:sp>
         <p:nvSpPr>
-          <p:cNvPr id="7" name="Placeholder 3"/>
+          <p:cNvPr id="8" name="Placeholder 3"/>
           <p:cNvSpPr txBox="1"/>
           <p:nvPr>
             <p:ph type="body" idx="3"/>
@@ -4214,7 +4673,7 @@
       </p:sp>
       <p:sp>
         <p:nvSpPr>
-          <p:cNvPr id="8" name="Placeholder 4"/>
+          <p:cNvPr id="9" name="Placeholder 4"/>
           <p:cNvSpPr txBox="1"/>
           <p:nvPr>
             <p:ph type="body" idx="4"/>
@@ -4259,7 +4718,7 @@
       </p:sp>
       <p:sp>
         <p:nvSpPr>
-          <p:cNvPr id="9" name="Placeholder 5"/>
+          <p:cNvPr id="10" name="Placeholder 5"/>
           <p:cNvSpPr txBox="1"/>
           <p:nvPr>
             <p:ph type="body" idx="5"/>
@@ -4317,7 +4776,7 @@
 
 <file path=ppt/slideLayouts/slideLayout7.xml><?xml version="1.0" encoding="utf-8"?>
 <p:sldLayout xmlns:a="http://schemas.openxmlformats.org/drawingml/2006/main" xmlns:r="http://schemas.openxmlformats.org/officeDocument/2006/relationships" xmlns:p="http://schemas.openxmlformats.org/presentationml/2006/main" type="cust" preserve="1" showMasterSp="1">
-  <p:cSld name="Plan B / Table">
+  <p:cSld name="Plan B / Light / Table">
     <p:bg>
       <p:bgPr>
         <a:solidFill>
@@ -4342,7 +4801,65 @@
       </p:grpSpPr>
       <p:sp>
         <p:nvSpPr>
-          <p:cNvPr id="2" name="Plan B Foundation"/>
+          <p:cNvPr id="2" name="Plan B / Network energy gradient"/>
+          <p:cNvSpPr/>
+          <p:nvPr/>
+        </p:nvSpPr>
+        <p:spPr>
+          <a:xfrm>
+            <a:off x="594360" y="6163056"/>
+            <a:ext cx="10972800" cy="91440"/>
+          </a:xfrm>
+          <a:prstGeom prst="rect">
+            <a:avLst/>
+          </a:prstGeom>
+          <a:gradFill rotWithShape="1">
+            <a:gsLst>
+              <a:gs pos="0">
+                <a:srgbClr val="FFB604"/>
+              </a:gs>
+              <a:gs pos="28000">
+                <a:srgbClr val="FF5DB1"/>
+              </a:gs>
+              <a:gs pos="58000">
+                <a:srgbClr val="7468FF"/>
+              </a:gs>
+              <a:gs pos="100000">
+                <a:srgbClr val="23F5FF"/>
+              </a:gs>
+            </a:gsLst>
+            <a:lin ang="0" scaled="1"/>
+          </a:gradFill>
+          <a:ln>
+            <a:noFill/>
+          </a:ln>
+          <a:effectLst/>
+        </p:spPr>
+        <p:style>
+          <a:lnRef idx="1">
+            <a:schemeClr val="accent1"/>
+          </a:lnRef>
+          <a:fillRef idx="3">
+            <a:schemeClr val="accent1"/>
+          </a:fillRef>
+          <a:effectRef idx="2">
+            <a:schemeClr val="accent1"/>
+          </a:effectRef>
+          <a:fontRef idx="minor">
+            <a:schemeClr val="lt1"/>
+          </a:fontRef>
+        </p:style>
+        <p:txBody>
+          <a:bodyPr rtlCol="0" anchor="ctr"/>
+          <a:lstStyle/>
+          <a:p>
+            <a:pPr algn="ctr"/>
+          </a:p>
+        </p:txBody>
+      </p:sp>
+      <p:sp>
+        <p:nvSpPr>
+          <p:cNvPr id="3" name="Plan B Foundation"/>
           <p:cNvSpPr txBox="1"/>
           <p:nvPr/>
         </p:nvSpPr>
@@ -4385,7 +4902,7 @@
       </p:sp>
       <p:sp>
         <p:nvSpPr>
-          <p:cNvPr id="3" name="Civic Digital Commons"/>
+          <p:cNvPr id="4" name="Civic Digital Commons"/>
           <p:cNvSpPr txBox="1"/>
           <p:nvPr/>
         </p:nvSpPr>
@@ -4428,7 +4945,7 @@
       </p:sp>
       <p:sp>
         <p:nvSpPr>
-          <p:cNvPr id="4" name="Placeholder 0"/>
+          <p:cNvPr id="5" name="Placeholder 0"/>
           <p:cNvSpPr txBox="1"/>
           <p:nvPr>
             <p:ph type="title" idx="0"/>
@@ -4473,7 +4990,7 @@
       </p:sp>
       <p:sp>
         <p:nvSpPr>
-          <p:cNvPr id="5" name="Placeholder 1"/>
+          <p:cNvPr id="6" name="Placeholder 1"/>
           <p:cNvSpPr txBox="1"/>
           <p:nvPr>
             <p:ph type="body" idx="1"/>
@@ -4518,7 +5035,7 @@
       </p:sp>
       <p:sp>
         <p:nvSpPr>
-          <p:cNvPr id="6" name="Placeholder 2"/>
+          <p:cNvPr id="7" name="Placeholder 2"/>
           <p:cNvSpPr txBox="1"/>
           <p:nvPr>
             <p:ph type="tbl" idx="2"/>
@@ -4563,7 +5080,7 @@
       </p:sp>
       <p:sp>
         <p:nvSpPr>
-          <p:cNvPr id="7" name="Placeholder 3"/>
+          <p:cNvPr id="8" name="Placeholder 3"/>
           <p:cNvSpPr txBox="1"/>
           <p:nvPr>
             <p:ph type="body" idx="3"/>
@@ -4621,7 +5138,7 @@
 
 <file path=ppt/slideLayouts/slideLayout8.xml><?xml version="1.0" encoding="utf-8"?>
 <p:sldLayout xmlns:a="http://schemas.openxmlformats.org/drawingml/2006/main" xmlns:r="http://schemas.openxmlformats.org/officeDocument/2006/relationships" xmlns:p="http://schemas.openxmlformats.org/presentationml/2006/main" type="cust" preserve="1" showMasterSp="1">
-  <p:cSld name="Plan B / Quotation">
+  <p:cSld name="Plan B / Light / Quotation">
     <p:bg>
       <p:bgPr>
         <a:solidFill>
@@ -4646,7 +5163,65 @@
       </p:grpSpPr>
       <p:sp>
         <p:nvSpPr>
-          <p:cNvPr id="2" name="Plan B Foundation"/>
+          <p:cNvPr id="2" name="Plan B / Network energy gradient"/>
+          <p:cNvSpPr/>
+          <p:nvPr/>
+        </p:nvSpPr>
+        <p:spPr>
+          <a:xfrm>
+            <a:off x="594360" y="6163056"/>
+            <a:ext cx="10972800" cy="91440"/>
+          </a:xfrm>
+          <a:prstGeom prst="rect">
+            <a:avLst/>
+          </a:prstGeom>
+          <a:gradFill rotWithShape="1">
+            <a:gsLst>
+              <a:gs pos="0">
+                <a:srgbClr val="FFB604"/>
+              </a:gs>
+              <a:gs pos="28000">
+                <a:srgbClr val="FF5DB1"/>
+              </a:gs>
+              <a:gs pos="58000">
+                <a:srgbClr val="7468FF"/>
+              </a:gs>
+              <a:gs pos="100000">
+                <a:srgbClr val="23F5FF"/>
+              </a:gs>
+            </a:gsLst>
+            <a:lin ang="0" scaled="1"/>
+          </a:gradFill>
+          <a:ln>
+            <a:noFill/>
+          </a:ln>
+          <a:effectLst/>
+        </p:spPr>
+        <p:style>
+          <a:lnRef idx="1">
+            <a:schemeClr val="accent1"/>
+          </a:lnRef>
+          <a:fillRef idx="3">
+            <a:schemeClr val="accent1"/>
+          </a:fillRef>
+          <a:effectRef idx="2">
+            <a:schemeClr val="accent1"/>
+          </a:effectRef>
+          <a:fontRef idx="minor">
+            <a:schemeClr val="lt1"/>
+          </a:fontRef>
+        </p:style>
+        <p:txBody>
+          <a:bodyPr rtlCol="0" anchor="ctr"/>
+          <a:lstStyle/>
+          <a:p>
+            <a:pPr algn="ctr"/>
+          </a:p>
+        </p:txBody>
+      </p:sp>
+      <p:sp>
+        <p:nvSpPr>
+          <p:cNvPr id="3" name="Plan B Foundation"/>
           <p:cNvSpPr txBox="1"/>
           <p:nvPr/>
         </p:nvSpPr>
@@ -4689,7 +5264,7 @@
       </p:sp>
       <p:sp>
         <p:nvSpPr>
-          <p:cNvPr id="3" name="Civic Digital Commons"/>
+          <p:cNvPr id="4" name="Civic Digital Commons"/>
           <p:cNvSpPr txBox="1"/>
           <p:nvPr/>
         </p:nvSpPr>
@@ -4732,7 +5307,7 @@
       </p:sp>
       <p:sp>
         <p:nvSpPr>
-          <p:cNvPr id="4" name="Placeholder 0"/>
+          <p:cNvPr id="5" name="Placeholder 0"/>
           <p:cNvSpPr txBox="1"/>
           <p:nvPr>
             <p:ph type="title" idx="0"/>
@@ -4797,7 +5372,7 @@
       </p:sp>
       <p:sp>
         <p:nvSpPr>
-          <p:cNvPr id="5" name="Placeholder 1"/>
+          <p:cNvPr id="6" name="Placeholder 1"/>
           <p:cNvSpPr txBox="1"/>
           <p:nvPr>
             <p:ph type="body" idx="1"/>
@@ -4862,21 +5437,35 @@
       </p:sp>
       <p:sp>
         <p:nvSpPr>
-          <p:cNvPr id="6" name="Rectangle 5"/>
+          <p:cNvPr id="7" name="Plan B / Network energy gradient"/>
           <p:cNvSpPr/>
           <p:nvPr/>
         </p:nvSpPr>
         <p:spPr>
           <a:xfrm>
             <a:off x="777240" y="960120"/>
-            <a:ext cx="640080" cy="73152"/>
-          </a:xfrm>
-          <a:prstGeom prst="rect">
-            <a:avLst/>
-          </a:prstGeom>
-          <a:solidFill>
-            <a:srgbClr val="FFB604"/>
-          </a:solidFill>
+            <a:ext cx="2560320" cy="146304"/>
+          </a:xfrm>
+          <a:prstGeom prst="rect">
+            <a:avLst/>
+          </a:prstGeom>
+          <a:gradFill rotWithShape="1">
+            <a:gsLst>
+              <a:gs pos="0">
+                <a:srgbClr val="FFB604"/>
+              </a:gs>
+              <a:gs pos="28000">
+                <a:srgbClr val="FF5DB1"/>
+              </a:gs>
+              <a:gs pos="58000">
+                <a:srgbClr val="7468FF"/>
+              </a:gs>
+              <a:gs pos="100000">
+                <a:srgbClr val="23F5FF"/>
+              </a:gs>
+            </a:gsLst>
+            <a:lin ang="0" scaled="1"/>
+          </a:gradFill>
           <a:ln>
             <a:noFill/>
           </a:ln>
@@ -4919,7 +5508,7 @@
 
 <file path=ppt/slideLayouts/slideLayout9.xml><?xml version="1.0" encoding="utf-8"?>
 <p:sldLayout xmlns:a="http://schemas.openxmlformats.org/drawingml/2006/main" xmlns:r="http://schemas.openxmlformats.org/officeDocument/2006/relationships" xmlns:p="http://schemas.openxmlformats.org/presentationml/2006/main" type="cust" preserve="1" showMasterSp="1">
-  <p:cSld name="Plan B / Next steps">
+  <p:cSld name="Plan B / Light / Next steps">
     <p:bg>
       <p:bgPr>
         <a:solidFill>
@@ -4944,7 +5533,65 @@
       </p:grpSpPr>
       <p:sp>
         <p:nvSpPr>
-          <p:cNvPr id="2" name="Plan B Foundation"/>
+          <p:cNvPr id="2" name="Plan B / Network energy gradient"/>
+          <p:cNvSpPr/>
+          <p:nvPr/>
+        </p:nvSpPr>
+        <p:spPr>
+          <a:xfrm>
+            <a:off x="594360" y="6163056"/>
+            <a:ext cx="10972800" cy="91440"/>
+          </a:xfrm>
+          <a:prstGeom prst="rect">
+            <a:avLst/>
+          </a:prstGeom>
+          <a:gradFill rotWithShape="1">
+            <a:gsLst>
+              <a:gs pos="0">
+                <a:srgbClr val="FFB604"/>
+              </a:gs>
+              <a:gs pos="28000">
+                <a:srgbClr val="FF5DB1"/>
+              </a:gs>
+              <a:gs pos="58000">
+                <a:srgbClr val="7468FF"/>
+              </a:gs>
+              <a:gs pos="100000">
+                <a:srgbClr val="23F5FF"/>
+              </a:gs>
+            </a:gsLst>
+            <a:lin ang="0" scaled="1"/>
+          </a:gradFill>
+          <a:ln>
+            <a:noFill/>
+          </a:ln>
+          <a:effectLst/>
+        </p:spPr>
+        <p:style>
+          <a:lnRef idx="1">
+            <a:schemeClr val="accent1"/>
+          </a:lnRef>
+          <a:fillRef idx="3">
+            <a:schemeClr val="accent1"/>
+          </a:fillRef>
+          <a:effectRef idx="2">
+            <a:schemeClr val="accent1"/>
+          </a:effectRef>
+          <a:fontRef idx="minor">
+            <a:schemeClr val="lt1"/>
+          </a:fontRef>
+        </p:style>
+        <p:txBody>
+          <a:bodyPr rtlCol="0" anchor="ctr"/>
+          <a:lstStyle/>
+          <a:p>
+            <a:pPr algn="ctr"/>
+          </a:p>
+        </p:txBody>
+      </p:sp>
+      <p:sp>
+        <p:nvSpPr>
+          <p:cNvPr id="3" name="Plan B Foundation"/>
           <p:cNvSpPr txBox="1"/>
           <p:nvPr/>
         </p:nvSpPr>
@@ -4987,7 +5634,7 @@
       </p:sp>
       <p:sp>
         <p:nvSpPr>
-          <p:cNvPr id="3" name="Civic Digital Commons"/>
+          <p:cNvPr id="4" name="Civic Digital Commons"/>
           <p:cNvSpPr txBox="1"/>
           <p:nvPr/>
         </p:nvSpPr>
@@ -5030,7 +5677,7 @@
       </p:sp>
       <p:sp>
         <p:nvSpPr>
-          <p:cNvPr id="4" name="Placeholder 0"/>
+          <p:cNvPr id="5" name="Placeholder 0"/>
           <p:cNvSpPr txBox="1"/>
           <p:nvPr>
             <p:ph type="title" idx="0"/>
@@ -5075,7 +5722,7 @@
       </p:sp>
       <p:sp>
         <p:nvSpPr>
-          <p:cNvPr id="5" name="Placeholder 1"/>
+          <p:cNvPr id="6" name="Placeholder 1"/>
           <p:cNvSpPr txBox="1"/>
           <p:nvPr>
             <p:ph type="body" idx="1"/>
@@ -5120,7 +5767,7 @@
       </p:sp>
       <p:sp>
         <p:nvSpPr>
-          <p:cNvPr id="6" name="Placeholder 2"/>
+          <p:cNvPr id="7" name="Placeholder 2"/>
           <p:cNvSpPr txBox="1"/>
           <p:nvPr>
             <p:ph type="body" idx="2"/>
@@ -5185,7 +5832,7 @@
       </p:sp>
       <p:sp>
         <p:nvSpPr>
-          <p:cNvPr id="7" name="Placeholder 3"/>
+          <p:cNvPr id="8" name="Placeholder 3"/>
           <p:cNvSpPr txBox="1"/>
           <p:nvPr>
             <p:ph type="body" idx="3"/>
@@ -5230,7 +5877,7 @@
       </p:sp>
       <p:sp>
         <p:nvSpPr>
-          <p:cNvPr id="8" name="Placeholder 4"/>
+          <p:cNvPr id="9" name="Placeholder 4"/>
           <p:cNvSpPr txBox="1"/>
           <p:nvPr>
             <p:ph type="body" idx="4"/>
@@ -5295,7 +5942,7 @@
       </p:sp>
       <p:sp>
         <p:nvSpPr>
-          <p:cNvPr id="9" name="Placeholder 5"/>
+          <p:cNvPr id="10" name="Placeholder 5"/>
           <p:cNvSpPr txBox="1"/>
           <p:nvPr>
             <p:ph type="body" idx="5"/>
@@ -5340,7 +5987,7 @@
       </p:sp>
       <p:sp>
         <p:nvSpPr>
-          <p:cNvPr id="10" name="Placeholder 6"/>
+          <p:cNvPr id="11" name="Placeholder 6"/>
           <p:cNvSpPr txBox="1"/>
           <p:nvPr>
             <p:ph type="body" idx="6"/>
@@ -5405,7 +6052,7 @@
       </p:sp>
       <p:sp>
         <p:nvSpPr>
-          <p:cNvPr id="11" name="Placeholder 7"/>
+          <p:cNvPr id="12" name="Placeholder 7"/>
           <p:cNvSpPr txBox="1"/>
           <p:nvPr>
             <p:ph type="body" idx="7"/>
@@ -5777,7 +6424,7 @@
       <p:grpSpPr/>
       <p:sp>
         <p:nvSpPr>
-          <p:cNvPr id="4" name="Placeholder 0"/>
+          <p:cNvPr id="5" name="Placeholder 0"/>
           <p:cNvSpPr txBox="1"/>
           <p:nvPr>
             <p:ph type="title" idx="0"/>
@@ -5842,7 +6489,7 @@
       </p:sp>
       <p:sp>
         <p:nvSpPr>
-          <p:cNvPr id="5" name="Placeholder 1"/>
+          <p:cNvPr id="6" name="Placeholder 1"/>
           <p:cNvSpPr txBox="1"/>
           <p:nvPr>
             <p:ph type="subTitle" idx="1"/>
@@ -5887,7 +6534,7 @@
       </p:sp>
       <p:sp>
         <p:nvSpPr>
-          <p:cNvPr id="6" name="Placeholder 2"/>
+          <p:cNvPr id="7" name="Placeholder 2"/>
           <p:cNvSpPr txBox="1"/>
           <p:nvPr>
             <p:ph type="body" idx="2"/>
@@ -5978,7 +6625,7 @@
       <p:grpSpPr/>
       <p:sp>
         <p:nvSpPr>
-          <p:cNvPr id="4" name="Placeholder 0"/>
+          <p:cNvPr id="5" name="Placeholder 0"/>
           <p:cNvSpPr txBox="1"/>
           <p:nvPr>
             <p:ph type="title" idx="0"/>
@@ -6023,7 +6670,7 @@
       </p:sp>
       <p:sp>
         <p:nvSpPr>
-          <p:cNvPr id="5" name="Placeholder 1"/>
+          <p:cNvPr id="6" name="Placeholder 1"/>
           <p:cNvSpPr txBox="1"/>
           <p:nvPr>
             <p:ph type="body" idx="1"/>
@@ -6068,7 +6715,7 @@
       </p:sp>
       <p:sp>
         <p:nvSpPr>
-          <p:cNvPr id="6" name="Placeholder 2"/>
+          <p:cNvPr id="7" name="Placeholder 2"/>
           <p:cNvSpPr txBox="1"/>
           <p:nvPr>
             <p:ph type="body" idx="2"/>
@@ -6133,7 +6780,7 @@
       </p:sp>
       <p:sp>
         <p:nvSpPr>
-          <p:cNvPr id="7" name="Placeholder 3"/>
+          <p:cNvPr id="8" name="Placeholder 3"/>
           <p:cNvSpPr txBox="1"/>
           <p:nvPr>
             <p:ph type="body" idx="3"/>
@@ -6191,7 +6838,7 @@
               <a:buNone/>
             </a:pPr>
             <a:r>
-              <a:t>One idea per slide. Use navy and warm white. Choose gold or a small gradient as the exceptional signal. Aim for 20pt or larger body text.</a:t>
+              <a:t>One idea per slide. Keep the selected light or dark palette. Preserve the gradient band and keep text on solid grounds. Aim for 20pt or larger body text.</a:t>
             </a:r>
           </a:p>
         </p:txBody>
@@ -6210,7 +6857,7 @@
     <p:bg>
       <p:bgPr>
         <a:solidFill>
-          <a:srgbClr val="082952"/>
+          <a:srgbClr val="F3F9FF"/>
         </a:solidFill>
         <a:effectLst/>
       </p:bgPr>
@@ -6224,7 +6871,7 @@
       <p:grpSpPr/>
       <p:sp>
         <p:nvSpPr>
-          <p:cNvPr id="4" name="Placeholder 0"/>
+          <p:cNvPr id="5" name="Placeholder 0"/>
           <p:cNvSpPr txBox="1"/>
           <p:nvPr>
             <p:ph type="title" idx="0"/>
@@ -6249,7 +6896,7 @@
             <a:pPr algn="l" marL="0" indent="0">
               <a:defRPr sz="4800" b="1">
                 <a:solidFill>
-                  <a:srgbClr val="FFFEFA"/>
+                  <a:srgbClr val="082952"/>
                 </a:solidFill>
                 <a:latin typeface="Inter"/>
               </a:defRPr>
@@ -6269,7 +6916,7 @@
       </p:sp>
       <p:sp>
         <p:nvSpPr>
-          <p:cNvPr id="5" name="Placeholder 1"/>
+          <p:cNvPr id="6" name="Placeholder 1"/>
           <p:cNvSpPr txBox="1"/>
           <p:nvPr>
             <p:ph type="body" idx="1"/>
@@ -6294,7 +6941,7 @@
             <a:pPr algn="l" marL="0" indent="0">
               <a:defRPr sz="2500" b="0">
                 <a:solidFill>
-                  <a:srgbClr val="FFFEFA"/>
+                  <a:srgbClr val="030B20"/>
                 </a:solidFill>
                 <a:latin typeface="Inter"/>
               </a:defRPr>
@@ -6340,7 +6987,7 @@
       <p:grpSpPr/>
       <p:sp>
         <p:nvSpPr>
-          <p:cNvPr id="4" name="Placeholder 0"/>
+          <p:cNvPr id="5" name="Placeholder 0"/>
           <p:cNvSpPr txBox="1"/>
           <p:nvPr>
             <p:ph type="title" idx="0"/>
@@ -6385,7 +7032,7 @@
       </p:sp>
       <p:sp>
         <p:nvSpPr>
-          <p:cNvPr id="5" name="Placeholder 1"/>
+          <p:cNvPr id="6" name="Placeholder 1"/>
           <p:cNvSpPr txBox="1"/>
           <p:nvPr>
             <p:ph type="body" idx="1"/>
@@ -6430,7 +7077,7 @@
       </p:sp>
       <p:sp>
         <p:nvSpPr>
-          <p:cNvPr id="6" name="Placeholder 2"/>
+          <p:cNvPr id="7" name="Placeholder 2"/>
           <p:cNvSpPr txBox="1"/>
           <p:nvPr>
             <p:ph type="body" idx="2"/>
@@ -6541,7 +7188,7 @@
       <p:grpSpPr/>
       <p:sp>
         <p:nvSpPr>
-          <p:cNvPr id="4" name="Placeholder 0"/>
+          <p:cNvPr id="5" name="Placeholder 0"/>
           <p:cNvSpPr txBox="1"/>
           <p:nvPr>
             <p:ph type="title" idx="0"/>
@@ -6586,7 +7233,7 @@
       </p:sp>
       <p:sp>
         <p:nvSpPr>
-          <p:cNvPr id="5" name="Placeholder 1"/>
+          <p:cNvPr id="6" name="Placeholder 1"/>
           <p:cNvSpPr txBox="1"/>
           <p:nvPr>
             <p:ph type="body" idx="1"/>
@@ -6631,7 +7278,7 @@
       </p:sp>
       <p:sp>
         <p:nvSpPr>
-          <p:cNvPr id="6" name="Placeholder 2"/>
+          <p:cNvPr id="7" name="Placeholder 2"/>
           <p:cNvSpPr txBox="1"/>
           <p:nvPr>
             <p:ph type="body" idx="2"/>
@@ -6676,7 +7323,7 @@
       </p:sp>
       <p:sp>
         <p:nvSpPr>
-          <p:cNvPr id="7" name="Placeholder 3"/>
+          <p:cNvPr id="8" name="Placeholder 3"/>
           <p:cNvSpPr txBox="1"/>
           <p:nvPr>
             <p:ph type="body" idx="3"/>
@@ -6721,7 +7368,7 @@
       </p:sp>
       <p:sp>
         <p:nvSpPr>
-          <p:cNvPr id="8" name="Placeholder 4"/>
+          <p:cNvPr id="9" name="Placeholder 4"/>
           <p:cNvSpPr txBox="1"/>
           <p:nvPr>
             <p:ph type="body" idx="4"/>
@@ -6792,7 +7439,7 @@
       <p:grpSpPr/>
       <p:sp>
         <p:nvSpPr>
-          <p:cNvPr id="4" name="Placeholder 0"/>
+          <p:cNvPr id="5" name="Placeholder 0"/>
           <p:cNvSpPr txBox="1"/>
           <p:nvPr>
             <p:ph type="title" idx="0"/>
@@ -6837,7 +7484,7 @@
       </p:sp>
       <p:sp>
         <p:nvSpPr>
-          <p:cNvPr id="7" name="Placeholder 1"/>
+          <p:cNvPr id="8" name="Placeholder 1"/>
           <p:cNvSpPr txBox="1"/>
           <p:nvPr>
             <p:ph type="pic" idx="1"/>
@@ -6882,7 +7529,7 @@
       </p:sp>
       <p:sp>
         <p:nvSpPr>
-          <p:cNvPr id="8" name="Placeholder 2"/>
+          <p:cNvPr id="9" name="Placeholder 2"/>
           <p:cNvSpPr txBox="1"/>
           <p:nvPr>
             <p:ph type="body" idx="2"/>
@@ -6927,7 +7574,7 @@
       </p:sp>
       <p:sp>
         <p:nvSpPr>
-          <p:cNvPr id="9" name="Placeholder 3"/>
+          <p:cNvPr id="10" name="Placeholder 3"/>
           <p:cNvSpPr txBox="1"/>
           <p:nvPr>
             <p:ph type="body" idx="3"/>
@@ -6972,7 +7619,7 @@
       </p:sp>
       <p:sp>
         <p:nvSpPr>
-          <p:cNvPr id="10" name="Placeholder 4"/>
+          <p:cNvPr id="11" name="Placeholder 4"/>
           <p:cNvSpPr txBox="1"/>
           <p:nvPr>
             <p:ph type="body" idx="4"/>
@@ -7043,7 +7690,7 @@
       <p:grpSpPr/>
       <p:sp>
         <p:nvSpPr>
-          <p:cNvPr id="4" name="Placeholder 0"/>
+          <p:cNvPr id="5" name="Placeholder 0"/>
           <p:cNvSpPr txBox="1"/>
           <p:nvPr>
             <p:ph type="title" idx="0"/>
@@ -7088,7 +7735,7 @@
       </p:sp>
       <p:sp>
         <p:nvSpPr>
-          <p:cNvPr id="5" name="Placeholder 1"/>
+          <p:cNvPr id="6" name="Placeholder 1"/>
           <p:cNvSpPr txBox="1"/>
           <p:nvPr>
             <p:ph type="body" idx="1"/>
@@ -7133,7 +7780,7 @@
       </p:sp>
       <p:sp>
         <p:nvSpPr>
-          <p:cNvPr id="7" name="Placeholder 3"/>
+          <p:cNvPr id="8" name="Placeholder 3"/>
           <p:cNvSpPr txBox="1"/>
           <p:nvPr>
             <p:ph type="body" idx="3"/>
@@ -7178,7 +7825,7 @@
       </p:sp>
       <p:sp>
         <p:nvSpPr>
-          <p:cNvPr id="8" name="Placeholder 4"/>
+          <p:cNvPr id="9" name="Placeholder 4"/>
           <p:cNvSpPr txBox="1"/>
           <p:nvPr>
             <p:ph type="body" idx="4"/>
@@ -7223,7 +7870,7 @@
       </p:sp>
       <p:sp>
         <p:nvSpPr>
-          <p:cNvPr id="9" name="Placeholder 5"/>
+          <p:cNvPr id="10" name="Placeholder 5"/>
           <p:cNvSpPr txBox="1"/>
           <p:nvPr>
             <p:ph type="body" idx="5"/>
@@ -7268,7 +7915,7 @@
       </p:sp>
       <p:graphicFrame>
         <p:nvGraphicFramePr>
-          <p:cNvPr id="10" name="Chart 9"/>
+          <p:cNvPr id="11" name="Chart 10"/>
           <p:cNvGraphicFramePr>
             <a:graphicFrameLocks noGrp="1"/>
           </p:cNvGraphicFramePr>
@@ -7312,7 +7959,7 @@
       <p:grpSpPr/>
       <p:sp>
         <p:nvSpPr>
-          <p:cNvPr id="4" name="Placeholder 0"/>
+          <p:cNvPr id="5" name="Placeholder 0"/>
           <p:cNvSpPr txBox="1"/>
           <p:nvPr>
             <p:ph type="title" idx="0"/>
@@ -7357,7 +8004,7 @@
       </p:sp>
       <p:sp>
         <p:nvSpPr>
-          <p:cNvPr id="5" name="Placeholder 1"/>
+          <p:cNvPr id="6" name="Placeholder 1"/>
           <p:cNvSpPr txBox="1"/>
           <p:nvPr>
             <p:ph type="body" idx="1"/>
@@ -7402,7 +8049,7 @@
       </p:sp>
       <p:sp>
         <p:nvSpPr>
-          <p:cNvPr id="7" name="Placeholder 3"/>
+          <p:cNvPr id="8" name="Placeholder 3"/>
           <p:cNvSpPr txBox="1"/>
           <p:nvPr>
             <p:ph type="body" idx="3"/>
@@ -7447,7 +8094,7 @@
       </p:sp>
       <p:graphicFrame>
         <p:nvGraphicFramePr>
-          <p:cNvPr id="8" name="Table 7"/>
+          <p:cNvPr id="9" name="Table 8"/>
           <p:cNvGraphicFramePr>
             <a:graphicFrameLocks noGrp="1"/>
           </p:cNvGraphicFramePr>
@@ -7796,7 +8443,7 @@
       <p:grpSpPr/>
       <p:sp>
         <p:nvSpPr>
-          <p:cNvPr id="4" name="Placeholder 0"/>
+          <p:cNvPr id="5" name="Placeholder 0"/>
           <p:cNvSpPr txBox="1"/>
           <p:nvPr>
             <p:ph type="title" idx="0"/>
@@ -7861,7 +8508,7 @@
       </p:sp>
       <p:sp>
         <p:nvSpPr>
-          <p:cNvPr id="5" name="Placeholder 1"/>
+          <p:cNvPr id="6" name="Placeholder 1"/>
           <p:cNvSpPr txBox="1"/>
           <p:nvPr>
             <p:ph type="body" idx="1"/>
@@ -7952,7 +8599,7 @@
       <p:grpSpPr/>
       <p:sp>
         <p:nvSpPr>
-          <p:cNvPr id="4" name="Placeholder 0"/>
+          <p:cNvPr id="5" name="Placeholder 0"/>
           <p:cNvSpPr txBox="1"/>
           <p:nvPr>
             <p:ph type="title" idx="0"/>
@@ -7997,7 +8644,7 @@
       </p:sp>
       <p:sp>
         <p:nvSpPr>
-          <p:cNvPr id="5" name="Placeholder 1"/>
+          <p:cNvPr id="6" name="Placeholder 1"/>
           <p:cNvSpPr txBox="1"/>
           <p:nvPr>
             <p:ph type="body" idx="1"/>
@@ -8042,7 +8689,7 @@
       </p:sp>
       <p:sp>
         <p:nvSpPr>
-          <p:cNvPr id="6" name="Placeholder 2"/>
+          <p:cNvPr id="7" name="Placeholder 2"/>
           <p:cNvSpPr txBox="1"/>
           <p:nvPr>
             <p:ph type="body" idx="2"/>
@@ -8107,7 +8754,7 @@
       </p:sp>
       <p:sp>
         <p:nvSpPr>
-          <p:cNvPr id="7" name="Placeholder 3"/>
+          <p:cNvPr id="8" name="Placeholder 3"/>
           <p:cNvSpPr txBox="1"/>
           <p:nvPr>
             <p:ph type="body" idx="3"/>
@@ -8152,7 +8799,7 @@
       </p:sp>
       <p:sp>
         <p:nvSpPr>
-          <p:cNvPr id="8" name="Placeholder 4"/>
+          <p:cNvPr id="9" name="Placeholder 4"/>
           <p:cNvSpPr txBox="1"/>
           <p:nvPr>
             <p:ph type="body" idx="4"/>
@@ -8217,7 +8864,7 @@
       </p:sp>
       <p:sp>
         <p:nvSpPr>
-          <p:cNvPr id="9" name="Placeholder 5"/>
+          <p:cNvPr id="10" name="Placeholder 5"/>
           <p:cNvSpPr txBox="1"/>
           <p:nvPr>
             <p:ph type="body" idx="5"/>
@@ -8262,7 +8909,7 @@
       </p:sp>
       <p:sp>
         <p:nvSpPr>
-          <p:cNvPr id="10" name="Placeholder 6"/>
+          <p:cNvPr id="11" name="Placeholder 6"/>
           <p:cNvSpPr txBox="1"/>
           <p:nvPr>
             <p:ph type="body" idx="6"/>
@@ -8327,7 +8974,7 @@
       </p:sp>
       <p:sp>
         <p:nvSpPr>
-          <p:cNvPr id="11" name="Placeholder 7"/>
+          <p:cNvPr id="12" name="Placeholder 7"/>
           <p:cNvSpPr txBox="1"/>
           <p:nvPr>
             <p:ph type="body" idx="7"/>

--- a/slides/planb-starter.pptx
+++ b/slides/planb-starter.pptx
@@ -1146,7 +1146,7 @@
           <a:lstStyle/>
           <a:p>
             <a:r>
-              <a:t>CHART. The starter contains an editable native PowerPoint chart with an embedded Excel workbook. All values are synthetic. Use Edit Data to replace them. Give units, source, date and uncertainty. Use navy for structure, blue for context and gold for one emphasis.</a:t>
+              <a:t>CHART. The starter contains an editable native PowerPoint chart with an embedded Excel workbook. All values are synthetic. Use Edit Data to replace them. Give units, source, date and uncertainty. Preserve the selected light or dark edition colors and keep all labels readable.</a:t>
             </a:r>
           </a:p>
         </p:txBody>
@@ -1216,7 +1216,7 @@
           <a:lstStyle/>
           <a:p>
             <a:r>
-              <a:t>TABLE. Native editable table in the starter. Keep to 3–4 columns and 3–5 rows. Replace bracketed fields. Do not use a screenshot of a spreadsheet. Keep text at least 20pt. Use a navy header and alternating quiet grounds.</a:t>
+              <a:t>TABLE. Native editable table in the starter. Keep to 3–4 columns and 3–5 rows. Replace bracketed fields. Do not use a screenshot of a spreadsheet. Keep text at least 20pt. Preserve the selected edition header and alternating quiet grounds.</a:t>
             </a:r>
           </a:p>
         </p:txBody>
@@ -1442,20 +1442,6 @@
           </a:ln>
           <a:effectLst/>
         </p:spPr>
-        <p:style>
-          <a:lnRef idx="1">
-            <a:schemeClr val="accent1"/>
-          </a:lnRef>
-          <a:fillRef idx="3">
-            <a:schemeClr val="accent1"/>
-          </a:fillRef>
-          <a:effectRef idx="2">
-            <a:schemeClr val="accent1"/>
-          </a:effectRef>
-          <a:fontRef idx="minor">
-            <a:schemeClr val="lt1"/>
-          </a:fontRef>
-        </p:style>
         <p:txBody>
           <a:bodyPr rtlCol="0" anchor="ctr"/>
           <a:lstStyle/>
@@ -1747,20 +1733,6 @@
           </a:ln>
           <a:effectLst/>
         </p:spPr>
-        <p:style>
-          <a:lnRef idx="1">
-            <a:schemeClr val="accent1"/>
-          </a:lnRef>
-          <a:fillRef idx="3">
-            <a:schemeClr val="accent1"/>
-          </a:fillRef>
-          <a:effectRef idx="2">
-            <a:schemeClr val="accent1"/>
-          </a:effectRef>
-          <a:fontRef idx="minor">
-            <a:schemeClr val="lt1"/>
-          </a:fontRef>
-        </p:style>
         <p:txBody>
           <a:bodyPr rtlCol="0" anchor="ctr"/>
           <a:lstStyle/>
@@ -1936,20 +1908,6 @@
           </a:ln>
           <a:effectLst/>
         </p:spPr>
-        <p:style>
-          <a:lnRef idx="1">
-            <a:schemeClr val="accent1"/>
-          </a:lnRef>
-          <a:fillRef idx="3">
-            <a:schemeClr val="accent1"/>
-          </a:fillRef>
-          <a:effectRef idx="2">
-            <a:schemeClr val="accent1"/>
-          </a:effectRef>
-          <a:fontRef idx="minor">
-            <a:schemeClr val="lt1"/>
-          </a:fontRef>
-        </p:style>
         <p:txBody>
           <a:bodyPr rtlCol="0" anchor="ctr"/>
           <a:lstStyle/>
@@ -2032,20 +1990,6 @@
           </a:ln>
           <a:effectLst/>
         </p:spPr>
-        <p:style>
-          <a:lnRef idx="1">
-            <a:schemeClr val="accent1"/>
-          </a:lnRef>
-          <a:fillRef idx="3">
-            <a:schemeClr val="accent1"/>
-          </a:fillRef>
-          <a:effectRef idx="2">
-            <a:schemeClr val="accent1"/>
-          </a:effectRef>
-          <a:fontRef idx="minor">
-            <a:schemeClr val="lt1"/>
-          </a:fontRef>
-        </p:style>
         <p:txBody>
           <a:bodyPr rtlCol="0" anchor="ctr"/>
           <a:lstStyle/>
@@ -2382,20 +2326,6 @@
           </a:ln>
           <a:effectLst/>
         </p:spPr>
-        <p:style>
-          <a:lnRef idx="1">
-            <a:schemeClr val="accent1"/>
-          </a:lnRef>
-          <a:fillRef idx="3">
-            <a:schemeClr val="accent1"/>
-          </a:fillRef>
-          <a:effectRef idx="2">
-            <a:schemeClr val="accent1"/>
-          </a:effectRef>
-          <a:fontRef idx="minor">
-            <a:schemeClr val="lt1"/>
-          </a:fontRef>
-        </p:style>
         <p:txBody>
           <a:bodyPr rtlCol="0" anchor="ctr"/>
           <a:lstStyle/>
@@ -2426,20 +2356,6 @@
           </a:ln>
           <a:effectLst/>
         </p:spPr>
-        <p:style>
-          <a:lnRef idx="1">
-            <a:schemeClr val="accent1"/>
-          </a:lnRef>
-          <a:fillRef idx="3">
-            <a:schemeClr val="accent1"/>
-          </a:fillRef>
-          <a:effectRef idx="2">
-            <a:schemeClr val="accent1"/>
-          </a:effectRef>
-          <a:fontRef idx="minor">
-            <a:schemeClr val="lt1"/>
-          </a:fontRef>
-        </p:style>
         <p:txBody>
           <a:bodyPr rtlCol="0" anchor="ctr"/>
           <a:lstStyle/>
@@ -2470,20 +2386,6 @@
           </a:ln>
           <a:effectLst/>
         </p:spPr>
-        <p:style>
-          <a:lnRef idx="1">
-            <a:schemeClr val="accent1"/>
-          </a:lnRef>
-          <a:fillRef idx="3">
-            <a:schemeClr val="accent1"/>
-          </a:fillRef>
-          <a:effectRef idx="2">
-            <a:schemeClr val="accent1"/>
-          </a:effectRef>
-          <a:fontRef idx="minor">
-            <a:schemeClr val="lt1"/>
-          </a:fontRef>
-        </p:style>
         <p:txBody>
           <a:bodyPr rtlCol="0" anchor="ctr"/>
           <a:lstStyle/>
@@ -2514,20 +2416,6 @@
           </a:ln>
           <a:effectLst/>
         </p:spPr>
-        <p:style>
-          <a:lnRef idx="1">
-            <a:schemeClr val="accent1"/>
-          </a:lnRef>
-          <a:fillRef idx="3">
-            <a:schemeClr val="accent1"/>
-          </a:fillRef>
-          <a:effectRef idx="2">
-            <a:schemeClr val="accent1"/>
-          </a:effectRef>
-          <a:fontRef idx="minor">
-            <a:schemeClr val="lt1"/>
-          </a:fontRef>
-        </p:style>
         <p:txBody>
           <a:bodyPr rtlCol="0" anchor="ctr"/>
           <a:lstStyle/>
@@ -2653,20 +2541,6 @@
           </a:ln>
           <a:effectLst/>
         </p:spPr>
-        <p:style>
-          <a:lnRef idx="1">
-            <a:schemeClr val="accent1"/>
-          </a:lnRef>
-          <a:fillRef idx="3">
-            <a:schemeClr val="accent1"/>
-          </a:fillRef>
-          <a:effectRef idx="2">
-            <a:schemeClr val="accent1"/>
-          </a:effectRef>
-          <a:fontRef idx="minor">
-            <a:schemeClr val="lt1"/>
-          </a:fontRef>
-        </p:style>
         <p:txBody>
           <a:bodyPr rtlCol="0" anchor="ctr"/>
           <a:lstStyle/>
@@ -2749,20 +2623,6 @@
           </a:ln>
           <a:effectLst/>
         </p:spPr>
-        <p:style>
-          <a:lnRef idx="1">
-            <a:schemeClr val="accent1"/>
-          </a:lnRef>
-          <a:fillRef idx="3">
-            <a:schemeClr val="accent1"/>
-          </a:fillRef>
-          <a:effectRef idx="2">
-            <a:schemeClr val="accent1"/>
-          </a:effectRef>
-          <a:fontRef idx="minor">
-            <a:schemeClr val="lt1"/>
-          </a:fontRef>
-        </p:style>
         <p:txBody>
           <a:bodyPr rtlCol="0" anchor="ctr"/>
           <a:lstStyle/>
@@ -2983,20 +2843,6 @@
           </a:ln>
           <a:effectLst/>
         </p:spPr>
-        <p:style>
-          <a:lnRef idx="1">
-            <a:schemeClr val="accent1"/>
-          </a:lnRef>
-          <a:fillRef idx="3">
-            <a:schemeClr val="accent1"/>
-          </a:fillRef>
-          <a:effectRef idx="2">
-            <a:schemeClr val="accent1"/>
-          </a:effectRef>
-          <a:fontRef idx="minor">
-            <a:schemeClr val="lt1"/>
-          </a:fontRef>
-        </p:style>
         <p:txBody>
           <a:bodyPr rtlCol="0" anchor="ctr"/>
           <a:lstStyle/>
@@ -3079,20 +2925,6 @@
           </a:ln>
           <a:effectLst/>
         </p:spPr>
-        <p:style>
-          <a:lnRef idx="1">
-            <a:schemeClr val="accent1"/>
-          </a:lnRef>
-          <a:fillRef idx="3">
-            <a:schemeClr val="accent1"/>
-          </a:fillRef>
-          <a:effectRef idx="2">
-            <a:schemeClr val="accent1"/>
-          </a:effectRef>
-          <a:fontRef idx="minor">
-            <a:schemeClr val="lt1"/>
-          </a:fontRef>
-        </p:style>
         <p:txBody>
           <a:bodyPr rtlCol="0" anchor="ctr"/>
           <a:lstStyle/>
@@ -3436,20 +3268,6 @@
           </a:ln>
           <a:effectLst/>
         </p:spPr>
-        <p:style>
-          <a:lnRef idx="1">
-            <a:schemeClr val="accent1"/>
-          </a:lnRef>
-          <a:fillRef idx="3">
-            <a:schemeClr val="accent1"/>
-          </a:fillRef>
-          <a:effectRef idx="2">
-            <a:schemeClr val="accent1"/>
-          </a:effectRef>
-          <a:fontRef idx="minor">
-            <a:schemeClr val="lt1"/>
-          </a:fontRef>
-        </p:style>
         <p:txBody>
           <a:bodyPr rtlCol="0" anchor="ctr"/>
           <a:lstStyle/>
@@ -3791,20 +3609,6 @@
           </a:ln>
           <a:effectLst/>
         </p:spPr>
-        <p:style>
-          <a:lnRef idx="1">
-            <a:schemeClr val="accent1"/>
-          </a:lnRef>
-          <a:fillRef idx="3">
-            <a:schemeClr val="accent1"/>
-          </a:fillRef>
-          <a:effectRef idx="2">
-            <a:schemeClr val="accent1"/>
-          </a:effectRef>
-          <a:fontRef idx="minor">
-            <a:schemeClr val="lt1"/>
-          </a:fontRef>
-        </p:style>
         <p:txBody>
           <a:bodyPr rtlCol="0" anchor="ctr"/>
           <a:lstStyle/>
@@ -3887,20 +3691,6 @@
           </a:ln>
           <a:effectLst/>
         </p:spPr>
-        <p:style>
-          <a:lnRef idx="1">
-            <a:schemeClr val="accent1"/>
-          </a:lnRef>
-          <a:fillRef idx="3">
-            <a:schemeClr val="accent1"/>
-          </a:fillRef>
-          <a:effectRef idx="2">
-            <a:schemeClr val="accent1"/>
-          </a:effectRef>
-          <a:fontRef idx="minor">
-            <a:schemeClr val="lt1"/>
-          </a:fontRef>
-        </p:style>
         <p:txBody>
           <a:bodyPr rtlCol="0" anchor="ctr"/>
           <a:lstStyle/>
@@ -4064,20 +3854,6 @@
           </a:ln>
           <a:effectLst/>
         </p:spPr>
-        <p:style>
-          <a:lnRef idx="1">
-            <a:schemeClr val="accent1"/>
-          </a:lnRef>
-          <a:fillRef idx="3">
-            <a:schemeClr val="accent1"/>
-          </a:fillRef>
-          <a:effectRef idx="2">
-            <a:schemeClr val="accent1"/>
-          </a:effectRef>
-          <a:fontRef idx="minor">
-            <a:schemeClr val="lt1"/>
-          </a:fontRef>
-        </p:style>
         <p:txBody>
           <a:bodyPr rtlCol="0" anchor="ctr"/>
           <a:lstStyle/>
@@ -4383,20 +4159,6 @@
           </a:ln>
           <a:effectLst/>
         </p:spPr>
-        <p:style>
-          <a:lnRef idx="1">
-            <a:schemeClr val="accent1"/>
-          </a:lnRef>
-          <a:fillRef idx="3">
-            <a:schemeClr val="accent1"/>
-          </a:fillRef>
-          <a:effectRef idx="2">
-            <a:schemeClr val="accent1"/>
-          </a:effectRef>
-          <a:fontRef idx="minor">
-            <a:schemeClr val="lt1"/>
-          </a:fontRef>
-        </p:style>
         <p:txBody>
           <a:bodyPr rtlCol="0" anchor="ctr"/>
           <a:lstStyle/>
@@ -4835,20 +4597,6 @@
           </a:ln>
           <a:effectLst/>
         </p:spPr>
-        <p:style>
-          <a:lnRef idx="1">
-            <a:schemeClr val="accent1"/>
-          </a:lnRef>
-          <a:fillRef idx="3">
-            <a:schemeClr val="accent1"/>
-          </a:fillRef>
-          <a:effectRef idx="2">
-            <a:schemeClr val="accent1"/>
-          </a:effectRef>
-          <a:fontRef idx="minor">
-            <a:schemeClr val="lt1"/>
-          </a:fontRef>
-        </p:style>
         <p:txBody>
           <a:bodyPr rtlCol="0" anchor="ctr"/>
           <a:lstStyle/>
@@ -5197,20 +4945,6 @@
           </a:ln>
           <a:effectLst/>
         </p:spPr>
-        <p:style>
-          <a:lnRef idx="1">
-            <a:schemeClr val="accent1"/>
-          </a:lnRef>
-          <a:fillRef idx="3">
-            <a:schemeClr val="accent1"/>
-          </a:fillRef>
-          <a:effectRef idx="2">
-            <a:schemeClr val="accent1"/>
-          </a:effectRef>
-          <a:fontRef idx="minor">
-            <a:schemeClr val="lt1"/>
-          </a:fontRef>
-        </p:style>
         <p:txBody>
           <a:bodyPr rtlCol="0" anchor="ctr"/>
           <a:lstStyle/>
@@ -5471,20 +5205,6 @@
           </a:ln>
           <a:effectLst/>
         </p:spPr>
-        <p:style>
-          <a:lnRef idx="1">
-            <a:schemeClr val="accent1"/>
-          </a:lnRef>
-          <a:fillRef idx="3">
-            <a:schemeClr val="accent1"/>
-          </a:fillRef>
-          <a:effectRef idx="2">
-            <a:schemeClr val="accent1"/>
-          </a:effectRef>
-          <a:fontRef idx="minor">
-            <a:schemeClr val="lt1"/>
-          </a:fontRef>
-        </p:style>
         <p:txBody>
           <a:bodyPr rtlCol="0" anchor="ctr"/>
           <a:lstStyle/>
@@ -5567,20 +5287,6 @@
           </a:ln>
           <a:effectLst/>
         </p:spPr>
-        <p:style>
-          <a:lnRef idx="1">
-            <a:schemeClr val="accent1"/>
-          </a:lnRef>
-          <a:fillRef idx="3">
-            <a:schemeClr val="accent1"/>
-          </a:fillRef>
-          <a:effectRef idx="2">
-            <a:schemeClr val="accent1"/>
-          </a:effectRef>
-          <a:fontRef idx="minor">
-            <a:schemeClr val="lt1"/>
-          </a:fontRef>
-        </p:style>
         <p:txBody>
           <a:bodyPr rtlCol="0" anchor="ctr"/>
           <a:lstStyle/>

--- a/slides/planb-starter.pptx
+++ b/slides/planb-starter.pptx
@@ -15,6 +15,9 @@
     <p:sldId id="263" r:id="rId15"/>
     <p:sldId id="264" r:id="rId16"/>
     <p:sldId id="265" r:id="rId17"/>
+    <p:sldId id="266" r:id="rId18"/>
+    <p:sldId id="267" r:id="rId19"/>
+    <p:sldId id="268" r:id="rId20"/>
   </p:sldIdLst>
   <p:sldSz cx="12191999" cy="6858000" type="screen4x3"/>
   <p:notesSz cx="6858000" cy="9144000"/>
@@ -726,7 +729,7 @@
           <a:lstStyle/>
           <a:p>
             <a:r>
-              <a:t>COVER. Replace bracketed text. Aim for a title under 8 words. Keep the inherited mark intact. This template uses the existing Lugano Plan B identity, not a newly designed Foundation logo. Install bundled Inter fonts before editing. Choose Home &gt; New Slide for Plan B layouts.</a:t>
+              <a:t>COVER. Replace bracketed text. Aim for a title under 8 words. Keep the inherited mark intact. This template uses the existing Lugano Plan B identity, not a newly designed Foundation logo. Install bundled Inter fonts before editing. The right-side panel, SVG logo, values text and top gradient are separate selectable slide objects. Duplicate this cover to preserve them; New Slide uses the content layout only. Swap logos by copying from the three logo-library slides. Edit both shared footer text boxes once on View &gt; Slide Master &gt; the top parent master, then Close Master View.</a:t>
             </a:r>
           </a:p>
         </p:txBody>
@@ -797,6 +800,216 @@
           <a:p>
             <a:r>
               <a:t>GUIDE. This deck is an editable starter, not a finished presentation. Ten Plan B layouts plus a branded blank are supplied. Speaker notes describe usage. Reuse the POTX in PowerPoint to create a new document. Keynote/LibreOffice may vary in rendering; check after import.</a:t>
+            </a:r>
+          </a:p>
+        </p:txBody>
+      </p:sp>
+      <p:sp>
+        <p:nvSpPr>
+          <p:cNvPr id="4" name="Slide Number Placeholder 3"/>
+          <p:cNvSpPr>
+            <a:spLocks noGrp="1"/>
+          </p:cNvSpPr>
+          <p:nvPr>
+            <p:ph type="sldNum" idx="5" sz="quarter"/>
+          </p:nvPr>
+        </p:nvSpPr>
+        <p:spPr/>
+      </p:sp>
+    </p:spTree>
+  </p:cSld>
+  <p:clrMapOvr>
+    <a:masterClrMapping/>
+  </p:clrMapOvr>
+</p:notes>
+</file>
+
+<file path=ppt/notesSlides/notesSlide11.xml><?xml version="1.0" encoding="utf-8"?>
+<p:notes xmlns:a="http://schemas.openxmlformats.org/drawingml/2006/main" xmlns:p="http://schemas.openxmlformats.org/presentationml/2006/main" xmlns:r="http://schemas.openxmlformats.org/officeDocument/2006/relationships">
+  <p:cSld>
+    <p:spTree>
+      <p:nvGrpSpPr>
+        <p:cNvPr id="1" name=""/>
+        <p:cNvGrpSpPr/>
+        <p:nvPr/>
+      </p:nvGrpSpPr>
+      <p:grpSpPr>
+        <a:xfrm>
+          <a:off x="0" y="0"/>
+          <a:ext cx="0" cy="0"/>
+          <a:chOff x="0" y="0"/>
+          <a:chExt cx="0" cy="0"/>
+        </a:xfrm>
+      </p:grpSpPr>
+      <p:sp>
+        <p:nvSpPr>
+          <p:cNvPr id="2" name="Slide Image Placeholder 1"/>
+          <p:cNvSpPr>
+            <a:spLocks noGrp="1"/>
+          </p:cNvSpPr>
+          <p:nvPr>
+            <p:ph type="sldImg" idx="2"/>
+          </p:nvPr>
+        </p:nvSpPr>
+        <p:spPr/>
+      </p:sp>
+      <p:sp>
+        <p:nvSpPr>
+          <p:cNvPr id="3" name="Notes Placeholder 2"/>
+          <p:cNvSpPr>
+            <a:spLocks noGrp="1"/>
+          </p:cNvSpPr>
+          <p:nvPr>
+            <p:ph type="body" idx="3" sz="quarter"/>
+          </p:nvPr>
+        </p:nvSpPr>
+        <p:spPr/>
+        <p:txBody>
+          <a:bodyPr/>
+          <a:lstStyle/>
+          <a:p>
+            <a:r>
+              <a:t>LOGO LIBRARY. Each logo is an original embedded SVG with a PNG fallback for older viewers. Copy the logo itself, not the background rectangle. Keep original proportions and colors. Color and white logos need a dark ground; black needs a light ground. Delete this slide before presenting. Shared footer: View &gt; Slide Master &gt; top parent master.</a:t>
+            </a:r>
+          </a:p>
+        </p:txBody>
+      </p:sp>
+      <p:sp>
+        <p:nvSpPr>
+          <p:cNvPr id="4" name="Slide Number Placeholder 3"/>
+          <p:cNvSpPr>
+            <a:spLocks noGrp="1"/>
+          </p:cNvSpPr>
+          <p:nvPr>
+            <p:ph type="sldNum" idx="5" sz="quarter"/>
+          </p:nvPr>
+        </p:nvSpPr>
+        <p:spPr/>
+      </p:sp>
+    </p:spTree>
+  </p:cSld>
+  <p:clrMapOvr>
+    <a:masterClrMapping/>
+  </p:clrMapOvr>
+</p:notes>
+</file>
+
+<file path=ppt/notesSlides/notesSlide12.xml><?xml version="1.0" encoding="utf-8"?>
+<p:notes xmlns:a="http://schemas.openxmlformats.org/drawingml/2006/main" xmlns:p="http://schemas.openxmlformats.org/presentationml/2006/main" xmlns:r="http://schemas.openxmlformats.org/officeDocument/2006/relationships">
+  <p:cSld>
+    <p:spTree>
+      <p:nvGrpSpPr>
+        <p:cNvPr id="1" name=""/>
+        <p:cNvGrpSpPr/>
+        <p:nvPr/>
+      </p:nvGrpSpPr>
+      <p:grpSpPr>
+        <a:xfrm>
+          <a:off x="0" y="0"/>
+          <a:ext cx="0" cy="0"/>
+          <a:chOff x="0" y="0"/>
+          <a:chExt cx="0" cy="0"/>
+        </a:xfrm>
+      </p:grpSpPr>
+      <p:sp>
+        <p:nvSpPr>
+          <p:cNvPr id="2" name="Slide Image Placeholder 1"/>
+          <p:cNvSpPr>
+            <a:spLocks noGrp="1"/>
+          </p:cNvSpPr>
+          <p:nvPr>
+            <p:ph type="sldImg" idx="2"/>
+          </p:nvPr>
+        </p:nvSpPr>
+        <p:spPr/>
+      </p:sp>
+      <p:sp>
+        <p:nvSpPr>
+          <p:cNvPr id="3" name="Notes Placeholder 2"/>
+          <p:cNvSpPr>
+            <a:spLocks noGrp="1"/>
+          </p:cNvSpPr>
+          <p:nvPr>
+            <p:ph type="body" idx="3" sz="quarter"/>
+          </p:nvPr>
+        </p:nvSpPr>
+        <p:spPr/>
+        <p:txBody>
+          <a:bodyPr/>
+          <a:lstStyle/>
+          <a:p>
+            <a:r>
+              <a:t>LOGO LIBRARY. Each logo is an original embedded SVG with a PNG fallback for older viewers. Copy the logo itself, not the background rectangle. Keep original proportions and colors. Color and white logos need a dark ground; black needs a light ground. Delete this slide before presenting. Shared footer: View &gt; Slide Master &gt; top parent master.</a:t>
+            </a:r>
+          </a:p>
+        </p:txBody>
+      </p:sp>
+      <p:sp>
+        <p:nvSpPr>
+          <p:cNvPr id="4" name="Slide Number Placeholder 3"/>
+          <p:cNvSpPr>
+            <a:spLocks noGrp="1"/>
+          </p:cNvSpPr>
+          <p:nvPr>
+            <p:ph type="sldNum" idx="5" sz="quarter"/>
+          </p:nvPr>
+        </p:nvSpPr>
+        <p:spPr/>
+      </p:sp>
+    </p:spTree>
+  </p:cSld>
+  <p:clrMapOvr>
+    <a:masterClrMapping/>
+  </p:clrMapOvr>
+</p:notes>
+</file>
+
+<file path=ppt/notesSlides/notesSlide13.xml><?xml version="1.0" encoding="utf-8"?>
+<p:notes xmlns:a="http://schemas.openxmlformats.org/drawingml/2006/main" xmlns:p="http://schemas.openxmlformats.org/presentationml/2006/main" xmlns:r="http://schemas.openxmlformats.org/officeDocument/2006/relationships">
+  <p:cSld>
+    <p:spTree>
+      <p:nvGrpSpPr>
+        <p:cNvPr id="1" name=""/>
+        <p:cNvGrpSpPr/>
+        <p:nvPr/>
+      </p:nvGrpSpPr>
+      <p:grpSpPr>
+        <a:xfrm>
+          <a:off x="0" y="0"/>
+          <a:ext cx="0" cy="0"/>
+          <a:chOff x="0" y="0"/>
+          <a:chExt cx="0" cy="0"/>
+        </a:xfrm>
+      </p:grpSpPr>
+      <p:sp>
+        <p:nvSpPr>
+          <p:cNvPr id="2" name="Slide Image Placeholder 1"/>
+          <p:cNvSpPr>
+            <a:spLocks noGrp="1"/>
+          </p:cNvSpPr>
+          <p:nvPr>
+            <p:ph type="sldImg" idx="2"/>
+          </p:nvPr>
+        </p:nvSpPr>
+        <p:spPr/>
+      </p:sp>
+      <p:sp>
+        <p:nvSpPr>
+          <p:cNvPr id="3" name="Notes Placeholder 2"/>
+          <p:cNvSpPr>
+            <a:spLocks noGrp="1"/>
+          </p:cNvSpPr>
+          <p:nvPr>
+            <p:ph type="body" idx="3" sz="quarter"/>
+          </p:nvPr>
+        </p:nvSpPr>
+        <p:spPr/>
+        <p:txBody>
+          <a:bodyPr/>
+          <a:lstStyle/>
+          <a:p>
+            <a:r>
+              <a:t>LOGO LIBRARY. Each logo is an original embedded SVG with a PNG fallback for older viewers. Copy the logo itself, not the background rectangle. Keep original proportions and colors. Color and white logos need a dark ground; black needs a light ground. Delete this slide before presenting. Shared footer: View &gt; Slide Master &gt; top parent master.</a:t>
             </a:r>
           </a:p>
         </p:txBody>
@@ -1452,93 +1665,7 @@
       </p:sp>
       <p:sp>
         <p:nvSpPr>
-          <p:cNvPr id="3" name="Plan B Foundation"/>
-          <p:cNvSpPr txBox="1"/>
-          <p:nvPr/>
-        </p:nvSpPr>
-        <p:spPr>
-          <a:xfrm>
-            <a:off x="594360" y="6382512"/>
-            <a:ext cx="3657600" cy="228600"/>
-          </a:xfrm>
-          <a:prstGeom prst="rect">
-            <a:avLst/>
-          </a:prstGeom>
-          <a:noFill/>
-        </p:spPr>
-        <p:txBody>
-          <a:bodyPr wrap="square" lIns="0" rIns="0" tIns="0" bIns="0">
-            <a:spAutoFit/>
-          </a:bodyPr>
-          <a:lstStyle/>
-          <a:p>
-            <a:pPr algn="l" marL="0" indent="0">
-              <a:defRPr sz="1100" b="1">
-                <a:solidFill>
-                  <a:srgbClr val="082952"/>
-                </a:solidFill>
-                <a:latin typeface="Inter"/>
-              </a:defRPr>
-              <a:lnSpc>
-                <a:spcPct val="112000"/>
-              </a:lnSpc>
-              <a:spcAft>
-                <a:spcPts val="1200"/>
-              </a:spcAft>
-              <a:buNone/>
-            </a:pPr>
-            <a:r>
-              <a:t>Plan B Foundation</a:t>
-            </a:r>
-          </a:p>
-        </p:txBody>
-      </p:sp>
-      <p:sp>
-        <p:nvSpPr>
-          <p:cNvPr id="4" name="Civic Digital Commons"/>
-          <p:cNvSpPr txBox="1"/>
-          <p:nvPr/>
-        </p:nvSpPr>
-        <p:spPr>
-          <a:xfrm>
-            <a:off x="8595360" y="6382512"/>
-            <a:ext cx="2971800" cy="228600"/>
-          </a:xfrm>
-          <a:prstGeom prst="rect">
-            <a:avLst/>
-          </a:prstGeom>
-          <a:noFill/>
-        </p:spPr>
-        <p:txBody>
-          <a:bodyPr wrap="square" lIns="0" rIns="0" tIns="0" bIns="0">
-            <a:spAutoFit/>
-          </a:bodyPr>
-          <a:lstStyle/>
-          <a:p>
-            <a:pPr algn="l" marL="0" indent="0">
-              <a:defRPr sz="1100" b="0">
-                <a:solidFill>
-                  <a:srgbClr val="082952"/>
-                </a:solidFill>
-                <a:latin typeface="Inter"/>
-              </a:defRPr>
-              <a:lnSpc>
-                <a:spcPct val="112000"/>
-              </a:lnSpc>
-              <a:spcAft>
-                <a:spcPts val="1200"/>
-              </a:spcAft>
-              <a:buNone/>
-            </a:pPr>
-            <a:r>
-              <a:t>Civic Digital Commons</a:t>
-            </a:r>
-          </a:p>
-        </p:txBody>
-      </p:sp>
-      <p:sp>
-        <p:nvSpPr>
-          <p:cNvPr id="5" name="Placeholder 0"/>
+          <p:cNvPr id="3" name="Placeholder 0"/>
           <p:cNvSpPr txBox="1"/>
           <p:nvPr>
             <p:ph type="title" idx="0"/>
@@ -1603,7 +1730,7 @@
       </p:sp>
       <p:sp>
         <p:nvSpPr>
-          <p:cNvPr id="6" name="Placeholder 1"/>
+          <p:cNvPr id="4" name="Placeholder 1"/>
           <p:cNvSpPr txBox="1"/>
           <p:nvPr>
             <p:ph type="subTitle" idx="1"/>
@@ -1648,7 +1775,7 @@
       </p:sp>
       <p:sp>
         <p:nvSpPr>
-          <p:cNvPr id="7" name="Placeholder 2"/>
+          <p:cNvPr id="5" name="Placeholder 2"/>
           <p:cNvSpPr txBox="1"/>
           <p:nvPr>
             <p:ph type="body" idx="2"/>
@@ -1708,211 +1835,6 @@
             <a:r>
               <a:t>[Event · date]</a:t>
             </a:r>
-          </a:p>
-        </p:txBody>
-      </p:sp>
-      <p:sp>
-        <p:nvSpPr>
-          <p:cNvPr id="8" name="Rectangle 7"/>
-          <p:cNvSpPr/>
-          <p:nvPr/>
-        </p:nvSpPr>
-        <p:spPr>
-          <a:xfrm>
-            <a:off x="7818120" y="0"/>
-            <a:ext cx="4379976" cy="6080760"/>
-          </a:xfrm>
-          <a:prstGeom prst="rect">
-            <a:avLst/>
-          </a:prstGeom>
-          <a:solidFill>
-            <a:srgbClr val="082952"/>
-          </a:solidFill>
-          <a:ln>
-            <a:noFill/>
-          </a:ln>
-          <a:effectLst/>
-        </p:spPr>
-        <p:txBody>
-          <a:bodyPr rtlCol="0" anchor="ctr"/>
-          <a:lstStyle/>
-          <a:p>
-            <a:pPr algn="ctr"/>
-          </a:p>
-        </p:txBody>
-      </p:sp>
-      <p:pic>
-        <p:nvPicPr>
-          <p:cNvPr id="9" name="Original Lugano's Plan B mark" descr="Lugano's Plan B original logo; existing mark, not a new Foundation logo"/>
-          <p:cNvPicPr>
-            <a:picLocks noChangeAspect="1"/>
-          </p:cNvPicPr>
-          <p:nvPr/>
-        </p:nvPicPr>
-        <p:blipFill>
-          <a:blip r:embed="rId2">
-            <a:ext uri="{96DAC541-7B7A-43D3-8B79-37D633B846F1}">
-              <ns0:svgBlip xmlns:ns0="http://schemas.microsoft.com/office/drawing/2016/SVG/main" r:embed="rId3"/>
-            </a:ext>
-          </a:blip>
-          <a:stretch>
-            <a:fillRect/>
-          </a:stretch>
-        </p:blipFill>
-        <p:spPr>
-          <a:xfrm>
-            <a:off x="8302752" y="1325880"/>
-            <a:ext cx="3401568" cy="720671"/>
-          </a:xfrm>
-          <a:prstGeom prst="rect">
-            <a:avLst/>
-          </a:prstGeom>
-        </p:spPr>
-      </p:pic>
-      <p:sp>
-        <p:nvSpPr>
-          <p:cNvPr id="10" name="Open.&#10;Capable.&#10;Curious.&#10;Grounded."/>
-          <p:cNvSpPr txBox="1"/>
-          <p:nvPr/>
-        </p:nvSpPr>
-        <p:spPr>
-          <a:xfrm>
-            <a:off x="8302752" y="2788920"/>
-            <a:ext cx="3291840" cy="2103120"/>
-          </a:xfrm>
-          <a:prstGeom prst="rect">
-            <a:avLst/>
-          </a:prstGeom>
-          <a:noFill/>
-        </p:spPr>
-        <p:txBody>
-          <a:bodyPr wrap="square" lIns="0" rIns="0" tIns="0" bIns="0">
-            <a:spAutoFit/>
-          </a:bodyPr>
-          <a:lstStyle/>
-          <a:p>
-            <a:pPr algn="l" marL="0" indent="0">
-              <a:defRPr sz="2900" b="1">
-                <a:solidFill>
-                  <a:srgbClr val="FFFEFA"/>
-                </a:solidFill>
-                <a:latin typeface="Inter"/>
-              </a:defRPr>
-              <a:lnSpc>
-                <a:spcPct val="112000"/>
-              </a:lnSpc>
-              <a:spcAft>
-                <a:spcPts val="1200"/>
-              </a:spcAft>
-              <a:buNone/>
-            </a:pPr>
-            <a:r>
-              <a:t>Open.</a:t>
-            </a:r>
-          </a:p>
-          <a:p>
-            <a:pPr algn="l" marL="0" indent="0">
-              <a:defRPr sz="2900" b="1">
-                <a:solidFill>
-                  <a:srgbClr val="FFFEFA"/>
-                </a:solidFill>
-                <a:latin typeface="Inter"/>
-              </a:defRPr>
-              <a:lnSpc>
-                <a:spcPct val="112000"/>
-              </a:lnSpc>
-              <a:spcAft>
-                <a:spcPts val="1200"/>
-              </a:spcAft>
-              <a:buNone/>
-            </a:pPr>
-            <a:r>
-              <a:t>Capable.</a:t>
-            </a:r>
-          </a:p>
-          <a:p>
-            <a:pPr algn="l" marL="0" indent="0">
-              <a:defRPr sz="2900" b="1">
-                <a:solidFill>
-                  <a:srgbClr val="FFFEFA"/>
-                </a:solidFill>
-                <a:latin typeface="Inter"/>
-              </a:defRPr>
-              <a:lnSpc>
-                <a:spcPct val="112000"/>
-              </a:lnSpc>
-              <a:spcAft>
-                <a:spcPts val="1200"/>
-              </a:spcAft>
-              <a:buNone/>
-            </a:pPr>
-            <a:r>
-              <a:t>Curious.</a:t>
-            </a:r>
-          </a:p>
-          <a:p>
-            <a:pPr algn="l" marL="0" indent="0">
-              <a:defRPr sz="2900" b="1">
-                <a:solidFill>
-                  <a:srgbClr val="FFFEFA"/>
-                </a:solidFill>
-                <a:latin typeface="Inter"/>
-              </a:defRPr>
-              <a:lnSpc>
-                <a:spcPct val="112000"/>
-              </a:lnSpc>
-              <a:spcAft>
-                <a:spcPts val="1200"/>
-              </a:spcAft>
-              <a:buNone/>
-            </a:pPr>
-            <a:r>
-              <a:t>Grounded.</a:t>
-            </a:r>
-          </a:p>
-        </p:txBody>
-      </p:sp>
-      <p:sp>
-        <p:nvSpPr>
-          <p:cNvPr id="11" name="Plan B / Network energy gradient"/>
-          <p:cNvSpPr/>
-          <p:nvPr/>
-        </p:nvSpPr>
-        <p:spPr>
-          <a:xfrm>
-            <a:off x="7818120" y="5715000"/>
-            <a:ext cx="4379976" cy="365760"/>
-          </a:xfrm>
-          <a:prstGeom prst="rect">
-            <a:avLst/>
-          </a:prstGeom>
-          <a:gradFill rotWithShape="1">
-            <a:gsLst>
-              <a:gs pos="0">
-                <a:srgbClr val="FFB604"/>
-              </a:gs>
-              <a:gs pos="28000">
-                <a:srgbClr val="FF5DB1"/>
-              </a:gs>
-              <a:gs pos="58000">
-                <a:srgbClr val="7468FF"/>
-              </a:gs>
-              <a:gs pos="100000">
-                <a:srgbClr val="23F5FF"/>
-              </a:gs>
-            </a:gsLst>
-            <a:lin ang="0" scaled="1"/>
-          </a:gradFill>
-          <a:ln>
-            <a:noFill/>
-          </a:ln>
-          <a:effectLst/>
-        </p:spPr>
-        <p:txBody>
-          <a:bodyPr rtlCol="0" anchor="ctr"/>
-          <a:lstStyle/>
-          <a:p>
-            <a:pPr algn="ctr"/>
           </a:p>
         </p:txBody>
       </p:sp>
@@ -2000,93 +1922,7 @@
       </p:sp>
       <p:sp>
         <p:nvSpPr>
-          <p:cNvPr id="3" name="Plan B Foundation"/>
-          <p:cNvSpPr txBox="1"/>
-          <p:nvPr/>
-        </p:nvSpPr>
-        <p:spPr>
-          <a:xfrm>
-            <a:off x="594360" y="6382512"/>
-            <a:ext cx="3657600" cy="228600"/>
-          </a:xfrm>
-          <a:prstGeom prst="rect">
-            <a:avLst/>
-          </a:prstGeom>
-          <a:noFill/>
-        </p:spPr>
-        <p:txBody>
-          <a:bodyPr wrap="square" lIns="0" rIns="0" tIns="0" bIns="0">
-            <a:spAutoFit/>
-          </a:bodyPr>
-          <a:lstStyle/>
-          <a:p>
-            <a:pPr algn="l" marL="0" indent="0">
-              <a:defRPr sz="1100" b="1">
-                <a:solidFill>
-                  <a:srgbClr val="082952"/>
-                </a:solidFill>
-                <a:latin typeface="Inter"/>
-              </a:defRPr>
-              <a:lnSpc>
-                <a:spcPct val="112000"/>
-              </a:lnSpc>
-              <a:spcAft>
-                <a:spcPts val="1200"/>
-              </a:spcAft>
-              <a:buNone/>
-            </a:pPr>
-            <a:r>
-              <a:t>Plan B Foundation</a:t>
-            </a:r>
-          </a:p>
-        </p:txBody>
-      </p:sp>
-      <p:sp>
-        <p:nvSpPr>
-          <p:cNvPr id="4" name="Civic Digital Commons"/>
-          <p:cNvSpPr txBox="1"/>
-          <p:nvPr/>
-        </p:nvSpPr>
-        <p:spPr>
-          <a:xfrm>
-            <a:off x="8595360" y="6382512"/>
-            <a:ext cx="2971800" cy="228600"/>
-          </a:xfrm>
-          <a:prstGeom prst="rect">
-            <a:avLst/>
-          </a:prstGeom>
-          <a:noFill/>
-        </p:spPr>
-        <p:txBody>
-          <a:bodyPr wrap="square" lIns="0" rIns="0" tIns="0" bIns="0">
-            <a:spAutoFit/>
-          </a:bodyPr>
-          <a:lstStyle/>
-          <a:p>
-            <a:pPr algn="l" marL="0" indent="0">
-              <a:defRPr sz="1100" b="0">
-                <a:solidFill>
-                  <a:srgbClr val="082952"/>
-                </a:solidFill>
-                <a:latin typeface="Inter"/>
-              </a:defRPr>
-              <a:lnSpc>
-                <a:spcPct val="112000"/>
-              </a:lnSpc>
-              <a:spcAft>
-                <a:spcPts val="1200"/>
-              </a:spcAft>
-              <a:buNone/>
-            </a:pPr>
-            <a:r>
-              <a:t>Civic Digital Commons</a:t>
-            </a:r>
-          </a:p>
-        </p:txBody>
-      </p:sp>
-      <p:sp>
-        <p:nvSpPr>
-          <p:cNvPr id="5" name="Placeholder 0"/>
+          <p:cNvPr id="3" name="Placeholder 0"/>
           <p:cNvSpPr txBox="1"/>
           <p:nvPr>
             <p:ph type="title" idx="0"/>
@@ -2131,7 +1967,7 @@
       </p:sp>
       <p:sp>
         <p:nvSpPr>
-          <p:cNvPr id="6" name="Placeholder 1"/>
+          <p:cNvPr id="4" name="Placeholder 1"/>
           <p:cNvSpPr txBox="1"/>
           <p:nvPr>
             <p:ph type="body" idx="1"/>
@@ -2176,7 +2012,7 @@
       </p:sp>
       <p:sp>
         <p:nvSpPr>
-          <p:cNvPr id="7" name="Placeholder 2"/>
+          <p:cNvPr id="5" name="Placeholder 2"/>
           <p:cNvSpPr txBox="1"/>
           <p:nvPr>
             <p:ph type="body" idx="2"/>
@@ -2214,7 +2050,7 @@
               <a:buNone/>
             </a:pPr>
             <a:r>
-              <a:t>Use the layouts</a:t>
+              <a:t>Edit the slide</a:t>
             </a:r>
           </a:p>
           <a:p>
@@ -2234,14 +2070,14 @@
               <a:buNone/>
             </a:pPr>
             <a:r>
-              <a:t>Install Inter, then choose Home → New Slide. Replace bracketed prompts. Duplicate the chart or table example to retain its styling.</a:t>
-            </a:r>
-          </a:p>
-        </p:txBody>
-      </p:sp>
-      <p:sp>
-        <p:nvSpPr>
-          <p:cNvPr id="8" name="Placeholder 3"/>
+              <a:t>Duplicate the cover to keep its movable SVG logo, text, panel and top gradient. Copy other logo forms from the library slides. Use New Slide for content layouts.</a:t>
+            </a:r>
+          </a:p>
+        </p:txBody>
+      </p:sp>
+      <p:sp>
+        <p:nvSpPr>
+          <p:cNvPr id="6" name="Placeholder 3"/>
           <p:cNvSpPr txBox="1"/>
           <p:nvPr>
             <p:ph type="body" idx="3"/>
@@ -2279,7 +2115,7 @@
               <a:buNone/>
             </a:pPr>
             <a:r>
-              <a:t>Keep it clear</a:t>
+              <a:t>Edit every footer at once</a:t>
             </a:r>
           </a:p>
           <a:p>
@@ -2299,14 +2135,14 @@
               <a:buNone/>
             </a:pPr>
             <a:r>
-              <a:t>One idea per slide. Keep the selected light or dark palette. Preserve the gradient band and keep text on solid grounds. Aim for 20pt or larger body text.</a:t>
-            </a:r>
-          </a:p>
-        </p:txBody>
-      </p:sp>
-      <p:sp>
-        <p:nvSpPr>
-          <p:cNvPr id="9" name="Rectangle 8"/>
+              <a:t>View → Slide Master → select the top parent master. Edit the two footer text boxes, then Close Master View. Delete this guide and the logo library before presenting.</a:t>
+            </a:r>
+          </a:p>
+        </p:txBody>
+      </p:sp>
+      <p:sp>
+        <p:nvSpPr>
+          <p:cNvPr id="7" name="Rectangle 6"/>
           <p:cNvSpPr/>
           <p:nvPr/>
         </p:nvSpPr>
@@ -2336,7 +2172,7 @@
       </p:sp>
       <p:sp>
         <p:nvSpPr>
-          <p:cNvPr id="10" name="Rectangle 9"/>
+          <p:cNvPr id="8" name="Rectangle 7"/>
           <p:cNvSpPr/>
           <p:nvPr/>
         </p:nvSpPr>
@@ -2366,7 +2202,7 @@
       </p:sp>
       <p:sp>
         <p:nvSpPr>
-          <p:cNvPr id="11" name="Rectangle 10"/>
+          <p:cNvPr id="9" name="Rectangle 8"/>
           <p:cNvSpPr/>
           <p:nvPr/>
         </p:nvSpPr>
@@ -2396,7 +2232,7 @@
       </p:sp>
       <p:sp>
         <p:nvSpPr>
-          <p:cNvPr id="12" name="Rectangle 11"/>
+          <p:cNvPr id="10" name="Rectangle 9"/>
           <p:cNvSpPr/>
           <p:nvPr/>
         </p:nvSpPr>
@@ -2426,7 +2262,7 @@
       </p:sp>
       <p:sp>
         <p:nvSpPr>
-          <p:cNvPr id="13" name="Full guidance: plan-b.foundation/brandin"/>
+          <p:cNvPr id="11" name="Full guidance: plan-b.foundation/brandin"/>
           <p:cNvSpPr txBox="1"/>
           <p:nvPr/>
         </p:nvSpPr>
@@ -2633,93 +2469,7 @@
       </p:sp>
       <p:sp>
         <p:nvSpPr>
-          <p:cNvPr id="3" name="Plan B Foundation"/>
-          <p:cNvSpPr txBox="1"/>
-          <p:nvPr/>
-        </p:nvSpPr>
-        <p:spPr>
-          <a:xfrm>
-            <a:off x="594360" y="6382512"/>
-            <a:ext cx="3657600" cy="228600"/>
-          </a:xfrm>
-          <a:prstGeom prst="rect">
-            <a:avLst/>
-          </a:prstGeom>
-          <a:noFill/>
-        </p:spPr>
-        <p:txBody>
-          <a:bodyPr wrap="square" lIns="0" rIns="0" tIns="0" bIns="0">
-            <a:spAutoFit/>
-          </a:bodyPr>
-          <a:lstStyle/>
-          <a:p>
-            <a:pPr algn="l" marL="0" indent="0">
-              <a:defRPr sz="1100" b="1">
-                <a:solidFill>
-                  <a:srgbClr val="082952"/>
-                </a:solidFill>
-                <a:latin typeface="Inter"/>
-              </a:defRPr>
-              <a:lnSpc>
-                <a:spcPct val="112000"/>
-              </a:lnSpc>
-              <a:spcAft>
-                <a:spcPts val="1200"/>
-              </a:spcAft>
-              <a:buNone/>
-            </a:pPr>
-            <a:r>
-              <a:t>Plan B Foundation</a:t>
-            </a:r>
-          </a:p>
-        </p:txBody>
-      </p:sp>
-      <p:sp>
-        <p:nvSpPr>
-          <p:cNvPr id="4" name="Civic Digital Commons"/>
-          <p:cNvSpPr txBox="1"/>
-          <p:nvPr/>
-        </p:nvSpPr>
-        <p:spPr>
-          <a:xfrm>
-            <a:off x="8595360" y="6382512"/>
-            <a:ext cx="2971800" cy="228600"/>
-          </a:xfrm>
-          <a:prstGeom prst="rect">
-            <a:avLst/>
-          </a:prstGeom>
-          <a:noFill/>
-        </p:spPr>
-        <p:txBody>
-          <a:bodyPr wrap="square" lIns="0" rIns="0" tIns="0" bIns="0">
-            <a:spAutoFit/>
-          </a:bodyPr>
-          <a:lstStyle/>
-          <a:p>
-            <a:pPr algn="l" marL="0" indent="0">
-              <a:defRPr sz="1100" b="0">
-                <a:solidFill>
-                  <a:srgbClr val="082952"/>
-                </a:solidFill>
-                <a:latin typeface="Inter"/>
-              </a:defRPr>
-              <a:lnSpc>
-                <a:spcPct val="112000"/>
-              </a:lnSpc>
-              <a:spcAft>
-                <a:spcPts val="1200"/>
-              </a:spcAft>
-              <a:buNone/>
-            </a:pPr>
-            <a:r>
-              <a:t>Civic Digital Commons</a:t>
-            </a:r>
-          </a:p>
-        </p:txBody>
-      </p:sp>
-      <p:sp>
-        <p:nvSpPr>
-          <p:cNvPr id="5" name="Placeholder 0"/>
+          <p:cNvPr id="3" name="Placeholder 0"/>
           <p:cNvSpPr txBox="1"/>
           <p:nvPr>
             <p:ph type="title" idx="0"/>
@@ -2764,7 +2514,7 @@
       </p:sp>
       <p:sp>
         <p:nvSpPr>
-          <p:cNvPr id="6" name="Placeholder 1"/>
+          <p:cNvPr id="4" name="Placeholder 1"/>
           <p:cNvSpPr txBox="1"/>
           <p:nvPr>
             <p:ph type="body" idx="1"/>
@@ -2809,7 +2559,7 @@
       </p:sp>
       <p:sp>
         <p:nvSpPr>
-          <p:cNvPr id="7" name="Plan B / Network energy gradient"/>
+          <p:cNvPr id="5" name="Plan B / Network energy gradient"/>
           <p:cNvSpPr/>
           <p:nvPr/>
         </p:nvSpPr>
@@ -2935,93 +2685,7 @@
       </p:sp>
       <p:sp>
         <p:nvSpPr>
-          <p:cNvPr id="3" name="Plan B Foundation"/>
-          <p:cNvSpPr txBox="1"/>
-          <p:nvPr/>
-        </p:nvSpPr>
-        <p:spPr>
-          <a:xfrm>
-            <a:off x="594360" y="6382512"/>
-            <a:ext cx="3657600" cy="228600"/>
-          </a:xfrm>
-          <a:prstGeom prst="rect">
-            <a:avLst/>
-          </a:prstGeom>
-          <a:noFill/>
-        </p:spPr>
-        <p:txBody>
-          <a:bodyPr wrap="square" lIns="0" rIns="0" tIns="0" bIns="0">
-            <a:spAutoFit/>
-          </a:bodyPr>
-          <a:lstStyle/>
-          <a:p>
-            <a:pPr algn="l" marL="0" indent="0">
-              <a:defRPr sz="1100" b="1">
-                <a:solidFill>
-                  <a:srgbClr val="082952"/>
-                </a:solidFill>
-                <a:latin typeface="Inter"/>
-              </a:defRPr>
-              <a:lnSpc>
-                <a:spcPct val="112000"/>
-              </a:lnSpc>
-              <a:spcAft>
-                <a:spcPts val="1200"/>
-              </a:spcAft>
-              <a:buNone/>
-            </a:pPr>
-            <a:r>
-              <a:t>Plan B Foundation</a:t>
-            </a:r>
-          </a:p>
-        </p:txBody>
-      </p:sp>
-      <p:sp>
-        <p:nvSpPr>
-          <p:cNvPr id="4" name="Civic Digital Commons"/>
-          <p:cNvSpPr txBox="1"/>
-          <p:nvPr/>
-        </p:nvSpPr>
-        <p:spPr>
-          <a:xfrm>
-            <a:off x="8595360" y="6382512"/>
-            <a:ext cx="2971800" cy="228600"/>
-          </a:xfrm>
-          <a:prstGeom prst="rect">
-            <a:avLst/>
-          </a:prstGeom>
-          <a:noFill/>
-        </p:spPr>
-        <p:txBody>
-          <a:bodyPr wrap="square" lIns="0" rIns="0" tIns="0" bIns="0">
-            <a:spAutoFit/>
-          </a:bodyPr>
-          <a:lstStyle/>
-          <a:p>
-            <a:pPr algn="l" marL="0" indent="0">
-              <a:defRPr sz="1100" b="0">
-                <a:solidFill>
-                  <a:srgbClr val="082952"/>
-                </a:solidFill>
-                <a:latin typeface="Inter"/>
-              </a:defRPr>
-              <a:lnSpc>
-                <a:spcPct val="112000"/>
-              </a:lnSpc>
-              <a:spcAft>
-                <a:spcPts val="1200"/>
-              </a:spcAft>
-              <a:buNone/>
-            </a:pPr>
-            <a:r>
-              <a:t>Civic Digital Commons</a:t>
-            </a:r>
-          </a:p>
-        </p:txBody>
-      </p:sp>
-      <p:sp>
-        <p:nvSpPr>
-          <p:cNvPr id="5" name="Placeholder 0"/>
+          <p:cNvPr id="3" name="Placeholder 0"/>
           <p:cNvSpPr txBox="1"/>
           <p:nvPr>
             <p:ph type="title" idx="0"/>
@@ -3066,7 +2730,7 @@
       </p:sp>
       <p:sp>
         <p:nvSpPr>
-          <p:cNvPr id="6" name="Placeholder 1"/>
+          <p:cNvPr id="4" name="Placeholder 1"/>
           <p:cNvSpPr txBox="1"/>
           <p:nvPr>
             <p:ph type="body" idx="1"/>
@@ -3111,7 +2775,7 @@
       </p:sp>
       <p:sp>
         <p:nvSpPr>
-          <p:cNvPr id="7" name="Placeholder 2"/>
+          <p:cNvPr id="5" name="Placeholder 2"/>
           <p:cNvSpPr txBox="1"/>
           <p:nvPr>
             <p:ph type="body" idx="2"/>
@@ -3278,93 +2942,7 @@
       </p:sp>
       <p:sp>
         <p:nvSpPr>
-          <p:cNvPr id="3" name="Plan B Foundation"/>
-          <p:cNvSpPr txBox="1"/>
-          <p:nvPr/>
-        </p:nvSpPr>
-        <p:spPr>
-          <a:xfrm>
-            <a:off x="594360" y="6382512"/>
-            <a:ext cx="3657600" cy="228600"/>
-          </a:xfrm>
-          <a:prstGeom prst="rect">
-            <a:avLst/>
-          </a:prstGeom>
-          <a:noFill/>
-        </p:spPr>
-        <p:txBody>
-          <a:bodyPr wrap="square" lIns="0" rIns="0" tIns="0" bIns="0">
-            <a:spAutoFit/>
-          </a:bodyPr>
-          <a:lstStyle/>
-          <a:p>
-            <a:pPr algn="l" marL="0" indent="0">
-              <a:defRPr sz="1100" b="1">
-                <a:solidFill>
-                  <a:srgbClr val="082952"/>
-                </a:solidFill>
-                <a:latin typeface="Inter"/>
-              </a:defRPr>
-              <a:lnSpc>
-                <a:spcPct val="112000"/>
-              </a:lnSpc>
-              <a:spcAft>
-                <a:spcPts val="1200"/>
-              </a:spcAft>
-              <a:buNone/>
-            </a:pPr>
-            <a:r>
-              <a:t>Plan B Foundation</a:t>
-            </a:r>
-          </a:p>
-        </p:txBody>
-      </p:sp>
-      <p:sp>
-        <p:nvSpPr>
-          <p:cNvPr id="4" name="Civic Digital Commons"/>
-          <p:cNvSpPr txBox="1"/>
-          <p:nvPr/>
-        </p:nvSpPr>
-        <p:spPr>
-          <a:xfrm>
-            <a:off x="8595360" y="6382512"/>
-            <a:ext cx="2971800" cy="228600"/>
-          </a:xfrm>
-          <a:prstGeom prst="rect">
-            <a:avLst/>
-          </a:prstGeom>
-          <a:noFill/>
-        </p:spPr>
-        <p:txBody>
-          <a:bodyPr wrap="square" lIns="0" rIns="0" tIns="0" bIns="0">
-            <a:spAutoFit/>
-          </a:bodyPr>
-          <a:lstStyle/>
-          <a:p>
-            <a:pPr algn="l" marL="0" indent="0">
-              <a:defRPr sz="1100" b="0">
-                <a:solidFill>
-                  <a:srgbClr val="082952"/>
-                </a:solidFill>
-                <a:latin typeface="Inter"/>
-              </a:defRPr>
-              <a:lnSpc>
-                <a:spcPct val="112000"/>
-              </a:lnSpc>
-              <a:spcAft>
-                <a:spcPts val="1200"/>
-              </a:spcAft>
-              <a:buNone/>
-            </a:pPr>
-            <a:r>
-              <a:t>Civic Digital Commons</a:t>
-            </a:r>
-          </a:p>
-        </p:txBody>
-      </p:sp>
-      <p:sp>
-        <p:nvSpPr>
-          <p:cNvPr id="5" name="Placeholder 0"/>
+          <p:cNvPr id="3" name="Placeholder 0"/>
           <p:cNvSpPr txBox="1"/>
           <p:nvPr>
             <p:ph type="title" idx="0"/>
@@ -3409,7 +2987,7 @@
       </p:sp>
       <p:sp>
         <p:nvSpPr>
-          <p:cNvPr id="6" name="Placeholder 1"/>
+          <p:cNvPr id="4" name="Placeholder 1"/>
           <p:cNvSpPr txBox="1"/>
           <p:nvPr>
             <p:ph type="body" idx="1"/>
@@ -3454,7 +3032,7 @@
       </p:sp>
       <p:sp>
         <p:nvSpPr>
-          <p:cNvPr id="7" name="Placeholder 2"/>
+          <p:cNvPr id="5" name="Placeholder 2"/>
           <p:cNvSpPr txBox="1"/>
           <p:nvPr>
             <p:ph type="body" idx="2"/>
@@ -3499,7 +3077,7 @@
       </p:sp>
       <p:sp>
         <p:nvSpPr>
-          <p:cNvPr id="8" name="Placeholder 3"/>
+          <p:cNvPr id="6" name="Placeholder 3"/>
           <p:cNvSpPr txBox="1"/>
           <p:nvPr>
             <p:ph type="body" idx="3"/>
@@ -3544,7 +3122,7 @@
       </p:sp>
       <p:sp>
         <p:nvSpPr>
-          <p:cNvPr id="9" name="Placeholder 4"/>
+          <p:cNvPr id="7" name="Placeholder 4"/>
           <p:cNvSpPr txBox="1"/>
           <p:nvPr>
             <p:ph type="body" idx="4"/>
@@ -3589,7 +3167,7 @@
       </p:sp>
       <p:sp>
         <p:nvSpPr>
-          <p:cNvPr id="10" name="Rectangle 9"/>
+          <p:cNvPr id="8" name="Rectangle 7"/>
           <p:cNvSpPr/>
           <p:nvPr/>
         </p:nvSpPr>
@@ -3701,93 +3279,7 @@
       </p:sp>
       <p:sp>
         <p:nvSpPr>
-          <p:cNvPr id="3" name="Plan B Foundation"/>
-          <p:cNvSpPr txBox="1"/>
-          <p:nvPr/>
-        </p:nvSpPr>
-        <p:spPr>
-          <a:xfrm>
-            <a:off x="594360" y="6382512"/>
-            <a:ext cx="3657600" cy="228600"/>
-          </a:xfrm>
-          <a:prstGeom prst="rect">
-            <a:avLst/>
-          </a:prstGeom>
-          <a:noFill/>
-        </p:spPr>
-        <p:txBody>
-          <a:bodyPr wrap="square" lIns="0" rIns="0" tIns="0" bIns="0">
-            <a:spAutoFit/>
-          </a:bodyPr>
-          <a:lstStyle/>
-          <a:p>
-            <a:pPr algn="l" marL="0" indent="0">
-              <a:defRPr sz="1100" b="1">
-                <a:solidFill>
-                  <a:srgbClr val="082952"/>
-                </a:solidFill>
-                <a:latin typeface="Inter"/>
-              </a:defRPr>
-              <a:lnSpc>
-                <a:spcPct val="112000"/>
-              </a:lnSpc>
-              <a:spcAft>
-                <a:spcPts val="1200"/>
-              </a:spcAft>
-              <a:buNone/>
-            </a:pPr>
-            <a:r>
-              <a:t>Plan B Foundation</a:t>
-            </a:r>
-          </a:p>
-        </p:txBody>
-      </p:sp>
-      <p:sp>
-        <p:nvSpPr>
-          <p:cNvPr id="4" name="Civic Digital Commons"/>
-          <p:cNvSpPr txBox="1"/>
-          <p:nvPr/>
-        </p:nvSpPr>
-        <p:spPr>
-          <a:xfrm>
-            <a:off x="8595360" y="6382512"/>
-            <a:ext cx="2971800" cy="228600"/>
-          </a:xfrm>
-          <a:prstGeom prst="rect">
-            <a:avLst/>
-          </a:prstGeom>
-          <a:noFill/>
-        </p:spPr>
-        <p:txBody>
-          <a:bodyPr wrap="square" lIns="0" rIns="0" tIns="0" bIns="0">
-            <a:spAutoFit/>
-          </a:bodyPr>
-          <a:lstStyle/>
-          <a:p>
-            <a:pPr algn="l" marL="0" indent="0">
-              <a:defRPr sz="1100" b="0">
-                <a:solidFill>
-                  <a:srgbClr val="082952"/>
-                </a:solidFill>
-                <a:latin typeface="Inter"/>
-              </a:defRPr>
-              <a:lnSpc>
-                <a:spcPct val="112000"/>
-              </a:lnSpc>
-              <a:spcAft>
-                <a:spcPts val="1200"/>
-              </a:spcAft>
-              <a:buNone/>
-            </a:pPr>
-            <a:r>
-              <a:t>Civic Digital Commons</a:t>
-            </a:r>
-          </a:p>
-        </p:txBody>
-      </p:sp>
-      <p:sp>
-        <p:nvSpPr>
-          <p:cNvPr id="5" name="Placeholder 0"/>
+          <p:cNvPr id="3" name="Placeholder 0"/>
           <p:cNvSpPr txBox="1"/>
           <p:nvPr>
             <p:ph type="title" idx="0"/>
@@ -3832,7 +3324,7 @@
       </p:sp>
       <p:sp>
         <p:nvSpPr>
-          <p:cNvPr id="6" name="Rounded Rectangle 5"/>
+          <p:cNvPr id="4" name="Rounded Rectangle 3"/>
           <p:cNvSpPr/>
           <p:nvPr/>
         </p:nvSpPr>
@@ -3864,7 +3356,7 @@
       </p:sp>
       <p:sp>
         <p:nvSpPr>
-          <p:cNvPr id="7" name="Insert a documentary photograph"/>
+          <p:cNvPr id="5" name="Insert a documentary photograph"/>
           <p:cNvSpPr txBox="1"/>
           <p:nvPr/>
         </p:nvSpPr>
@@ -3907,7 +3399,7 @@
       </p:sp>
       <p:sp>
         <p:nvSpPr>
-          <p:cNvPr id="8" name="Placeholder 1"/>
+          <p:cNvPr id="6" name="Placeholder 1"/>
           <p:cNvSpPr txBox="1"/>
           <p:nvPr>
             <p:ph type="pic" idx="1"/>
@@ -3952,7 +3444,7 @@
       </p:sp>
       <p:sp>
         <p:nvSpPr>
-          <p:cNvPr id="9" name="Placeholder 2"/>
+          <p:cNvPr id="7" name="Placeholder 2"/>
           <p:cNvSpPr txBox="1"/>
           <p:nvPr>
             <p:ph type="body" idx="2"/>
@@ -3997,7 +3489,7 @@
       </p:sp>
       <p:sp>
         <p:nvSpPr>
-          <p:cNvPr id="10" name="Placeholder 3"/>
+          <p:cNvPr id="8" name="Placeholder 3"/>
           <p:cNvSpPr txBox="1"/>
           <p:nvPr>
             <p:ph type="body" idx="3"/>
@@ -4042,7 +3534,7 @@
       </p:sp>
       <p:sp>
         <p:nvSpPr>
-          <p:cNvPr id="11" name="Placeholder 4"/>
+          <p:cNvPr id="9" name="Placeholder 4"/>
           <p:cNvSpPr txBox="1"/>
           <p:nvPr>
             <p:ph type="body" idx="4"/>
@@ -4169,93 +3661,7 @@
       </p:sp>
       <p:sp>
         <p:nvSpPr>
-          <p:cNvPr id="3" name="Plan B Foundation"/>
-          <p:cNvSpPr txBox="1"/>
-          <p:nvPr/>
-        </p:nvSpPr>
-        <p:spPr>
-          <a:xfrm>
-            <a:off x="594360" y="6382512"/>
-            <a:ext cx="3657600" cy="228600"/>
-          </a:xfrm>
-          <a:prstGeom prst="rect">
-            <a:avLst/>
-          </a:prstGeom>
-          <a:noFill/>
-        </p:spPr>
-        <p:txBody>
-          <a:bodyPr wrap="square" lIns="0" rIns="0" tIns="0" bIns="0">
-            <a:spAutoFit/>
-          </a:bodyPr>
-          <a:lstStyle/>
-          <a:p>
-            <a:pPr algn="l" marL="0" indent="0">
-              <a:defRPr sz="1100" b="1">
-                <a:solidFill>
-                  <a:srgbClr val="082952"/>
-                </a:solidFill>
-                <a:latin typeface="Inter"/>
-              </a:defRPr>
-              <a:lnSpc>
-                <a:spcPct val="112000"/>
-              </a:lnSpc>
-              <a:spcAft>
-                <a:spcPts val="1200"/>
-              </a:spcAft>
-              <a:buNone/>
-            </a:pPr>
-            <a:r>
-              <a:t>Plan B Foundation</a:t>
-            </a:r>
-          </a:p>
-        </p:txBody>
-      </p:sp>
-      <p:sp>
-        <p:nvSpPr>
-          <p:cNvPr id="4" name="Civic Digital Commons"/>
-          <p:cNvSpPr txBox="1"/>
-          <p:nvPr/>
-        </p:nvSpPr>
-        <p:spPr>
-          <a:xfrm>
-            <a:off x="8595360" y="6382512"/>
-            <a:ext cx="2971800" cy="228600"/>
-          </a:xfrm>
-          <a:prstGeom prst="rect">
-            <a:avLst/>
-          </a:prstGeom>
-          <a:noFill/>
-        </p:spPr>
-        <p:txBody>
-          <a:bodyPr wrap="square" lIns="0" rIns="0" tIns="0" bIns="0">
-            <a:spAutoFit/>
-          </a:bodyPr>
-          <a:lstStyle/>
-          <a:p>
-            <a:pPr algn="l" marL="0" indent="0">
-              <a:defRPr sz="1100" b="0">
-                <a:solidFill>
-                  <a:srgbClr val="082952"/>
-                </a:solidFill>
-                <a:latin typeface="Inter"/>
-              </a:defRPr>
-              <a:lnSpc>
-                <a:spcPct val="112000"/>
-              </a:lnSpc>
-              <a:spcAft>
-                <a:spcPts val="1200"/>
-              </a:spcAft>
-              <a:buNone/>
-            </a:pPr>
-            <a:r>
-              <a:t>Civic Digital Commons</a:t>
-            </a:r>
-          </a:p>
-        </p:txBody>
-      </p:sp>
-      <p:sp>
-        <p:nvSpPr>
-          <p:cNvPr id="5" name="Placeholder 0"/>
+          <p:cNvPr id="3" name="Placeholder 0"/>
           <p:cNvSpPr txBox="1"/>
           <p:nvPr>
             <p:ph type="title" idx="0"/>
@@ -4300,7 +3706,7 @@
       </p:sp>
       <p:sp>
         <p:nvSpPr>
-          <p:cNvPr id="6" name="Placeholder 1"/>
+          <p:cNvPr id="4" name="Placeholder 1"/>
           <p:cNvSpPr txBox="1"/>
           <p:nvPr>
             <p:ph type="body" idx="1"/>
@@ -4345,7 +3751,7 @@
       </p:sp>
       <p:sp>
         <p:nvSpPr>
-          <p:cNvPr id="7" name="Placeholder 2"/>
+          <p:cNvPr id="5" name="Placeholder 2"/>
           <p:cNvSpPr txBox="1"/>
           <p:nvPr>
             <p:ph type="chart" idx="2"/>
@@ -4390,7 +3796,7 @@
       </p:sp>
       <p:sp>
         <p:nvSpPr>
-          <p:cNvPr id="8" name="Placeholder 3"/>
+          <p:cNvPr id="6" name="Placeholder 3"/>
           <p:cNvSpPr txBox="1"/>
           <p:nvPr>
             <p:ph type="body" idx="3"/>
@@ -4435,7 +3841,7 @@
       </p:sp>
       <p:sp>
         <p:nvSpPr>
-          <p:cNvPr id="9" name="Placeholder 4"/>
+          <p:cNvPr id="7" name="Placeholder 4"/>
           <p:cNvSpPr txBox="1"/>
           <p:nvPr>
             <p:ph type="body" idx="4"/>
@@ -4480,7 +3886,7 @@
       </p:sp>
       <p:sp>
         <p:nvSpPr>
-          <p:cNvPr id="10" name="Placeholder 5"/>
+          <p:cNvPr id="8" name="Placeholder 5"/>
           <p:cNvSpPr txBox="1"/>
           <p:nvPr>
             <p:ph type="body" idx="5"/>
@@ -4607,93 +4013,7 @@
       </p:sp>
       <p:sp>
         <p:nvSpPr>
-          <p:cNvPr id="3" name="Plan B Foundation"/>
-          <p:cNvSpPr txBox="1"/>
-          <p:nvPr/>
-        </p:nvSpPr>
-        <p:spPr>
-          <a:xfrm>
-            <a:off x="594360" y="6382512"/>
-            <a:ext cx="3657600" cy="228600"/>
-          </a:xfrm>
-          <a:prstGeom prst="rect">
-            <a:avLst/>
-          </a:prstGeom>
-          <a:noFill/>
-        </p:spPr>
-        <p:txBody>
-          <a:bodyPr wrap="square" lIns="0" rIns="0" tIns="0" bIns="0">
-            <a:spAutoFit/>
-          </a:bodyPr>
-          <a:lstStyle/>
-          <a:p>
-            <a:pPr algn="l" marL="0" indent="0">
-              <a:defRPr sz="1100" b="1">
-                <a:solidFill>
-                  <a:srgbClr val="082952"/>
-                </a:solidFill>
-                <a:latin typeface="Inter"/>
-              </a:defRPr>
-              <a:lnSpc>
-                <a:spcPct val="112000"/>
-              </a:lnSpc>
-              <a:spcAft>
-                <a:spcPts val="1200"/>
-              </a:spcAft>
-              <a:buNone/>
-            </a:pPr>
-            <a:r>
-              <a:t>Plan B Foundation</a:t>
-            </a:r>
-          </a:p>
-        </p:txBody>
-      </p:sp>
-      <p:sp>
-        <p:nvSpPr>
-          <p:cNvPr id="4" name="Civic Digital Commons"/>
-          <p:cNvSpPr txBox="1"/>
-          <p:nvPr/>
-        </p:nvSpPr>
-        <p:spPr>
-          <a:xfrm>
-            <a:off x="8595360" y="6382512"/>
-            <a:ext cx="2971800" cy="228600"/>
-          </a:xfrm>
-          <a:prstGeom prst="rect">
-            <a:avLst/>
-          </a:prstGeom>
-          <a:noFill/>
-        </p:spPr>
-        <p:txBody>
-          <a:bodyPr wrap="square" lIns="0" rIns="0" tIns="0" bIns="0">
-            <a:spAutoFit/>
-          </a:bodyPr>
-          <a:lstStyle/>
-          <a:p>
-            <a:pPr algn="l" marL="0" indent="0">
-              <a:defRPr sz="1100" b="0">
-                <a:solidFill>
-                  <a:srgbClr val="082952"/>
-                </a:solidFill>
-                <a:latin typeface="Inter"/>
-              </a:defRPr>
-              <a:lnSpc>
-                <a:spcPct val="112000"/>
-              </a:lnSpc>
-              <a:spcAft>
-                <a:spcPts val="1200"/>
-              </a:spcAft>
-              <a:buNone/>
-            </a:pPr>
-            <a:r>
-              <a:t>Civic Digital Commons</a:t>
-            </a:r>
-          </a:p>
-        </p:txBody>
-      </p:sp>
-      <p:sp>
-        <p:nvSpPr>
-          <p:cNvPr id="5" name="Placeholder 0"/>
+          <p:cNvPr id="3" name="Placeholder 0"/>
           <p:cNvSpPr txBox="1"/>
           <p:nvPr>
             <p:ph type="title" idx="0"/>
@@ -4738,7 +4058,7 @@
       </p:sp>
       <p:sp>
         <p:nvSpPr>
-          <p:cNvPr id="6" name="Placeholder 1"/>
+          <p:cNvPr id="4" name="Placeholder 1"/>
           <p:cNvSpPr txBox="1"/>
           <p:nvPr>
             <p:ph type="body" idx="1"/>
@@ -4783,7 +4103,7 @@
       </p:sp>
       <p:sp>
         <p:nvSpPr>
-          <p:cNvPr id="7" name="Placeholder 2"/>
+          <p:cNvPr id="5" name="Placeholder 2"/>
           <p:cNvSpPr txBox="1"/>
           <p:nvPr>
             <p:ph type="tbl" idx="2"/>
@@ -4828,7 +4148,7 @@
       </p:sp>
       <p:sp>
         <p:nvSpPr>
-          <p:cNvPr id="8" name="Placeholder 3"/>
+          <p:cNvPr id="6" name="Placeholder 3"/>
           <p:cNvSpPr txBox="1"/>
           <p:nvPr>
             <p:ph type="body" idx="3"/>
@@ -4955,93 +4275,7 @@
       </p:sp>
       <p:sp>
         <p:nvSpPr>
-          <p:cNvPr id="3" name="Plan B Foundation"/>
-          <p:cNvSpPr txBox="1"/>
-          <p:nvPr/>
-        </p:nvSpPr>
-        <p:spPr>
-          <a:xfrm>
-            <a:off x="594360" y="6382512"/>
-            <a:ext cx="3657600" cy="228600"/>
-          </a:xfrm>
-          <a:prstGeom prst="rect">
-            <a:avLst/>
-          </a:prstGeom>
-          <a:noFill/>
-        </p:spPr>
-        <p:txBody>
-          <a:bodyPr wrap="square" lIns="0" rIns="0" tIns="0" bIns="0">
-            <a:spAutoFit/>
-          </a:bodyPr>
-          <a:lstStyle/>
-          <a:p>
-            <a:pPr algn="l" marL="0" indent="0">
-              <a:defRPr sz="1100" b="1">
-                <a:solidFill>
-                  <a:srgbClr val="082952"/>
-                </a:solidFill>
-                <a:latin typeface="Inter"/>
-              </a:defRPr>
-              <a:lnSpc>
-                <a:spcPct val="112000"/>
-              </a:lnSpc>
-              <a:spcAft>
-                <a:spcPts val="1200"/>
-              </a:spcAft>
-              <a:buNone/>
-            </a:pPr>
-            <a:r>
-              <a:t>Plan B Foundation</a:t>
-            </a:r>
-          </a:p>
-        </p:txBody>
-      </p:sp>
-      <p:sp>
-        <p:nvSpPr>
-          <p:cNvPr id="4" name="Civic Digital Commons"/>
-          <p:cNvSpPr txBox="1"/>
-          <p:nvPr/>
-        </p:nvSpPr>
-        <p:spPr>
-          <a:xfrm>
-            <a:off x="8595360" y="6382512"/>
-            <a:ext cx="2971800" cy="228600"/>
-          </a:xfrm>
-          <a:prstGeom prst="rect">
-            <a:avLst/>
-          </a:prstGeom>
-          <a:noFill/>
-        </p:spPr>
-        <p:txBody>
-          <a:bodyPr wrap="square" lIns="0" rIns="0" tIns="0" bIns="0">
-            <a:spAutoFit/>
-          </a:bodyPr>
-          <a:lstStyle/>
-          <a:p>
-            <a:pPr algn="l" marL="0" indent="0">
-              <a:defRPr sz="1100" b="0">
-                <a:solidFill>
-                  <a:srgbClr val="082952"/>
-                </a:solidFill>
-                <a:latin typeface="Inter"/>
-              </a:defRPr>
-              <a:lnSpc>
-                <a:spcPct val="112000"/>
-              </a:lnSpc>
-              <a:spcAft>
-                <a:spcPts val="1200"/>
-              </a:spcAft>
-              <a:buNone/>
-            </a:pPr>
-            <a:r>
-              <a:t>Civic Digital Commons</a:t>
-            </a:r>
-          </a:p>
-        </p:txBody>
-      </p:sp>
-      <p:sp>
-        <p:nvSpPr>
-          <p:cNvPr id="5" name="Placeholder 0"/>
+          <p:cNvPr id="3" name="Placeholder 0"/>
           <p:cNvSpPr txBox="1"/>
           <p:nvPr>
             <p:ph type="title" idx="0"/>
@@ -5106,7 +4340,7 @@
       </p:sp>
       <p:sp>
         <p:nvSpPr>
-          <p:cNvPr id="6" name="Placeholder 1"/>
+          <p:cNvPr id="4" name="Placeholder 1"/>
           <p:cNvSpPr txBox="1"/>
           <p:nvPr>
             <p:ph type="body" idx="1"/>
@@ -5171,7 +4405,7 @@
       </p:sp>
       <p:sp>
         <p:nvSpPr>
-          <p:cNvPr id="7" name="Plan B / Network energy gradient"/>
+          <p:cNvPr id="5" name="Plan B / Network energy gradient"/>
           <p:cNvSpPr/>
           <p:nvPr/>
         </p:nvSpPr>
@@ -5297,93 +4531,7 @@
       </p:sp>
       <p:sp>
         <p:nvSpPr>
-          <p:cNvPr id="3" name="Plan B Foundation"/>
-          <p:cNvSpPr txBox="1"/>
-          <p:nvPr/>
-        </p:nvSpPr>
-        <p:spPr>
-          <a:xfrm>
-            <a:off x="594360" y="6382512"/>
-            <a:ext cx="3657600" cy="228600"/>
-          </a:xfrm>
-          <a:prstGeom prst="rect">
-            <a:avLst/>
-          </a:prstGeom>
-          <a:noFill/>
-        </p:spPr>
-        <p:txBody>
-          <a:bodyPr wrap="square" lIns="0" rIns="0" tIns="0" bIns="0">
-            <a:spAutoFit/>
-          </a:bodyPr>
-          <a:lstStyle/>
-          <a:p>
-            <a:pPr algn="l" marL="0" indent="0">
-              <a:defRPr sz="1100" b="1">
-                <a:solidFill>
-                  <a:srgbClr val="082952"/>
-                </a:solidFill>
-                <a:latin typeface="Inter"/>
-              </a:defRPr>
-              <a:lnSpc>
-                <a:spcPct val="112000"/>
-              </a:lnSpc>
-              <a:spcAft>
-                <a:spcPts val="1200"/>
-              </a:spcAft>
-              <a:buNone/>
-            </a:pPr>
-            <a:r>
-              <a:t>Plan B Foundation</a:t>
-            </a:r>
-          </a:p>
-        </p:txBody>
-      </p:sp>
-      <p:sp>
-        <p:nvSpPr>
-          <p:cNvPr id="4" name="Civic Digital Commons"/>
-          <p:cNvSpPr txBox="1"/>
-          <p:nvPr/>
-        </p:nvSpPr>
-        <p:spPr>
-          <a:xfrm>
-            <a:off x="8595360" y="6382512"/>
-            <a:ext cx="2971800" cy="228600"/>
-          </a:xfrm>
-          <a:prstGeom prst="rect">
-            <a:avLst/>
-          </a:prstGeom>
-          <a:noFill/>
-        </p:spPr>
-        <p:txBody>
-          <a:bodyPr wrap="square" lIns="0" rIns="0" tIns="0" bIns="0">
-            <a:spAutoFit/>
-          </a:bodyPr>
-          <a:lstStyle/>
-          <a:p>
-            <a:pPr algn="l" marL="0" indent="0">
-              <a:defRPr sz="1100" b="0">
-                <a:solidFill>
-                  <a:srgbClr val="082952"/>
-                </a:solidFill>
-                <a:latin typeface="Inter"/>
-              </a:defRPr>
-              <a:lnSpc>
-                <a:spcPct val="112000"/>
-              </a:lnSpc>
-              <a:spcAft>
-                <a:spcPts val="1200"/>
-              </a:spcAft>
-              <a:buNone/>
-            </a:pPr>
-            <a:r>
-              <a:t>Civic Digital Commons</a:t>
-            </a:r>
-          </a:p>
-        </p:txBody>
-      </p:sp>
-      <p:sp>
-        <p:nvSpPr>
-          <p:cNvPr id="5" name="Placeholder 0"/>
+          <p:cNvPr id="3" name="Placeholder 0"/>
           <p:cNvSpPr txBox="1"/>
           <p:nvPr>
             <p:ph type="title" idx="0"/>
@@ -5428,7 +4576,7 @@
       </p:sp>
       <p:sp>
         <p:nvSpPr>
-          <p:cNvPr id="6" name="Placeholder 1"/>
+          <p:cNvPr id="4" name="Placeholder 1"/>
           <p:cNvSpPr txBox="1"/>
           <p:nvPr>
             <p:ph type="body" idx="1"/>
@@ -5473,7 +4621,7 @@
       </p:sp>
       <p:sp>
         <p:nvSpPr>
-          <p:cNvPr id="7" name="Placeholder 2"/>
+          <p:cNvPr id="5" name="Placeholder 2"/>
           <p:cNvSpPr txBox="1"/>
           <p:nvPr>
             <p:ph type="body" idx="2"/>
@@ -5538,7 +4686,7 @@
       </p:sp>
       <p:sp>
         <p:nvSpPr>
-          <p:cNvPr id="8" name="Placeholder 3"/>
+          <p:cNvPr id="6" name="Placeholder 3"/>
           <p:cNvSpPr txBox="1"/>
           <p:nvPr>
             <p:ph type="body" idx="3"/>
@@ -5583,7 +4731,7 @@
       </p:sp>
       <p:sp>
         <p:nvSpPr>
-          <p:cNvPr id="9" name="Placeholder 4"/>
+          <p:cNvPr id="7" name="Placeholder 4"/>
           <p:cNvSpPr txBox="1"/>
           <p:nvPr>
             <p:ph type="body" idx="4"/>
@@ -5648,7 +4796,7 @@
       </p:sp>
       <p:sp>
         <p:nvSpPr>
-          <p:cNvPr id="10" name="Placeholder 5"/>
+          <p:cNvPr id="8" name="Placeholder 5"/>
           <p:cNvSpPr txBox="1"/>
           <p:nvPr>
             <p:ph type="body" idx="5"/>
@@ -5693,7 +4841,7 @@
       </p:sp>
       <p:sp>
         <p:nvSpPr>
-          <p:cNvPr id="11" name="Placeholder 6"/>
+          <p:cNvPr id="9" name="Placeholder 6"/>
           <p:cNvSpPr txBox="1"/>
           <p:nvPr>
             <p:ph type="body" idx="6"/>
@@ -5758,7 +4906,7 @@
       </p:sp>
       <p:sp>
         <p:nvSpPr>
-          <p:cNvPr id="12" name="Placeholder 7"/>
+          <p:cNvPr id="10" name="Placeholder 7"/>
           <p:cNvSpPr txBox="1"/>
           <p:nvPr>
             <p:ph type="body" idx="7"/>
@@ -5836,6 +4984,92 @@
           <a:chExt cx="0" cy="0"/>
         </a:xfrm>
       </p:grpSpPr>
+      <p:sp>
+        <p:nvSpPr>
+          <p:cNvPr id="2" name="Shared footer / Organization"/>
+          <p:cNvSpPr txBox="1"/>
+          <p:nvPr/>
+        </p:nvSpPr>
+        <p:spPr>
+          <a:xfrm>
+            <a:off x="594360" y="6382512"/>
+            <a:ext cx="3657600" cy="228600"/>
+          </a:xfrm>
+          <a:prstGeom prst="rect">
+            <a:avLst/>
+          </a:prstGeom>
+          <a:noFill/>
+        </p:spPr>
+        <p:txBody>
+          <a:bodyPr wrap="square" lIns="0" rIns="0" tIns="0" bIns="0">
+            <a:spAutoFit/>
+          </a:bodyPr>
+          <a:lstStyle/>
+          <a:p>
+            <a:pPr algn="l" marL="0" indent="0">
+              <a:defRPr sz="1100" b="1">
+                <a:solidFill>
+                  <a:srgbClr val="082952"/>
+                </a:solidFill>
+                <a:latin typeface="Inter"/>
+              </a:defRPr>
+              <a:lnSpc>
+                <a:spcPct val="112000"/>
+              </a:lnSpc>
+              <a:spcAft>
+                <a:spcPts val="1200"/>
+              </a:spcAft>
+              <a:buNone/>
+            </a:pPr>
+            <a:r>
+              <a:t>Plan B Foundation</a:t>
+            </a:r>
+          </a:p>
+        </p:txBody>
+      </p:sp>
+      <p:sp>
+        <p:nvSpPr>
+          <p:cNvPr id="3" name="Shared footer / Tagline"/>
+          <p:cNvSpPr txBox="1"/>
+          <p:nvPr/>
+        </p:nvSpPr>
+        <p:spPr>
+          <a:xfrm>
+            <a:off x="8595360" y="6382512"/>
+            <a:ext cx="2971800" cy="228600"/>
+          </a:xfrm>
+          <a:prstGeom prst="rect">
+            <a:avLst/>
+          </a:prstGeom>
+          <a:noFill/>
+        </p:spPr>
+        <p:txBody>
+          <a:bodyPr wrap="square" lIns="0" rIns="0" tIns="0" bIns="0">
+            <a:spAutoFit/>
+          </a:bodyPr>
+          <a:lstStyle/>
+          <a:p>
+            <a:pPr algn="l" marL="0" indent="0">
+              <a:defRPr sz="1100" b="0">
+                <a:solidFill>
+                  <a:srgbClr val="082952"/>
+                </a:solidFill>
+                <a:latin typeface="Inter"/>
+              </a:defRPr>
+              <a:lnSpc>
+                <a:spcPct val="112000"/>
+              </a:lnSpc>
+              <a:spcAft>
+                <a:spcPts val="1200"/>
+              </a:spcAft>
+              <a:buNone/>
+            </a:pPr>
+            <a:r>
+              <a:t>Civic Digital Commons</a:t>
+            </a:r>
+          </a:p>
+        </p:txBody>
+      </p:sp>
     </p:spTree>
     <p:extLst>
       <p:ext uri="{BB962C8B-B14F-4D97-AF65-F5344CB8AC3E}">
@@ -6130,7 +5364,7 @@
       <p:grpSpPr/>
       <p:sp>
         <p:nvSpPr>
-          <p:cNvPr id="5" name="Placeholder 0"/>
+          <p:cNvPr id="3" name="Placeholder 0"/>
           <p:cNvSpPr txBox="1"/>
           <p:nvPr>
             <p:ph type="title" idx="0"/>
@@ -6195,7 +5429,7 @@
       </p:sp>
       <p:sp>
         <p:nvSpPr>
-          <p:cNvPr id="6" name="Placeholder 1"/>
+          <p:cNvPr id="4" name="Placeholder 1"/>
           <p:cNvSpPr txBox="1"/>
           <p:nvPr>
             <p:ph type="subTitle" idx="1"/>
@@ -6240,7 +5474,7 @@
       </p:sp>
       <p:sp>
         <p:nvSpPr>
-          <p:cNvPr id="7" name="Placeholder 2"/>
+          <p:cNvPr id="5" name="Placeholder 2"/>
           <p:cNvSpPr txBox="1"/>
           <p:nvPr>
             <p:ph type="body" idx="2"/>
@@ -6300,6 +5534,211 @@
             <a:r>
               <a:t>[Event · date]</a:t>
             </a:r>
+          </a:p>
+        </p:txBody>
+      </p:sp>
+      <p:sp>
+        <p:nvSpPr>
+          <p:cNvPr id="6" name="Cover / Background panel"/>
+          <p:cNvSpPr/>
+          <p:nvPr/>
+        </p:nvSpPr>
+        <p:spPr>
+          <a:xfrm>
+            <a:off x="7818120" y="0"/>
+            <a:ext cx="4379976" cy="6080760"/>
+          </a:xfrm>
+          <a:prstGeom prst="rect">
+            <a:avLst/>
+          </a:prstGeom>
+          <a:solidFill>
+            <a:srgbClr val="082952"/>
+          </a:solidFill>
+          <a:ln>
+            <a:noFill/>
+          </a:ln>
+          <a:effectLst/>
+        </p:spPr>
+        <p:txBody>
+          <a:bodyPr rtlCol="0" anchor="ctr"/>
+          <a:lstStyle/>
+          <a:p>
+            <a:pPr algn="ctr"/>
+          </a:p>
+        </p:txBody>
+      </p:sp>
+      <p:pic>
+        <p:nvPicPr>
+          <p:cNvPr id="7" name="Logo / Wide / White (SVG)" descr="Lugano's Plan B original logo; existing mark, not a new Foundation logo"/>
+          <p:cNvPicPr>
+            <a:picLocks noChangeAspect="1"/>
+          </p:cNvPicPr>
+          <p:nvPr/>
+        </p:nvPicPr>
+        <p:blipFill>
+          <a:blip r:embed="rId2">
+            <a:ext uri="{96DAC541-7B7A-43D3-8B79-37D633B846F1}">
+              <ns0:svgBlip xmlns:ns0="http://schemas.microsoft.com/office/drawing/2016/SVG/main" r:embed="rId3"/>
+            </a:ext>
+          </a:blip>
+          <a:stretch>
+            <a:fillRect/>
+          </a:stretch>
+        </p:blipFill>
+        <p:spPr>
+          <a:xfrm>
+            <a:off x="8302752" y="1325880"/>
+            <a:ext cx="3401568" cy="720671"/>
+          </a:xfrm>
+          <a:prstGeom prst="rect">
+            <a:avLst/>
+          </a:prstGeom>
+        </p:spPr>
+      </p:pic>
+      <p:sp>
+        <p:nvSpPr>
+          <p:cNvPr id="8" name="Cover / Editable values"/>
+          <p:cNvSpPr txBox="1"/>
+          <p:nvPr/>
+        </p:nvSpPr>
+        <p:spPr>
+          <a:xfrm>
+            <a:off x="8302752" y="2788920"/>
+            <a:ext cx="3291840" cy="2103120"/>
+          </a:xfrm>
+          <a:prstGeom prst="rect">
+            <a:avLst/>
+          </a:prstGeom>
+          <a:noFill/>
+        </p:spPr>
+        <p:txBody>
+          <a:bodyPr wrap="square" lIns="0" rIns="0" tIns="0" bIns="0">
+            <a:spAutoFit/>
+          </a:bodyPr>
+          <a:lstStyle/>
+          <a:p>
+            <a:pPr algn="l" marL="0" indent="0">
+              <a:defRPr sz="2900" b="1">
+                <a:solidFill>
+                  <a:srgbClr val="FFFEFA"/>
+                </a:solidFill>
+                <a:latin typeface="Inter"/>
+              </a:defRPr>
+              <a:lnSpc>
+                <a:spcPct val="112000"/>
+              </a:lnSpc>
+              <a:spcAft>
+                <a:spcPts val="1200"/>
+              </a:spcAft>
+              <a:buNone/>
+            </a:pPr>
+            <a:r>
+              <a:t>Open.</a:t>
+            </a:r>
+          </a:p>
+          <a:p>
+            <a:pPr algn="l" marL="0" indent="0">
+              <a:defRPr sz="2900" b="1">
+                <a:solidFill>
+                  <a:srgbClr val="FFFEFA"/>
+                </a:solidFill>
+                <a:latin typeface="Inter"/>
+              </a:defRPr>
+              <a:lnSpc>
+                <a:spcPct val="112000"/>
+              </a:lnSpc>
+              <a:spcAft>
+                <a:spcPts val="1200"/>
+              </a:spcAft>
+              <a:buNone/>
+            </a:pPr>
+            <a:r>
+              <a:t>Capable.</a:t>
+            </a:r>
+          </a:p>
+          <a:p>
+            <a:pPr algn="l" marL="0" indent="0">
+              <a:defRPr sz="2900" b="1">
+                <a:solidFill>
+                  <a:srgbClr val="FFFEFA"/>
+                </a:solidFill>
+                <a:latin typeface="Inter"/>
+              </a:defRPr>
+              <a:lnSpc>
+                <a:spcPct val="112000"/>
+              </a:lnSpc>
+              <a:spcAft>
+                <a:spcPts val="1200"/>
+              </a:spcAft>
+              <a:buNone/>
+            </a:pPr>
+            <a:r>
+              <a:t>Curious.</a:t>
+            </a:r>
+          </a:p>
+          <a:p>
+            <a:pPr algn="l" marL="0" indent="0">
+              <a:defRPr sz="2900" b="1">
+                <a:solidFill>
+                  <a:srgbClr val="FFFEFA"/>
+                </a:solidFill>
+                <a:latin typeface="Inter"/>
+              </a:defRPr>
+              <a:lnSpc>
+                <a:spcPct val="112000"/>
+              </a:lnSpc>
+              <a:spcAft>
+                <a:spcPts val="1200"/>
+              </a:spcAft>
+              <a:buNone/>
+            </a:pPr>
+            <a:r>
+              <a:t>Grounded.</a:t>
+            </a:r>
+          </a:p>
+        </p:txBody>
+      </p:sp>
+      <p:sp>
+        <p:nvSpPr>
+          <p:cNvPr id="9" name="Cover / Movable gradient"/>
+          <p:cNvSpPr/>
+          <p:nvPr/>
+        </p:nvSpPr>
+        <p:spPr>
+          <a:xfrm>
+            <a:off x="7818120" y="0"/>
+            <a:ext cx="4379976" cy="365760"/>
+          </a:xfrm>
+          <a:prstGeom prst="rect">
+            <a:avLst/>
+          </a:prstGeom>
+          <a:gradFill rotWithShape="1">
+            <a:gsLst>
+              <a:gs pos="0">
+                <a:srgbClr val="FFB604"/>
+              </a:gs>
+              <a:gs pos="28000">
+                <a:srgbClr val="FF5DB1"/>
+              </a:gs>
+              <a:gs pos="58000">
+                <a:srgbClr val="7468FF"/>
+              </a:gs>
+              <a:gs pos="100000">
+                <a:srgbClr val="23F5FF"/>
+              </a:gs>
+            </a:gsLst>
+            <a:lin ang="0" scaled="1"/>
+          </a:gradFill>
+          <a:ln>
+            <a:noFill/>
+          </a:ln>
+          <a:effectLst/>
+        </p:spPr>
+        <p:txBody>
+          <a:bodyPr rtlCol="0" anchor="ctr"/>
+          <a:lstStyle/>
+          <a:p>
+            <a:pPr algn="ctr"/>
           </a:p>
         </p:txBody>
       </p:sp>
@@ -6331,7 +5770,7 @@
       <p:grpSpPr/>
       <p:sp>
         <p:nvSpPr>
-          <p:cNvPr id="5" name="Placeholder 0"/>
+          <p:cNvPr id="3" name="Placeholder 0"/>
           <p:cNvSpPr txBox="1"/>
           <p:nvPr>
             <p:ph type="title" idx="0"/>
@@ -6376,7 +5815,7 @@
       </p:sp>
       <p:sp>
         <p:nvSpPr>
-          <p:cNvPr id="6" name="Placeholder 1"/>
+          <p:cNvPr id="4" name="Placeholder 1"/>
           <p:cNvSpPr txBox="1"/>
           <p:nvPr>
             <p:ph type="body" idx="1"/>
@@ -6421,7 +5860,7 @@
       </p:sp>
       <p:sp>
         <p:nvSpPr>
-          <p:cNvPr id="7" name="Placeholder 2"/>
+          <p:cNvPr id="5" name="Placeholder 2"/>
           <p:cNvSpPr txBox="1"/>
           <p:nvPr>
             <p:ph type="body" idx="2"/>
@@ -6459,7 +5898,7 @@
               <a:buNone/>
             </a:pPr>
             <a:r>
-              <a:t>Use the layouts</a:t>
+              <a:t>Edit the slide</a:t>
             </a:r>
           </a:p>
           <a:p>
@@ -6479,14 +5918,14 @@
               <a:buNone/>
             </a:pPr>
             <a:r>
-              <a:t>Install Inter, then choose Home → New Slide. Replace bracketed prompts. Duplicate the chart or table example to retain its styling.</a:t>
-            </a:r>
-          </a:p>
-        </p:txBody>
-      </p:sp>
-      <p:sp>
-        <p:nvSpPr>
-          <p:cNvPr id="8" name="Placeholder 3"/>
+              <a:t>Duplicate the cover to keep its movable SVG logo, text, panel and top gradient. Copy other logo forms from the library slides. Use New Slide for content layouts.</a:t>
+            </a:r>
+          </a:p>
+        </p:txBody>
+      </p:sp>
+      <p:sp>
+        <p:nvSpPr>
+          <p:cNvPr id="6" name="Placeholder 3"/>
           <p:cNvSpPr txBox="1"/>
           <p:nvPr>
             <p:ph type="body" idx="3"/>
@@ -6524,7 +5963,7 @@
               <a:buNone/>
             </a:pPr>
             <a:r>
-              <a:t>Keep it clear</a:t>
+              <a:t>Edit every footer at once</a:t>
             </a:r>
           </a:p>
           <a:p>
@@ -6544,11 +5983,1244 @@
               <a:buNone/>
             </a:pPr>
             <a:r>
-              <a:t>One idea per slide. Keep the selected light or dark palette. Preserve the gradient band and keep text on solid grounds. Aim for 20pt or larger body text.</a:t>
-            </a:r>
-          </a:p>
-        </p:txBody>
-      </p:sp>
+              <a:t>View → Slide Master → select the top parent master. Edit the two footer text boxes, then Close Master View. Delete this guide and the logo library before presenting.</a:t>
+            </a:r>
+          </a:p>
+        </p:txBody>
+      </p:sp>
+    </p:spTree>
+  </p:cSld>
+  <p:clrMapOvr>
+    <a:masterClrMapping/>
+  </p:clrMapOvr>
+</p:sld>
+</file>
+
+<file path=ppt/slides/slide11.xml><?xml version="1.0" encoding="utf-8"?>
+<p:sld xmlns:a="http://schemas.openxmlformats.org/drawingml/2006/main" xmlns:p="http://schemas.openxmlformats.org/presentationml/2006/main" xmlns:r="http://schemas.openxmlformats.org/officeDocument/2006/relationships" showMasterSp="1">
+  <p:cSld>
+    <p:spTree>
+      <p:nvGrpSpPr>
+        <p:cNvPr id="1" name=""/>
+        <p:cNvGrpSpPr/>
+        <p:nvPr/>
+      </p:nvGrpSpPr>
+      <p:grpSpPr/>
+      <p:sp>
+        <p:nvSpPr>
+          <p:cNvPr id="2" name="Placeholder 0"/>
+          <p:cNvSpPr txBox="1"/>
+          <p:nvPr>
+            <p:ph type="title" idx="0"/>
+          </p:nvPr>
+        </p:nvSpPr>
+        <p:spPr>
+          <a:xfrm>
+            <a:off x="594360" y="502920"/>
+            <a:ext cx="10972800" cy="1005840"/>
+          </a:xfrm>
+          <a:prstGeom prst="rect">
+            <a:avLst/>
+          </a:prstGeom>
+          <a:noFill/>
+        </p:spPr>
+        <p:txBody>
+          <a:bodyPr wrap="square" lIns="0" rIns="0" tIns="0" bIns="0">
+            <a:spAutoFit/>
+          </a:bodyPr>
+          <a:lstStyle/>
+          <a:p>
+            <a:pPr algn="l" marL="0" indent="0">
+              <a:defRPr sz="3600" b="1">
+                <a:solidFill>
+                  <a:srgbClr val="082952"/>
+                </a:solidFill>
+                <a:latin typeface="Inter"/>
+              </a:defRPr>
+              <a:lnSpc>
+                <a:spcPct val="112000"/>
+              </a:lnSpc>
+              <a:spcAft>
+                <a:spcPts val="1200"/>
+              </a:spcAft>
+              <a:buNone/>
+            </a:pPr>
+            <a:r>
+              <a:t>Logo library / Color</a:t>
+            </a:r>
+          </a:p>
+        </p:txBody>
+      </p:sp>
+      <p:sp>
+        <p:nvSpPr>
+          <p:cNvPr id="3" name="Placeholder 1"/>
+          <p:cNvSpPr txBox="1"/>
+          <p:nvPr>
+            <p:ph type="body" idx="1"/>
+          </p:nvPr>
+        </p:nvSpPr>
+        <p:spPr>
+          <a:xfrm>
+            <a:off x="594360" y="1508760"/>
+            <a:ext cx="10698480" cy="685800"/>
+          </a:xfrm>
+          <a:prstGeom prst="rect">
+            <a:avLst/>
+          </a:prstGeom>
+          <a:noFill/>
+        </p:spPr>
+        <p:txBody>
+          <a:bodyPr wrap="square" lIns="0" rIns="0" tIns="0" bIns="0">
+            <a:spAutoFit/>
+          </a:bodyPr>
+          <a:lstStyle/>
+          <a:p>
+            <a:pPr algn="l" marL="0" indent="0">
+              <a:defRPr sz="1900" b="0">
+                <a:solidFill>
+                  <a:srgbClr val="030B20"/>
+                </a:solidFill>
+                <a:latin typeface="Inter"/>
+              </a:defRPr>
+              <a:lnSpc>
+                <a:spcPct val="112000"/>
+              </a:lnSpc>
+              <a:spcAft>
+                <a:spcPts val="1200"/>
+              </a:spcAft>
+              <a:buNone/>
+            </a:pPr>
+            <a:r>
+              <a:t>Select a logo and copy it to any slide. Delete this library before presenting.</a:t>
+            </a:r>
+          </a:p>
+        </p:txBody>
+      </p:sp>
+      <p:sp>
+        <p:nvSpPr>
+          <p:cNvPr id="4" name="Wide"/>
+          <p:cNvSpPr txBox="1"/>
+          <p:nvPr/>
+        </p:nvSpPr>
+        <p:spPr>
+          <a:xfrm>
+            <a:off x="594360" y="2194560"/>
+            <a:ext cx="3383280" cy="411480"/>
+          </a:xfrm>
+          <a:prstGeom prst="rect">
+            <a:avLst/>
+          </a:prstGeom>
+          <a:noFill/>
+        </p:spPr>
+        <p:txBody>
+          <a:bodyPr wrap="square" lIns="0" rIns="0" tIns="0" bIns="0">
+            <a:spAutoFit/>
+          </a:bodyPr>
+          <a:lstStyle/>
+          <a:p>
+            <a:pPr algn="l" marL="0" indent="0">
+              <a:defRPr sz="2300" b="1">
+                <a:solidFill>
+                  <a:srgbClr val="082952"/>
+                </a:solidFill>
+                <a:latin typeface="Inter"/>
+              </a:defRPr>
+              <a:lnSpc>
+                <a:spcPct val="112000"/>
+              </a:lnSpc>
+              <a:spcAft>
+                <a:spcPts val="1200"/>
+              </a:spcAft>
+              <a:buNone/>
+            </a:pPr>
+            <a:r>
+              <a:t>Wide</a:t>
+            </a:r>
+          </a:p>
+        </p:txBody>
+      </p:sp>
+      <p:sp>
+        <p:nvSpPr>
+          <p:cNvPr id="5" name="Logo ground / wide"/>
+          <p:cNvSpPr/>
+          <p:nvPr/>
+        </p:nvSpPr>
+        <p:spPr>
+          <a:xfrm>
+            <a:off x="594360" y="2743200"/>
+            <a:ext cx="3383280" cy="2971800"/>
+          </a:xfrm>
+          <a:prstGeom prst="rect">
+            <a:avLst/>
+          </a:prstGeom>
+          <a:solidFill>
+            <a:srgbClr val="082952"/>
+          </a:solidFill>
+          <a:ln>
+            <a:noFill/>
+          </a:ln>
+          <a:effectLst/>
+        </p:spPr>
+        <p:txBody>
+          <a:bodyPr rtlCol="0" anchor="ctr"/>
+          <a:lstStyle/>
+          <a:p>
+            <a:pPr algn="ctr"/>
+          </a:p>
+        </p:txBody>
+      </p:sp>
+      <p:pic>
+        <p:nvPicPr>
+          <p:cNvPr id="6" name="Logo / Wide / Color (SVG)" descr="Lugano's Plan B original logo; existing mark, not a new Foundation logo"/>
+          <p:cNvPicPr>
+            <a:picLocks noChangeAspect="1"/>
+          </p:cNvPicPr>
+          <p:nvPr/>
+        </p:nvPicPr>
+        <p:blipFill>
+          <a:blip r:embed="rId2">
+            <a:ext uri="{96DAC541-7B7A-43D3-8B79-37D633B846F1}">
+              <ns0:svgBlip xmlns:ns0="http://schemas.microsoft.com/office/drawing/2016/SVG/main" r:embed="rId3"/>
+            </a:ext>
+          </a:blip>
+          <a:stretch>
+            <a:fillRect/>
+          </a:stretch>
+        </p:blipFill>
+        <p:spPr>
+          <a:xfrm>
+            <a:off x="822960" y="3850941"/>
+            <a:ext cx="2926080" cy="756317"/>
+          </a:xfrm>
+          <a:prstGeom prst="rect">
+            <a:avLst/>
+          </a:prstGeom>
+        </p:spPr>
+      </p:pic>
+      <p:sp>
+        <p:nvSpPr>
+          <p:cNvPr id="7" name="Square"/>
+          <p:cNvSpPr txBox="1"/>
+          <p:nvPr/>
+        </p:nvSpPr>
+        <p:spPr>
+          <a:xfrm>
+            <a:off x="4389120" y="2194560"/>
+            <a:ext cx="3383280" cy="411480"/>
+          </a:xfrm>
+          <a:prstGeom prst="rect">
+            <a:avLst/>
+          </a:prstGeom>
+          <a:noFill/>
+        </p:spPr>
+        <p:txBody>
+          <a:bodyPr wrap="square" lIns="0" rIns="0" tIns="0" bIns="0">
+            <a:spAutoFit/>
+          </a:bodyPr>
+          <a:lstStyle/>
+          <a:p>
+            <a:pPr algn="l" marL="0" indent="0">
+              <a:defRPr sz="2300" b="1">
+                <a:solidFill>
+                  <a:srgbClr val="082952"/>
+                </a:solidFill>
+                <a:latin typeface="Inter"/>
+              </a:defRPr>
+              <a:lnSpc>
+                <a:spcPct val="112000"/>
+              </a:lnSpc>
+              <a:spcAft>
+                <a:spcPts val="1200"/>
+              </a:spcAft>
+              <a:buNone/>
+            </a:pPr>
+            <a:r>
+              <a:t>Square</a:t>
+            </a:r>
+          </a:p>
+        </p:txBody>
+      </p:sp>
+      <p:sp>
+        <p:nvSpPr>
+          <p:cNvPr id="8" name="Logo ground / square"/>
+          <p:cNvSpPr/>
+          <p:nvPr/>
+        </p:nvSpPr>
+        <p:spPr>
+          <a:xfrm>
+            <a:off x="4389120" y="2743200"/>
+            <a:ext cx="3383280" cy="2971800"/>
+          </a:xfrm>
+          <a:prstGeom prst="rect">
+            <a:avLst/>
+          </a:prstGeom>
+          <a:solidFill>
+            <a:srgbClr val="082952"/>
+          </a:solidFill>
+          <a:ln>
+            <a:noFill/>
+          </a:ln>
+          <a:effectLst/>
+        </p:spPr>
+        <p:txBody>
+          <a:bodyPr rtlCol="0" anchor="ctr"/>
+          <a:lstStyle/>
+          <a:p>
+            <a:pPr algn="ctr"/>
+          </a:p>
+        </p:txBody>
+      </p:sp>
+      <p:pic>
+        <p:nvPicPr>
+          <p:cNvPr id="9" name="Logo / Square / Color (SVG)" descr="Lugano's Plan B original logo; existing mark, not a new Foundation logo"/>
+          <p:cNvPicPr>
+            <a:picLocks noChangeAspect="1"/>
+          </p:cNvPicPr>
+          <p:nvPr/>
+        </p:nvPicPr>
+        <p:blipFill>
+          <a:blip r:embed="rId4">
+            <a:ext uri="{96DAC541-7B7A-43D3-8B79-37D633B846F1}">
+              <ns0:svgBlip xmlns:ns0="http://schemas.microsoft.com/office/drawing/2016/SVG/main" r:embed="rId5"/>
+            </a:ext>
+          </a:blip>
+          <a:stretch>
+            <a:fillRect/>
+          </a:stretch>
+        </p:blipFill>
+        <p:spPr>
+          <a:xfrm>
+            <a:off x="4617720" y="3713523"/>
+            <a:ext cx="2926080" cy="1031154"/>
+          </a:xfrm>
+          <a:prstGeom prst="rect">
+            <a:avLst/>
+          </a:prstGeom>
+        </p:spPr>
+      </p:pic>
+      <p:sp>
+        <p:nvSpPr>
+          <p:cNvPr id="10" name="Tall"/>
+          <p:cNvSpPr txBox="1"/>
+          <p:nvPr/>
+        </p:nvSpPr>
+        <p:spPr>
+          <a:xfrm>
+            <a:off x="8183880" y="2194560"/>
+            <a:ext cx="3383280" cy="411480"/>
+          </a:xfrm>
+          <a:prstGeom prst="rect">
+            <a:avLst/>
+          </a:prstGeom>
+          <a:noFill/>
+        </p:spPr>
+        <p:txBody>
+          <a:bodyPr wrap="square" lIns="0" rIns="0" tIns="0" bIns="0">
+            <a:spAutoFit/>
+          </a:bodyPr>
+          <a:lstStyle/>
+          <a:p>
+            <a:pPr algn="l" marL="0" indent="0">
+              <a:defRPr sz="2300" b="1">
+                <a:solidFill>
+                  <a:srgbClr val="082952"/>
+                </a:solidFill>
+                <a:latin typeface="Inter"/>
+              </a:defRPr>
+              <a:lnSpc>
+                <a:spcPct val="112000"/>
+              </a:lnSpc>
+              <a:spcAft>
+                <a:spcPts val="1200"/>
+              </a:spcAft>
+              <a:buNone/>
+            </a:pPr>
+            <a:r>
+              <a:t>Tall</a:t>
+            </a:r>
+          </a:p>
+        </p:txBody>
+      </p:sp>
+      <p:sp>
+        <p:nvSpPr>
+          <p:cNvPr id="11" name="Logo ground / tall"/>
+          <p:cNvSpPr/>
+          <p:nvPr/>
+        </p:nvSpPr>
+        <p:spPr>
+          <a:xfrm>
+            <a:off x="8183880" y="2743200"/>
+            <a:ext cx="3383280" cy="2971800"/>
+          </a:xfrm>
+          <a:prstGeom prst="rect">
+            <a:avLst/>
+          </a:prstGeom>
+          <a:solidFill>
+            <a:srgbClr val="082952"/>
+          </a:solidFill>
+          <a:ln>
+            <a:noFill/>
+          </a:ln>
+          <a:effectLst/>
+        </p:spPr>
+        <p:txBody>
+          <a:bodyPr rtlCol="0" anchor="ctr"/>
+          <a:lstStyle/>
+          <a:p>
+            <a:pPr algn="ctr"/>
+          </a:p>
+        </p:txBody>
+      </p:sp>
+      <p:pic>
+        <p:nvPicPr>
+          <p:cNvPr id="12" name="Logo / Tall / Color (SVG)" descr="Lugano's Plan B original logo; existing mark, not a new Foundation logo"/>
+          <p:cNvPicPr>
+            <a:picLocks noChangeAspect="1"/>
+          </p:cNvPicPr>
+          <p:nvPr/>
+        </p:nvPicPr>
+        <p:blipFill>
+          <a:blip r:embed="rId6">
+            <a:ext uri="{96DAC541-7B7A-43D3-8B79-37D633B846F1}">
+              <ns0:svgBlip xmlns:ns0="http://schemas.microsoft.com/office/drawing/2016/SVG/main" r:embed="rId7"/>
+            </a:ext>
+          </a:blip>
+          <a:stretch>
+            <a:fillRect/>
+          </a:stretch>
+        </p:blipFill>
+        <p:spPr>
+          <a:xfrm>
+            <a:off x="9121140" y="2971800"/>
+            <a:ext cx="1508760" cy="2514600"/>
+          </a:xfrm>
+          <a:prstGeom prst="rect">
+            <a:avLst/>
+          </a:prstGeom>
+        </p:spPr>
+      </p:pic>
+    </p:spTree>
+  </p:cSld>
+  <p:clrMapOvr>
+    <a:masterClrMapping/>
+  </p:clrMapOvr>
+</p:sld>
+</file>
+
+<file path=ppt/slides/slide12.xml><?xml version="1.0" encoding="utf-8"?>
+<p:sld xmlns:a="http://schemas.openxmlformats.org/drawingml/2006/main" xmlns:p="http://schemas.openxmlformats.org/presentationml/2006/main" xmlns:r="http://schemas.openxmlformats.org/officeDocument/2006/relationships" showMasterSp="1">
+  <p:cSld>
+    <p:spTree>
+      <p:nvGrpSpPr>
+        <p:cNvPr id="1" name=""/>
+        <p:cNvGrpSpPr/>
+        <p:nvPr/>
+      </p:nvGrpSpPr>
+      <p:grpSpPr/>
+      <p:sp>
+        <p:nvSpPr>
+          <p:cNvPr id="2" name="Placeholder 0"/>
+          <p:cNvSpPr txBox="1"/>
+          <p:nvPr>
+            <p:ph type="title" idx="0"/>
+          </p:nvPr>
+        </p:nvSpPr>
+        <p:spPr>
+          <a:xfrm>
+            <a:off x="594360" y="502920"/>
+            <a:ext cx="10972800" cy="1005840"/>
+          </a:xfrm>
+          <a:prstGeom prst="rect">
+            <a:avLst/>
+          </a:prstGeom>
+          <a:noFill/>
+        </p:spPr>
+        <p:txBody>
+          <a:bodyPr wrap="square" lIns="0" rIns="0" tIns="0" bIns="0">
+            <a:spAutoFit/>
+          </a:bodyPr>
+          <a:lstStyle/>
+          <a:p>
+            <a:pPr algn="l" marL="0" indent="0">
+              <a:defRPr sz="3600" b="1">
+                <a:solidFill>
+                  <a:srgbClr val="082952"/>
+                </a:solidFill>
+                <a:latin typeface="Inter"/>
+              </a:defRPr>
+              <a:lnSpc>
+                <a:spcPct val="112000"/>
+              </a:lnSpc>
+              <a:spcAft>
+                <a:spcPts val="1200"/>
+              </a:spcAft>
+              <a:buNone/>
+            </a:pPr>
+            <a:r>
+              <a:t>Logo library / Black</a:t>
+            </a:r>
+          </a:p>
+        </p:txBody>
+      </p:sp>
+      <p:sp>
+        <p:nvSpPr>
+          <p:cNvPr id="3" name="Placeholder 1"/>
+          <p:cNvSpPr txBox="1"/>
+          <p:nvPr>
+            <p:ph type="body" idx="1"/>
+          </p:nvPr>
+        </p:nvSpPr>
+        <p:spPr>
+          <a:xfrm>
+            <a:off x="594360" y="1508760"/>
+            <a:ext cx="10698480" cy="685800"/>
+          </a:xfrm>
+          <a:prstGeom prst="rect">
+            <a:avLst/>
+          </a:prstGeom>
+          <a:noFill/>
+        </p:spPr>
+        <p:txBody>
+          <a:bodyPr wrap="square" lIns="0" rIns="0" tIns="0" bIns="0">
+            <a:spAutoFit/>
+          </a:bodyPr>
+          <a:lstStyle/>
+          <a:p>
+            <a:pPr algn="l" marL="0" indent="0">
+              <a:defRPr sz="1900" b="0">
+                <a:solidFill>
+                  <a:srgbClr val="030B20"/>
+                </a:solidFill>
+                <a:latin typeface="Inter"/>
+              </a:defRPr>
+              <a:lnSpc>
+                <a:spcPct val="112000"/>
+              </a:lnSpc>
+              <a:spcAft>
+                <a:spcPts val="1200"/>
+              </a:spcAft>
+              <a:buNone/>
+            </a:pPr>
+            <a:r>
+              <a:t>Select a logo and copy it to any slide. Delete this library before presenting.</a:t>
+            </a:r>
+          </a:p>
+        </p:txBody>
+      </p:sp>
+      <p:sp>
+        <p:nvSpPr>
+          <p:cNvPr id="4" name="Wide"/>
+          <p:cNvSpPr txBox="1"/>
+          <p:nvPr/>
+        </p:nvSpPr>
+        <p:spPr>
+          <a:xfrm>
+            <a:off x="594360" y="2194560"/>
+            <a:ext cx="3383280" cy="411480"/>
+          </a:xfrm>
+          <a:prstGeom prst="rect">
+            <a:avLst/>
+          </a:prstGeom>
+          <a:noFill/>
+        </p:spPr>
+        <p:txBody>
+          <a:bodyPr wrap="square" lIns="0" rIns="0" tIns="0" bIns="0">
+            <a:spAutoFit/>
+          </a:bodyPr>
+          <a:lstStyle/>
+          <a:p>
+            <a:pPr algn="l" marL="0" indent="0">
+              <a:defRPr sz="2300" b="1">
+                <a:solidFill>
+                  <a:srgbClr val="082952"/>
+                </a:solidFill>
+                <a:latin typeface="Inter"/>
+              </a:defRPr>
+              <a:lnSpc>
+                <a:spcPct val="112000"/>
+              </a:lnSpc>
+              <a:spcAft>
+                <a:spcPts val="1200"/>
+              </a:spcAft>
+              <a:buNone/>
+            </a:pPr>
+            <a:r>
+              <a:t>Wide</a:t>
+            </a:r>
+          </a:p>
+        </p:txBody>
+      </p:sp>
+      <p:sp>
+        <p:nvSpPr>
+          <p:cNvPr id="5" name="Logo ground / wide"/>
+          <p:cNvSpPr/>
+          <p:nvPr/>
+        </p:nvSpPr>
+        <p:spPr>
+          <a:xfrm>
+            <a:off x="594360" y="2743200"/>
+            <a:ext cx="3383280" cy="2971800"/>
+          </a:xfrm>
+          <a:prstGeom prst="rect">
+            <a:avLst/>
+          </a:prstGeom>
+          <a:solidFill>
+            <a:srgbClr val="FFFEFA"/>
+          </a:solidFill>
+          <a:ln>
+            <a:noFill/>
+          </a:ln>
+          <a:effectLst/>
+        </p:spPr>
+        <p:txBody>
+          <a:bodyPr rtlCol="0" anchor="ctr"/>
+          <a:lstStyle/>
+          <a:p>
+            <a:pPr algn="ctr"/>
+          </a:p>
+        </p:txBody>
+      </p:sp>
+      <p:pic>
+        <p:nvPicPr>
+          <p:cNvPr id="6" name="Logo / Wide / Black (SVG)" descr="Lugano's Plan B original logo; existing mark, not a new Foundation logo"/>
+          <p:cNvPicPr>
+            <a:picLocks noChangeAspect="1"/>
+          </p:cNvPicPr>
+          <p:nvPr/>
+        </p:nvPicPr>
+        <p:blipFill>
+          <a:blip r:embed="rId2">
+            <a:ext uri="{96DAC541-7B7A-43D3-8B79-37D633B846F1}">
+              <ns0:svgBlip xmlns:ns0="http://schemas.microsoft.com/office/drawing/2016/SVG/main" r:embed="rId3"/>
+            </a:ext>
+          </a:blip>
+          <a:stretch>
+            <a:fillRect/>
+          </a:stretch>
+        </p:blipFill>
+        <p:spPr>
+          <a:xfrm>
+            <a:off x="822960" y="3850941"/>
+            <a:ext cx="2926080" cy="756317"/>
+          </a:xfrm>
+          <a:prstGeom prst="rect">
+            <a:avLst/>
+          </a:prstGeom>
+        </p:spPr>
+      </p:pic>
+      <p:sp>
+        <p:nvSpPr>
+          <p:cNvPr id="7" name="Square"/>
+          <p:cNvSpPr txBox="1"/>
+          <p:nvPr/>
+        </p:nvSpPr>
+        <p:spPr>
+          <a:xfrm>
+            <a:off x="4389120" y="2194560"/>
+            <a:ext cx="3383280" cy="411480"/>
+          </a:xfrm>
+          <a:prstGeom prst="rect">
+            <a:avLst/>
+          </a:prstGeom>
+          <a:noFill/>
+        </p:spPr>
+        <p:txBody>
+          <a:bodyPr wrap="square" lIns="0" rIns="0" tIns="0" bIns="0">
+            <a:spAutoFit/>
+          </a:bodyPr>
+          <a:lstStyle/>
+          <a:p>
+            <a:pPr algn="l" marL="0" indent="0">
+              <a:defRPr sz="2300" b="1">
+                <a:solidFill>
+                  <a:srgbClr val="082952"/>
+                </a:solidFill>
+                <a:latin typeface="Inter"/>
+              </a:defRPr>
+              <a:lnSpc>
+                <a:spcPct val="112000"/>
+              </a:lnSpc>
+              <a:spcAft>
+                <a:spcPts val="1200"/>
+              </a:spcAft>
+              <a:buNone/>
+            </a:pPr>
+            <a:r>
+              <a:t>Square</a:t>
+            </a:r>
+          </a:p>
+        </p:txBody>
+      </p:sp>
+      <p:sp>
+        <p:nvSpPr>
+          <p:cNvPr id="8" name="Logo ground / square"/>
+          <p:cNvSpPr/>
+          <p:nvPr/>
+        </p:nvSpPr>
+        <p:spPr>
+          <a:xfrm>
+            <a:off x="4389120" y="2743200"/>
+            <a:ext cx="3383280" cy="2971800"/>
+          </a:xfrm>
+          <a:prstGeom prst="rect">
+            <a:avLst/>
+          </a:prstGeom>
+          <a:solidFill>
+            <a:srgbClr val="FFFEFA"/>
+          </a:solidFill>
+          <a:ln>
+            <a:noFill/>
+          </a:ln>
+          <a:effectLst/>
+        </p:spPr>
+        <p:txBody>
+          <a:bodyPr rtlCol="0" anchor="ctr"/>
+          <a:lstStyle/>
+          <a:p>
+            <a:pPr algn="ctr"/>
+          </a:p>
+        </p:txBody>
+      </p:sp>
+      <p:pic>
+        <p:nvPicPr>
+          <p:cNvPr id="9" name="Logo / Square / Black (SVG)" descr="Lugano's Plan B original logo; existing mark, not a new Foundation logo"/>
+          <p:cNvPicPr>
+            <a:picLocks noChangeAspect="1"/>
+          </p:cNvPicPr>
+          <p:nvPr/>
+        </p:nvPicPr>
+        <p:blipFill>
+          <a:blip r:embed="rId4">
+            <a:ext uri="{96DAC541-7B7A-43D3-8B79-37D633B846F1}">
+              <ns0:svgBlip xmlns:ns0="http://schemas.microsoft.com/office/drawing/2016/SVG/main" r:embed="rId5"/>
+            </a:ext>
+          </a:blip>
+          <a:stretch>
+            <a:fillRect/>
+          </a:stretch>
+        </p:blipFill>
+        <p:spPr>
+          <a:xfrm>
+            <a:off x="4617720" y="3713523"/>
+            <a:ext cx="2926080" cy="1031154"/>
+          </a:xfrm>
+          <a:prstGeom prst="rect">
+            <a:avLst/>
+          </a:prstGeom>
+        </p:spPr>
+      </p:pic>
+      <p:sp>
+        <p:nvSpPr>
+          <p:cNvPr id="10" name="Tall"/>
+          <p:cNvSpPr txBox="1"/>
+          <p:nvPr/>
+        </p:nvSpPr>
+        <p:spPr>
+          <a:xfrm>
+            <a:off x="8183880" y="2194560"/>
+            <a:ext cx="3383280" cy="411480"/>
+          </a:xfrm>
+          <a:prstGeom prst="rect">
+            <a:avLst/>
+          </a:prstGeom>
+          <a:noFill/>
+        </p:spPr>
+        <p:txBody>
+          <a:bodyPr wrap="square" lIns="0" rIns="0" tIns="0" bIns="0">
+            <a:spAutoFit/>
+          </a:bodyPr>
+          <a:lstStyle/>
+          <a:p>
+            <a:pPr algn="l" marL="0" indent="0">
+              <a:defRPr sz="2300" b="1">
+                <a:solidFill>
+                  <a:srgbClr val="082952"/>
+                </a:solidFill>
+                <a:latin typeface="Inter"/>
+              </a:defRPr>
+              <a:lnSpc>
+                <a:spcPct val="112000"/>
+              </a:lnSpc>
+              <a:spcAft>
+                <a:spcPts val="1200"/>
+              </a:spcAft>
+              <a:buNone/>
+            </a:pPr>
+            <a:r>
+              <a:t>Tall</a:t>
+            </a:r>
+          </a:p>
+        </p:txBody>
+      </p:sp>
+      <p:sp>
+        <p:nvSpPr>
+          <p:cNvPr id="11" name="Logo ground / tall"/>
+          <p:cNvSpPr/>
+          <p:nvPr/>
+        </p:nvSpPr>
+        <p:spPr>
+          <a:xfrm>
+            <a:off x="8183880" y="2743200"/>
+            <a:ext cx="3383280" cy="2971800"/>
+          </a:xfrm>
+          <a:prstGeom prst="rect">
+            <a:avLst/>
+          </a:prstGeom>
+          <a:solidFill>
+            <a:srgbClr val="FFFEFA"/>
+          </a:solidFill>
+          <a:ln>
+            <a:noFill/>
+          </a:ln>
+          <a:effectLst/>
+        </p:spPr>
+        <p:txBody>
+          <a:bodyPr rtlCol="0" anchor="ctr"/>
+          <a:lstStyle/>
+          <a:p>
+            <a:pPr algn="ctr"/>
+          </a:p>
+        </p:txBody>
+      </p:sp>
+      <p:pic>
+        <p:nvPicPr>
+          <p:cNvPr id="12" name="Logo / Tall / Black (SVG)" descr="Lugano's Plan B original logo; existing mark, not a new Foundation logo"/>
+          <p:cNvPicPr>
+            <a:picLocks noChangeAspect="1"/>
+          </p:cNvPicPr>
+          <p:nvPr/>
+        </p:nvPicPr>
+        <p:blipFill>
+          <a:blip r:embed="rId6">
+            <a:ext uri="{96DAC541-7B7A-43D3-8B79-37D633B846F1}">
+              <ns0:svgBlip xmlns:ns0="http://schemas.microsoft.com/office/drawing/2016/SVG/main" r:embed="rId7"/>
+            </a:ext>
+          </a:blip>
+          <a:stretch>
+            <a:fillRect/>
+          </a:stretch>
+        </p:blipFill>
+        <p:spPr>
+          <a:xfrm>
+            <a:off x="9121140" y="2971800"/>
+            <a:ext cx="1508760" cy="2514600"/>
+          </a:xfrm>
+          <a:prstGeom prst="rect">
+            <a:avLst/>
+          </a:prstGeom>
+        </p:spPr>
+      </p:pic>
+    </p:spTree>
+  </p:cSld>
+  <p:clrMapOvr>
+    <a:masterClrMapping/>
+  </p:clrMapOvr>
+</p:sld>
+</file>
+
+<file path=ppt/slides/slide13.xml><?xml version="1.0" encoding="utf-8"?>
+<p:sld xmlns:a="http://schemas.openxmlformats.org/drawingml/2006/main" xmlns:p="http://schemas.openxmlformats.org/presentationml/2006/main" xmlns:r="http://schemas.openxmlformats.org/officeDocument/2006/relationships" showMasterSp="1">
+  <p:cSld>
+    <p:spTree>
+      <p:nvGrpSpPr>
+        <p:cNvPr id="1" name=""/>
+        <p:cNvGrpSpPr/>
+        <p:nvPr/>
+      </p:nvGrpSpPr>
+      <p:grpSpPr/>
+      <p:sp>
+        <p:nvSpPr>
+          <p:cNvPr id="2" name="Placeholder 0"/>
+          <p:cNvSpPr txBox="1"/>
+          <p:nvPr>
+            <p:ph type="title" idx="0"/>
+          </p:nvPr>
+        </p:nvSpPr>
+        <p:spPr>
+          <a:xfrm>
+            <a:off x="594360" y="502920"/>
+            <a:ext cx="10972800" cy="1005840"/>
+          </a:xfrm>
+          <a:prstGeom prst="rect">
+            <a:avLst/>
+          </a:prstGeom>
+          <a:noFill/>
+        </p:spPr>
+        <p:txBody>
+          <a:bodyPr wrap="square" lIns="0" rIns="0" tIns="0" bIns="0">
+            <a:spAutoFit/>
+          </a:bodyPr>
+          <a:lstStyle/>
+          <a:p>
+            <a:pPr algn="l" marL="0" indent="0">
+              <a:defRPr sz="3600" b="1">
+                <a:solidFill>
+                  <a:srgbClr val="082952"/>
+                </a:solidFill>
+                <a:latin typeface="Inter"/>
+              </a:defRPr>
+              <a:lnSpc>
+                <a:spcPct val="112000"/>
+              </a:lnSpc>
+              <a:spcAft>
+                <a:spcPts val="1200"/>
+              </a:spcAft>
+              <a:buNone/>
+            </a:pPr>
+            <a:r>
+              <a:t>Logo library / White</a:t>
+            </a:r>
+          </a:p>
+        </p:txBody>
+      </p:sp>
+      <p:sp>
+        <p:nvSpPr>
+          <p:cNvPr id="3" name="Placeholder 1"/>
+          <p:cNvSpPr txBox="1"/>
+          <p:nvPr>
+            <p:ph type="body" idx="1"/>
+          </p:nvPr>
+        </p:nvSpPr>
+        <p:spPr>
+          <a:xfrm>
+            <a:off x="594360" y="1508760"/>
+            <a:ext cx="10698480" cy="685800"/>
+          </a:xfrm>
+          <a:prstGeom prst="rect">
+            <a:avLst/>
+          </a:prstGeom>
+          <a:noFill/>
+        </p:spPr>
+        <p:txBody>
+          <a:bodyPr wrap="square" lIns="0" rIns="0" tIns="0" bIns="0">
+            <a:spAutoFit/>
+          </a:bodyPr>
+          <a:lstStyle/>
+          <a:p>
+            <a:pPr algn="l" marL="0" indent="0">
+              <a:defRPr sz="1900" b="0">
+                <a:solidFill>
+                  <a:srgbClr val="030B20"/>
+                </a:solidFill>
+                <a:latin typeface="Inter"/>
+              </a:defRPr>
+              <a:lnSpc>
+                <a:spcPct val="112000"/>
+              </a:lnSpc>
+              <a:spcAft>
+                <a:spcPts val="1200"/>
+              </a:spcAft>
+              <a:buNone/>
+            </a:pPr>
+            <a:r>
+              <a:t>Select a logo and copy it to any slide. Delete this library before presenting.</a:t>
+            </a:r>
+          </a:p>
+        </p:txBody>
+      </p:sp>
+      <p:sp>
+        <p:nvSpPr>
+          <p:cNvPr id="4" name="Wide"/>
+          <p:cNvSpPr txBox="1"/>
+          <p:nvPr/>
+        </p:nvSpPr>
+        <p:spPr>
+          <a:xfrm>
+            <a:off x="594360" y="2194560"/>
+            <a:ext cx="3383280" cy="411480"/>
+          </a:xfrm>
+          <a:prstGeom prst="rect">
+            <a:avLst/>
+          </a:prstGeom>
+          <a:noFill/>
+        </p:spPr>
+        <p:txBody>
+          <a:bodyPr wrap="square" lIns="0" rIns="0" tIns="0" bIns="0">
+            <a:spAutoFit/>
+          </a:bodyPr>
+          <a:lstStyle/>
+          <a:p>
+            <a:pPr algn="l" marL="0" indent="0">
+              <a:defRPr sz="2300" b="1">
+                <a:solidFill>
+                  <a:srgbClr val="082952"/>
+                </a:solidFill>
+                <a:latin typeface="Inter"/>
+              </a:defRPr>
+              <a:lnSpc>
+                <a:spcPct val="112000"/>
+              </a:lnSpc>
+              <a:spcAft>
+                <a:spcPts val="1200"/>
+              </a:spcAft>
+              <a:buNone/>
+            </a:pPr>
+            <a:r>
+              <a:t>Wide</a:t>
+            </a:r>
+          </a:p>
+        </p:txBody>
+      </p:sp>
+      <p:sp>
+        <p:nvSpPr>
+          <p:cNvPr id="5" name="Logo ground / wide"/>
+          <p:cNvSpPr/>
+          <p:nvPr/>
+        </p:nvSpPr>
+        <p:spPr>
+          <a:xfrm>
+            <a:off x="594360" y="2743200"/>
+            <a:ext cx="3383280" cy="2971800"/>
+          </a:xfrm>
+          <a:prstGeom prst="rect">
+            <a:avLst/>
+          </a:prstGeom>
+          <a:solidFill>
+            <a:srgbClr val="082952"/>
+          </a:solidFill>
+          <a:ln>
+            <a:noFill/>
+          </a:ln>
+          <a:effectLst/>
+        </p:spPr>
+        <p:txBody>
+          <a:bodyPr rtlCol="0" anchor="ctr"/>
+          <a:lstStyle/>
+          <a:p>
+            <a:pPr algn="ctr"/>
+          </a:p>
+        </p:txBody>
+      </p:sp>
+      <p:pic>
+        <p:nvPicPr>
+          <p:cNvPr id="6" name="Logo / Wide / White (SVG)" descr="Lugano's Plan B original logo; existing mark, not a new Foundation logo"/>
+          <p:cNvPicPr>
+            <a:picLocks noChangeAspect="1"/>
+          </p:cNvPicPr>
+          <p:nvPr/>
+        </p:nvPicPr>
+        <p:blipFill>
+          <a:blip r:embed="rId2">
+            <a:ext uri="{96DAC541-7B7A-43D3-8B79-37D633B846F1}">
+              <ns0:svgBlip xmlns:ns0="http://schemas.microsoft.com/office/drawing/2016/SVG/main" r:embed="rId3"/>
+            </a:ext>
+          </a:blip>
+          <a:stretch>
+            <a:fillRect/>
+          </a:stretch>
+        </p:blipFill>
+        <p:spPr>
+          <a:xfrm>
+            <a:off x="822960" y="3919134"/>
+            <a:ext cx="2926080" cy="619932"/>
+          </a:xfrm>
+          <a:prstGeom prst="rect">
+            <a:avLst/>
+          </a:prstGeom>
+        </p:spPr>
+      </p:pic>
+      <p:sp>
+        <p:nvSpPr>
+          <p:cNvPr id="7" name="Square"/>
+          <p:cNvSpPr txBox="1"/>
+          <p:nvPr/>
+        </p:nvSpPr>
+        <p:spPr>
+          <a:xfrm>
+            <a:off x="4389120" y="2194560"/>
+            <a:ext cx="3383280" cy="411480"/>
+          </a:xfrm>
+          <a:prstGeom prst="rect">
+            <a:avLst/>
+          </a:prstGeom>
+          <a:noFill/>
+        </p:spPr>
+        <p:txBody>
+          <a:bodyPr wrap="square" lIns="0" rIns="0" tIns="0" bIns="0">
+            <a:spAutoFit/>
+          </a:bodyPr>
+          <a:lstStyle/>
+          <a:p>
+            <a:pPr algn="l" marL="0" indent="0">
+              <a:defRPr sz="2300" b="1">
+                <a:solidFill>
+                  <a:srgbClr val="082952"/>
+                </a:solidFill>
+                <a:latin typeface="Inter"/>
+              </a:defRPr>
+              <a:lnSpc>
+                <a:spcPct val="112000"/>
+              </a:lnSpc>
+              <a:spcAft>
+                <a:spcPts val="1200"/>
+              </a:spcAft>
+              <a:buNone/>
+            </a:pPr>
+            <a:r>
+              <a:t>Square</a:t>
+            </a:r>
+          </a:p>
+        </p:txBody>
+      </p:sp>
+      <p:sp>
+        <p:nvSpPr>
+          <p:cNvPr id="8" name="Logo ground / square"/>
+          <p:cNvSpPr/>
+          <p:nvPr/>
+        </p:nvSpPr>
+        <p:spPr>
+          <a:xfrm>
+            <a:off x="4389120" y="2743200"/>
+            <a:ext cx="3383280" cy="2971800"/>
+          </a:xfrm>
+          <a:prstGeom prst="rect">
+            <a:avLst/>
+          </a:prstGeom>
+          <a:solidFill>
+            <a:srgbClr val="082952"/>
+          </a:solidFill>
+          <a:ln>
+            <a:noFill/>
+          </a:ln>
+          <a:effectLst/>
+        </p:spPr>
+        <p:txBody>
+          <a:bodyPr rtlCol="0" anchor="ctr"/>
+          <a:lstStyle/>
+          <a:p>
+            <a:pPr algn="ctr"/>
+          </a:p>
+        </p:txBody>
+      </p:sp>
+      <p:pic>
+        <p:nvPicPr>
+          <p:cNvPr id="9" name="Logo / Square / White (SVG)" descr="Lugano's Plan B original logo; existing mark, not a new Foundation logo"/>
+          <p:cNvPicPr>
+            <a:picLocks noChangeAspect="1"/>
+          </p:cNvPicPr>
+          <p:nvPr/>
+        </p:nvPicPr>
+        <p:blipFill>
+          <a:blip r:embed="rId4">
+            <a:ext uri="{96DAC541-7B7A-43D3-8B79-37D633B846F1}">
+              <ns0:svgBlip xmlns:ns0="http://schemas.microsoft.com/office/drawing/2016/SVG/main" r:embed="rId5"/>
+            </a:ext>
+          </a:blip>
+          <a:stretch>
+            <a:fillRect/>
+          </a:stretch>
+        </p:blipFill>
+        <p:spPr>
+          <a:xfrm>
+            <a:off x="4617720" y="3713523"/>
+            <a:ext cx="2926080" cy="1031154"/>
+          </a:xfrm>
+          <a:prstGeom prst="rect">
+            <a:avLst/>
+          </a:prstGeom>
+        </p:spPr>
+      </p:pic>
+      <p:sp>
+        <p:nvSpPr>
+          <p:cNvPr id="10" name="Tall"/>
+          <p:cNvSpPr txBox="1"/>
+          <p:nvPr/>
+        </p:nvSpPr>
+        <p:spPr>
+          <a:xfrm>
+            <a:off x="8183880" y="2194560"/>
+            <a:ext cx="3383280" cy="411480"/>
+          </a:xfrm>
+          <a:prstGeom prst="rect">
+            <a:avLst/>
+          </a:prstGeom>
+          <a:noFill/>
+        </p:spPr>
+        <p:txBody>
+          <a:bodyPr wrap="square" lIns="0" rIns="0" tIns="0" bIns="0">
+            <a:spAutoFit/>
+          </a:bodyPr>
+          <a:lstStyle/>
+          <a:p>
+            <a:pPr algn="l" marL="0" indent="0">
+              <a:defRPr sz="2300" b="1">
+                <a:solidFill>
+                  <a:srgbClr val="082952"/>
+                </a:solidFill>
+                <a:latin typeface="Inter"/>
+              </a:defRPr>
+              <a:lnSpc>
+                <a:spcPct val="112000"/>
+              </a:lnSpc>
+              <a:spcAft>
+                <a:spcPts val="1200"/>
+              </a:spcAft>
+              <a:buNone/>
+            </a:pPr>
+            <a:r>
+              <a:t>Tall</a:t>
+            </a:r>
+          </a:p>
+        </p:txBody>
+      </p:sp>
+      <p:sp>
+        <p:nvSpPr>
+          <p:cNvPr id="11" name="Logo ground / tall"/>
+          <p:cNvSpPr/>
+          <p:nvPr/>
+        </p:nvSpPr>
+        <p:spPr>
+          <a:xfrm>
+            <a:off x="8183880" y="2743200"/>
+            <a:ext cx="3383280" cy="2971800"/>
+          </a:xfrm>
+          <a:prstGeom prst="rect">
+            <a:avLst/>
+          </a:prstGeom>
+          <a:solidFill>
+            <a:srgbClr val="082952"/>
+          </a:solidFill>
+          <a:ln>
+            <a:noFill/>
+          </a:ln>
+          <a:effectLst/>
+        </p:spPr>
+        <p:txBody>
+          <a:bodyPr rtlCol="0" anchor="ctr"/>
+          <a:lstStyle/>
+          <a:p>
+            <a:pPr algn="ctr"/>
+          </a:p>
+        </p:txBody>
+      </p:sp>
+      <p:pic>
+        <p:nvPicPr>
+          <p:cNvPr id="12" name="Logo / Tall / White (SVG)" descr="Lugano's Plan B original logo; existing mark, not a new Foundation logo"/>
+          <p:cNvPicPr>
+            <a:picLocks noChangeAspect="1"/>
+          </p:cNvPicPr>
+          <p:nvPr/>
+        </p:nvPicPr>
+        <p:blipFill>
+          <a:blip r:embed="rId6">
+            <a:ext uri="{96DAC541-7B7A-43D3-8B79-37D633B846F1}">
+              <ns0:svgBlip xmlns:ns0="http://schemas.microsoft.com/office/drawing/2016/SVG/main" r:embed="rId7"/>
+            </a:ext>
+          </a:blip>
+          <a:stretch>
+            <a:fillRect/>
+          </a:stretch>
+        </p:blipFill>
+        <p:spPr>
+          <a:xfrm>
+            <a:off x="9121140" y="2971800"/>
+            <a:ext cx="1508760" cy="2514600"/>
+          </a:xfrm>
+          <a:prstGeom prst="rect">
+            <a:avLst/>
+          </a:prstGeom>
+        </p:spPr>
+      </p:pic>
     </p:spTree>
   </p:cSld>
   <p:clrMapOvr>
@@ -6577,7 +7249,7 @@
       <p:grpSpPr/>
       <p:sp>
         <p:nvSpPr>
-          <p:cNvPr id="5" name="Placeholder 0"/>
+          <p:cNvPr id="3" name="Placeholder 0"/>
           <p:cNvSpPr txBox="1"/>
           <p:nvPr>
             <p:ph type="title" idx="0"/>
@@ -6622,7 +7294,7 @@
       </p:sp>
       <p:sp>
         <p:nvSpPr>
-          <p:cNvPr id="6" name="Placeholder 1"/>
+          <p:cNvPr id="4" name="Placeholder 1"/>
           <p:cNvSpPr txBox="1"/>
           <p:nvPr>
             <p:ph type="body" idx="1"/>
@@ -6693,7 +7365,7 @@
       <p:grpSpPr/>
       <p:sp>
         <p:nvSpPr>
-          <p:cNvPr id="5" name="Placeholder 0"/>
+          <p:cNvPr id="3" name="Placeholder 0"/>
           <p:cNvSpPr txBox="1"/>
           <p:nvPr>
             <p:ph type="title" idx="0"/>
@@ -6738,7 +7410,7 @@
       </p:sp>
       <p:sp>
         <p:nvSpPr>
-          <p:cNvPr id="6" name="Placeholder 1"/>
+          <p:cNvPr id="4" name="Placeholder 1"/>
           <p:cNvSpPr txBox="1"/>
           <p:nvPr>
             <p:ph type="body" idx="1"/>
@@ -6783,7 +7455,7 @@
       </p:sp>
       <p:sp>
         <p:nvSpPr>
-          <p:cNvPr id="7" name="Placeholder 2"/>
+          <p:cNvPr id="5" name="Placeholder 2"/>
           <p:cNvSpPr txBox="1"/>
           <p:nvPr>
             <p:ph type="body" idx="2"/>
@@ -6894,7 +7566,7 @@
       <p:grpSpPr/>
       <p:sp>
         <p:nvSpPr>
-          <p:cNvPr id="5" name="Placeholder 0"/>
+          <p:cNvPr id="3" name="Placeholder 0"/>
           <p:cNvSpPr txBox="1"/>
           <p:nvPr>
             <p:ph type="title" idx="0"/>
@@ -6939,7 +7611,7 @@
       </p:sp>
       <p:sp>
         <p:nvSpPr>
-          <p:cNvPr id="6" name="Placeholder 1"/>
+          <p:cNvPr id="4" name="Placeholder 1"/>
           <p:cNvSpPr txBox="1"/>
           <p:nvPr>
             <p:ph type="body" idx="1"/>
@@ -6984,7 +7656,7 @@
       </p:sp>
       <p:sp>
         <p:nvSpPr>
-          <p:cNvPr id="7" name="Placeholder 2"/>
+          <p:cNvPr id="5" name="Placeholder 2"/>
           <p:cNvSpPr txBox="1"/>
           <p:nvPr>
             <p:ph type="body" idx="2"/>
@@ -7029,7 +7701,7 @@
       </p:sp>
       <p:sp>
         <p:nvSpPr>
-          <p:cNvPr id="8" name="Placeholder 3"/>
+          <p:cNvPr id="6" name="Placeholder 3"/>
           <p:cNvSpPr txBox="1"/>
           <p:nvPr>
             <p:ph type="body" idx="3"/>
@@ -7074,7 +7746,7 @@
       </p:sp>
       <p:sp>
         <p:nvSpPr>
-          <p:cNvPr id="9" name="Placeholder 4"/>
+          <p:cNvPr id="7" name="Placeholder 4"/>
           <p:cNvSpPr txBox="1"/>
           <p:nvPr>
             <p:ph type="body" idx="4"/>
@@ -7145,7 +7817,7 @@
       <p:grpSpPr/>
       <p:sp>
         <p:nvSpPr>
-          <p:cNvPr id="5" name="Placeholder 0"/>
+          <p:cNvPr id="3" name="Placeholder 0"/>
           <p:cNvSpPr txBox="1"/>
           <p:nvPr>
             <p:ph type="title" idx="0"/>
@@ -7190,7 +7862,7 @@
       </p:sp>
       <p:sp>
         <p:nvSpPr>
-          <p:cNvPr id="8" name="Placeholder 1"/>
+          <p:cNvPr id="6" name="Placeholder 1"/>
           <p:cNvSpPr txBox="1"/>
           <p:nvPr>
             <p:ph type="pic" idx="1"/>
@@ -7235,7 +7907,7 @@
       </p:sp>
       <p:sp>
         <p:nvSpPr>
-          <p:cNvPr id="9" name="Placeholder 2"/>
+          <p:cNvPr id="7" name="Placeholder 2"/>
           <p:cNvSpPr txBox="1"/>
           <p:nvPr>
             <p:ph type="body" idx="2"/>
@@ -7280,7 +7952,7 @@
       </p:sp>
       <p:sp>
         <p:nvSpPr>
-          <p:cNvPr id="10" name="Placeholder 3"/>
+          <p:cNvPr id="8" name="Placeholder 3"/>
           <p:cNvSpPr txBox="1"/>
           <p:nvPr>
             <p:ph type="body" idx="3"/>
@@ -7325,7 +7997,7 @@
       </p:sp>
       <p:sp>
         <p:nvSpPr>
-          <p:cNvPr id="11" name="Placeholder 4"/>
+          <p:cNvPr id="9" name="Placeholder 4"/>
           <p:cNvSpPr txBox="1"/>
           <p:nvPr>
             <p:ph type="body" idx="4"/>
@@ -7396,7 +8068,7 @@
       <p:grpSpPr/>
       <p:sp>
         <p:nvSpPr>
-          <p:cNvPr id="5" name="Placeholder 0"/>
+          <p:cNvPr id="3" name="Placeholder 0"/>
           <p:cNvSpPr txBox="1"/>
           <p:nvPr>
             <p:ph type="title" idx="0"/>
@@ -7441,7 +8113,7 @@
       </p:sp>
       <p:sp>
         <p:nvSpPr>
-          <p:cNvPr id="6" name="Placeholder 1"/>
+          <p:cNvPr id="4" name="Placeholder 1"/>
           <p:cNvSpPr txBox="1"/>
           <p:nvPr>
             <p:ph type="body" idx="1"/>
@@ -7486,7 +8158,7 @@
       </p:sp>
       <p:sp>
         <p:nvSpPr>
-          <p:cNvPr id="8" name="Placeholder 3"/>
+          <p:cNvPr id="6" name="Placeholder 3"/>
           <p:cNvSpPr txBox="1"/>
           <p:nvPr>
             <p:ph type="body" idx="3"/>
@@ -7531,7 +8203,7 @@
       </p:sp>
       <p:sp>
         <p:nvSpPr>
-          <p:cNvPr id="9" name="Placeholder 4"/>
+          <p:cNvPr id="7" name="Placeholder 4"/>
           <p:cNvSpPr txBox="1"/>
           <p:nvPr>
             <p:ph type="body" idx="4"/>
@@ -7576,7 +8248,7 @@
       </p:sp>
       <p:sp>
         <p:nvSpPr>
-          <p:cNvPr id="10" name="Placeholder 5"/>
+          <p:cNvPr id="8" name="Placeholder 5"/>
           <p:cNvSpPr txBox="1"/>
           <p:nvPr>
             <p:ph type="body" idx="5"/>
@@ -7621,7 +8293,7 @@
       </p:sp>
       <p:graphicFrame>
         <p:nvGraphicFramePr>
-          <p:cNvPr id="11" name="Chart 10"/>
+          <p:cNvPr id="9" name="Chart 8"/>
           <p:cNvGraphicFramePr>
             <a:graphicFrameLocks noGrp="1"/>
           </p:cNvGraphicFramePr>
@@ -7665,7 +8337,7 @@
       <p:grpSpPr/>
       <p:sp>
         <p:nvSpPr>
-          <p:cNvPr id="5" name="Placeholder 0"/>
+          <p:cNvPr id="3" name="Placeholder 0"/>
           <p:cNvSpPr txBox="1"/>
           <p:nvPr>
             <p:ph type="title" idx="0"/>
@@ -7710,7 +8382,7 @@
       </p:sp>
       <p:sp>
         <p:nvSpPr>
-          <p:cNvPr id="6" name="Placeholder 1"/>
+          <p:cNvPr id="4" name="Placeholder 1"/>
           <p:cNvSpPr txBox="1"/>
           <p:nvPr>
             <p:ph type="body" idx="1"/>
@@ -7755,7 +8427,7 @@
       </p:sp>
       <p:sp>
         <p:nvSpPr>
-          <p:cNvPr id="8" name="Placeholder 3"/>
+          <p:cNvPr id="6" name="Placeholder 3"/>
           <p:cNvSpPr txBox="1"/>
           <p:nvPr>
             <p:ph type="body" idx="3"/>
@@ -7800,7 +8472,7 @@
       </p:sp>
       <p:graphicFrame>
         <p:nvGraphicFramePr>
-          <p:cNvPr id="9" name="Table 8"/>
+          <p:cNvPr id="7" name="Table 6"/>
           <p:cNvGraphicFramePr>
             <a:graphicFrameLocks noGrp="1"/>
           </p:cNvGraphicFramePr>
@@ -8149,7 +8821,7 @@
       <p:grpSpPr/>
       <p:sp>
         <p:nvSpPr>
-          <p:cNvPr id="5" name="Placeholder 0"/>
+          <p:cNvPr id="3" name="Placeholder 0"/>
           <p:cNvSpPr txBox="1"/>
           <p:nvPr>
             <p:ph type="title" idx="0"/>
@@ -8214,7 +8886,7 @@
       </p:sp>
       <p:sp>
         <p:nvSpPr>
-          <p:cNvPr id="6" name="Placeholder 1"/>
+          <p:cNvPr id="4" name="Placeholder 1"/>
           <p:cNvSpPr txBox="1"/>
           <p:nvPr>
             <p:ph type="body" idx="1"/>
@@ -8305,7 +8977,7 @@
       <p:grpSpPr/>
       <p:sp>
         <p:nvSpPr>
-          <p:cNvPr id="5" name="Placeholder 0"/>
+          <p:cNvPr id="3" name="Placeholder 0"/>
           <p:cNvSpPr txBox="1"/>
           <p:nvPr>
             <p:ph type="title" idx="0"/>
@@ -8350,7 +9022,7 @@
       </p:sp>
       <p:sp>
         <p:nvSpPr>
-          <p:cNvPr id="6" name="Placeholder 1"/>
+          <p:cNvPr id="4" name="Placeholder 1"/>
           <p:cNvSpPr txBox="1"/>
           <p:nvPr>
             <p:ph type="body" idx="1"/>
@@ -8395,7 +9067,7 @@
       </p:sp>
       <p:sp>
         <p:nvSpPr>
-          <p:cNvPr id="7" name="Placeholder 2"/>
+          <p:cNvPr id="5" name="Placeholder 2"/>
           <p:cNvSpPr txBox="1"/>
           <p:nvPr>
             <p:ph type="body" idx="2"/>
@@ -8460,7 +9132,7 @@
       </p:sp>
       <p:sp>
         <p:nvSpPr>
-          <p:cNvPr id="8" name="Placeholder 3"/>
+          <p:cNvPr id="6" name="Placeholder 3"/>
           <p:cNvSpPr txBox="1"/>
           <p:nvPr>
             <p:ph type="body" idx="3"/>
@@ -8505,7 +9177,7 @@
       </p:sp>
       <p:sp>
         <p:nvSpPr>
-          <p:cNvPr id="9" name="Placeholder 4"/>
+          <p:cNvPr id="7" name="Placeholder 4"/>
           <p:cNvSpPr txBox="1"/>
           <p:nvPr>
             <p:ph type="body" idx="4"/>
@@ -8570,7 +9242,7 @@
       </p:sp>
       <p:sp>
         <p:nvSpPr>
-          <p:cNvPr id="10" name="Placeholder 5"/>
+          <p:cNvPr id="8" name="Placeholder 5"/>
           <p:cNvSpPr txBox="1"/>
           <p:nvPr>
             <p:ph type="body" idx="5"/>
@@ -8615,7 +9287,7 @@
       </p:sp>
       <p:sp>
         <p:nvSpPr>
-          <p:cNvPr id="11" name="Placeholder 6"/>
+          <p:cNvPr id="9" name="Placeholder 6"/>
           <p:cNvSpPr txBox="1"/>
           <p:nvPr>
             <p:ph type="body" idx="6"/>
@@ -8680,7 +9352,7 @@
       </p:sp>
       <p:sp>
         <p:nvSpPr>
-          <p:cNvPr id="12" name="Placeholder 7"/>
+          <p:cNvPr id="10" name="Placeholder 7"/>
           <p:cNvSpPr txBox="1"/>
           <p:nvPr>
             <p:ph type="body" idx="7"/>
